--- a/output/wordlabs-clean-3day.pptx
+++ b/output/wordlabs-clean-3day.pptx
@@ -4240,7 +4240,7 @@
                 <a:ea typeface="Calibri" pitchFamily="34" charset="-122"/>
                 <a:cs typeface="Calibri" pitchFamily="34" charset="-120"/>
               </a:rPr>
-              <a:t>"free from dirt, pure"</a:t>
+              <a:t>"free from dirt or impurity"</a:t>
             </a:r>
             <a:endParaRPr lang="en-US" sz="2200" dirty="0"/>
           </a:p>
@@ -5288,7 +5288,7 @@
                 <a:ea typeface="Calibri" pitchFamily="34" charset="-122"/>
                 <a:cs typeface="Calibri" pitchFamily="34" charset="-120"/>
               </a:rPr>
-              <a:t>Word Labs  •  wordlabs.app  •  Root: 'clean' = free from dirt, pure</a:t>
+              <a:t>Word Labs  •  wordlabs.app  •  Root: 'clean' = free from dirt or impurity</a:t>
             </a:r>
             <a:endParaRPr lang="en-US" sz="800" dirty="0"/>
           </a:p>
@@ -5622,7 +5622,7 @@
                 <a:ea typeface="Trebuchet MS" pitchFamily="34" charset="-122"/>
                 <a:cs typeface="Trebuchet MS" pitchFamily="34" charset="-120"/>
               </a:rPr>
-              <a:t>1</a:t>
+              <a:t>2</a:t>
             </a:r>
             <a:pPr algn="ctr" indent="0" marL="0">
               <a:buNone/>
@@ -5636,7 +5636,7 @@
                 <a:ea typeface="Trebuchet MS" pitchFamily="34" charset="-122"/>
                 <a:cs typeface="Trebuchet MS" pitchFamily="34" charset="-120"/>
               </a:rPr>
-              <a:t>  punctuation mark</a:t>
+              <a:t>  punctuation marks</a:t>
             </a:r>
             <a:endParaRPr lang="en-US" sz="2800" dirty="0"/>
           </a:p>
@@ -5928,7 +5928,7 @@
                 <a:ea typeface="Calibri" pitchFamily="34" charset="-122"/>
                 <a:cs typeface="Calibri" pitchFamily="34" charset="-120"/>
               </a:rPr>
-              <a:t>Word Labs  •  wordlabs.app  •  Root: 'clean' = free from dirt, pure</a:t>
+              <a:t>Word Labs  •  wordlabs.app  •  Root: 'clean' = free from dirt or impurity</a:t>
             </a:r>
             <a:endParaRPr lang="en-US" sz="800" dirty="0"/>
           </a:p>
@@ -6040,7 +6040,7 @@
                 <a:ea typeface="Calibri" pitchFamily="34" charset="-122"/>
                 <a:cs typeface="Calibri" pitchFamily="34" charset="-120"/>
               </a:rPr>
-              <a:t>The </a:t>
+              <a:t>After playing in the mud, she needed a thorough </a:t>
             </a:r>
             <a:pPr algn="l" indent="0" marL="0">
               <a:buNone/>
@@ -6057,7 +6057,7 @@
                 <a:ea typeface="Calibri" pitchFamily="34" charset="-122"/>
                 <a:cs typeface="Calibri" pitchFamily="34" charset="-120"/>
               </a:rPr>
-              <a:t>cleaner</a:t>
+              <a:t>cleansing</a:t>
             </a:r>
             <a:pPr algn="l" indent="0" marL="0">
               <a:buNone/>
@@ -6071,7 +6071,7 @@
                 <a:ea typeface="Calibri" pitchFamily="34" charset="-122"/>
                 <a:cs typeface="Calibri" pitchFamily="34" charset="-120"/>
               </a:rPr>
-              <a:t> scrubbed the floors until everything was </a:t>
+              <a:t>, and her mum said the bathroom had never looked </a:t>
             </a:r>
             <a:pPr algn="l" indent="0" marL="0">
               <a:buNone/>
@@ -6088,7 +6088,7 @@
                 <a:ea typeface="Calibri" pitchFamily="34" charset="-122"/>
                 <a:cs typeface="Calibri" pitchFamily="34" charset="-120"/>
               </a:rPr>
-              <a:t>unclean</a:t>
+              <a:t>cleaner</a:t>
             </a:r>
             <a:pPr algn="l" indent="0" marL="0">
               <a:buNone/>
@@ -6102,7 +6102,7 @@
                 <a:ea typeface="Calibri" pitchFamily="34" charset="-122"/>
                 <a:cs typeface="Calibri" pitchFamily="34" charset="-120"/>
               </a:rPr>
-              <a:t> no more!</a:t>
+              <a:t>!</a:t>
             </a:r>
             <a:endParaRPr lang="en-US" sz="1800" dirty="0"/>
           </a:p>
@@ -6257,7 +6257,7 @@
                 <a:ea typeface="Trebuchet MS" pitchFamily="34" charset="-122"/>
                 <a:cs typeface="Trebuchet MS" pitchFamily="34" charset="-120"/>
               </a:rPr>
-              <a:t>cleaner</a:t>
+              <a:t>cleansing</a:t>
             </a:r>
             <a:endParaRPr lang="en-US" sz="1400" dirty="0"/>
           </a:p>
@@ -6385,7 +6385,7 @@
                 <a:ea typeface="Trebuchet MS" pitchFamily="34" charset="-122"/>
                 <a:cs typeface="Trebuchet MS" pitchFamily="34" charset="-120"/>
               </a:rPr>
-              <a:t>unclean</a:t>
+              <a:t>cleaner</a:t>
             </a:r>
             <a:endParaRPr lang="en-US" sz="1400" dirty="0"/>
           </a:p>
@@ -6716,7 +6716,7 @@
                 <a:ea typeface="Calibri" pitchFamily="34" charset="-122"/>
                 <a:cs typeface="Calibri" pitchFamily="34" charset="-120"/>
               </a:rPr>
-              <a:t>Word Labs  •  wordlabs.app  •  Root: 'clean' = free from dirt, pure</a:t>
+              <a:t>Word Labs  •  wordlabs.app  •  Root: 'clean' = free from dirt or impurity</a:t>
             </a:r>
             <a:endParaRPr lang="en-US" sz="800" dirty="0"/>
           </a:p>
@@ -6855,7 +6855,7 @@
                 <a:ea typeface="Trebuchet MS" pitchFamily="34" charset="-122"/>
                 <a:cs typeface="Trebuchet MS" pitchFamily="34" charset="-120"/>
               </a:rPr>
-              <a:t>cleaner</a:t>
+              <a:t>cleansing</a:t>
             </a:r>
             <a:endParaRPr lang="en-US" sz="2800" dirty="0"/>
           </a:p>
@@ -7543,7 +7543,7 @@
                 <a:ea typeface="Calibri" pitchFamily="34" charset="-122"/>
                 <a:cs typeface="Calibri" pitchFamily="34" charset="-120"/>
               </a:rPr>
-              <a:t>Word Labs  •  wordlabs.app  •  Root: 'clean' = free from dirt, pure</a:t>
+              <a:t>Word Labs  •  wordlabs.app  •  Root: 'clean' = free from dirt or impurity</a:t>
             </a:r>
             <a:endParaRPr lang="en-US" sz="800" dirty="0"/>
           </a:p>
@@ -7682,7 +7682,7 @@
                 <a:ea typeface="Trebuchet MS" pitchFamily="34" charset="-122"/>
                 <a:cs typeface="Trebuchet MS" pitchFamily="34" charset="-120"/>
               </a:rPr>
-              <a:t>cleaner</a:t>
+              <a:t>cleansing</a:t>
             </a:r>
             <a:endParaRPr lang="en-US" sz="2800" dirty="0"/>
           </a:p>
@@ -7771,11 +7771,11 @@
             </a:avLst>
           </a:prstGeom>
           <a:solidFill>
-            <a:srgbClr val="CCFBF1"/>
+            <a:srgbClr val="DDD6FE"/>
           </a:solidFill>
           <a:ln w="19050">
             <a:solidFill>
-              <a:srgbClr val="0D9488"/>
+              <a:srgbClr val="7C3AED"/>
             </a:solidFill>
             <a:prstDash val="solid"/>
           </a:ln>
@@ -7815,13 +7815,13 @@
             <a:r>
               <a:rPr lang="en-US" sz="1300" b="1" dirty="0">
                 <a:solidFill>
-                  <a:srgbClr val="0F766E"/>
+                  <a:srgbClr val="4C1D95"/>
                 </a:solidFill>
                 <a:latin typeface="Trebuchet MS" pitchFamily="34" charset="0"/>
                 <a:ea typeface="Trebuchet MS" pitchFamily="34" charset="-122"/>
                 <a:cs typeface="Trebuchet MS" pitchFamily="34" charset="-120"/>
               </a:rPr>
-              <a:t>clean</a:t>
+              <a:t>cleanse</a:t>
             </a:r>
             <a:endParaRPr lang="en-US" sz="1300" dirty="0"/>
           </a:p>
@@ -7860,7 +7860,7 @@
                 <a:ea typeface="Calibri" pitchFamily="34" charset="-122"/>
                 <a:cs typeface="Calibri" pitchFamily="34" charset="-120"/>
               </a:rPr>
-              <a:t>free from dirt</a:t>
+              <a:t>to make thoroughly clean</a:t>
             </a:r>
             <a:endParaRPr lang="en-US" sz="850" dirty="0"/>
           </a:p>
@@ -7933,7 +7933,7 @@
                 <a:ea typeface="Trebuchet MS" pitchFamily="34" charset="-122"/>
                 <a:cs typeface="Trebuchet MS" pitchFamily="34" charset="-120"/>
               </a:rPr>
-              <a:t>er</a:t>
+              <a:t>ing</a:t>
             </a:r>
             <a:endParaRPr lang="en-US" sz="1300" dirty="0"/>
           </a:p>
@@ -7972,7 +7972,7 @@
                 <a:ea typeface="Calibri" pitchFamily="34" charset="-122"/>
                 <a:cs typeface="Calibri" pitchFamily="34" charset="-120"/>
               </a:rPr>
-              <a:t>person or thing that does something</a:t>
+              <a:t>action happening now</a:t>
             </a:r>
             <a:endParaRPr lang="en-US" sz="850" dirty="0"/>
           </a:p>
@@ -8528,7 +8528,7 @@
                 <a:ea typeface="Calibri" pitchFamily="34" charset="-122"/>
                 <a:cs typeface="Calibri" pitchFamily="34" charset="-120"/>
               </a:rPr>
-              <a:t>Word Labs  •  wordlabs.app  •  Root: 'clean' = free from dirt, pure</a:t>
+              <a:t>Word Labs  •  wordlabs.app  •  Root: 'clean' = free from dirt or impurity</a:t>
             </a:r>
             <a:endParaRPr lang="en-US" sz="800" dirty="0"/>
           </a:p>
@@ -8667,7 +8667,7 @@
                 <a:ea typeface="Trebuchet MS" pitchFamily="34" charset="-122"/>
                 <a:cs typeface="Trebuchet MS" pitchFamily="34" charset="-120"/>
               </a:rPr>
-              <a:t>cleaner</a:t>
+              <a:t>cleansing</a:t>
             </a:r>
             <a:endParaRPr lang="en-US" sz="2800" dirty="0"/>
           </a:p>
@@ -8756,11 +8756,11 @@
             </a:avLst>
           </a:prstGeom>
           <a:solidFill>
-            <a:srgbClr val="CCFBF1"/>
+            <a:srgbClr val="DDD6FE"/>
           </a:solidFill>
           <a:ln w="19050">
             <a:solidFill>
-              <a:srgbClr val="0D9488"/>
+              <a:srgbClr val="7C3AED"/>
             </a:solidFill>
             <a:prstDash val="solid"/>
           </a:ln>
@@ -8800,13 +8800,13 @@
             <a:r>
               <a:rPr lang="en-US" sz="1300" b="1" dirty="0">
                 <a:solidFill>
-                  <a:srgbClr val="0F766E"/>
+                  <a:srgbClr val="4C1D95"/>
                 </a:solidFill>
                 <a:latin typeface="Trebuchet MS" pitchFamily="34" charset="0"/>
                 <a:ea typeface="Trebuchet MS" pitchFamily="34" charset="-122"/>
                 <a:cs typeface="Trebuchet MS" pitchFamily="34" charset="-120"/>
               </a:rPr>
-              <a:t>clean</a:t>
+              <a:t>cleanse</a:t>
             </a:r>
             <a:endParaRPr lang="en-US" sz="1300" dirty="0"/>
           </a:p>
@@ -8845,7 +8845,7 @@
                 <a:ea typeface="Calibri" pitchFamily="34" charset="-122"/>
                 <a:cs typeface="Calibri" pitchFamily="34" charset="-120"/>
               </a:rPr>
-              <a:t>free from dirt</a:t>
+              <a:t>to make thoroughly clean</a:t>
             </a:r>
             <a:endParaRPr lang="en-US" sz="850" dirty="0"/>
           </a:p>
@@ -8918,7 +8918,7 @@
                 <a:ea typeface="Trebuchet MS" pitchFamily="34" charset="-122"/>
                 <a:cs typeface="Trebuchet MS" pitchFamily="34" charset="-120"/>
               </a:rPr>
-              <a:t>er</a:t>
+              <a:t>ing</a:t>
             </a:r>
             <a:endParaRPr lang="en-US" sz="1300" dirty="0"/>
           </a:p>
@@ -8957,7 +8957,7 @@
                 <a:ea typeface="Calibri" pitchFamily="34" charset="-122"/>
                 <a:cs typeface="Calibri" pitchFamily="34" charset="-120"/>
               </a:rPr>
-              <a:t>person or thing that does something</a:t>
+              <a:t>action happening now</a:t>
             </a:r>
             <a:endParaRPr lang="en-US" sz="850" dirty="0"/>
           </a:p>
@@ -9116,7 +9116,7 @@
                 <a:ea typeface="Trebuchet MS" pitchFamily="34" charset="-122"/>
                 <a:cs typeface="Trebuchet MS" pitchFamily="34" charset="-120"/>
               </a:rPr>
-              <a:t>clean</a:t>
+              <a:t>cleans</a:t>
             </a:r>
             <a:endParaRPr lang="en-US" sz="1400" dirty="0"/>
           </a:p>
@@ -9221,7 +9221,7 @@
                 <a:ea typeface="Trebuchet MS" pitchFamily="34" charset="-122"/>
                 <a:cs typeface="Trebuchet MS" pitchFamily="34" charset="-120"/>
               </a:rPr>
-              <a:t>er</a:t>
+              <a:t>ing</a:t>
             </a:r>
             <a:endParaRPr lang="en-US" sz="1400" dirty="0"/>
           </a:p>
@@ -9645,7 +9645,7 @@
                 <a:ea typeface="Calibri" pitchFamily="34" charset="-122"/>
                 <a:cs typeface="Calibri" pitchFamily="34" charset="-120"/>
               </a:rPr>
-              <a:t>Word Labs  •  wordlabs.app  •  Root: 'clean' = free from dirt, pure</a:t>
+              <a:t>Word Labs  •  wordlabs.app  •  Root: 'clean' = free from dirt or impurity</a:t>
             </a:r>
             <a:endParaRPr lang="en-US" sz="800" dirty="0"/>
           </a:p>
@@ -9784,7 +9784,7 @@
                 <a:ea typeface="Trebuchet MS" pitchFamily="34" charset="-122"/>
                 <a:cs typeface="Trebuchet MS" pitchFamily="34" charset="-120"/>
               </a:rPr>
-              <a:t>cleaner</a:t>
+              <a:t>cleansing</a:t>
             </a:r>
             <a:endParaRPr lang="en-US" sz="2800" dirty="0"/>
           </a:p>
@@ -9873,11 +9873,11 @@
             </a:avLst>
           </a:prstGeom>
           <a:solidFill>
-            <a:srgbClr val="CCFBF1"/>
+            <a:srgbClr val="DDD6FE"/>
           </a:solidFill>
           <a:ln w="19050">
             <a:solidFill>
-              <a:srgbClr val="0D9488"/>
+              <a:srgbClr val="7C3AED"/>
             </a:solidFill>
             <a:prstDash val="solid"/>
           </a:ln>
@@ -9917,13 +9917,13 @@
             <a:r>
               <a:rPr lang="en-US" sz="1300" b="1" dirty="0">
                 <a:solidFill>
-                  <a:srgbClr val="0F766E"/>
+                  <a:srgbClr val="4C1D95"/>
                 </a:solidFill>
                 <a:latin typeface="Trebuchet MS" pitchFamily="34" charset="0"/>
                 <a:ea typeface="Trebuchet MS" pitchFamily="34" charset="-122"/>
                 <a:cs typeface="Trebuchet MS" pitchFamily="34" charset="-120"/>
               </a:rPr>
-              <a:t>clean</a:t>
+              <a:t>cleanse</a:t>
             </a:r>
             <a:endParaRPr lang="en-US" sz="1300" dirty="0"/>
           </a:p>
@@ -9962,7 +9962,7 @@
                 <a:ea typeface="Calibri" pitchFamily="34" charset="-122"/>
                 <a:cs typeface="Calibri" pitchFamily="34" charset="-120"/>
               </a:rPr>
-              <a:t>free from dirt</a:t>
+              <a:t>to make thoroughly clean</a:t>
             </a:r>
             <a:endParaRPr lang="en-US" sz="850" dirty="0"/>
           </a:p>
@@ -10035,7 +10035,7 @@
                 <a:ea typeface="Trebuchet MS" pitchFamily="34" charset="-122"/>
                 <a:cs typeface="Trebuchet MS" pitchFamily="34" charset="-120"/>
               </a:rPr>
-              <a:t>er</a:t>
+              <a:t>ing</a:t>
             </a:r>
             <a:endParaRPr lang="en-US" sz="1300" dirty="0"/>
           </a:p>
@@ -10074,7 +10074,7 @@
                 <a:ea typeface="Calibri" pitchFamily="34" charset="-122"/>
                 <a:cs typeface="Calibri" pitchFamily="34" charset="-120"/>
               </a:rPr>
-              <a:t>person or thing that does something</a:t>
+              <a:t>action happening now</a:t>
             </a:r>
             <a:endParaRPr lang="en-US" sz="850" dirty="0"/>
           </a:p>
@@ -10233,7 +10233,7 @@
                 <a:ea typeface="Trebuchet MS" pitchFamily="34" charset="-122"/>
                 <a:cs typeface="Trebuchet MS" pitchFamily="34" charset="-120"/>
               </a:rPr>
-              <a:t>clean</a:t>
+              <a:t>cleans</a:t>
             </a:r>
             <a:endParaRPr lang="en-US" sz="1400" dirty="0"/>
           </a:p>
@@ -10338,7 +10338,7 @@
                 <a:ea typeface="Trebuchet MS" pitchFamily="34" charset="-122"/>
                 <a:cs typeface="Trebuchet MS" pitchFamily="34" charset="-120"/>
               </a:rPr>
-              <a:t>er</a:t>
+              <a:t>ing</a:t>
             </a:r>
             <a:endParaRPr lang="en-US" sz="1400" dirty="0"/>
           </a:p>
@@ -10445,7 +10445,7 @@
         </p:nvSpPr>
         <p:spPr>
           <a:xfrm>
-            <a:off x="2670048" y="4169664"/>
+            <a:off x="2254649" y="4169664"/>
             <a:ext cx="685800" cy="475488"/>
           </a:xfrm>
           <a:prstGeom prst="rect">
@@ -10472,7 +10472,7 @@
         </p:nvSpPr>
         <p:spPr>
           <a:xfrm>
-            <a:off x="2670048" y="4169664"/>
+            <a:off x="2254649" y="4169664"/>
             <a:ext cx="685800" cy="475488"/>
           </a:xfrm>
           <a:prstGeom prst="rect">
@@ -10511,7 +10511,7 @@
         </p:nvSpPr>
         <p:spPr>
           <a:xfrm>
-            <a:off x="4123944" y="4169664"/>
+            <a:off x="3293146" y="4169664"/>
             <a:ext cx="685800" cy="475488"/>
           </a:xfrm>
           <a:prstGeom prst="rect">
@@ -10538,7 +10538,7 @@
         </p:nvSpPr>
         <p:spPr>
           <a:xfrm>
-            <a:off x="4123944" y="4169664"/>
+            <a:off x="3293146" y="4169664"/>
             <a:ext cx="685800" cy="475488"/>
           </a:xfrm>
           <a:prstGeom prst="rect">
@@ -10577,7 +10577,7 @@
         </p:nvSpPr>
         <p:spPr>
           <a:xfrm>
-            <a:off x="5577840" y="4169664"/>
+            <a:off x="4331643" y="4169664"/>
             <a:ext cx="685800" cy="475488"/>
           </a:xfrm>
           <a:prstGeom prst="rect">
@@ -10604,7 +10604,7 @@
         </p:nvSpPr>
         <p:spPr>
           <a:xfrm>
-            <a:off x="5577840" y="4169664"/>
+            <a:off x="4331643" y="4169664"/>
             <a:ext cx="685800" cy="475488"/>
           </a:xfrm>
           <a:prstGeom prst="rect">
@@ -10643,7 +10643,7 @@
         </p:nvSpPr>
         <p:spPr>
           <a:xfrm>
-            <a:off x="7031736" y="4169664"/>
+            <a:off x="5370141" y="4169664"/>
             <a:ext cx="685800" cy="475488"/>
           </a:xfrm>
           <a:prstGeom prst="rect">
@@ -10670,7 +10670,7 @@
         </p:nvSpPr>
         <p:spPr>
           <a:xfrm>
-            <a:off x="7031736" y="4169664"/>
+            <a:off x="5370141" y="4169664"/>
             <a:ext cx="685800" cy="475488"/>
           </a:xfrm>
           <a:prstGeom prst="rect">
@@ -10695,7 +10695,139 @@
                 <a:ea typeface="Trebuchet MS" pitchFamily="34" charset="-122"/>
                 <a:cs typeface="Trebuchet MS" pitchFamily="34" charset="-120"/>
               </a:rPr>
-              <a:t>er</a:t>
+              <a:t>s</a:t>
+            </a:r>
+            <a:endParaRPr lang="en-US" sz="900" dirty="0"/>
+          </a:p>
+        </p:txBody>
+      </p:sp>
+      <p:sp>
+        <p:nvSpPr>
+          <p:cNvPr id="41" name="Shape 39"/>
+          <p:cNvSpPr/>
+          <p:nvPr/>
+        </p:nvSpPr>
+        <p:spPr>
+          <a:xfrm>
+            <a:off x="6408638" y="4169664"/>
+            <a:ext cx="685800" cy="475488"/>
+          </a:xfrm>
+          <a:prstGeom prst="rect">
+            <a:avLst>
+              <a:gd name="adj" fmla="val 7692"/>
+            </a:avLst>
+          </a:prstGeom>
+          <a:solidFill>
+            <a:srgbClr val="FFFFFF"/>
+          </a:solidFill>
+          <a:ln w="12700">
+            <a:solidFill>
+              <a:srgbClr val="DB2777"/>
+            </a:solidFill>
+            <a:prstDash val="solid"/>
+          </a:ln>
+        </p:spPr>
+      </p:sp>
+      <p:sp>
+        <p:nvSpPr>
+          <p:cNvPr id="42" name="Text 40"/>
+          <p:cNvSpPr/>
+          <p:nvPr/>
+        </p:nvSpPr>
+        <p:spPr>
+          <a:xfrm>
+            <a:off x="6408638" y="4169664"/>
+            <a:ext cx="685800" cy="475488"/>
+          </a:xfrm>
+          <a:prstGeom prst="rect">
+            <a:avLst/>
+          </a:prstGeom>
+          <a:noFill/>
+          <a:ln/>
+        </p:spPr>
+        <p:txBody>
+          <a:bodyPr wrap="square" lIns="0" tIns="0" rIns="0" bIns="0" rtlCol="0" anchor="ctr"/>
+          <a:lstStyle/>
+          <a:p>
+            <a:pPr algn="ctr" indent="0" marL="0">
+              <a:buNone/>
+            </a:pPr>
+            <a:r>
+              <a:rPr lang="en-US" sz="900" b="1" dirty="0">
+                <a:solidFill>
+                  <a:srgbClr val="9D174D"/>
+                </a:solidFill>
+                <a:latin typeface="Trebuchet MS" pitchFamily="34" charset="0"/>
+                <a:ea typeface="Trebuchet MS" pitchFamily="34" charset="-122"/>
+                <a:cs typeface="Trebuchet MS" pitchFamily="34" charset="-120"/>
+              </a:rPr>
+              <a:t>i</a:t>
+            </a:r>
+            <a:endParaRPr lang="en-US" sz="900" dirty="0"/>
+          </a:p>
+        </p:txBody>
+      </p:sp>
+      <p:sp>
+        <p:nvSpPr>
+          <p:cNvPr id="43" name="Shape 41"/>
+          <p:cNvSpPr/>
+          <p:nvPr/>
+        </p:nvSpPr>
+        <p:spPr>
+          <a:xfrm>
+            <a:off x="7447135" y="4169664"/>
+            <a:ext cx="685800" cy="475488"/>
+          </a:xfrm>
+          <a:prstGeom prst="rect">
+            <a:avLst>
+              <a:gd name="adj" fmla="val 7692"/>
+            </a:avLst>
+          </a:prstGeom>
+          <a:solidFill>
+            <a:srgbClr val="FFFFFF"/>
+          </a:solidFill>
+          <a:ln w="12700">
+            <a:solidFill>
+              <a:srgbClr val="DB2777"/>
+            </a:solidFill>
+            <a:prstDash val="solid"/>
+          </a:ln>
+        </p:spPr>
+      </p:sp>
+      <p:sp>
+        <p:nvSpPr>
+          <p:cNvPr id="44" name="Text 42"/>
+          <p:cNvSpPr/>
+          <p:nvPr/>
+        </p:nvSpPr>
+        <p:spPr>
+          <a:xfrm>
+            <a:off x="7447135" y="4169664"/>
+            <a:ext cx="685800" cy="475488"/>
+          </a:xfrm>
+          <a:prstGeom prst="rect">
+            <a:avLst/>
+          </a:prstGeom>
+          <a:noFill/>
+          <a:ln/>
+        </p:spPr>
+        <p:txBody>
+          <a:bodyPr wrap="square" lIns="0" tIns="0" rIns="0" bIns="0" rtlCol="0" anchor="ctr"/>
+          <a:lstStyle/>
+          <a:p>
+            <a:pPr algn="ctr" indent="0" marL="0">
+              <a:buNone/>
+            </a:pPr>
+            <a:r>
+              <a:rPr lang="en-US" sz="900" b="1" dirty="0">
+                <a:solidFill>
+                  <a:srgbClr val="9D174D"/>
+                </a:solidFill>
+                <a:latin typeface="Trebuchet MS" pitchFamily="34" charset="0"/>
+                <a:ea typeface="Trebuchet MS" pitchFamily="34" charset="-122"/>
+                <a:cs typeface="Trebuchet MS" pitchFamily="34" charset="-120"/>
+              </a:rPr>
+              <a:t>ng</a:t>
             </a:r>
             <a:endParaRPr lang="en-US" sz="900" dirty="0"/>
           </a:p>
@@ -10987,7 +11119,7 @@
                 <a:ea typeface="Calibri" pitchFamily="34" charset="-122"/>
                 <a:cs typeface="Calibri" pitchFamily="34" charset="-120"/>
               </a:rPr>
-              <a:t>Word Labs  •  wordlabs.app  •  Root: 'clean' = free from dirt, pure</a:t>
+              <a:t>Word Labs  •  wordlabs.app  •  Root: 'clean' = free from dirt or impurity</a:t>
             </a:r>
             <a:endParaRPr lang="en-US" sz="800" dirty="0"/>
           </a:p>
@@ -11126,7 +11258,7 @@
                 <a:ea typeface="Trebuchet MS" pitchFamily="34" charset="-122"/>
                 <a:cs typeface="Trebuchet MS" pitchFamily="34" charset="-120"/>
               </a:rPr>
-              <a:t>unclean</a:t>
+              <a:t>cleaner</a:t>
             </a:r>
             <a:endParaRPr lang="en-US" sz="2800" dirty="0"/>
           </a:p>
@@ -11814,7 +11946,7 @@
                 <a:ea typeface="Calibri" pitchFamily="34" charset="-122"/>
                 <a:cs typeface="Calibri" pitchFamily="34" charset="-120"/>
               </a:rPr>
-              <a:t>Word Labs  •  wordlabs.app  •  Root: 'clean' = free from dirt, pure</a:t>
+              <a:t>Word Labs  •  wordlabs.app  •  Root: 'clean' = free from dirt or impurity</a:t>
             </a:r>
             <a:endParaRPr lang="en-US" sz="800" dirty="0"/>
           </a:p>
@@ -11953,7 +12085,7 @@
                 <a:ea typeface="Trebuchet MS" pitchFamily="34" charset="-122"/>
                 <a:cs typeface="Trebuchet MS" pitchFamily="34" charset="-120"/>
               </a:rPr>
-              <a:t>unclean</a:t>
+              <a:t>cleaner</a:t>
             </a:r>
             <a:endParaRPr lang="en-US" sz="2800" dirty="0"/>
           </a:p>
@@ -12042,11 +12174,11 @@
             </a:avLst>
           </a:prstGeom>
           <a:solidFill>
-            <a:srgbClr val="DDD6FE"/>
+            <a:srgbClr val="CCFBF1"/>
           </a:solidFill>
           <a:ln w="19050">
             <a:solidFill>
-              <a:srgbClr val="7C3AED"/>
+              <a:srgbClr val="0D9488"/>
             </a:solidFill>
             <a:prstDash val="solid"/>
           </a:ln>
@@ -12086,13 +12218,13 @@
             <a:r>
               <a:rPr lang="en-US" sz="1300" b="1" dirty="0">
                 <a:solidFill>
-                  <a:srgbClr val="4C1D95"/>
+                  <a:srgbClr val="0F766E"/>
                 </a:solidFill>
                 <a:latin typeface="Trebuchet MS" pitchFamily="34" charset="0"/>
                 <a:ea typeface="Trebuchet MS" pitchFamily="34" charset="-122"/>
                 <a:cs typeface="Trebuchet MS" pitchFamily="34" charset="-120"/>
               </a:rPr>
-              <a:t>un</a:t>
+              <a:t>clean</a:t>
             </a:r>
             <a:endParaRPr lang="en-US" sz="1300" dirty="0"/>
           </a:p>
@@ -12131,7 +12263,7 @@
                 <a:ea typeface="Calibri" pitchFamily="34" charset="-122"/>
                 <a:cs typeface="Calibri" pitchFamily="34" charset="-120"/>
               </a:rPr>
-              <a:t>not</a:t>
+              <a:t>free from dirt</a:t>
             </a:r>
             <a:endParaRPr lang="en-US" sz="850" dirty="0"/>
           </a:p>
@@ -12154,11 +12286,11 @@
             </a:avLst>
           </a:prstGeom>
           <a:solidFill>
-            <a:srgbClr val="CCFBF1"/>
+            <a:srgbClr val="FCE7F3"/>
           </a:solidFill>
           <a:ln w="19050">
             <a:solidFill>
-              <a:srgbClr val="0D9488"/>
+              <a:srgbClr val="DB2777"/>
             </a:solidFill>
             <a:prstDash val="solid"/>
           </a:ln>
@@ -12198,13 +12330,13 @@
             <a:r>
               <a:rPr lang="en-US" sz="1300" b="1" dirty="0">
                 <a:solidFill>
-                  <a:srgbClr val="0F766E"/>
+                  <a:srgbClr val="9D174D"/>
                 </a:solidFill>
                 <a:latin typeface="Trebuchet MS" pitchFamily="34" charset="0"/>
                 <a:ea typeface="Trebuchet MS" pitchFamily="34" charset="-122"/>
                 <a:cs typeface="Trebuchet MS" pitchFamily="34" charset="-120"/>
               </a:rPr>
-              <a:t>clean</a:t>
+              <a:t>er</a:t>
             </a:r>
             <a:endParaRPr lang="en-US" sz="1300" dirty="0"/>
           </a:p>
@@ -12243,7 +12375,7 @@
                 <a:ea typeface="Calibri" pitchFamily="34" charset="-122"/>
                 <a:cs typeface="Calibri" pitchFamily="34" charset="-120"/>
               </a:rPr>
-              <a:t>free from dirt</a:t>
+              <a:t>more, or one who does</a:t>
             </a:r>
             <a:endParaRPr lang="en-US" sz="850" dirty="0"/>
           </a:p>
@@ -12799,7 +12931,7 @@
                 <a:ea typeface="Calibri" pitchFamily="34" charset="-122"/>
                 <a:cs typeface="Calibri" pitchFamily="34" charset="-120"/>
               </a:rPr>
-              <a:t>Word Labs  •  wordlabs.app  •  Root: 'clean' = free from dirt, pure</a:t>
+              <a:t>Word Labs  •  wordlabs.app  •  Root: 'clean' = free from dirt or impurity</a:t>
             </a:r>
             <a:endParaRPr lang="en-US" sz="800" dirty="0"/>
           </a:p>
@@ -12938,7 +13070,7 @@
                 <a:ea typeface="Trebuchet MS" pitchFamily="34" charset="-122"/>
                 <a:cs typeface="Trebuchet MS" pitchFamily="34" charset="-120"/>
               </a:rPr>
-              <a:t>unclean</a:t>
+              <a:t>cleaner</a:t>
             </a:r>
             <a:endParaRPr lang="en-US" sz="2800" dirty="0"/>
           </a:p>
@@ -13027,11 +13159,11 @@
             </a:avLst>
           </a:prstGeom>
           <a:solidFill>
-            <a:srgbClr val="DDD6FE"/>
+            <a:srgbClr val="CCFBF1"/>
           </a:solidFill>
           <a:ln w="19050">
             <a:solidFill>
-              <a:srgbClr val="7C3AED"/>
+              <a:srgbClr val="0D9488"/>
             </a:solidFill>
             <a:prstDash val="solid"/>
           </a:ln>
@@ -13071,13 +13203,13 @@
             <a:r>
               <a:rPr lang="en-US" sz="1300" b="1" dirty="0">
                 <a:solidFill>
-                  <a:srgbClr val="4C1D95"/>
+                  <a:srgbClr val="0F766E"/>
                 </a:solidFill>
                 <a:latin typeface="Trebuchet MS" pitchFamily="34" charset="0"/>
                 <a:ea typeface="Trebuchet MS" pitchFamily="34" charset="-122"/>
                 <a:cs typeface="Trebuchet MS" pitchFamily="34" charset="-120"/>
               </a:rPr>
-              <a:t>un</a:t>
+              <a:t>clean</a:t>
             </a:r>
             <a:endParaRPr lang="en-US" sz="1300" dirty="0"/>
           </a:p>
@@ -13116,7 +13248,7 @@
                 <a:ea typeface="Calibri" pitchFamily="34" charset="-122"/>
                 <a:cs typeface="Calibri" pitchFamily="34" charset="-120"/>
               </a:rPr>
-              <a:t>not</a:t>
+              <a:t>free from dirt</a:t>
             </a:r>
             <a:endParaRPr lang="en-US" sz="850" dirty="0"/>
           </a:p>
@@ -13139,11 +13271,11 @@
             </a:avLst>
           </a:prstGeom>
           <a:solidFill>
-            <a:srgbClr val="CCFBF1"/>
+            <a:srgbClr val="FCE7F3"/>
           </a:solidFill>
           <a:ln w="19050">
             <a:solidFill>
-              <a:srgbClr val="0D9488"/>
+              <a:srgbClr val="DB2777"/>
             </a:solidFill>
             <a:prstDash val="solid"/>
           </a:ln>
@@ -13183,13 +13315,13 @@
             <a:r>
               <a:rPr lang="en-US" sz="1300" b="1" dirty="0">
                 <a:solidFill>
-                  <a:srgbClr val="0F766E"/>
+                  <a:srgbClr val="9D174D"/>
                 </a:solidFill>
                 <a:latin typeface="Trebuchet MS" pitchFamily="34" charset="0"/>
                 <a:ea typeface="Trebuchet MS" pitchFamily="34" charset="-122"/>
                 <a:cs typeface="Trebuchet MS" pitchFamily="34" charset="-120"/>
               </a:rPr>
-              <a:t>clean</a:t>
+              <a:t>er</a:t>
             </a:r>
             <a:endParaRPr lang="en-US" sz="1300" dirty="0"/>
           </a:p>
@@ -13228,7 +13360,7 @@
                 <a:ea typeface="Calibri" pitchFamily="34" charset="-122"/>
                 <a:cs typeface="Calibri" pitchFamily="34" charset="-120"/>
               </a:rPr>
-              <a:t>free from dirt</a:t>
+              <a:t>more, or one who does</a:t>
             </a:r>
             <a:endParaRPr lang="en-US" sz="850" dirty="0"/>
           </a:p>
@@ -13387,7 +13519,7 @@
                 <a:ea typeface="Trebuchet MS" pitchFamily="34" charset="-122"/>
                 <a:cs typeface="Trebuchet MS" pitchFamily="34" charset="-120"/>
               </a:rPr>
-              <a:t>un</a:t>
+              <a:t>clean</a:t>
             </a:r>
             <a:endParaRPr lang="en-US" sz="1400" dirty="0"/>
           </a:p>
@@ -13492,7 +13624,7 @@
                 <a:ea typeface="Trebuchet MS" pitchFamily="34" charset="-122"/>
                 <a:cs typeface="Trebuchet MS" pitchFamily="34" charset="-120"/>
               </a:rPr>
-              <a:t>clean</a:t>
+              <a:t>er</a:t>
             </a:r>
             <a:endParaRPr lang="en-US" sz="1400" dirty="0"/>
           </a:p>
@@ -13825,7 +13957,7 @@
                 <a:ea typeface="Calibri" pitchFamily="34" charset="-122"/>
                 <a:cs typeface="Calibri" pitchFamily="34" charset="-120"/>
               </a:rPr>
-              <a:t>Root 'clean' — free from dirt, pure</a:t>
+              <a:t>Root 'clean' — free from dirt or impurity</a:t>
             </a:r>
             <a:endParaRPr lang="en-US" sz="1600" dirty="0"/>
           </a:p>
@@ -14181,7 +14313,7 @@
                 <a:ea typeface="Calibri" pitchFamily="34" charset="-122"/>
                 <a:cs typeface="Calibri" pitchFamily="34" charset="-120"/>
               </a:rPr>
-              <a:t>Word Labs  •  wordlabs.app  •  Root: 'clean' = free from dirt, pure</a:t>
+              <a:t>Word Labs  •  wordlabs.app  •  Root: 'clean' = free from dirt or impurity</a:t>
             </a:r>
             <a:endParaRPr lang="en-US" sz="800" dirty="0"/>
           </a:p>
@@ -14320,7 +14452,7 @@
                 <a:ea typeface="Trebuchet MS" pitchFamily="34" charset="-122"/>
                 <a:cs typeface="Trebuchet MS" pitchFamily="34" charset="-120"/>
               </a:rPr>
-              <a:t>unclean</a:t>
+              <a:t>cleaner</a:t>
             </a:r>
             <a:endParaRPr lang="en-US" sz="2800" dirty="0"/>
           </a:p>
@@ -14409,11 +14541,11 @@
             </a:avLst>
           </a:prstGeom>
           <a:solidFill>
-            <a:srgbClr val="DDD6FE"/>
+            <a:srgbClr val="CCFBF1"/>
           </a:solidFill>
           <a:ln w="19050">
             <a:solidFill>
-              <a:srgbClr val="7C3AED"/>
+              <a:srgbClr val="0D9488"/>
             </a:solidFill>
             <a:prstDash val="solid"/>
           </a:ln>
@@ -14453,13 +14585,13 @@
             <a:r>
               <a:rPr lang="en-US" sz="1300" b="1" dirty="0">
                 <a:solidFill>
-                  <a:srgbClr val="4C1D95"/>
+                  <a:srgbClr val="0F766E"/>
                 </a:solidFill>
                 <a:latin typeface="Trebuchet MS" pitchFamily="34" charset="0"/>
                 <a:ea typeface="Trebuchet MS" pitchFamily="34" charset="-122"/>
                 <a:cs typeface="Trebuchet MS" pitchFamily="34" charset="-120"/>
               </a:rPr>
-              <a:t>un</a:t>
+              <a:t>clean</a:t>
             </a:r>
             <a:endParaRPr lang="en-US" sz="1300" dirty="0"/>
           </a:p>
@@ -14498,7 +14630,7 @@
                 <a:ea typeface="Calibri" pitchFamily="34" charset="-122"/>
                 <a:cs typeface="Calibri" pitchFamily="34" charset="-120"/>
               </a:rPr>
-              <a:t>not</a:t>
+              <a:t>free from dirt</a:t>
             </a:r>
             <a:endParaRPr lang="en-US" sz="850" dirty="0"/>
           </a:p>
@@ -14521,11 +14653,11 @@
             </a:avLst>
           </a:prstGeom>
           <a:solidFill>
-            <a:srgbClr val="CCFBF1"/>
+            <a:srgbClr val="FCE7F3"/>
           </a:solidFill>
           <a:ln w="19050">
             <a:solidFill>
-              <a:srgbClr val="0D9488"/>
+              <a:srgbClr val="DB2777"/>
             </a:solidFill>
             <a:prstDash val="solid"/>
           </a:ln>
@@ -14565,13 +14697,13 @@
             <a:r>
               <a:rPr lang="en-US" sz="1300" b="1" dirty="0">
                 <a:solidFill>
-                  <a:srgbClr val="0F766E"/>
+                  <a:srgbClr val="9D174D"/>
                 </a:solidFill>
                 <a:latin typeface="Trebuchet MS" pitchFamily="34" charset="0"/>
                 <a:ea typeface="Trebuchet MS" pitchFamily="34" charset="-122"/>
                 <a:cs typeface="Trebuchet MS" pitchFamily="34" charset="-120"/>
               </a:rPr>
-              <a:t>clean</a:t>
+              <a:t>er</a:t>
             </a:r>
             <a:endParaRPr lang="en-US" sz="1300" dirty="0"/>
           </a:p>
@@ -14610,7 +14742,7 @@
                 <a:ea typeface="Calibri" pitchFamily="34" charset="-122"/>
                 <a:cs typeface="Calibri" pitchFamily="34" charset="-120"/>
               </a:rPr>
-              <a:t>free from dirt</a:t>
+              <a:t>more, or one who does</a:t>
             </a:r>
             <a:endParaRPr lang="en-US" sz="850" dirty="0"/>
           </a:p>
@@ -14769,7 +14901,7 @@
                 <a:ea typeface="Trebuchet MS" pitchFamily="34" charset="-122"/>
                 <a:cs typeface="Trebuchet MS" pitchFamily="34" charset="-120"/>
               </a:rPr>
-              <a:t>un</a:t>
+              <a:t>clean</a:t>
             </a:r>
             <a:endParaRPr lang="en-US" sz="1400" dirty="0"/>
           </a:p>
@@ -14874,7 +15006,7 @@
                 <a:ea typeface="Trebuchet MS" pitchFamily="34" charset="-122"/>
                 <a:cs typeface="Trebuchet MS" pitchFamily="34" charset="-120"/>
               </a:rPr>
-              <a:t>clean</a:t>
+              <a:t>er</a:t>
             </a:r>
             <a:endParaRPr lang="en-US" sz="1400" dirty="0"/>
           </a:p>
@@ -14981,7 +15113,7 @@
         </p:nvSpPr>
         <p:spPr>
           <a:xfrm>
-            <a:off x="2427732" y="4169664"/>
+            <a:off x="2670048" y="4169664"/>
             <a:ext cx="685800" cy="475488"/>
           </a:xfrm>
           <a:prstGeom prst="rect">
@@ -15008,7 +15140,7 @@
         </p:nvSpPr>
         <p:spPr>
           <a:xfrm>
-            <a:off x="2427732" y="4169664"/>
+            <a:off x="2670048" y="4169664"/>
             <a:ext cx="685800" cy="475488"/>
           </a:xfrm>
           <a:prstGeom prst="rect">
@@ -15033,7 +15165,7 @@
                 <a:ea typeface="Trebuchet MS" pitchFamily="34" charset="-122"/>
                 <a:cs typeface="Trebuchet MS" pitchFamily="34" charset="-120"/>
               </a:rPr>
-              <a:t>u</a:t>
+              <a:t>cl</a:t>
             </a:r>
             <a:endParaRPr lang="en-US" sz="900" dirty="0"/>
           </a:p>
@@ -15047,7 +15179,7 @@
         </p:nvSpPr>
         <p:spPr>
           <a:xfrm>
-            <a:off x="3639312" y="4169664"/>
+            <a:off x="4123944" y="4169664"/>
             <a:ext cx="685800" cy="475488"/>
           </a:xfrm>
           <a:prstGeom prst="rect">
@@ -15074,7 +15206,7 @@
         </p:nvSpPr>
         <p:spPr>
           <a:xfrm>
-            <a:off x="3639312" y="4169664"/>
+            <a:off x="4123944" y="4169664"/>
             <a:ext cx="685800" cy="475488"/>
           </a:xfrm>
           <a:prstGeom prst="rect">
@@ -15099,7 +15231,7 @@
                 <a:ea typeface="Trebuchet MS" pitchFamily="34" charset="-122"/>
                 <a:cs typeface="Trebuchet MS" pitchFamily="34" charset="-120"/>
               </a:rPr>
-              <a:t>n</a:t>
+              <a:t>ea</a:t>
             </a:r>
             <a:endParaRPr lang="en-US" sz="900" dirty="0"/>
           </a:p>
@@ -15113,7 +15245,7 @@
         </p:nvSpPr>
         <p:spPr>
           <a:xfrm>
-            <a:off x="4850892" y="4169664"/>
+            <a:off x="5577840" y="4169664"/>
             <a:ext cx="685800" cy="475488"/>
           </a:xfrm>
           <a:prstGeom prst="rect">
@@ -15140,7 +15272,7 @@
         </p:nvSpPr>
         <p:spPr>
           <a:xfrm>
-            <a:off x="4850892" y="4169664"/>
+            <a:off x="5577840" y="4169664"/>
             <a:ext cx="685800" cy="475488"/>
           </a:xfrm>
           <a:prstGeom prst="rect">
@@ -15165,7 +15297,7 @@
                 <a:ea typeface="Trebuchet MS" pitchFamily="34" charset="-122"/>
                 <a:cs typeface="Trebuchet MS" pitchFamily="34" charset="-120"/>
               </a:rPr>
-              <a:t>cl</a:t>
+              <a:t>n</a:t>
             </a:r>
             <a:endParaRPr lang="en-US" sz="900" dirty="0"/>
           </a:p>
@@ -15179,7 +15311,7 @@
         </p:nvSpPr>
         <p:spPr>
           <a:xfrm>
-            <a:off x="6062472" y="4169664"/>
+            <a:off x="7031736" y="4169664"/>
             <a:ext cx="685800" cy="475488"/>
           </a:xfrm>
           <a:prstGeom prst="rect">
@@ -15206,7 +15338,7 @@
         </p:nvSpPr>
         <p:spPr>
           <a:xfrm>
-            <a:off x="6062472" y="4169664"/>
+            <a:off x="7031736" y="4169664"/>
             <a:ext cx="685800" cy="475488"/>
           </a:xfrm>
           <a:prstGeom prst="rect">
@@ -15231,73 +15363,7 @@
                 <a:ea typeface="Trebuchet MS" pitchFamily="34" charset="-122"/>
                 <a:cs typeface="Trebuchet MS" pitchFamily="34" charset="-120"/>
               </a:rPr>
-              <a:t>ea</a:t>
-            </a:r>
-            <a:endParaRPr lang="en-US" sz="900" dirty="0"/>
-          </a:p>
-        </p:txBody>
-      </p:sp>
-      <p:sp>
-        <p:nvSpPr>
-          <p:cNvPr id="41" name="Shape 39"/>
-          <p:cNvSpPr/>
-          <p:nvPr/>
-        </p:nvSpPr>
-        <p:spPr>
-          <a:xfrm>
-            <a:off x="7274052" y="4169664"/>
-            <a:ext cx="685800" cy="475488"/>
-          </a:xfrm>
-          <a:prstGeom prst="rect">
-            <a:avLst>
-              <a:gd name="adj" fmla="val 7692"/>
-            </a:avLst>
-          </a:prstGeom>
-          <a:solidFill>
-            <a:srgbClr val="FFFFFF"/>
-          </a:solidFill>
-          <a:ln w="12700">
-            <a:solidFill>
-              <a:srgbClr val="DB2777"/>
-            </a:solidFill>
-            <a:prstDash val="solid"/>
-          </a:ln>
-        </p:spPr>
-      </p:sp>
-      <p:sp>
-        <p:nvSpPr>
-          <p:cNvPr id="42" name="Text 40"/>
-          <p:cNvSpPr/>
-          <p:nvPr/>
-        </p:nvSpPr>
-        <p:spPr>
-          <a:xfrm>
-            <a:off x="7274052" y="4169664"/>
-            <a:ext cx="685800" cy="475488"/>
-          </a:xfrm>
-          <a:prstGeom prst="rect">
-            <a:avLst/>
-          </a:prstGeom>
-          <a:noFill/>
-          <a:ln/>
-        </p:spPr>
-        <p:txBody>
-          <a:bodyPr wrap="square" lIns="0" tIns="0" rIns="0" bIns="0" rtlCol="0" anchor="ctr"/>
-          <a:lstStyle/>
-          <a:p>
-            <a:pPr algn="ctr" indent="0" marL="0">
-              <a:buNone/>
-            </a:pPr>
-            <a:r>
-              <a:rPr lang="en-US" sz="900" b="1" dirty="0">
-                <a:solidFill>
-                  <a:srgbClr val="9D174D"/>
-                </a:solidFill>
-                <a:latin typeface="Trebuchet MS" pitchFamily="34" charset="0"/>
-                <a:ea typeface="Trebuchet MS" pitchFamily="34" charset="-122"/>
-                <a:cs typeface="Trebuchet MS" pitchFamily="34" charset="-120"/>
-              </a:rPr>
-              <a:t>n</a:t>
+              <a:t>er</a:t>
             </a:r>
             <a:endParaRPr lang="en-US" sz="900" dirty="0"/>
           </a:p>
@@ -15871,7 +15937,7 @@
                 <a:ea typeface="Calibri" pitchFamily="34" charset="-122"/>
                 <a:cs typeface="Calibri" pitchFamily="34" charset="-120"/>
               </a:rPr>
-              <a:t>Word Labs  •  wordlabs.app  •  Root: 'clean' = free from dirt, pure</a:t>
+              <a:t>Word Labs  •  wordlabs.app  •  Root: 'clean' = free from dirt or impurity</a:t>
             </a:r>
             <a:endParaRPr lang="en-US" sz="800" dirty="0"/>
           </a:p>
@@ -16205,7 +16271,7 @@
                 <a:ea typeface="Trebuchet MS" pitchFamily="34" charset="-122"/>
                 <a:cs typeface="Trebuchet MS" pitchFamily="34" charset="-120"/>
               </a:rPr>
-              <a:t>1</a:t>
+              <a:t>2</a:t>
             </a:r>
             <a:pPr algn="ctr" indent="0" marL="0">
               <a:buNone/>
@@ -16219,7 +16285,7 @@
                 <a:ea typeface="Trebuchet MS" pitchFamily="34" charset="-122"/>
                 <a:cs typeface="Trebuchet MS" pitchFamily="34" charset="-120"/>
               </a:rPr>
-              <a:t>  punctuation mark</a:t>
+              <a:t>  punctuation marks</a:t>
             </a:r>
             <a:endParaRPr lang="en-US" sz="2800" dirty="0"/>
           </a:p>
@@ -16511,7 +16577,7 @@
                 <a:ea typeface="Calibri" pitchFamily="34" charset="-122"/>
                 <a:cs typeface="Calibri" pitchFamily="34" charset="-120"/>
               </a:rPr>
-              <a:t>Word Labs  •  wordlabs.app  •  Root: 'clean' = free from dirt, pure</a:t>
+              <a:t>Word Labs  •  wordlabs.app  •  Root: 'clean' = free from dirt or impurity</a:t>
             </a:r>
             <a:endParaRPr lang="en-US" sz="800" dirty="0"/>
           </a:p>
@@ -16640,7 +16706,7 @@
                 <a:ea typeface="Calibri" pitchFamily="34" charset="-122"/>
                 <a:cs typeface="Calibri" pitchFamily="34" charset="-120"/>
               </a:rPr>
-              <a:t>cleaner</a:t>
+              <a:t>unclean</a:t>
             </a:r>
             <a:pPr algn="l" indent="0" marL="0">
               <a:buNone/>
@@ -16654,7 +16720,7 @@
                 <a:ea typeface="Calibri" pitchFamily="34" charset="-122"/>
                 <a:cs typeface="Calibri" pitchFamily="34" charset="-120"/>
               </a:rPr>
-              <a:t> worked so </a:t>
+              <a:t> surfaces were scrubbed until they shone; Jayden then sprayed a </a:t>
             </a:r>
             <a:pPr algn="l" indent="0" marL="0">
               <a:buNone/>
@@ -16685,7 +16751,7 @@
                 <a:ea typeface="Calibri" pitchFamily="34" charset="-122"/>
                 <a:cs typeface="Calibri" pitchFamily="34" charset="-120"/>
               </a:rPr>
-              <a:t> and carefully that even the </a:t>
+              <a:t> scented mist, making the whole room feel fresh, and finally handed the </a:t>
             </a:r>
             <a:pPr algn="l" indent="0" marL="0">
               <a:buNone/>
@@ -16702,7 +16768,7 @@
                 <a:ea typeface="Calibri" pitchFamily="34" charset="-122"/>
                 <a:cs typeface="Calibri" pitchFamily="34" charset="-120"/>
               </a:rPr>
-              <a:t>uncleanliness</a:t>
+              <a:t>cleaning</a:t>
             </a:r>
             <a:pPr algn="l" indent="0" marL="0">
               <a:buNone/>
@@ -16716,7 +16782,7 @@
                 <a:ea typeface="Calibri" pitchFamily="34" charset="-122"/>
                 <a:cs typeface="Calibri" pitchFamily="34" charset="-120"/>
               </a:rPr>
-              <a:t> in the old storeroom disappeared!</a:t>
+              <a:t> supplies back to his teacher.</a:t>
             </a:r>
             <a:endParaRPr lang="en-US" sz="1800" dirty="0"/>
           </a:p>
@@ -16871,7 +16937,7 @@
                 <a:ea typeface="Trebuchet MS" pitchFamily="34" charset="-122"/>
                 <a:cs typeface="Trebuchet MS" pitchFamily="34" charset="-120"/>
               </a:rPr>
-              <a:t>cleaner</a:t>
+              <a:t>unclean</a:t>
             </a:r>
             <a:endParaRPr lang="en-US" sz="1400" dirty="0"/>
           </a:p>
@@ -17127,7 +17193,7 @@
                 <a:ea typeface="Trebuchet MS" pitchFamily="34" charset="-122"/>
                 <a:cs typeface="Trebuchet MS" pitchFamily="34" charset="-120"/>
               </a:rPr>
-              <a:t>uncleanliness</a:t>
+              <a:t>cleaning</a:t>
             </a:r>
             <a:endParaRPr lang="en-US" sz="1400" dirty="0"/>
           </a:p>
@@ -17458,7 +17524,7 @@
                 <a:ea typeface="Calibri" pitchFamily="34" charset="-122"/>
                 <a:cs typeface="Calibri" pitchFamily="34" charset="-120"/>
               </a:rPr>
-              <a:t>Word Labs  •  wordlabs.app  •  Root: 'clean' = free from dirt, pure</a:t>
+              <a:t>Word Labs  •  wordlabs.app  •  Root: 'clean' = free from dirt or impurity</a:t>
             </a:r>
             <a:endParaRPr lang="en-US" sz="800" dirty="0"/>
           </a:p>
@@ -17597,7 +17663,7 @@
                 <a:ea typeface="Trebuchet MS" pitchFamily="34" charset="-122"/>
                 <a:cs typeface="Trebuchet MS" pitchFamily="34" charset="-120"/>
               </a:rPr>
-              <a:t>cleaner</a:t>
+              <a:t>unclean</a:t>
             </a:r>
             <a:endParaRPr lang="en-US" sz="2800" dirty="0"/>
           </a:p>
@@ -18285,7 +18351,7 @@
                 <a:ea typeface="Calibri" pitchFamily="34" charset="-122"/>
                 <a:cs typeface="Calibri" pitchFamily="34" charset="-120"/>
               </a:rPr>
-              <a:t>Word Labs  •  wordlabs.app  •  Root: 'clean' = free from dirt, pure</a:t>
+              <a:t>Word Labs  •  wordlabs.app  •  Root: 'clean' = free from dirt or impurity</a:t>
             </a:r>
             <a:endParaRPr lang="en-US" sz="800" dirty="0"/>
           </a:p>
@@ -18424,7 +18490,7 @@
                 <a:ea typeface="Trebuchet MS" pitchFamily="34" charset="-122"/>
                 <a:cs typeface="Trebuchet MS" pitchFamily="34" charset="-120"/>
               </a:rPr>
-              <a:t>cleaner</a:t>
+              <a:t>unclean</a:t>
             </a:r>
             <a:endParaRPr lang="en-US" sz="2800" dirty="0"/>
           </a:p>
@@ -18513,11 +18579,11 @@
             </a:avLst>
           </a:prstGeom>
           <a:solidFill>
-            <a:srgbClr val="CCFBF1"/>
+            <a:srgbClr val="DDD6FE"/>
           </a:solidFill>
           <a:ln w="19050">
             <a:solidFill>
-              <a:srgbClr val="0D9488"/>
+              <a:srgbClr val="7C3AED"/>
             </a:solidFill>
             <a:prstDash val="solid"/>
           </a:ln>
@@ -18557,13 +18623,13 @@
             <a:r>
               <a:rPr lang="en-US" sz="1300" b="1" dirty="0">
                 <a:solidFill>
-                  <a:srgbClr val="0F766E"/>
+                  <a:srgbClr val="4C1D95"/>
                 </a:solidFill>
                 <a:latin typeface="Trebuchet MS" pitchFamily="34" charset="0"/>
                 <a:ea typeface="Trebuchet MS" pitchFamily="34" charset="-122"/>
                 <a:cs typeface="Trebuchet MS" pitchFamily="34" charset="-120"/>
               </a:rPr>
-              <a:t>clean</a:t>
+              <a:t>un</a:t>
             </a:r>
             <a:endParaRPr lang="en-US" sz="1300" dirty="0"/>
           </a:p>
@@ -18602,7 +18668,7 @@
                 <a:ea typeface="Calibri" pitchFamily="34" charset="-122"/>
                 <a:cs typeface="Calibri" pitchFamily="34" charset="-120"/>
               </a:rPr>
-              <a:t>free from dirt</a:t>
+              <a:t>not</a:t>
             </a:r>
             <a:endParaRPr lang="en-US" sz="850" dirty="0"/>
           </a:p>
@@ -18625,11 +18691,11 @@
             </a:avLst>
           </a:prstGeom>
           <a:solidFill>
-            <a:srgbClr val="FCE7F3"/>
+            <a:srgbClr val="CCFBF1"/>
           </a:solidFill>
           <a:ln w="19050">
             <a:solidFill>
-              <a:srgbClr val="DB2777"/>
+              <a:srgbClr val="0D9488"/>
             </a:solidFill>
             <a:prstDash val="solid"/>
           </a:ln>
@@ -18669,13 +18735,13 @@
             <a:r>
               <a:rPr lang="en-US" sz="1300" b="1" dirty="0">
                 <a:solidFill>
-                  <a:srgbClr val="9D174D"/>
+                  <a:srgbClr val="0F766E"/>
                 </a:solidFill>
                 <a:latin typeface="Trebuchet MS" pitchFamily="34" charset="0"/>
                 <a:ea typeface="Trebuchet MS" pitchFamily="34" charset="-122"/>
                 <a:cs typeface="Trebuchet MS" pitchFamily="34" charset="-120"/>
               </a:rPr>
-              <a:t>er</a:t>
+              <a:t>clean</a:t>
             </a:r>
             <a:endParaRPr lang="en-US" sz="1300" dirty="0"/>
           </a:p>
@@ -18714,7 +18780,7 @@
                 <a:ea typeface="Calibri" pitchFamily="34" charset="-122"/>
                 <a:cs typeface="Calibri" pitchFamily="34" charset="-120"/>
               </a:rPr>
-              <a:t>person or thing that does something</a:t>
+              <a:t>free from dirt</a:t>
             </a:r>
             <a:endParaRPr lang="en-US" sz="850" dirty="0"/>
           </a:p>
@@ -19270,7 +19336,7 @@
                 <a:ea typeface="Calibri" pitchFamily="34" charset="-122"/>
                 <a:cs typeface="Calibri" pitchFamily="34" charset="-120"/>
               </a:rPr>
-              <a:t>Word Labs  •  wordlabs.app  •  Root: 'clean' = free from dirt, pure</a:t>
+              <a:t>Word Labs  •  wordlabs.app  •  Root: 'clean' = free from dirt or impurity</a:t>
             </a:r>
             <a:endParaRPr lang="en-US" sz="800" dirty="0"/>
           </a:p>
@@ -19409,7 +19475,7 @@
                 <a:ea typeface="Trebuchet MS" pitchFamily="34" charset="-122"/>
                 <a:cs typeface="Trebuchet MS" pitchFamily="34" charset="-120"/>
               </a:rPr>
-              <a:t>cleaner</a:t>
+              <a:t>unclean</a:t>
             </a:r>
             <a:endParaRPr lang="en-US" sz="2800" dirty="0"/>
           </a:p>
@@ -19498,11 +19564,11 @@
             </a:avLst>
           </a:prstGeom>
           <a:solidFill>
-            <a:srgbClr val="CCFBF1"/>
+            <a:srgbClr val="DDD6FE"/>
           </a:solidFill>
           <a:ln w="19050">
             <a:solidFill>
-              <a:srgbClr val="0D9488"/>
+              <a:srgbClr val="7C3AED"/>
             </a:solidFill>
             <a:prstDash val="solid"/>
           </a:ln>
@@ -19542,13 +19608,13 @@
             <a:r>
               <a:rPr lang="en-US" sz="1300" b="1" dirty="0">
                 <a:solidFill>
-                  <a:srgbClr val="0F766E"/>
+                  <a:srgbClr val="4C1D95"/>
                 </a:solidFill>
                 <a:latin typeface="Trebuchet MS" pitchFamily="34" charset="0"/>
                 <a:ea typeface="Trebuchet MS" pitchFamily="34" charset="-122"/>
                 <a:cs typeface="Trebuchet MS" pitchFamily="34" charset="-120"/>
               </a:rPr>
-              <a:t>clean</a:t>
+              <a:t>un</a:t>
             </a:r>
             <a:endParaRPr lang="en-US" sz="1300" dirty="0"/>
           </a:p>
@@ -19587,7 +19653,7 @@
                 <a:ea typeface="Calibri" pitchFamily="34" charset="-122"/>
                 <a:cs typeface="Calibri" pitchFamily="34" charset="-120"/>
               </a:rPr>
-              <a:t>free from dirt</a:t>
+              <a:t>not</a:t>
             </a:r>
             <a:endParaRPr lang="en-US" sz="850" dirty="0"/>
           </a:p>
@@ -19610,11 +19676,11 @@
             </a:avLst>
           </a:prstGeom>
           <a:solidFill>
-            <a:srgbClr val="FCE7F3"/>
+            <a:srgbClr val="CCFBF1"/>
           </a:solidFill>
           <a:ln w="19050">
             <a:solidFill>
-              <a:srgbClr val="DB2777"/>
+              <a:srgbClr val="0D9488"/>
             </a:solidFill>
             <a:prstDash val="solid"/>
           </a:ln>
@@ -19654,13 +19720,13 @@
             <a:r>
               <a:rPr lang="en-US" sz="1300" b="1" dirty="0">
                 <a:solidFill>
-                  <a:srgbClr val="9D174D"/>
+                  <a:srgbClr val="0F766E"/>
                 </a:solidFill>
                 <a:latin typeface="Trebuchet MS" pitchFamily="34" charset="0"/>
                 <a:ea typeface="Trebuchet MS" pitchFamily="34" charset="-122"/>
                 <a:cs typeface="Trebuchet MS" pitchFamily="34" charset="-120"/>
               </a:rPr>
-              <a:t>er</a:t>
+              <a:t>clean</a:t>
             </a:r>
             <a:endParaRPr lang="en-US" sz="1300" dirty="0"/>
           </a:p>
@@ -19699,7 +19765,7 @@
                 <a:ea typeface="Calibri" pitchFamily="34" charset="-122"/>
                 <a:cs typeface="Calibri" pitchFamily="34" charset="-120"/>
               </a:rPr>
-              <a:t>person or thing that does something</a:t>
+              <a:t>free from dirt</a:t>
             </a:r>
             <a:endParaRPr lang="en-US" sz="850" dirty="0"/>
           </a:p>
@@ -19858,7 +19924,7 @@
                 <a:ea typeface="Trebuchet MS" pitchFamily="34" charset="-122"/>
                 <a:cs typeface="Trebuchet MS" pitchFamily="34" charset="-120"/>
               </a:rPr>
-              <a:t>clean</a:t>
+              <a:t>un</a:t>
             </a:r>
             <a:endParaRPr lang="en-US" sz="1400" dirty="0"/>
           </a:p>
@@ -19963,7 +20029,7 @@
                 <a:ea typeface="Trebuchet MS" pitchFamily="34" charset="-122"/>
                 <a:cs typeface="Trebuchet MS" pitchFamily="34" charset="-120"/>
               </a:rPr>
-              <a:t>er</a:t>
+              <a:t>clean</a:t>
             </a:r>
             <a:endParaRPr lang="en-US" sz="1400" dirty="0"/>
           </a:p>
@@ -20387,7 +20453,7 @@
                 <a:ea typeface="Calibri" pitchFamily="34" charset="-122"/>
                 <a:cs typeface="Calibri" pitchFamily="34" charset="-120"/>
               </a:rPr>
-              <a:t>Word Labs  •  wordlabs.app  •  Root: 'clean' = free from dirt, pure</a:t>
+              <a:t>Word Labs  •  wordlabs.app  •  Root: 'clean' = free from dirt or impurity</a:t>
             </a:r>
             <a:endParaRPr lang="en-US" sz="800" dirty="0"/>
           </a:p>
@@ -20526,7 +20592,7 @@
                 <a:ea typeface="Trebuchet MS" pitchFamily="34" charset="-122"/>
                 <a:cs typeface="Trebuchet MS" pitchFamily="34" charset="-120"/>
               </a:rPr>
-              <a:t>cleaner</a:t>
+              <a:t>unclean</a:t>
             </a:r>
             <a:endParaRPr lang="en-US" sz="2800" dirty="0"/>
           </a:p>
@@ -20615,11 +20681,11 @@
             </a:avLst>
           </a:prstGeom>
           <a:solidFill>
-            <a:srgbClr val="CCFBF1"/>
+            <a:srgbClr val="DDD6FE"/>
           </a:solidFill>
           <a:ln w="19050">
             <a:solidFill>
-              <a:srgbClr val="0D9488"/>
+              <a:srgbClr val="7C3AED"/>
             </a:solidFill>
             <a:prstDash val="solid"/>
           </a:ln>
@@ -20659,13 +20725,13 @@
             <a:r>
               <a:rPr lang="en-US" sz="1300" b="1" dirty="0">
                 <a:solidFill>
-                  <a:srgbClr val="0F766E"/>
+                  <a:srgbClr val="4C1D95"/>
                 </a:solidFill>
                 <a:latin typeface="Trebuchet MS" pitchFamily="34" charset="0"/>
                 <a:ea typeface="Trebuchet MS" pitchFamily="34" charset="-122"/>
                 <a:cs typeface="Trebuchet MS" pitchFamily="34" charset="-120"/>
               </a:rPr>
-              <a:t>clean</a:t>
+              <a:t>un</a:t>
             </a:r>
             <a:endParaRPr lang="en-US" sz="1300" dirty="0"/>
           </a:p>
@@ -20704,7 +20770,7 @@
                 <a:ea typeface="Calibri" pitchFamily="34" charset="-122"/>
                 <a:cs typeface="Calibri" pitchFamily="34" charset="-120"/>
               </a:rPr>
-              <a:t>free from dirt</a:t>
+              <a:t>not</a:t>
             </a:r>
             <a:endParaRPr lang="en-US" sz="850" dirty="0"/>
           </a:p>
@@ -20727,11 +20793,11 @@
             </a:avLst>
           </a:prstGeom>
           <a:solidFill>
-            <a:srgbClr val="FCE7F3"/>
+            <a:srgbClr val="CCFBF1"/>
           </a:solidFill>
           <a:ln w="19050">
             <a:solidFill>
-              <a:srgbClr val="DB2777"/>
+              <a:srgbClr val="0D9488"/>
             </a:solidFill>
             <a:prstDash val="solid"/>
           </a:ln>
@@ -20771,13 +20837,13 @@
             <a:r>
               <a:rPr lang="en-US" sz="1300" b="1" dirty="0">
                 <a:solidFill>
-                  <a:srgbClr val="9D174D"/>
+                  <a:srgbClr val="0F766E"/>
                 </a:solidFill>
                 <a:latin typeface="Trebuchet MS" pitchFamily="34" charset="0"/>
                 <a:ea typeface="Trebuchet MS" pitchFamily="34" charset="-122"/>
                 <a:cs typeface="Trebuchet MS" pitchFamily="34" charset="-120"/>
               </a:rPr>
-              <a:t>er</a:t>
+              <a:t>clean</a:t>
             </a:r>
             <a:endParaRPr lang="en-US" sz="1300" dirty="0"/>
           </a:p>
@@ -20816,7 +20882,7 @@
                 <a:ea typeface="Calibri" pitchFamily="34" charset="-122"/>
                 <a:cs typeface="Calibri" pitchFamily="34" charset="-120"/>
               </a:rPr>
-              <a:t>person or thing that does something</a:t>
+              <a:t>free from dirt</a:t>
             </a:r>
             <a:endParaRPr lang="en-US" sz="850" dirty="0"/>
           </a:p>
@@ -20975,7 +21041,7 @@
                 <a:ea typeface="Trebuchet MS" pitchFamily="34" charset="-122"/>
                 <a:cs typeface="Trebuchet MS" pitchFamily="34" charset="-120"/>
               </a:rPr>
-              <a:t>clean</a:t>
+              <a:t>un</a:t>
             </a:r>
             <a:endParaRPr lang="en-US" sz="1400" dirty="0"/>
           </a:p>
@@ -21080,7 +21146,7 @@
                 <a:ea typeface="Trebuchet MS" pitchFamily="34" charset="-122"/>
                 <a:cs typeface="Trebuchet MS" pitchFamily="34" charset="-120"/>
               </a:rPr>
-              <a:t>er</a:t>
+              <a:t>clean</a:t>
             </a:r>
             <a:endParaRPr lang="en-US" sz="1400" dirty="0"/>
           </a:p>
@@ -21187,7 +21253,7 @@
         </p:nvSpPr>
         <p:spPr>
           <a:xfrm>
-            <a:off x="2670048" y="4169664"/>
+            <a:off x="2427732" y="4169664"/>
             <a:ext cx="685800" cy="475488"/>
           </a:xfrm>
           <a:prstGeom prst="rect">
@@ -21214,7 +21280,7 @@
         </p:nvSpPr>
         <p:spPr>
           <a:xfrm>
-            <a:off x="2670048" y="4169664"/>
+            <a:off x="2427732" y="4169664"/>
             <a:ext cx="685800" cy="475488"/>
           </a:xfrm>
           <a:prstGeom prst="rect">
@@ -21239,7 +21305,7 @@
                 <a:ea typeface="Trebuchet MS" pitchFamily="34" charset="-122"/>
                 <a:cs typeface="Trebuchet MS" pitchFamily="34" charset="-120"/>
               </a:rPr>
-              <a:t>cl</a:t>
+              <a:t>u</a:t>
             </a:r>
             <a:endParaRPr lang="en-US" sz="900" dirty="0"/>
           </a:p>
@@ -21253,7 +21319,7 @@
         </p:nvSpPr>
         <p:spPr>
           <a:xfrm>
-            <a:off x="4123944" y="4169664"/>
+            <a:off x="3639312" y="4169664"/>
             <a:ext cx="685800" cy="475488"/>
           </a:xfrm>
           <a:prstGeom prst="rect">
@@ -21280,7 +21346,7 @@
         </p:nvSpPr>
         <p:spPr>
           <a:xfrm>
-            <a:off x="4123944" y="4169664"/>
+            <a:off x="3639312" y="4169664"/>
             <a:ext cx="685800" cy="475488"/>
           </a:xfrm>
           <a:prstGeom prst="rect">
@@ -21305,7 +21371,7 @@
                 <a:ea typeface="Trebuchet MS" pitchFamily="34" charset="-122"/>
                 <a:cs typeface="Trebuchet MS" pitchFamily="34" charset="-120"/>
               </a:rPr>
-              <a:t>ea</a:t>
+              <a:t>n</a:t>
             </a:r>
             <a:endParaRPr lang="en-US" sz="900" dirty="0"/>
           </a:p>
@@ -21319,7 +21385,7 @@
         </p:nvSpPr>
         <p:spPr>
           <a:xfrm>
-            <a:off x="5577840" y="4169664"/>
+            <a:off x="4850892" y="4169664"/>
             <a:ext cx="685800" cy="475488"/>
           </a:xfrm>
           <a:prstGeom prst="rect">
@@ -21346,7 +21412,7 @@
         </p:nvSpPr>
         <p:spPr>
           <a:xfrm>
-            <a:off x="5577840" y="4169664"/>
+            <a:off x="4850892" y="4169664"/>
             <a:ext cx="685800" cy="475488"/>
           </a:xfrm>
           <a:prstGeom prst="rect">
@@ -21371,7 +21437,7 @@
                 <a:ea typeface="Trebuchet MS" pitchFamily="34" charset="-122"/>
                 <a:cs typeface="Trebuchet MS" pitchFamily="34" charset="-120"/>
               </a:rPr>
-              <a:t>n</a:t>
+              <a:t>cl</a:t>
             </a:r>
             <a:endParaRPr lang="en-US" sz="900" dirty="0"/>
           </a:p>
@@ -21385,7 +21451,7 @@
         </p:nvSpPr>
         <p:spPr>
           <a:xfrm>
-            <a:off x="7031736" y="4169664"/>
+            <a:off x="6062472" y="4169664"/>
             <a:ext cx="685800" cy="475488"/>
           </a:xfrm>
           <a:prstGeom prst="rect">
@@ -21412,7 +21478,7 @@
         </p:nvSpPr>
         <p:spPr>
           <a:xfrm>
-            <a:off x="7031736" y="4169664"/>
+            <a:off x="6062472" y="4169664"/>
             <a:ext cx="685800" cy="475488"/>
           </a:xfrm>
           <a:prstGeom prst="rect">
@@ -21437,7 +21503,73 @@
                 <a:ea typeface="Trebuchet MS" pitchFamily="34" charset="-122"/>
                 <a:cs typeface="Trebuchet MS" pitchFamily="34" charset="-120"/>
               </a:rPr>
-              <a:t>er</a:t>
+              <a:t>ea</a:t>
+            </a:r>
+            <a:endParaRPr lang="en-US" sz="900" dirty="0"/>
+          </a:p>
+        </p:txBody>
+      </p:sp>
+      <p:sp>
+        <p:nvSpPr>
+          <p:cNvPr id="41" name="Shape 39"/>
+          <p:cNvSpPr/>
+          <p:nvPr/>
+        </p:nvSpPr>
+        <p:spPr>
+          <a:xfrm>
+            <a:off x="7274052" y="4169664"/>
+            <a:ext cx="685800" cy="475488"/>
+          </a:xfrm>
+          <a:prstGeom prst="rect">
+            <a:avLst>
+              <a:gd name="adj" fmla="val 7692"/>
+            </a:avLst>
+          </a:prstGeom>
+          <a:solidFill>
+            <a:srgbClr val="FFFFFF"/>
+          </a:solidFill>
+          <a:ln w="12700">
+            <a:solidFill>
+              <a:srgbClr val="DB2777"/>
+            </a:solidFill>
+            <a:prstDash val="solid"/>
+          </a:ln>
+        </p:spPr>
+      </p:sp>
+      <p:sp>
+        <p:nvSpPr>
+          <p:cNvPr id="42" name="Text 40"/>
+          <p:cNvSpPr/>
+          <p:nvPr/>
+        </p:nvSpPr>
+        <p:spPr>
+          <a:xfrm>
+            <a:off x="7274052" y="4169664"/>
+            <a:ext cx="685800" cy="475488"/>
+          </a:xfrm>
+          <a:prstGeom prst="rect">
+            <a:avLst/>
+          </a:prstGeom>
+          <a:noFill/>
+          <a:ln/>
+        </p:spPr>
+        <p:txBody>
+          <a:bodyPr wrap="square" lIns="0" tIns="0" rIns="0" bIns="0" rtlCol="0" anchor="ctr"/>
+          <a:lstStyle/>
+          <a:p>
+            <a:pPr algn="ctr" indent="0" marL="0">
+              <a:buNone/>
+            </a:pPr>
+            <a:r>
+              <a:rPr lang="en-US" sz="900" b="1" dirty="0">
+                <a:solidFill>
+                  <a:srgbClr val="9D174D"/>
+                </a:solidFill>
+                <a:latin typeface="Trebuchet MS" pitchFamily="34" charset="0"/>
+                <a:ea typeface="Trebuchet MS" pitchFamily="34" charset="-122"/>
+                <a:cs typeface="Trebuchet MS" pitchFamily="34" charset="-120"/>
+              </a:rPr>
+              <a:t>n</a:t>
             </a:r>
             <a:endParaRPr lang="en-US" sz="900" dirty="0"/>
           </a:p>
@@ -21729,7 +21861,7 @@
                 <a:ea typeface="Calibri" pitchFamily="34" charset="-122"/>
                 <a:cs typeface="Calibri" pitchFamily="34" charset="-120"/>
               </a:rPr>
-              <a:t>Word Labs  •  wordlabs.app  •  Root: 'clean' = free from dirt, pure</a:t>
+              <a:t>Word Labs  •  wordlabs.app  •  Root: 'clean' = free from dirt or impurity</a:t>
             </a:r>
             <a:endParaRPr lang="en-US" sz="800" dirty="0"/>
           </a:p>
@@ -22556,7 +22688,7 @@
                 <a:ea typeface="Calibri" pitchFamily="34" charset="-122"/>
                 <a:cs typeface="Calibri" pitchFamily="34" charset="-120"/>
               </a:rPr>
-              <a:t>Word Labs  •  wordlabs.app  •  Root: 'clean' = free from dirt, pure</a:t>
+              <a:t>Word Labs  •  wordlabs.app  •  Root: 'clean' = free from dirt or impurity</a:t>
             </a:r>
             <a:endParaRPr lang="en-US" sz="800" dirty="0"/>
           </a:p>
@@ -22985,7 +23117,7 @@
                 <a:ea typeface="Calibri" pitchFamily="34" charset="-122"/>
                 <a:cs typeface="Calibri" pitchFamily="34" charset="-120"/>
               </a:rPr>
-              <a:t>in a particular way</a:t>
+              <a:t>in the manner of</a:t>
             </a:r>
             <a:endParaRPr lang="en-US" sz="850" dirty="0"/>
           </a:p>
@@ -23541,7 +23673,7 @@
                 <a:ea typeface="Calibri" pitchFamily="34" charset="-122"/>
                 <a:cs typeface="Calibri" pitchFamily="34" charset="-120"/>
               </a:rPr>
-              <a:t>Word Labs  •  wordlabs.app  •  Root: 'clean' = free from dirt, pure</a:t>
+              <a:t>Word Labs  •  wordlabs.app  •  Root: 'clean' = free from dirt or impurity</a:t>
             </a:r>
             <a:endParaRPr lang="en-US" sz="800" dirty="0"/>
           </a:p>
@@ -23614,7 +23746,7 @@
                 <a:ea typeface="Trebuchet MS" pitchFamily="34" charset="-122"/>
                 <a:cs typeface="Trebuchet MS" pitchFamily="34" charset="-120"/>
               </a:rPr>
-              <a:t>We are learning that the root 'clean' means 'free from dirt, pure'.</a:t>
+              <a:t>We are learning that the root 'clean' means 'free from dirt or impurity'.</a:t>
             </a:r>
             <a:endParaRPr lang="en-US" sz="2000" dirty="0"/>
           </a:p>
@@ -24260,7 +24392,7 @@
                 <a:ea typeface="Calibri" pitchFamily="34" charset="-122"/>
                 <a:cs typeface="Calibri" pitchFamily="34" charset="-120"/>
               </a:rPr>
-              <a:t>Word Labs  •  wordlabs.app  •  Root: 'clean' = free from dirt, pure</a:t>
+              <a:t>Word Labs  •  wordlabs.app  •  Root: 'clean' = free from dirt or impurity</a:t>
             </a:r>
             <a:endParaRPr lang="en-US" sz="800" dirty="0"/>
           </a:p>
@@ -24689,7 +24821,7 @@
                 <a:ea typeface="Calibri" pitchFamily="34" charset="-122"/>
                 <a:cs typeface="Calibri" pitchFamily="34" charset="-120"/>
               </a:rPr>
-              <a:t>in a particular way</a:t>
+              <a:t>in the manner of</a:t>
             </a:r>
             <a:endParaRPr lang="en-US" sz="850" dirty="0"/>
           </a:p>
@@ -25377,7 +25509,7 @@
                 <a:ea typeface="Calibri" pitchFamily="34" charset="-122"/>
                 <a:cs typeface="Calibri" pitchFamily="34" charset="-120"/>
               </a:rPr>
-              <a:t>Word Labs  •  wordlabs.app  •  Root: 'clean' = free from dirt, pure</a:t>
+              <a:t>Word Labs  •  wordlabs.app  •  Root: 'clean' = free from dirt or impurity</a:t>
             </a:r>
             <a:endParaRPr lang="en-US" sz="800" dirty="0"/>
           </a:p>
@@ -25806,7 +25938,7 @@
                 <a:ea typeface="Calibri" pitchFamily="34" charset="-122"/>
                 <a:cs typeface="Calibri" pitchFamily="34" charset="-120"/>
               </a:rPr>
-              <a:t>in a particular way</a:t>
+              <a:t>in the manner of</a:t>
             </a:r>
             <a:endParaRPr lang="en-US" sz="850" dirty="0"/>
           </a:p>
@@ -26785,7 +26917,7 @@
                 <a:ea typeface="Calibri" pitchFamily="34" charset="-122"/>
                 <a:cs typeface="Calibri" pitchFamily="34" charset="-120"/>
               </a:rPr>
-              <a:t>Word Labs  •  wordlabs.app  •  Root: 'clean' = free from dirt, pure</a:t>
+              <a:t>Word Labs  •  wordlabs.app  •  Root: 'clean' = free from dirt or impurity</a:t>
             </a:r>
             <a:endParaRPr lang="en-US" sz="800" dirty="0"/>
           </a:p>
@@ -26924,7 +27056,7 @@
                 <a:ea typeface="Trebuchet MS" pitchFamily="34" charset="-122"/>
                 <a:cs typeface="Trebuchet MS" pitchFamily="34" charset="-120"/>
               </a:rPr>
-              <a:t>uncleanliness</a:t>
+              <a:t>cleaning</a:t>
             </a:r>
             <a:endParaRPr lang="en-US" sz="2800" dirty="0"/>
           </a:p>
@@ -27612,7 +27744,7 @@
                 <a:ea typeface="Calibri" pitchFamily="34" charset="-122"/>
                 <a:cs typeface="Calibri" pitchFamily="34" charset="-120"/>
               </a:rPr>
-              <a:t>Word Labs  •  wordlabs.app  •  Root: 'clean' = free from dirt, pure</a:t>
+              <a:t>Word Labs  •  wordlabs.app  •  Root: 'clean' = free from dirt or impurity</a:t>
             </a:r>
             <a:endParaRPr lang="en-US" sz="800" dirty="0"/>
           </a:p>
@@ -27751,7 +27883,7 @@
                 <a:ea typeface="Trebuchet MS" pitchFamily="34" charset="-122"/>
                 <a:cs typeface="Trebuchet MS" pitchFamily="34" charset="-120"/>
               </a:rPr>
-              <a:t>uncleanliness</a:t>
+              <a:t>cleaning</a:t>
             </a:r>
             <a:endParaRPr lang="en-US" sz="2800" dirty="0"/>
           </a:p>
@@ -27831,8 +27963,8 @@
         </p:nvSpPr>
         <p:spPr>
           <a:xfrm>
-            <a:off x="1989734" y="2258568"/>
-            <a:ext cx="1581912" cy="292608"/>
+            <a:off x="2938272" y="2258568"/>
+            <a:ext cx="1828800" cy="292608"/>
           </a:xfrm>
           <a:prstGeom prst="rect">
             <a:avLst>
@@ -27840,11 +27972,11 @@
             </a:avLst>
           </a:prstGeom>
           <a:solidFill>
-            <a:srgbClr val="DDD6FE"/>
+            <a:srgbClr val="CCFBF1"/>
           </a:solidFill>
           <a:ln w="19050">
             <a:solidFill>
-              <a:srgbClr val="7C3AED"/>
+              <a:srgbClr val="0D9488"/>
             </a:solidFill>
             <a:prstDash val="solid"/>
           </a:ln>
@@ -27865,8 +27997,8 @@
         </p:nvSpPr>
         <p:spPr>
           <a:xfrm>
-            <a:off x="1989734" y="2258568"/>
-            <a:ext cx="1581912" cy="292608"/>
+            <a:off x="2938272" y="2258568"/>
+            <a:ext cx="1828800" cy="292608"/>
           </a:xfrm>
           <a:prstGeom prst="rect">
             <a:avLst/>
@@ -27884,13 +28016,13 @@
             <a:r>
               <a:rPr lang="en-US" sz="1300" b="1" dirty="0">
                 <a:solidFill>
-                  <a:srgbClr val="4C1D95"/>
+                  <a:srgbClr val="0F766E"/>
                 </a:solidFill>
                 <a:latin typeface="Trebuchet MS" pitchFamily="34" charset="0"/>
                 <a:ea typeface="Trebuchet MS" pitchFamily="34" charset="-122"/>
                 <a:cs typeface="Trebuchet MS" pitchFamily="34" charset="-120"/>
               </a:rPr>
-              <a:t>un</a:t>
+              <a:t>clean</a:t>
             </a:r>
             <a:endParaRPr lang="en-US" sz="1300" dirty="0"/>
           </a:p>
@@ -27904,8 +28036,8 @@
         </p:nvSpPr>
         <p:spPr>
           <a:xfrm>
-            <a:off x="1989734" y="2569464"/>
-            <a:ext cx="1581912" cy="201168"/>
+            <a:off x="2938272" y="2569464"/>
+            <a:ext cx="1828800" cy="201168"/>
           </a:xfrm>
           <a:prstGeom prst="rect">
             <a:avLst/>
@@ -27929,7 +28061,7 @@
                 <a:ea typeface="Calibri" pitchFamily="34" charset="-122"/>
                 <a:cs typeface="Calibri" pitchFamily="34" charset="-120"/>
               </a:rPr>
-              <a:t>not</a:t>
+              <a:t>free from dirt</a:t>
             </a:r>
             <a:endParaRPr lang="en-US" sz="850" dirty="0"/>
           </a:p>
@@ -27943,8 +28075,8 @@
         </p:nvSpPr>
         <p:spPr>
           <a:xfrm>
-            <a:off x="3659429" y="2258568"/>
-            <a:ext cx="1581912" cy="292608"/>
+            <a:off x="5803392" y="2258568"/>
+            <a:ext cx="1828800" cy="292608"/>
           </a:xfrm>
           <a:prstGeom prst="rect">
             <a:avLst>
@@ -27952,11 +28084,11 @@
             </a:avLst>
           </a:prstGeom>
           <a:solidFill>
-            <a:srgbClr val="CCFBF1"/>
+            <a:srgbClr val="FCE7F3"/>
           </a:solidFill>
           <a:ln w="19050">
             <a:solidFill>
-              <a:srgbClr val="0D9488"/>
+              <a:srgbClr val="DB2777"/>
             </a:solidFill>
             <a:prstDash val="solid"/>
           </a:ln>
@@ -27977,8 +28109,8 @@
         </p:nvSpPr>
         <p:spPr>
           <a:xfrm>
-            <a:off x="3659429" y="2258568"/>
-            <a:ext cx="1581912" cy="292608"/>
+            <a:off x="5803392" y="2258568"/>
+            <a:ext cx="1828800" cy="292608"/>
           </a:xfrm>
           <a:prstGeom prst="rect">
             <a:avLst/>
@@ -27996,13 +28128,13 @@
             <a:r>
               <a:rPr lang="en-US" sz="1300" b="1" dirty="0">
                 <a:solidFill>
-                  <a:srgbClr val="0F766E"/>
+                  <a:srgbClr val="9D174D"/>
                 </a:solidFill>
                 <a:latin typeface="Trebuchet MS" pitchFamily="34" charset="0"/>
                 <a:ea typeface="Trebuchet MS" pitchFamily="34" charset="-122"/>
                 <a:cs typeface="Trebuchet MS" pitchFamily="34" charset="-120"/>
               </a:rPr>
-              <a:t>clean</a:t>
+              <a:t>ing</a:t>
             </a:r>
             <a:endParaRPr lang="en-US" sz="1300" dirty="0"/>
           </a:p>
@@ -28016,8 +28148,8 @@
         </p:nvSpPr>
         <p:spPr>
           <a:xfrm>
-            <a:off x="3659429" y="2569464"/>
-            <a:ext cx="1581912" cy="201168"/>
+            <a:off x="5803392" y="2569464"/>
+            <a:ext cx="1828800" cy="201168"/>
           </a:xfrm>
           <a:prstGeom prst="rect">
             <a:avLst/>
@@ -28041,7 +28173,7 @@
                 <a:ea typeface="Calibri" pitchFamily="34" charset="-122"/>
                 <a:cs typeface="Calibri" pitchFamily="34" charset="-120"/>
               </a:rPr>
-              <a:t>free from dirt</a:t>
+              <a:t>action happening now</a:t>
             </a:r>
             <a:endParaRPr lang="en-US" sz="850" dirty="0"/>
           </a:p>
@@ -28055,30 +28187,23 @@
         </p:nvSpPr>
         <p:spPr>
           <a:xfrm>
-            <a:off x="5329123" y="2258568"/>
-            <a:ext cx="1581912" cy="292608"/>
+            <a:off x="365760" y="3273552"/>
+            <a:ext cx="1371600" cy="658368"/>
           </a:xfrm>
           <a:prstGeom prst="rect">
             <a:avLst>
-              <a:gd name="adj" fmla="val 25000"/>
+              <a:gd name="adj" fmla="val 8333"/>
             </a:avLst>
           </a:prstGeom>
           <a:solidFill>
-            <a:srgbClr val="FCE7F3"/>
-          </a:solidFill>
-          <a:ln w="19050">
-            <a:solidFill>
-              <a:srgbClr val="DB2777"/>
-            </a:solidFill>
-            <a:prstDash val="solid"/>
-          </a:ln>
-          <a:effectLst>
-            <a:outerShdw sx="100000" sy="100000" kx="0" ky="0" algn="bl" rotWithShape="0" blurRad="101600" dist="38100" dir="8100000">
-              <a:srgbClr val="000000">
-                <a:alpha val="12000"/>
-              </a:srgbClr>
-            </a:outerShdw>
-          </a:effectLst>
+            <a:srgbClr val="E2E8F0"/>
+          </a:solidFill>
+          <a:ln w="12700">
+            <a:solidFill>
+              <a:srgbClr val="E2E8F0"/>
+            </a:solidFill>
+            <a:prstDash val="solid"/>
+          </a:ln>
         </p:spPr>
       </p:sp>
       <p:sp>
@@ -28089,8 +28214,8 @@
         </p:nvSpPr>
         <p:spPr>
           <a:xfrm>
-            <a:off x="5329123" y="2258568"/>
-            <a:ext cx="1581912" cy="292608"/>
+            <a:off x="365760" y="3273552"/>
+            <a:ext cx="1371600" cy="658368"/>
           </a:xfrm>
           <a:prstGeom prst="rect">
             <a:avLst/>
@@ -28106,95 +28231,83 @@
               <a:buNone/>
             </a:pPr>
             <a:r>
-              <a:rPr lang="en-US" sz="1300" b="1" dirty="0">
-                <a:solidFill>
-                  <a:srgbClr val="9D174D"/>
+              <a:rPr lang="en-US" sz="1100" b="1" dirty="0">
+                <a:solidFill>
+                  <a:srgbClr val="475569"/>
                 </a:solidFill>
                 <a:latin typeface="Trebuchet MS" pitchFamily="34" charset="0"/>
                 <a:ea typeface="Trebuchet MS" pitchFamily="34" charset="-122"/>
                 <a:cs typeface="Trebuchet MS" pitchFamily="34" charset="-120"/>
               </a:rPr>
-              <a:t>li</a:t>
-            </a:r>
-            <a:endParaRPr lang="en-US" sz="1300" dirty="0"/>
-          </a:p>
-        </p:txBody>
-      </p:sp>
-      <p:sp>
-        <p:nvSpPr>
-          <p:cNvPr id="24" name="Text 22"/>
-          <p:cNvSpPr/>
-          <p:nvPr/>
-        </p:nvSpPr>
-        <p:spPr>
-          <a:xfrm>
-            <a:off x="5329123" y="2569464"/>
-            <a:ext cx="1581912" cy="201168"/>
-          </a:xfrm>
-          <a:prstGeom prst="rect">
-            <a:avLst/>
-          </a:prstGeom>
-          <a:noFill/>
-          <a:ln/>
-        </p:spPr>
-        <p:txBody>
-          <a:bodyPr wrap="square" lIns="0" tIns="0" rIns="0" bIns="0" rtlCol="0" anchor="t"/>
-          <a:lstStyle/>
-          <a:p>
-            <a:pPr algn="ctr" indent="0" marL="0">
-              <a:buNone/>
-            </a:pPr>
-            <a:r>
-              <a:rPr lang="en-US" sz="850" dirty="0">
-                <a:solidFill>
-                  <a:srgbClr val="475569"/>
+              <a:t>Syllables</a:t>
+            </a:r>
+            <a:endParaRPr lang="en-US" sz="1100" dirty="0"/>
+          </a:p>
+        </p:txBody>
+      </p:sp>
+      <p:sp>
+        <p:nvSpPr>
+          <p:cNvPr id="24" name="Shape 22"/>
+          <p:cNvSpPr/>
+          <p:nvPr/>
+        </p:nvSpPr>
+        <p:spPr>
+          <a:xfrm>
+            <a:off x="1874520" y="3273552"/>
+            <a:ext cx="6903720" cy="658368"/>
+          </a:xfrm>
+          <a:prstGeom prst="rect">
+            <a:avLst>
+              <a:gd name="adj" fmla="val 8333"/>
+            </a:avLst>
+          </a:prstGeom>
+          <a:solidFill>
+            <a:srgbClr val="F8FAFC"/>
+          </a:solidFill>
+          <a:ln w="12700">
+            <a:solidFill>
+              <a:srgbClr val="E2E8F0"/>
+            </a:solidFill>
+            <a:prstDash val="dash"/>
+          </a:ln>
+        </p:spPr>
+      </p:sp>
+      <p:sp>
+        <p:nvSpPr>
+          <p:cNvPr id="25" name="Text 23"/>
+          <p:cNvSpPr/>
+          <p:nvPr/>
+        </p:nvSpPr>
+        <p:spPr>
+          <a:xfrm>
+            <a:off x="1874520" y="3273552"/>
+            <a:ext cx="6903720" cy="658368"/>
+          </a:xfrm>
+          <a:prstGeom prst="rect">
+            <a:avLst/>
+          </a:prstGeom>
+          <a:noFill/>
+          <a:ln/>
+        </p:spPr>
+        <p:txBody>
+          <a:bodyPr wrap="square" rtlCol="0" anchor="ctr"/>
+          <a:lstStyle/>
+          <a:p>
+            <a:pPr algn="ctr" indent="0" marL="0">
+              <a:buNone/>
+            </a:pPr>
+            <a:r>
+              <a:rPr lang="en-US" sz="1100" i="1" dirty="0">
+                <a:solidFill>
+                  <a:srgbClr val="CBD5E1"/>
                 </a:solidFill>
                 <a:latin typeface="Calibri" pitchFamily="34" charset="0"/>
                 <a:ea typeface="Calibri" pitchFamily="34" charset="-122"/>
                 <a:cs typeface="Calibri" pitchFamily="34" charset="-120"/>
               </a:rPr>
-              <a:t>connecting form</a:t>
-            </a:r>
-            <a:endParaRPr lang="en-US" sz="850" dirty="0"/>
-          </a:p>
-        </p:txBody>
-      </p:sp>
-      <p:sp>
-        <p:nvSpPr>
-          <p:cNvPr id="25" name="Text 23"/>
-          <p:cNvSpPr/>
-          <p:nvPr/>
-        </p:nvSpPr>
-        <p:spPr>
-          <a:xfrm>
-            <a:off x="5329123" y="2752344"/>
-            <a:ext cx="1581912" cy="182880"/>
-          </a:xfrm>
-          <a:prstGeom prst="rect">
-            <a:avLst/>
-          </a:prstGeom>
-          <a:noFill/>
-          <a:ln/>
-        </p:spPr>
-        <p:txBody>
-          <a:bodyPr wrap="square" lIns="0" tIns="0" rIns="0" bIns="0" rtlCol="0" anchor="t"/>
-          <a:lstStyle/>
-          <a:p>
-            <a:pPr algn="ctr" indent="0" marL="0">
-              <a:buNone/>
-            </a:pPr>
-            <a:r>
-              <a:rPr lang="en-US" sz="700" i="1" dirty="0">
-                <a:solidFill>
-                  <a:srgbClr val="94A3B8"/>
-                </a:solidFill>
-                <a:latin typeface="Calibri" pitchFamily="34" charset="0"/>
-                <a:ea typeface="Calibri" pitchFamily="34" charset="-122"/>
-                <a:cs typeface="Calibri" pitchFamily="34" charset="-120"/>
-              </a:rPr>
-              <a:t>'y' changes to 'i' before suffix</a:t>
-            </a:r>
-            <a:endParaRPr lang="en-US" sz="700" dirty="0"/>
+              <a:t>Write here...</a:t>
+            </a:r>
+            <a:endParaRPr lang="en-US" sz="1100" dirty="0"/>
           </a:p>
         </p:txBody>
       </p:sp>
@@ -28206,30 +28319,23 @@
         </p:nvSpPr>
         <p:spPr>
           <a:xfrm>
-            <a:off x="6998818" y="2258568"/>
-            <a:ext cx="1581912" cy="292608"/>
+            <a:off x="365760" y="4096512"/>
+            <a:ext cx="1371600" cy="804672"/>
           </a:xfrm>
           <a:prstGeom prst="rect">
             <a:avLst>
-              <a:gd name="adj" fmla="val 25000"/>
+              <a:gd name="adj" fmla="val 6818"/>
             </a:avLst>
           </a:prstGeom>
           <a:solidFill>
-            <a:srgbClr val="FCE7F3"/>
-          </a:solidFill>
-          <a:ln w="19050">
-            <a:solidFill>
-              <a:srgbClr val="DB2777"/>
-            </a:solidFill>
-            <a:prstDash val="solid"/>
-          </a:ln>
-          <a:effectLst>
-            <a:outerShdw sx="100000" sy="100000" kx="0" ky="0" algn="bl" rotWithShape="0" blurRad="101600" dist="38100" dir="8100000">
-              <a:srgbClr val="000000">
-                <a:alpha val="12000"/>
-              </a:srgbClr>
-            </a:outerShdw>
-          </a:effectLst>
+            <a:srgbClr val="E2E8F0"/>
+          </a:solidFill>
+          <a:ln w="12700">
+            <a:solidFill>
+              <a:srgbClr val="E2E8F0"/>
+            </a:solidFill>
+            <a:prstDash val="solid"/>
+          </a:ln>
         </p:spPr>
       </p:sp>
       <p:sp>
@@ -28240,8 +28346,8 @@
         </p:nvSpPr>
         <p:spPr>
           <a:xfrm>
-            <a:off x="6998818" y="2258568"/>
-            <a:ext cx="1581912" cy="292608"/>
+            <a:off x="365760" y="4096512"/>
+            <a:ext cx="1371600" cy="804672"/>
           </a:xfrm>
           <a:prstGeom prst="rect">
             <a:avLst/>
@@ -28257,120 +28363,15 @@
               <a:buNone/>
             </a:pPr>
             <a:r>
-              <a:rPr lang="en-US" sz="1300" b="1" dirty="0">
-                <a:solidFill>
-                  <a:srgbClr val="9D174D"/>
+              <a:rPr lang="en-US" sz="1100" b="1" dirty="0">
+                <a:solidFill>
+                  <a:srgbClr val="475569"/>
                 </a:solidFill>
                 <a:latin typeface="Trebuchet MS" pitchFamily="34" charset="0"/>
                 <a:ea typeface="Trebuchet MS" pitchFamily="34" charset="-122"/>
                 <a:cs typeface="Trebuchet MS" pitchFamily="34" charset="-120"/>
               </a:rPr>
-              <a:t>ness</a:t>
-            </a:r>
-            <a:endParaRPr lang="en-US" sz="1300" dirty="0"/>
-          </a:p>
-        </p:txBody>
-      </p:sp>
-      <p:sp>
-        <p:nvSpPr>
-          <p:cNvPr id="28" name="Text 26"/>
-          <p:cNvSpPr/>
-          <p:nvPr/>
-        </p:nvSpPr>
-        <p:spPr>
-          <a:xfrm>
-            <a:off x="6998818" y="2569464"/>
-            <a:ext cx="1581912" cy="201168"/>
-          </a:xfrm>
-          <a:prstGeom prst="rect">
-            <a:avLst/>
-          </a:prstGeom>
-          <a:noFill/>
-          <a:ln/>
-        </p:spPr>
-        <p:txBody>
-          <a:bodyPr wrap="square" lIns="0" tIns="0" rIns="0" bIns="0" rtlCol="0" anchor="t"/>
-          <a:lstStyle/>
-          <a:p>
-            <a:pPr algn="ctr" indent="0" marL="0">
-              <a:buNone/>
-            </a:pPr>
-            <a:r>
-              <a:rPr lang="en-US" sz="850" dirty="0">
-                <a:solidFill>
-                  <a:srgbClr val="475569"/>
-                </a:solidFill>
-                <a:latin typeface="Calibri" pitchFamily="34" charset="0"/>
-                <a:ea typeface="Calibri" pitchFamily="34" charset="-122"/>
-                <a:cs typeface="Calibri" pitchFamily="34" charset="-120"/>
-              </a:rPr>
-              <a:t>state or quality of</a:t>
-            </a:r>
-            <a:endParaRPr lang="en-US" sz="850" dirty="0"/>
-          </a:p>
-        </p:txBody>
-      </p:sp>
-      <p:sp>
-        <p:nvSpPr>
-          <p:cNvPr id="29" name="Shape 27"/>
-          <p:cNvSpPr/>
-          <p:nvPr/>
-        </p:nvSpPr>
-        <p:spPr>
-          <a:xfrm>
-            <a:off x="365760" y="3273552"/>
-            <a:ext cx="1371600" cy="658368"/>
-          </a:xfrm>
-          <a:prstGeom prst="rect">
-            <a:avLst>
-              <a:gd name="adj" fmla="val 8333"/>
-            </a:avLst>
-          </a:prstGeom>
-          <a:solidFill>
-            <a:srgbClr val="E2E8F0"/>
-          </a:solidFill>
-          <a:ln w="12700">
-            <a:solidFill>
-              <a:srgbClr val="E2E8F0"/>
-            </a:solidFill>
-            <a:prstDash val="solid"/>
-          </a:ln>
-        </p:spPr>
-      </p:sp>
-      <p:sp>
-        <p:nvSpPr>
-          <p:cNvPr id="30" name="Text 28"/>
-          <p:cNvSpPr/>
-          <p:nvPr/>
-        </p:nvSpPr>
-        <p:spPr>
-          <a:xfrm>
-            <a:off x="365760" y="3273552"/>
-            <a:ext cx="1371600" cy="658368"/>
-          </a:xfrm>
-          <a:prstGeom prst="rect">
-            <a:avLst/>
-          </a:prstGeom>
-          <a:noFill/>
-          <a:ln/>
-        </p:spPr>
-        <p:txBody>
-          <a:bodyPr wrap="square" lIns="0" tIns="0" rIns="0" bIns="0" rtlCol="0" anchor="ctr"/>
-          <a:lstStyle/>
-          <a:p>
-            <a:pPr algn="ctr" indent="0" marL="0">
-              <a:buNone/>
-            </a:pPr>
-            <a:r>
-              <a:rPr lang="en-US" sz="1100" b="1" dirty="0">
-                <a:solidFill>
-                  <a:srgbClr val="475569"/>
-                </a:solidFill>
-                <a:latin typeface="Trebuchet MS" pitchFamily="34" charset="0"/>
-                <a:ea typeface="Trebuchet MS" pitchFamily="34" charset="-122"/>
-                <a:cs typeface="Trebuchet MS" pitchFamily="34" charset="-120"/>
-              </a:rPr>
-              <a:t>Syllables</a:t>
+              <a:t>Phonemes</a:t>
             </a:r>
             <a:endParaRPr lang="en-US" sz="1100" dirty="0"/>
           </a:p>
@@ -28378,80 +28379,14 @@
       </p:sp>
       <p:sp>
         <p:nvSpPr>
-          <p:cNvPr id="31" name="Shape 29"/>
-          <p:cNvSpPr/>
-          <p:nvPr/>
-        </p:nvSpPr>
-        <p:spPr>
-          <a:xfrm>
-            <a:off x="1874520" y="3273552"/>
-            <a:ext cx="6903720" cy="658368"/>
-          </a:xfrm>
-          <a:prstGeom prst="rect">
-            <a:avLst>
-              <a:gd name="adj" fmla="val 8333"/>
-            </a:avLst>
-          </a:prstGeom>
-          <a:solidFill>
-            <a:srgbClr val="F8FAFC"/>
-          </a:solidFill>
-          <a:ln w="12700">
-            <a:solidFill>
-              <a:srgbClr val="E2E8F0"/>
-            </a:solidFill>
-            <a:prstDash val="dash"/>
-          </a:ln>
-        </p:spPr>
-      </p:sp>
-      <p:sp>
-        <p:nvSpPr>
-          <p:cNvPr id="32" name="Text 30"/>
-          <p:cNvSpPr/>
-          <p:nvPr/>
-        </p:nvSpPr>
-        <p:spPr>
-          <a:xfrm>
-            <a:off x="1874520" y="3273552"/>
-            <a:ext cx="6903720" cy="658368"/>
-          </a:xfrm>
-          <a:prstGeom prst="rect">
-            <a:avLst/>
-          </a:prstGeom>
-          <a:noFill/>
-          <a:ln/>
-        </p:spPr>
-        <p:txBody>
-          <a:bodyPr wrap="square" rtlCol="0" anchor="ctr"/>
-          <a:lstStyle/>
-          <a:p>
-            <a:pPr algn="ctr" indent="0" marL="0">
-              <a:buNone/>
-            </a:pPr>
-            <a:r>
-              <a:rPr lang="en-US" sz="1100" i="1" dirty="0">
-                <a:solidFill>
-                  <a:srgbClr val="CBD5E1"/>
-                </a:solidFill>
-                <a:latin typeface="Calibri" pitchFamily="34" charset="0"/>
-                <a:ea typeface="Calibri" pitchFamily="34" charset="-122"/>
-                <a:cs typeface="Calibri" pitchFamily="34" charset="-120"/>
-              </a:rPr>
-              <a:t>Write here...</a:t>
-            </a:r>
-            <a:endParaRPr lang="en-US" sz="1100" dirty="0"/>
-          </a:p>
-        </p:txBody>
-      </p:sp>
-      <p:sp>
-        <p:nvSpPr>
-          <p:cNvPr id="33" name="Shape 31"/>
-          <p:cNvSpPr/>
-          <p:nvPr/>
-        </p:nvSpPr>
-        <p:spPr>
-          <a:xfrm>
-            <a:off x="365760" y="4096512"/>
-            <a:ext cx="1371600" cy="804672"/>
+          <p:cNvPr id="28" name="Shape 26"/>
+          <p:cNvSpPr/>
+          <p:nvPr/>
+        </p:nvSpPr>
+        <p:spPr>
+          <a:xfrm>
+            <a:off x="1874520" y="4096512"/>
+            <a:ext cx="6903720" cy="804672"/>
           </a:xfrm>
           <a:prstGeom prst="rect">
             <a:avLst>
@@ -28459,85 +28394,19 @@
             </a:avLst>
           </a:prstGeom>
           <a:solidFill>
-            <a:srgbClr val="E2E8F0"/>
+            <a:srgbClr val="F8FAFC"/>
           </a:solidFill>
           <a:ln w="12700">
             <a:solidFill>
               <a:srgbClr val="E2E8F0"/>
             </a:solidFill>
-            <a:prstDash val="solid"/>
-          </a:ln>
-        </p:spPr>
-      </p:sp>
-      <p:sp>
-        <p:nvSpPr>
-          <p:cNvPr id="34" name="Text 32"/>
-          <p:cNvSpPr/>
-          <p:nvPr/>
-        </p:nvSpPr>
-        <p:spPr>
-          <a:xfrm>
-            <a:off x="365760" y="4096512"/>
-            <a:ext cx="1371600" cy="804672"/>
-          </a:xfrm>
-          <a:prstGeom prst="rect">
-            <a:avLst/>
-          </a:prstGeom>
-          <a:noFill/>
-          <a:ln/>
-        </p:spPr>
-        <p:txBody>
-          <a:bodyPr wrap="square" lIns="0" tIns="0" rIns="0" bIns="0" rtlCol="0" anchor="ctr"/>
-          <a:lstStyle/>
-          <a:p>
-            <a:pPr algn="ctr" indent="0" marL="0">
-              <a:buNone/>
-            </a:pPr>
-            <a:r>
-              <a:rPr lang="en-US" sz="1100" b="1" dirty="0">
-                <a:solidFill>
-                  <a:srgbClr val="475569"/>
-                </a:solidFill>
-                <a:latin typeface="Trebuchet MS" pitchFamily="34" charset="0"/>
-                <a:ea typeface="Trebuchet MS" pitchFamily="34" charset="-122"/>
-                <a:cs typeface="Trebuchet MS" pitchFamily="34" charset="-120"/>
-              </a:rPr>
-              <a:t>Phonemes</a:t>
-            </a:r>
-            <a:endParaRPr lang="en-US" sz="1100" dirty="0"/>
-          </a:p>
-        </p:txBody>
-      </p:sp>
-      <p:sp>
-        <p:nvSpPr>
-          <p:cNvPr id="35" name="Shape 33"/>
-          <p:cNvSpPr/>
-          <p:nvPr/>
-        </p:nvSpPr>
-        <p:spPr>
-          <a:xfrm>
-            <a:off x="1874520" y="4096512"/>
-            <a:ext cx="6903720" cy="804672"/>
-          </a:xfrm>
-          <a:prstGeom prst="rect">
-            <a:avLst>
-              <a:gd name="adj" fmla="val 6818"/>
-            </a:avLst>
-          </a:prstGeom>
-          <a:solidFill>
-            <a:srgbClr val="F8FAFC"/>
-          </a:solidFill>
-          <a:ln w="12700">
-            <a:solidFill>
-              <a:srgbClr val="E2E8F0"/>
-            </a:solidFill>
             <a:prstDash val="dash"/>
           </a:ln>
         </p:spPr>
       </p:sp>
       <p:sp>
         <p:nvSpPr>
-          <p:cNvPr id="36" name="Text 34"/>
+          <p:cNvPr id="29" name="Text 27"/>
           <p:cNvSpPr/>
           <p:nvPr/>
         </p:nvSpPr>
@@ -28860,7 +28729,7 @@
                 <a:ea typeface="Calibri" pitchFamily="34" charset="-122"/>
                 <a:cs typeface="Calibri" pitchFamily="34" charset="-120"/>
               </a:rPr>
-              <a:t>Word Labs  •  wordlabs.app  •  Root: 'clean' = free from dirt, pure</a:t>
+              <a:t>Word Labs  •  wordlabs.app  •  Root: 'clean' = free from dirt or impurity</a:t>
             </a:r>
             <a:endParaRPr lang="en-US" sz="800" dirty="0"/>
           </a:p>
@@ -28999,7 +28868,7 @@
                 <a:ea typeface="Trebuchet MS" pitchFamily="34" charset="-122"/>
                 <a:cs typeface="Trebuchet MS" pitchFamily="34" charset="-120"/>
               </a:rPr>
-              <a:t>uncleanliness</a:t>
+              <a:t>cleaning</a:t>
             </a:r>
             <a:endParaRPr lang="en-US" sz="2800" dirty="0"/>
           </a:p>
@@ -29079,8 +28948,8 @@
         </p:nvSpPr>
         <p:spPr>
           <a:xfrm>
-            <a:off x="1989734" y="2258568"/>
-            <a:ext cx="1581912" cy="292608"/>
+            <a:off x="2938272" y="2258568"/>
+            <a:ext cx="1828800" cy="292608"/>
           </a:xfrm>
           <a:prstGeom prst="rect">
             <a:avLst>
@@ -29088,11 +28957,11 @@
             </a:avLst>
           </a:prstGeom>
           <a:solidFill>
-            <a:srgbClr val="DDD6FE"/>
+            <a:srgbClr val="CCFBF1"/>
           </a:solidFill>
           <a:ln w="19050">
             <a:solidFill>
-              <a:srgbClr val="7C3AED"/>
+              <a:srgbClr val="0D9488"/>
             </a:solidFill>
             <a:prstDash val="solid"/>
           </a:ln>
@@ -29113,8 +28982,8 @@
         </p:nvSpPr>
         <p:spPr>
           <a:xfrm>
-            <a:off x="1989734" y="2258568"/>
-            <a:ext cx="1581912" cy="292608"/>
+            <a:off x="2938272" y="2258568"/>
+            <a:ext cx="1828800" cy="292608"/>
           </a:xfrm>
           <a:prstGeom prst="rect">
             <a:avLst/>
@@ -29132,13 +29001,13 @@
             <a:r>
               <a:rPr lang="en-US" sz="1300" b="1" dirty="0">
                 <a:solidFill>
-                  <a:srgbClr val="4C1D95"/>
+                  <a:srgbClr val="0F766E"/>
                 </a:solidFill>
                 <a:latin typeface="Trebuchet MS" pitchFamily="34" charset="0"/>
                 <a:ea typeface="Trebuchet MS" pitchFamily="34" charset="-122"/>
                 <a:cs typeface="Trebuchet MS" pitchFamily="34" charset="-120"/>
               </a:rPr>
-              <a:t>un</a:t>
+              <a:t>clean</a:t>
             </a:r>
             <a:endParaRPr lang="en-US" sz="1300" dirty="0"/>
           </a:p>
@@ -29152,8 +29021,8 @@
         </p:nvSpPr>
         <p:spPr>
           <a:xfrm>
-            <a:off x="1989734" y="2569464"/>
-            <a:ext cx="1581912" cy="201168"/>
+            <a:off x="2938272" y="2569464"/>
+            <a:ext cx="1828800" cy="201168"/>
           </a:xfrm>
           <a:prstGeom prst="rect">
             <a:avLst/>
@@ -29177,7 +29046,7 @@
                 <a:ea typeface="Calibri" pitchFamily="34" charset="-122"/>
                 <a:cs typeface="Calibri" pitchFamily="34" charset="-120"/>
               </a:rPr>
-              <a:t>not</a:t>
+              <a:t>free from dirt</a:t>
             </a:r>
             <a:endParaRPr lang="en-US" sz="850" dirty="0"/>
           </a:p>
@@ -29191,8 +29060,8 @@
         </p:nvSpPr>
         <p:spPr>
           <a:xfrm>
-            <a:off x="3659429" y="2258568"/>
-            <a:ext cx="1581912" cy="292608"/>
+            <a:off x="5803392" y="2258568"/>
+            <a:ext cx="1828800" cy="292608"/>
           </a:xfrm>
           <a:prstGeom prst="rect">
             <a:avLst>
@@ -29200,11 +29069,11 @@
             </a:avLst>
           </a:prstGeom>
           <a:solidFill>
-            <a:srgbClr val="CCFBF1"/>
+            <a:srgbClr val="FCE7F3"/>
           </a:solidFill>
           <a:ln w="19050">
             <a:solidFill>
-              <a:srgbClr val="0D9488"/>
+              <a:srgbClr val="DB2777"/>
             </a:solidFill>
             <a:prstDash val="solid"/>
           </a:ln>
@@ -29225,8 +29094,8 @@
         </p:nvSpPr>
         <p:spPr>
           <a:xfrm>
-            <a:off x="3659429" y="2258568"/>
-            <a:ext cx="1581912" cy="292608"/>
+            <a:off x="5803392" y="2258568"/>
+            <a:ext cx="1828800" cy="292608"/>
           </a:xfrm>
           <a:prstGeom prst="rect">
             <a:avLst/>
@@ -29244,13 +29113,13 @@
             <a:r>
               <a:rPr lang="en-US" sz="1300" b="1" dirty="0">
                 <a:solidFill>
-                  <a:srgbClr val="0F766E"/>
+                  <a:srgbClr val="9D174D"/>
                 </a:solidFill>
                 <a:latin typeface="Trebuchet MS" pitchFamily="34" charset="0"/>
                 <a:ea typeface="Trebuchet MS" pitchFamily="34" charset="-122"/>
                 <a:cs typeface="Trebuchet MS" pitchFamily="34" charset="-120"/>
               </a:rPr>
-              <a:t>clean</a:t>
+              <a:t>ing</a:t>
             </a:r>
             <a:endParaRPr lang="en-US" sz="1300" dirty="0"/>
           </a:p>
@@ -29264,8 +29133,8 @@
         </p:nvSpPr>
         <p:spPr>
           <a:xfrm>
-            <a:off x="3659429" y="2569464"/>
-            <a:ext cx="1581912" cy="201168"/>
+            <a:off x="5803392" y="2569464"/>
+            <a:ext cx="1828800" cy="201168"/>
           </a:xfrm>
           <a:prstGeom prst="rect">
             <a:avLst/>
@@ -29289,7 +29158,7 @@
                 <a:ea typeface="Calibri" pitchFamily="34" charset="-122"/>
                 <a:cs typeface="Calibri" pitchFamily="34" charset="-120"/>
               </a:rPr>
-              <a:t>free from dirt</a:t>
+              <a:t>action happening now</a:t>
             </a:r>
             <a:endParaRPr lang="en-US" sz="850" dirty="0"/>
           </a:p>
@@ -29303,30 +29172,23 @@
         </p:nvSpPr>
         <p:spPr>
           <a:xfrm>
-            <a:off x="5329123" y="2258568"/>
-            <a:ext cx="1581912" cy="292608"/>
+            <a:off x="365760" y="3273552"/>
+            <a:ext cx="1371600" cy="658368"/>
           </a:xfrm>
           <a:prstGeom prst="rect">
             <a:avLst>
-              <a:gd name="adj" fmla="val 25000"/>
+              <a:gd name="adj" fmla="val 8333"/>
             </a:avLst>
           </a:prstGeom>
           <a:solidFill>
-            <a:srgbClr val="FCE7F3"/>
-          </a:solidFill>
-          <a:ln w="19050">
-            <a:solidFill>
-              <a:srgbClr val="DB2777"/>
-            </a:solidFill>
-            <a:prstDash val="solid"/>
-          </a:ln>
-          <a:effectLst>
-            <a:outerShdw sx="100000" sy="100000" kx="0" ky="0" algn="bl" rotWithShape="0" blurRad="101600" dist="38100" dir="8100000">
-              <a:srgbClr val="000000">
-                <a:alpha val="12000"/>
-              </a:srgbClr>
-            </a:outerShdw>
-          </a:effectLst>
+            <a:srgbClr val="E2E8F0"/>
+          </a:solidFill>
+          <a:ln w="12700">
+            <a:solidFill>
+              <a:srgbClr val="E2E8F0"/>
+            </a:solidFill>
+            <a:prstDash val="solid"/>
+          </a:ln>
         </p:spPr>
       </p:sp>
       <p:sp>
@@ -29337,8 +29199,8 @@
         </p:nvSpPr>
         <p:spPr>
           <a:xfrm>
-            <a:off x="5329123" y="2258568"/>
-            <a:ext cx="1581912" cy="292608"/>
+            <a:off x="365760" y="3273552"/>
+            <a:ext cx="1371600" cy="658368"/>
           </a:xfrm>
           <a:prstGeom prst="rect">
             <a:avLst/>
@@ -29354,142 +29216,84 @@
               <a:buNone/>
             </a:pPr>
             <a:r>
-              <a:rPr lang="en-US" sz="1300" b="1" dirty="0">
-                <a:solidFill>
-                  <a:srgbClr val="9D174D"/>
+              <a:rPr lang="en-US" sz="1100" b="1" dirty="0">
+                <a:solidFill>
+                  <a:srgbClr val="475569"/>
                 </a:solidFill>
                 <a:latin typeface="Trebuchet MS" pitchFamily="34" charset="0"/>
                 <a:ea typeface="Trebuchet MS" pitchFamily="34" charset="-122"/>
                 <a:cs typeface="Trebuchet MS" pitchFamily="34" charset="-120"/>
               </a:rPr>
-              <a:t>li</a:t>
-            </a:r>
-            <a:endParaRPr lang="en-US" sz="1300" dirty="0"/>
-          </a:p>
-        </p:txBody>
-      </p:sp>
-      <p:sp>
-        <p:nvSpPr>
-          <p:cNvPr id="24" name="Text 22"/>
-          <p:cNvSpPr/>
-          <p:nvPr/>
-        </p:nvSpPr>
-        <p:spPr>
-          <a:xfrm>
-            <a:off x="5329123" y="2569464"/>
-            <a:ext cx="1581912" cy="201168"/>
-          </a:xfrm>
-          <a:prstGeom prst="rect">
-            <a:avLst/>
-          </a:prstGeom>
-          <a:noFill/>
-          <a:ln/>
-        </p:spPr>
-        <p:txBody>
-          <a:bodyPr wrap="square" lIns="0" tIns="0" rIns="0" bIns="0" rtlCol="0" anchor="t"/>
-          <a:lstStyle/>
-          <a:p>
-            <a:pPr algn="ctr" indent="0" marL="0">
-              <a:buNone/>
-            </a:pPr>
-            <a:r>
-              <a:rPr lang="en-US" sz="850" dirty="0">
-                <a:solidFill>
-                  <a:srgbClr val="475569"/>
-                </a:solidFill>
-                <a:latin typeface="Calibri" pitchFamily="34" charset="0"/>
-                <a:ea typeface="Calibri" pitchFamily="34" charset="-122"/>
-                <a:cs typeface="Calibri" pitchFamily="34" charset="-120"/>
-              </a:rPr>
-              <a:t>connecting form</a:t>
-            </a:r>
-            <a:endParaRPr lang="en-US" sz="850" dirty="0"/>
-          </a:p>
-        </p:txBody>
-      </p:sp>
-      <p:sp>
-        <p:nvSpPr>
-          <p:cNvPr id="25" name="Text 23"/>
-          <p:cNvSpPr/>
-          <p:nvPr/>
-        </p:nvSpPr>
-        <p:spPr>
-          <a:xfrm>
-            <a:off x="5329123" y="2752344"/>
-            <a:ext cx="1581912" cy="182880"/>
-          </a:xfrm>
-          <a:prstGeom prst="rect">
-            <a:avLst/>
-          </a:prstGeom>
-          <a:noFill/>
-          <a:ln/>
-        </p:spPr>
-        <p:txBody>
-          <a:bodyPr wrap="square" lIns="0" tIns="0" rIns="0" bIns="0" rtlCol="0" anchor="t"/>
-          <a:lstStyle/>
-          <a:p>
-            <a:pPr algn="ctr" indent="0" marL="0">
-              <a:buNone/>
-            </a:pPr>
-            <a:r>
-              <a:rPr lang="en-US" sz="700" i="1" dirty="0">
-                <a:solidFill>
-                  <a:srgbClr val="94A3B8"/>
-                </a:solidFill>
-                <a:latin typeface="Calibri" pitchFamily="34" charset="0"/>
-                <a:ea typeface="Calibri" pitchFamily="34" charset="-122"/>
-                <a:cs typeface="Calibri" pitchFamily="34" charset="-120"/>
-              </a:rPr>
-              <a:t>'y' changes to 'i' before suffix</a:t>
-            </a:r>
-            <a:endParaRPr lang="en-US" sz="700" dirty="0"/>
-          </a:p>
-        </p:txBody>
-      </p:sp>
-      <p:sp>
-        <p:nvSpPr>
-          <p:cNvPr id="26" name="Shape 24"/>
-          <p:cNvSpPr/>
-          <p:nvPr/>
-        </p:nvSpPr>
-        <p:spPr>
-          <a:xfrm>
-            <a:off x="6998818" y="2258568"/>
-            <a:ext cx="1581912" cy="292608"/>
+              <a:t>Syllables</a:t>
+            </a:r>
+            <a:endParaRPr lang="en-US" sz="1100" dirty="0"/>
+          </a:p>
+        </p:txBody>
+      </p:sp>
+      <p:sp>
+        <p:nvSpPr>
+          <p:cNvPr id="24" name="Shape 22"/>
+          <p:cNvSpPr/>
+          <p:nvPr/>
+        </p:nvSpPr>
+        <p:spPr>
+          <a:xfrm>
+            <a:off x="1874520" y="3273552"/>
+            <a:ext cx="6903720" cy="658368"/>
           </a:xfrm>
           <a:prstGeom prst="rect">
             <a:avLst>
-              <a:gd name="adj" fmla="val 25000"/>
+              <a:gd name="adj" fmla="val 8333"/>
             </a:avLst>
           </a:prstGeom>
           <a:solidFill>
-            <a:srgbClr val="FCE7F3"/>
-          </a:solidFill>
-          <a:ln w="19050">
-            <a:solidFill>
-              <a:srgbClr val="DB2777"/>
-            </a:solidFill>
-            <a:prstDash val="solid"/>
-          </a:ln>
-          <a:effectLst>
-            <a:outerShdw sx="100000" sy="100000" kx="0" ky="0" algn="bl" rotWithShape="0" blurRad="101600" dist="38100" dir="8100000">
-              <a:srgbClr val="000000">
-                <a:alpha val="12000"/>
-              </a:srgbClr>
-            </a:outerShdw>
-          </a:effectLst>
-        </p:spPr>
-      </p:sp>
-      <p:sp>
-        <p:nvSpPr>
-          <p:cNvPr id="27" name="Text 25"/>
-          <p:cNvSpPr/>
-          <p:nvPr/>
-        </p:nvSpPr>
-        <p:spPr>
-          <a:xfrm>
-            <a:off x="6998818" y="2258568"/>
-            <a:ext cx="1581912" cy="292608"/>
+            <a:srgbClr val="CCFBF1"/>
+          </a:solidFill>
+          <a:ln w="12700">
+            <a:solidFill>
+              <a:srgbClr val="0D9488"/>
+            </a:solidFill>
+            <a:prstDash val="solid"/>
+          </a:ln>
+        </p:spPr>
+      </p:sp>
+      <p:sp>
+        <p:nvSpPr>
+          <p:cNvPr id="25" name="Shape 23"/>
+          <p:cNvSpPr/>
+          <p:nvPr/>
+        </p:nvSpPr>
+        <p:spPr>
+          <a:xfrm>
+            <a:off x="2999232" y="3364992"/>
+            <a:ext cx="1645920" cy="475488"/>
+          </a:xfrm>
+          <a:prstGeom prst="rect">
+            <a:avLst>
+              <a:gd name="adj" fmla="val 9615"/>
+            </a:avLst>
+          </a:prstGeom>
+          <a:solidFill>
+            <a:srgbClr val="FFFFFF"/>
+          </a:solidFill>
+          <a:ln w="12700">
+            <a:solidFill>
+              <a:srgbClr val="0D9488"/>
+            </a:solidFill>
+            <a:prstDash val="solid"/>
+          </a:ln>
+        </p:spPr>
+      </p:sp>
+      <p:sp>
+        <p:nvSpPr>
+          <p:cNvPr id="26" name="Text 24"/>
+          <p:cNvSpPr/>
+          <p:nvPr/>
+        </p:nvSpPr>
+        <p:spPr>
+          <a:xfrm>
+            <a:off x="2999232" y="3364992"/>
+            <a:ext cx="1645920" cy="475488"/>
           </a:xfrm>
           <a:prstGeom prst="rect">
             <a:avLst/>
@@ -29505,96 +29309,30 @@
               <a:buNone/>
             </a:pPr>
             <a:r>
-              <a:rPr lang="en-US" sz="1300" b="1" dirty="0">
-                <a:solidFill>
-                  <a:srgbClr val="9D174D"/>
+              <a:rPr lang="en-US" sz="1400" b="1" dirty="0">
+                <a:solidFill>
+                  <a:srgbClr val="0D9488"/>
                 </a:solidFill>
                 <a:latin typeface="Trebuchet MS" pitchFamily="34" charset="0"/>
                 <a:ea typeface="Trebuchet MS" pitchFamily="34" charset="-122"/>
                 <a:cs typeface="Trebuchet MS" pitchFamily="34" charset="-120"/>
               </a:rPr>
-              <a:t>ness</a:t>
-            </a:r>
-            <a:endParaRPr lang="en-US" sz="1300" dirty="0"/>
-          </a:p>
-        </p:txBody>
-      </p:sp>
-      <p:sp>
-        <p:nvSpPr>
-          <p:cNvPr id="28" name="Text 26"/>
-          <p:cNvSpPr/>
-          <p:nvPr/>
-        </p:nvSpPr>
-        <p:spPr>
-          <a:xfrm>
-            <a:off x="6998818" y="2569464"/>
-            <a:ext cx="1581912" cy="201168"/>
-          </a:xfrm>
-          <a:prstGeom prst="rect">
-            <a:avLst/>
-          </a:prstGeom>
-          <a:noFill/>
-          <a:ln/>
-        </p:spPr>
-        <p:txBody>
-          <a:bodyPr wrap="square" lIns="0" tIns="0" rIns="0" bIns="0" rtlCol="0" anchor="t"/>
-          <a:lstStyle/>
-          <a:p>
-            <a:pPr algn="ctr" indent="0" marL="0">
-              <a:buNone/>
-            </a:pPr>
-            <a:r>
-              <a:rPr lang="en-US" sz="850" dirty="0">
-                <a:solidFill>
-                  <a:srgbClr val="475569"/>
-                </a:solidFill>
-                <a:latin typeface="Calibri" pitchFamily="34" charset="0"/>
-                <a:ea typeface="Calibri" pitchFamily="34" charset="-122"/>
-                <a:cs typeface="Calibri" pitchFamily="34" charset="-120"/>
-              </a:rPr>
-              <a:t>state or quality of</a:t>
-            </a:r>
-            <a:endParaRPr lang="en-US" sz="850" dirty="0"/>
-          </a:p>
-        </p:txBody>
-      </p:sp>
-      <p:sp>
-        <p:nvSpPr>
-          <p:cNvPr id="29" name="Shape 27"/>
-          <p:cNvSpPr/>
-          <p:nvPr/>
-        </p:nvSpPr>
-        <p:spPr>
-          <a:xfrm>
-            <a:off x="365760" y="3273552"/>
-            <a:ext cx="1371600" cy="658368"/>
-          </a:xfrm>
-          <a:prstGeom prst="rect">
-            <a:avLst>
-              <a:gd name="adj" fmla="val 8333"/>
-            </a:avLst>
-          </a:prstGeom>
-          <a:solidFill>
-            <a:srgbClr val="E2E8F0"/>
-          </a:solidFill>
-          <a:ln w="12700">
-            <a:solidFill>
-              <a:srgbClr val="E2E8F0"/>
-            </a:solidFill>
-            <a:prstDash val="solid"/>
-          </a:ln>
-        </p:spPr>
-      </p:sp>
-      <p:sp>
-        <p:nvSpPr>
-          <p:cNvPr id="30" name="Text 28"/>
-          <p:cNvSpPr/>
-          <p:nvPr/>
-        </p:nvSpPr>
-        <p:spPr>
-          <a:xfrm>
-            <a:off x="365760" y="3273552"/>
-            <a:ext cx="1371600" cy="658368"/>
+              <a:t>clean</a:t>
+            </a:r>
+            <a:endParaRPr lang="en-US" sz="1400" dirty="0"/>
+          </a:p>
+        </p:txBody>
+      </p:sp>
+      <p:sp>
+        <p:nvSpPr>
+          <p:cNvPr id="27" name="Text 25"/>
+          <p:cNvSpPr/>
+          <p:nvPr/>
+        </p:nvSpPr>
+        <p:spPr>
+          <a:xfrm>
+            <a:off x="4645152" y="3364992"/>
+            <a:ext cx="1097280" cy="475488"/>
           </a:xfrm>
           <a:prstGeom prst="rect">
             <a:avLst/>
@@ -29610,57 +29348,30 @@
               <a:buNone/>
             </a:pPr>
             <a:r>
-              <a:rPr lang="en-US" sz="1100" b="1" dirty="0">
-                <a:solidFill>
-                  <a:srgbClr val="475569"/>
+              <a:rPr lang="en-US" sz="1600" b="1" dirty="0">
+                <a:solidFill>
+                  <a:srgbClr val="0D9488"/>
                 </a:solidFill>
                 <a:latin typeface="Trebuchet MS" pitchFamily="34" charset="0"/>
                 <a:ea typeface="Trebuchet MS" pitchFamily="34" charset="-122"/>
                 <a:cs typeface="Trebuchet MS" pitchFamily="34" charset="-120"/>
               </a:rPr>
-              <a:t>Syllables</a:t>
-            </a:r>
-            <a:endParaRPr lang="en-US" sz="1100" dirty="0"/>
-          </a:p>
-        </p:txBody>
-      </p:sp>
-      <p:sp>
-        <p:nvSpPr>
-          <p:cNvPr id="31" name="Shape 29"/>
-          <p:cNvSpPr/>
-          <p:nvPr/>
-        </p:nvSpPr>
-        <p:spPr>
-          <a:xfrm>
-            <a:off x="1874520" y="3273552"/>
-            <a:ext cx="6903720" cy="658368"/>
-          </a:xfrm>
-          <a:prstGeom prst="rect">
-            <a:avLst>
-              <a:gd name="adj" fmla="val 8333"/>
-            </a:avLst>
-          </a:prstGeom>
-          <a:solidFill>
-            <a:srgbClr val="CCFBF1"/>
-          </a:solidFill>
-          <a:ln w="12700">
-            <a:solidFill>
-              <a:srgbClr val="0D9488"/>
-            </a:solidFill>
-            <a:prstDash val="solid"/>
-          </a:ln>
-        </p:spPr>
-      </p:sp>
-      <p:sp>
-        <p:nvSpPr>
-          <p:cNvPr id="32" name="Shape 30"/>
-          <p:cNvSpPr/>
-          <p:nvPr/>
-        </p:nvSpPr>
-        <p:spPr>
-          <a:xfrm>
-            <a:off x="1975104" y="3364992"/>
-            <a:ext cx="1554480" cy="475488"/>
+              <a:t>·</a:t>
+            </a:r>
+            <a:endParaRPr lang="en-US" sz="1600" dirty="0"/>
+          </a:p>
+        </p:txBody>
+      </p:sp>
+      <p:sp>
+        <p:nvSpPr>
+          <p:cNvPr id="28" name="Shape 26"/>
+          <p:cNvSpPr/>
+          <p:nvPr/>
+        </p:nvSpPr>
+        <p:spPr>
+          <a:xfrm>
+            <a:off x="5742432" y="3364992"/>
+            <a:ext cx="1645920" cy="475488"/>
           </a:xfrm>
           <a:prstGeom prst="rect">
             <a:avLst>
@@ -29680,14 +29391,14 @@
       </p:sp>
       <p:sp>
         <p:nvSpPr>
-          <p:cNvPr id="33" name="Text 31"/>
-          <p:cNvSpPr/>
-          <p:nvPr/>
-        </p:nvSpPr>
-        <p:spPr>
-          <a:xfrm>
-            <a:off x="1975104" y="3364992"/>
-            <a:ext cx="1554480" cy="475488"/>
+          <p:cNvPr id="29" name="Text 27"/>
+          <p:cNvSpPr/>
+          <p:nvPr/>
+        </p:nvSpPr>
+        <p:spPr>
+          <a:xfrm>
+            <a:off x="5742432" y="3364992"/>
+            <a:ext cx="1645920" cy="475488"/>
           </a:xfrm>
           <a:prstGeom prst="rect">
             <a:avLst/>
@@ -29711,7 +29422,7 @@
                 <a:ea typeface="Trebuchet MS" pitchFamily="34" charset="-122"/>
                 <a:cs typeface="Trebuchet MS" pitchFamily="34" charset="-120"/>
               </a:rPr>
-              <a:t>un</a:t>
+              <a:t>ing</a:t>
             </a:r>
             <a:endParaRPr lang="en-US" sz="1400" dirty="0"/>
           </a:p>
@@ -29719,14 +29430,41 @@
       </p:sp>
       <p:sp>
         <p:nvSpPr>
-          <p:cNvPr id="34" name="Text 32"/>
-          <p:cNvSpPr/>
-          <p:nvPr/>
-        </p:nvSpPr>
-        <p:spPr>
-          <a:xfrm>
-            <a:off x="3529584" y="3364992"/>
-            <a:ext cx="73152" cy="475488"/>
+          <p:cNvPr id="30" name="Shape 28"/>
+          <p:cNvSpPr/>
+          <p:nvPr/>
+        </p:nvSpPr>
+        <p:spPr>
+          <a:xfrm>
+            <a:off x="365760" y="4096512"/>
+            <a:ext cx="1371600" cy="804672"/>
+          </a:xfrm>
+          <a:prstGeom prst="rect">
+            <a:avLst>
+              <a:gd name="adj" fmla="val 6818"/>
+            </a:avLst>
+          </a:prstGeom>
+          <a:solidFill>
+            <a:srgbClr val="E2E8F0"/>
+          </a:solidFill>
+          <a:ln w="12700">
+            <a:solidFill>
+              <a:srgbClr val="E2E8F0"/>
+            </a:solidFill>
+            <a:prstDash val="solid"/>
+          </a:ln>
+        </p:spPr>
+      </p:sp>
+      <p:sp>
+        <p:nvSpPr>
+          <p:cNvPr id="31" name="Text 29"/>
+          <p:cNvSpPr/>
+          <p:nvPr/>
+        </p:nvSpPr>
+        <p:spPr>
+          <a:xfrm>
+            <a:off x="365760" y="4096512"/>
+            <a:ext cx="1371600" cy="804672"/>
           </a:xfrm>
           <a:prstGeom prst="rect">
             <a:avLst/>
@@ -29742,306 +29480,30 @@
               <a:buNone/>
             </a:pPr>
             <a:r>
-              <a:rPr lang="en-US" sz="1600" b="1" dirty="0">
-                <a:solidFill>
-                  <a:srgbClr val="0D9488"/>
+              <a:rPr lang="en-US" sz="1100" b="1" dirty="0">
+                <a:solidFill>
+                  <a:srgbClr val="475569"/>
                 </a:solidFill>
                 <a:latin typeface="Trebuchet MS" pitchFamily="34" charset="0"/>
                 <a:ea typeface="Trebuchet MS" pitchFamily="34" charset="-122"/>
                 <a:cs typeface="Trebuchet MS" pitchFamily="34" charset="-120"/>
               </a:rPr>
-              <a:t>·</a:t>
-            </a:r>
-            <a:endParaRPr lang="en-US" sz="1600" dirty="0"/>
-          </a:p>
-        </p:txBody>
-      </p:sp>
-      <p:sp>
-        <p:nvSpPr>
-          <p:cNvPr id="35" name="Shape 33"/>
-          <p:cNvSpPr/>
-          <p:nvPr/>
-        </p:nvSpPr>
-        <p:spPr>
-          <a:xfrm>
-            <a:off x="3602736" y="3364992"/>
-            <a:ext cx="1554480" cy="475488"/>
-          </a:xfrm>
-          <a:prstGeom prst="rect">
-            <a:avLst>
-              <a:gd name="adj" fmla="val 9615"/>
-            </a:avLst>
-          </a:prstGeom>
-          <a:solidFill>
-            <a:srgbClr val="FFFFFF"/>
-          </a:solidFill>
-          <a:ln w="12700">
-            <a:solidFill>
-              <a:srgbClr val="0D9488"/>
-            </a:solidFill>
-            <a:prstDash val="solid"/>
-          </a:ln>
-        </p:spPr>
-      </p:sp>
-      <p:sp>
-        <p:nvSpPr>
-          <p:cNvPr id="36" name="Text 34"/>
-          <p:cNvSpPr/>
-          <p:nvPr/>
-        </p:nvSpPr>
-        <p:spPr>
-          <a:xfrm>
-            <a:off x="3602736" y="3364992"/>
-            <a:ext cx="1554480" cy="475488"/>
-          </a:xfrm>
-          <a:prstGeom prst="rect">
-            <a:avLst/>
-          </a:prstGeom>
-          <a:noFill/>
-          <a:ln/>
-        </p:spPr>
-        <p:txBody>
-          <a:bodyPr wrap="square" lIns="0" tIns="0" rIns="0" bIns="0" rtlCol="0" anchor="ctr"/>
-          <a:lstStyle/>
-          <a:p>
-            <a:pPr algn="ctr" indent="0" marL="0">
-              <a:buNone/>
-            </a:pPr>
-            <a:r>
-              <a:rPr lang="en-US" sz="1400" b="1" dirty="0">
-                <a:solidFill>
-                  <a:srgbClr val="0D9488"/>
-                </a:solidFill>
-                <a:latin typeface="Trebuchet MS" pitchFamily="34" charset="0"/>
-                <a:ea typeface="Trebuchet MS" pitchFamily="34" charset="-122"/>
-                <a:cs typeface="Trebuchet MS" pitchFamily="34" charset="-120"/>
-              </a:rPr>
-              <a:t>clean</a:t>
-            </a:r>
-            <a:endParaRPr lang="en-US" sz="1400" dirty="0"/>
-          </a:p>
-        </p:txBody>
-      </p:sp>
-      <p:sp>
-        <p:nvSpPr>
-          <p:cNvPr id="37" name="Text 35"/>
-          <p:cNvSpPr/>
-          <p:nvPr/>
-        </p:nvSpPr>
-        <p:spPr>
-          <a:xfrm>
-            <a:off x="5157216" y="3364992"/>
-            <a:ext cx="73152" cy="475488"/>
-          </a:xfrm>
-          <a:prstGeom prst="rect">
-            <a:avLst/>
-          </a:prstGeom>
-          <a:noFill/>
-          <a:ln/>
-        </p:spPr>
-        <p:txBody>
-          <a:bodyPr wrap="square" lIns="0" tIns="0" rIns="0" bIns="0" rtlCol="0" anchor="ctr"/>
-          <a:lstStyle/>
-          <a:p>
-            <a:pPr algn="ctr" indent="0" marL="0">
-              <a:buNone/>
-            </a:pPr>
-            <a:r>
-              <a:rPr lang="en-US" sz="1600" b="1" dirty="0">
-                <a:solidFill>
-                  <a:srgbClr val="0D9488"/>
-                </a:solidFill>
-                <a:latin typeface="Trebuchet MS" pitchFamily="34" charset="0"/>
-                <a:ea typeface="Trebuchet MS" pitchFamily="34" charset="-122"/>
-                <a:cs typeface="Trebuchet MS" pitchFamily="34" charset="-120"/>
-              </a:rPr>
-              <a:t>·</a:t>
-            </a:r>
-            <a:endParaRPr lang="en-US" sz="1600" dirty="0"/>
-          </a:p>
-        </p:txBody>
-      </p:sp>
-      <p:sp>
-        <p:nvSpPr>
-          <p:cNvPr id="38" name="Shape 36"/>
-          <p:cNvSpPr/>
-          <p:nvPr/>
-        </p:nvSpPr>
-        <p:spPr>
-          <a:xfrm>
-            <a:off x="5230368" y="3364992"/>
-            <a:ext cx="1554480" cy="475488"/>
-          </a:xfrm>
-          <a:prstGeom prst="rect">
-            <a:avLst>
-              <a:gd name="adj" fmla="val 9615"/>
-            </a:avLst>
-          </a:prstGeom>
-          <a:solidFill>
-            <a:srgbClr val="FFFFFF"/>
-          </a:solidFill>
-          <a:ln w="12700">
-            <a:solidFill>
-              <a:srgbClr val="0D9488"/>
-            </a:solidFill>
-            <a:prstDash val="solid"/>
-          </a:ln>
-        </p:spPr>
-      </p:sp>
-      <p:sp>
-        <p:nvSpPr>
-          <p:cNvPr id="39" name="Text 37"/>
-          <p:cNvSpPr/>
-          <p:nvPr/>
-        </p:nvSpPr>
-        <p:spPr>
-          <a:xfrm>
-            <a:off x="5230368" y="3364992"/>
-            <a:ext cx="1554480" cy="475488"/>
-          </a:xfrm>
-          <a:prstGeom prst="rect">
-            <a:avLst/>
-          </a:prstGeom>
-          <a:noFill/>
-          <a:ln/>
-        </p:spPr>
-        <p:txBody>
-          <a:bodyPr wrap="square" lIns="0" tIns="0" rIns="0" bIns="0" rtlCol="0" anchor="ctr"/>
-          <a:lstStyle/>
-          <a:p>
-            <a:pPr algn="ctr" indent="0" marL="0">
-              <a:buNone/>
-            </a:pPr>
-            <a:r>
-              <a:rPr lang="en-US" sz="1400" b="1" dirty="0">
-                <a:solidFill>
-                  <a:srgbClr val="0D9488"/>
-                </a:solidFill>
-                <a:latin typeface="Trebuchet MS" pitchFamily="34" charset="0"/>
-                <a:ea typeface="Trebuchet MS" pitchFamily="34" charset="-122"/>
-                <a:cs typeface="Trebuchet MS" pitchFamily="34" charset="-120"/>
-              </a:rPr>
-              <a:t>li</a:t>
-            </a:r>
-            <a:endParaRPr lang="en-US" sz="1400" dirty="0"/>
-          </a:p>
-        </p:txBody>
-      </p:sp>
-      <p:sp>
-        <p:nvSpPr>
-          <p:cNvPr id="40" name="Text 38"/>
-          <p:cNvSpPr/>
-          <p:nvPr/>
-        </p:nvSpPr>
-        <p:spPr>
-          <a:xfrm>
-            <a:off x="6784848" y="3364992"/>
-            <a:ext cx="73152" cy="475488"/>
-          </a:xfrm>
-          <a:prstGeom prst="rect">
-            <a:avLst/>
-          </a:prstGeom>
-          <a:noFill/>
-          <a:ln/>
-        </p:spPr>
-        <p:txBody>
-          <a:bodyPr wrap="square" lIns="0" tIns="0" rIns="0" bIns="0" rtlCol="0" anchor="ctr"/>
-          <a:lstStyle/>
-          <a:p>
-            <a:pPr algn="ctr" indent="0" marL="0">
-              <a:buNone/>
-            </a:pPr>
-            <a:r>
-              <a:rPr lang="en-US" sz="1600" b="1" dirty="0">
-                <a:solidFill>
-                  <a:srgbClr val="0D9488"/>
-                </a:solidFill>
-                <a:latin typeface="Trebuchet MS" pitchFamily="34" charset="0"/>
-                <a:ea typeface="Trebuchet MS" pitchFamily="34" charset="-122"/>
-                <a:cs typeface="Trebuchet MS" pitchFamily="34" charset="-120"/>
-              </a:rPr>
-              <a:t>·</a:t>
-            </a:r>
-            <a:endParaRPr lang="en-US" sz="1600" dirty="0"/>
-          </a:p>
-        </p:txBody>
-      </p:sp>
-      <p:sp>
-        <p:nvSpPr>
-          <p:cNvPr id="41" name="Shape 39"/>
-          <p:cNvSpPr/>
-          <p:nvPr/>
-        </p:nvSpPr>
-        <p:spPr>
-          <a:xfrm>
-            <a:off x="6858000" y="3364992"/>
-            <a:ext cx="1554480" cy="475488"/>
-          </a:xfrm>
-          <a:prstGeom prst="rect">
-            <a:avLst>
-              <a:gd name="adj" fmla="val 9615"/>
-            </a:avLst>
-          </a:prstGeom>
-          <a:solidFill>
-            <a:srgbClr val="FFFFFF"/>
-          </a:solidFill>
-          <a:ln w="12700">
-            <a:solidFill>
-              <a:srgbClr val="0D9488"/>
-            </a:solidFill>
-            <a:prstDash val="solid"/>
-          </a:ln>
-        </p:spPr>
-      </p:sp>
-      <p:sp>
-        <p:nvSpPr>
-          <p:cNvPr id="42" name="Text 40"/>
-          <p:cNvSpPr/>
-          <p:nvPr/>
-        </p:nvSpPr>
-        <p:spPr>
-          <a:xfrm>
-            <a:off x="6858000" y="3364992"/>
-            <a:ext cx="1554480" cy="475488"/>
-          </a:xfrm>
-          <a:prstGeom prst="rect">
-            <a:avLst/>
-          </a:prstGeom>
-          <a:noFill/>
-          <a:ln/>
-        </p:spPr>
-        <p:txBody>
-          <a:bodyPr wrap="square" lIns="0" tIns="0" rIns="0" bIns="0" rtlCol="0" anchor="ctr"/>
-          <a:lstStyle/>
-          <a:p>
-            <a:pPr algn="ctr" indent="0" marL="0">
-              <a:buNone/>
-            </a:pPr>
-            <a:r>
-              <a:rPr lang="en-US" sz="1400" b="1" dirty="0">
-                <a:solidFill>
-                  <a:srgbClr val="0D9488"/>
-                </a:solidFill>
-                <a:latin typeface="Trebuchet MS" pitchFamily="34" charset="0"/>
-                <a:ea typeface="Trebuchet MS" pitchFamily="34" charset="-122"/>
-                <a:cs typeface="Trebuchet MS" pitchFamily="34" charset="-120"/>
-              </a:rPr>
-              <a:t>ness</a:t>
-            </a:r>
-            <a:endParaRPr lang="en-US" sz="1400" dirty="0"/>
-          </a:p>
-        </p:txBody>
-      </p:sp>
-      <p:sp>
-        <p:nvSpPr>
-          <p:cNvPr id="43" name="Shape 41"/>
-          <p:cNvSpPr/>
-          <p:nvPr/>
-        </p:nvSpPr>
-        <p:spPr>
-          <a:xfrm>
-            <a:off x="365760" y="4096512"/>
-            <a:ext cx="1371600" cy="804672"/>
+              <a:t>Phonemes</a:t>
+            </a:r>
+            <a:endParaRPr lang="en-US" sz="1100" dirty="0"/>
+          </a:p>
+        </p:txBody>
+      </p:sp>
+      <p:sp>
+        <p:nvSpPr>
+          <p:cNvPr id="32" name="Shape 30"/>
+          <p:cNvSpPr/>
+          <p:nvPr/>
+        </p:nvSpPr>
+        <p:spPr>
+          <a:xfrm>
+            <a:off x="1874520" y="4096512"/>
+            <a:ext cx="6903720" cy="804672"/>
           </a:xfrm>
           <a:prstGeom prst="rect">
             <a:avLst>
@@ -30049,85 +29511,19 @@
             </a:avLst>
           </a:prstGeom>
           <a:solidFill>
-            <a:srgbClr val="E2E8F0"/>
+            <a:srgbClr val="F8FAFC"/>
           </a:solidFill>
           <a:ln w="12700">
             <a:solidFill>
               <a:srgbClr val="E2E8F0"/>
             </a:solidFill>
-            <a:prstDash val="solid"/>
-          </a:ln>
-        </p:spPr>
-      </p:sp>
-      <p:sp>
-        <p:nvSpPr>
-          <p:cNvPr id="44" name="Text 42"/>
-          <p:cNvSpPr/>
-          <p:nvPr/>
-        </p:nvSpPr>
-        <p:spPr>
-          <a:xfrm>
-            <a:off x="365760" y="4096512"/>
-            <a:ext cx="1371600" cy="804672"/>
-          </a:xfrm>
-          <a:prstGeom prst="rect">
-            <a:avLst/>
-          </a:prstGeom>
-          <a:noFill/>
-          <a:ln/>
-        </p:spPr>
-        <p:txBody>
-          <a:bodyPr wrap="square" lIns="0" tIns="0" rIns="0" bIns="0" rtlCol="0" anchor="ctr"/>
-          <a:lstStyle/>
-          <a:p>
-            <a:pPr algn="ctr" indent="0" marL="0">
-              <a:buNone/>
-            </a:pPr>
-            <a:r>
-              <a:rPr lang="en-US" sz="1100" b="1" dirty="0">
-                <a:solidFill>
-                  <a:srgbClr val="475569"/>
-                </a:solidFill>
-                <a:latin typeface="Trebuchet MS" pitchFamily="34" charset="0"/>
-                <a:ea typeface="Trebuchet MS" pitchFamily="34" charset="-122"/>
-                <a:cs typeface="Trebuchet MS" pitchFamily="34" charset="-120"/>
-              </a:rPr>
-              <a:t>Phonemes</a:t>
-            </a:r>
-            <a:endParaRPr lang="en-US" sz="1100" dirty="0"/>
-          </a:p>
-        </p:txBody>
-      </p:sp>
-      <p:sp>
-        <p:nvSpPr>
-          <p:cNvPr id="45" name="Shape 43"/>
-          <p:cNvSpPr/>
-          <p:nvPr/>
-        </p:nvSpPr>
-        <p:spPr>
-          <a:xfrm>
-            <a:off x="1874520" y="4096512"/>
-            <a:ext cx="6903720" cy="804672"/>
-          </a:xfrm>
-          <a:prstGeom prst="rect">
-            <a:avLst>
-              <a:gd name="adj" fmla="val 6818"/>
-            </a:avLst>
-          </a:prstGeom>
-          <a:solidFill>
-            <a:srgbClr val="F8FAFC"/>
-          </a:solidFill>
-          <a:ln w="12700">
-            <a:solidFill>
-              <a:srgbClr val="E2E8F0"/>
-            </a:solidFill>
             <a:prstDash val="dash"/>
           </a:ln>
         </p:spPr>
       </p:sp>
       <p:sp>
         <p:nvSpPr>
-          <p:cNvPr id="46" name="Text 44"/>
+          <p:cNvPr id="33" name="Text 31"/>
           <p:cNvSpPr/>
           <p:nvPr/>
         </p:nvSpPr>
@@ -30450,7 +29846,7 @@
                 <a:ea typeface="Calibri" pitchFamily="34" charset="-122"/>
                 <a:cs typeface="Calibri" pitchFamily="34" charset="-120"/>
               </a:rPr>
-              <a:t>Word Labs  •  wordlabs.app  •  Root: 'clean' = free from dirt, pure</a:t>
+              <a:t>Word Labs  •  wordlabs.app  •  Root: 'clean' = free from dirt or impurity</a:t>
             </a:r>
             <a:endParaRPr lang="en-US" sz="800" dirty="0"/>
           </a:p>
@@ -30589,7 +29985,7 @@
                 <a:ea typeface="Trebuchet MS" pitchFamily="34" charset="-122"/>
                 <a:cs typeface="Trebuchet MS" pitchFamily="34" charset="-120"/>
               </a:rPr>
-              <a:t>uncleanliness</a:t>
+              <a:t>cleaning</a:t>
             </a:r>
             <a:endParaRPr lang="en-US" sz="2800" dirty="0"/>
           </a:p>
@@ -30669,8 +30065,8 @@
         </p:nvSpPr>
         <p:spPr>
           <a:xfrm>
-            <a:off x="1989734" y="2258568"/>
-            <a:ext cx="1581912" cy="292608"/>
+            <a:off x="2938272" y="2258568"/>
+            <a:ext cx="1828800" cy="292608"/>
           </a:xfrm>
           <a:prstGeom prst="rect">
             <a:avLst>
@@ -30678,11 +30074,11 @@
             </a:avLst>
           </a:prstGeom>
           <a:solidFill>
-            <a:srgbClr val="DDD6FE"/>
+            <a:srgbClr val="CCFBF1"/>
           </a:solidFill>
           <a:ln w="19050">
             <a:solidFill>
-              <a:srgbClr val="7C3AED"/>
+              <a:srgbClr val="0D9488"/>
             </a:solidFill>
             <a:prstDash val="solid"/>
           </a:ln>
@@ -30703,8 +30099,8 @@
         </p:nvSpPr>
         <p:spPr>
           <a:xfrm>
-            <a:off x="1989734" y="2258568"/>
-            <a:ext cx="1581912" cy="292608"/>
+            <a:off x="2938272" y="2258568"/>
+            <a:ext cx="1828800" cy="292608"/>
           </a:xfrm>
           <a:prstGeom prst="rect">
             <a:avLst/>
@@ -30722,13 +30118,13 @@
             <a:r>
               <a:rPr lang="en-US" sz="1300" b="1" dirty="0">
                 <a:solidFill>
-                  <a:srgbClr val="4C1D95"/>
+                  <a:srgbClr val="0F766E"/>
                 </a:solidFill>
                 <a:latin typeface="Trebuchet MS" pitchFamily="34" charset="0"/>
                 <a:ea typeface="Trebuchet MS" pitchFamily="34" charset="-122"/>
                 <a:cs typeface="Trebuchet MS" pitchFamily="34" charset="-120"/>
               </a:rPr>
-              <a:t>un</a:t>
+              <a:t>clean</a:t>
             </a:r>
             <a:endParaRPr lang="en-US" sz="1300" dirty="0"/>
           </a:p>
@@ -30742,8 +30138,8 @@
         </p:nvSpPr>
         <p:spPr>
           <a:xfrm>
-            <a:off x="1989734" y="2569464"/>
-            <a:ext cx="1581912" cy="201168"/>
+            <a:off x="2938272" y="2569464"/>
+            <a:ext cx="1828800" cy="201168"/>
           </a:xfrm>
           <a:prstGeom prst="rect">
             <a:avLst/>
@@ -30767,7 +30163,7 @@
                 <a:ea typeface="Calibri" pitchFamily="34" charset="-122"/>
                 <a:cs typeface="Calibri" pitchFamily="34" charset="-120"/>
               </a:rPr>
-              <a:t>not</a:t>
+              <a:t>free from dirt</a:t>
             </a:r>
             <a:endParaRPr lang="en-US" sz="850" dirty="0"/>
           </a:p>
@@ -30781,8 +30177,8 @@
         </p:nvSpPr>
         <p:spPr>
           <a:xfrm>
-            <a:off x="3659429" y="2258568"/>
-            <a:ext cx="1581912" cy="292608"/>
+            <a:off x="5803392" y="2258568"/>
+            <a:ext cx="1828800" cy="292608"/>
           </a:xfrm>
           <a:prstGeom prst="rect">
             <a:avLst>
@@ -30790,11 +30186,11 @@
             </a:avLst>
           </a:prstGeom>
           <a:solidFill>
-            <a:srgbClr val="CCFBF1"/>
+            <a:srgbClr val="FCE7F3"/>
           </a:solidFill>
           <a:ln w="19050">
             <a:solidFill>
-              <a:srgbClr val="0D9488"/>
+              <a:srgbClr val="DB2777"/>
             </a:solidFill>
             <a:prstDash val="solid"/>
           </a:ln>
@@ -30815,8 +30211,8 @@
         </p:nvSpPr>
         <p:spPr>
           <a:xfrm>
-            <a:off x="3659429" y="2258568"/>
-            <a:ext cx="1581912" cy="292608"/>
+            <a:off x="5803392" y="2258568"/>
+            <a:ext cx="1828800" cy="292608"/>
           </a:xfrm>
           <a:prstGeom prst="rect">
             <a:avLst/>
@@ -30834,13 +30230,13 @@
             <a:r>
               <a:rPr lang="en-US" sz="1300" b="1" dirty="0">
                 <a:solidFill>
-                  <a:srgbClr val="0F766E"/>
+                  <a:srgbClr val="9D174D"/>
                 </a:solidFill>
                 <a:latin typeface="Trebuchet MS" pitchFamily="34" charset="0"/>
                 <a:ea typeface="Trebuchet MS" pitchFamily="34" charset="-122"/>
                 <a:cs typeface="Trebuchet MS" pitchFamily="34" charset="-120"/>
               </a:rPr>
-              <a:t>clean</a:t>
+              <a:t>ing</a:t>
             </a:r>
             <a:endParaRPr lang="en-US" sz="1300" dirty="0"/>
           </a:p>
@@ -30854,8 +30250,8 @@
         </p:nvSpPr>
         <p:spPr>
           <a:xfrm>
-            <a:off x="3659429" y="2569464"/>
-            <a:ext cx="1581912" cy="201168"/>
+            <a:off x="5803392" y="2569464"/>
+            <a:ext cx="1828800" cy="201168"/>
           </a:xfrm>
           <a:prstGeom prst="rect">
             <a:avLst/>
@@ -30879,7 +30275,7 @@
                 <a:ea typeface="Calibri" pitchFamily="34" charset="-122"/>
                 <a:cs typeface="Calibri" pitchFamily="34" charset="-120"/>
               </a:rPr>
-              <a:t>free from dirt</a:t>
+              <a:t>action happening now</a:t>
             </a:r>
             <a:endParaRPr lang="en-US" sz="850" dirty="0"/>
           </a:p>
@@ -30893,30 +30289,23 @@
         </p:nvSpPr>
         <p:spPr>
           <a:xfrm>
-            <a:off x="5329123" y="2258568"/>
-            <a:ext cx="1581912" cy="292608"/>
+            <a:off x="365760" y="3273552"/>
+            <a:ext cx="1371600" cy="658368"/>
           </a:xfrm>
           <a:prstGeom prst="rect">
             <a:avLst>
-              <a:gd name="adj" fmla="val 25000"/>
+              <a:gd name="adj" fmla="val 8333"/>
             </a:avLst>
           </a:prstGeom>
           <a:solidFill>
-            <a:srgbClr val="FCE7F3"/>
-          </a:solidFill>
-          <a:ln w="19050">
-            <a:solidFill>
-              <a:srgbClr val="DB2777"/>
-            </a:solidFill>
-            <a:prstDash val="solid"/>
-          </a:ln>
-          <a:effectLst>
-            <a:outerShdw sx="100000" sy="100000" kx="0" ky="0" algn="bl" rotWithShape="0" blurRad="101600" dist="38100" dir="8100000">
-              <a:srgbClr val="000000">
-                <a:alpha val="12000"/>
-              </a:srgbClr>
-            </a:outerShdw>
-          </a:effectLst>
+            <a:srgbClr val="E2E8F0"/>
+          </a:solidFill>
+          <a:ln w="12700">
+            <a:solidFill>
+              <a:srgbClr val="E2E8F0"/>
+            </a:solidFill>
+            <a:prstDash val="solid"/>
+          </a:ln>
         </p:spPr>
       </p:sp>
       <p:sp>
@@ -30927,8 +30316,8 @@
         </p:nvSpPr>
         <p:spPr>
           <a:xfrm>
-            <a:off x="5329123" y="2258568"/>
-            <a:ext cx="1581912" cy="292608"/>
+            <a:off x="365760" y="3273552"/>
+            <a:ext cx="1371600" cy="658368"/>
           </a:xfrm>
           <a:prstGeom prst="rect">
             <a:avLst/>
@@ -30944,142 +30333,84 @@
               <a:buNone/>
             </a:pPr>
             <a:r>
-              <a:rPr lang="en-US" sz="1300" b="1" dirty="0">
-                <a:solidFill>
-                  <a:srgbClr val="9D174D"/>
+              <a:rPr lang="en-US" sz="1100" b="1" dirty="0">
+                <a:solidFill>
+                  <a:srgbClr val="475569"/>
                 </a:solidFill>
                 <a:latin typeface="Trebuchet MS" pitchFamily="34" charset="0"/>
                 <a:ea typeface="Trebuchet MS" pitchFamily="34" charset="-122"/>
                 <a:cs typeface="Trebuchet MS" pitchFamily="34" charset="-120"/>
               </a:rPr>
-              <a:t>li</a:t>
-            </a:r>
-            <a:endParaRPr lang="en-US" sz="1300" dirty="0"/>
-          </a:p>
-        </p:txBody>
-      </p:sp>
-      <p:sp>
-        <p:nvSpPr>
-          <p:cNvPr id="24" name="Text 22"/>
-          <p:cNvSpPr/>
-          <p:nvPr/>
-        </p:nvSpPr>
-        <p:spPr>
-          <a:xfrm>
-            <a:off x="5329123" y="2569464"/>
-            <a:ext cx="1581912" cy="201168"/>
-          </a:xfrm>
-          <a:prstGeom prst="rect">
-            <a:avLst/>
-          </a:prstGeom>
-          <a:noFill/>
-          <a:ln/>
-        </p:spPr>
-        <p:txBody>
-          <a:bodyPr wrap="square" lIns="0" tIns="0" rIns="0" bIns="0" rtlCol="0" anchor="t"/>
-          <a:lstStyle/>
-          <a:p>
-            <a:pPr algn="ctr" indent="0" marL="0">
-              <a:buNone/>
-            </a:pPr>
-            <a:r>
-              <a:rPr lang="en-US" sz="850" dirty="0">
-                <a:solidFill>
-                  <a:srgbClr val="475569"/>
-                </a:solidFill>
-                <a:latin typeface="Calibri" pitchFamily="34" charset="0"/>
-                <a:ea typeface="Calibri" pitchFamily="34" charset="-122"/>
-                <a:cs typeface="Calibri" pitchFamily="34" charset="-120"/>
-              </a:rPr>
-              <a:t>connecting form</a:t>
-            </a:r>
-            <a:endParaRPr lang="en-US" sz="850" dirty="0"/>
-          </a:p>
-        </p:txBody>
-      </p:sp>
-      <p:sp>
-        <p:nvSpPr>
-          <p:cNvPr id="25" name="Text 23"/>
-          <p:cNvSpPr/>
-          <p:nvPr/>
-        </p:nvSpPr>
-        <p:spPr>
-          <a:xfrm>
-            <a:off x="5329123" y="2752344"/>
-            <a:ext cx="1581912" cy="182880"/>
-          </a:xfrm>
-          <a:prstGeom prst="rect">
-            <a:avLst/>
-          </a:prstGeom>
-          <a:noFill/>
-          <a:ln/>
-        </p:spPr>
-        <p:txBody>
-          <a:bodyPr wrap="square" lIns="0" tIns="0" rIns="0" bIns="0" rtlCol="0" anchor="t"/>
-          <a:lstStyle/>
-          <a:p>
-            <a:pPr algn="ctr" indent="0" marL="0">
-              <a:buNone/>
-            </a:pPr>
-            <a:r>
-              <a:rPr lang="en-US" sz="700" i="1" dirty="0">
-                <a:solidFill>
-                  <a:srgbClr val="94A3B8"/>
-                </a:solidFill>
-                <a:latin typeface="Calibri" pitchFamily="34" charset="0"/>
-                <a:ea typeface="Calibri" pitchFamily="34" charset="-122"/>
-                <a:cs typeface="Calibri" pitchFamily="34" charset="-120"/>
-              </a:rPr>
-              <a:t>'y' changes to 'i' before suffix</a:t>
-            </a:r>
-            <a:endParaRPr lang="en-US" sz="700" dirty="0"/>
-          </a:p>
-        </p:txBody>
-      </p:sp>
-      <p:sp>
-        <p:nvSpPr>
-          <p:cNvPr id="26" name="Shape 24"/>
-          <p:cNvSpPr/>
-          <p:nvPr/>
-        </p:nvSpPr>
-        <p:spPr>
-          <a:xfrm>
-            <a:off x="6998818" y="2258568"/>
-            <a:ext cx="1581912" cy="292608"/>
+              <a:t>Syllables</a:t>
+            </a:r>
+            <a:endParaRPr lang="en-US" sz="1100" dirty="0"/>
+          </a:p>
+        </p:txBody>
+      </p:sp>
+      <p:sp>
+        <p:nvSpPr>
+          <p:cNvPr id="24" name="Shape 22"/>
+          <p:cNvSpPr/>
+          <p:nvPr/>
+        </p:nvSpPr>
+        <p:spPr>
+          <a:xfrm>
+            <a:off x="1874520" y="3273552"/>
+            <a:ext cx="6903720" cy="658368"/>
           </a:xfrm>
           <a:prstGeom prst="rect">
             <a:avLst>
-              <a:gd name="adj" fmla="val 25000"/>
+              <a:gd name="adj" fmla="val 8333"/>
             </a:avLst>
           </a:prstGeom>
           <a:solidFill>
-            <a:srgbClr val="FCE7F3"/>
-          </a:solidFill>
-          <a:ln w="19050">
-            <a:solidFill>
-              <a:srgbClr val="DB2777"/>
-            </a:solidFill>
-            <a:prstDash val="solid"/>
-          </a:ln>
-          <a:effectLst>
-            <a:outerShdw sx="100000" sy="100000" kx="0" ky="0" algn="bl" rotWithShape="0" blurRad="101600" dist="38100" dir="8100000">
-              <a:srgbClr val="000000">
-                <a:alpha val="12000"/>
-              </a:srgbClr>
-            </a:outerShdw>
-          </a:effectLst>
-        </p:spPr>
-      </p:sp>
-      <p:sp>
-        <p:nvSpPr>
-          <p:cNvPr id="27" name="Text 25"/>
-          <p:cNvSpPr/>
-          <p:nvPr/>
-        </p:nvSpPr>
-        <p:spPr>
-          <a:xfrm>
-            <a:off x="6998818" y="2258568"/>
-            <a:ext cx="1581912" cy="292608"/>
+            <a:srgbClr val="CCFBF1"/>
+          </a:solidFill>
+          <a:ln w="12700">
+            <a:solidFill>
+              <a:srgbClr val="0D9488"/>
+            </a:solidFill>
+            <a:prstDash val="solid"/>
+          </a:ln>
+        </p:spPr>
+      </p:sp>
+      <p:sp>
+        <p:nvSpPr>
+          <p:cNvPr id="25" name="Shape 23"/>
+          <p:cNvSpPr/>
+          <p:nvPr/>
+        </p:nvSpPr>
+        <p:spPr>
+          <a:xfrm>
+            <a:off x="2999232" y="3364992"/>
+            <a:ext cx="1645920" cy="475488"/>
+          </a:xfrm>
+          <a:prstGeom prst="rect">
+            <a:avLst>
+              <a:gd name="adj" fmla="val 9615"/>
+            </a:avLst>
+          </a:prstGeom>
+          <a:solidFill>
+            <a:srgbClr val="FFFFFF"/>
+          </a:solidFill>
+          <a:ln w="12700">
+            <a:solidFill>
+              <a:srgbClr val="0D9488"/>
+            </a:solidFill>
+            <a:prstDash val="solid"/>
+          </a:ln>
+        </p:spPr>
+      </p:sp>
+      <p:sp>
+        <p:nvSpPr>
+          <p:cNvPr id="26" name="Text 24"/>
+          <p:cNvSpPr/>
+          <p:nvPr/>
+        </p:nvSpPr>
+        <p:spPr>
+          <a:xfrm>
+            <a:off x="2999232" y="3364992"/>
+            <a:ext cx="1645920" cy="475488"/>
           </a:xfrm>
           <a:prstGeom prst="rect">
             <a:avLst/>
@@ -31095,69 +30426,201 @@
               <a:buNone/>
             </a:pPr>
             <a:r>
-              <a:rPr lang="en-US" sz="1300" b="1" dirty="0">
-                <a:solidFill>
-                  <a:srgbClr val="9D174D"/>
+              <a:rPr lang="en-US" sz="1400" b="1" dirty="0">
+                <a:solidFill>
+                  <a:srgbClr val="0D9488"/>
                 </a:solidFill>
                 <a:latin typeface="Trebuchet MS" pitchFamily="34" charset="0"/>
                 <a:ea typeface="Trebuchet MS" pitchFamily="34" charset="-122"/>
                 <a:cs typeface="Trebuchet MS" pitchFamily="34" charset="-120"/>
               </a:rPr>
-              <a:t>ness</a:t>
-            </a:r>
-            <a:endParaRPr lang="en-US" sz="1300" dirty="0"/>
-          </a:p>
-        </p:txBody>
-      </p:sp>
-      <p:sp>
-        <p:nvSpPr>
-          <p:cNvPr id="28" name="Text 26"/>
-          <p:cNvSpPr/>
-          <p:nvPr/>
-        </p:nvSpPr>
-        <p:spPr>
-          <a:xfrm>
-            <a:off x="6998818" y="2569464"/>
-            <a:ext cx="1581912" cy="201168"/>
-          </a:xfrm>
-          <a:prstGeom prst="rect">
-            <a:avLst/>
-          </a:prstGeom>
-          <a:noFill/>
-          <a:ln/>
-        </p:spPr>
-        <p:txBody>
-          <a:bodyPr wrap="square" lIns="0" tIns="0" rIns="0" bIns="0" rtlCol="0" anchor="t"/>
-          <a:lstStyle/>
-          <a:p>
-            <a:pPr algn="ctr" indent="0" marL="0">
-              <a:buNone/>
-            </a:pPr>
-            <a:r>
-              <a:rPr lang="en-US" sz="850" dirty="0">
+              <a:t>clean</a:t>
+            </a:r>
+            <a:endParaRPr lang="en-US" sz="1400" dirty="0"/>
+          </a:p>
+        </p:txBody>
+      </p:sp>
+      <p:sp>
+        <p:nvSpPr>
+          <p:cNvPr id="27" name="Text 25"/>
+          <p:cNvSpPr/>
+          <p:nvPr/>
+        </p:nvSpPr>
+        <p:spPr>
+          <a:xfrm>
+            <a:off x="4645152" y="3364992"/>
+            <a:ext cx="1097280" cy="475488"/>
+          </a:xfrm>
+          <a:prstGeom prst="rect">
+            <a:avLst/>
+          </a:prstGeom>
+          <a:noFill/>
+          <a:ln/>
+        </p:spPr>
+        <p:txBody>
+          <a:bodyPr wrap="square" lIns="0" tIns="0" rIns="0" bIns="0" rtlCol="0" anchor="ctr"/>
+          <a:lstStyle/>
+          <a:p>
+            <a:pPr algn="ctr" indent="0" marL="0">
+              <a:buNone/>
+            </a:pPr>
+            <a:r>
+              <a:rPr lang="en-US" sz="1600" b="1" dirty="0">
+                <a:solidFill>
+                  <a:srgbClr val="0D9488"/>
+                </a:solidFill>
+                <a:latin typeface="Trebuchet MS" pitchFamily="34" charset="0"/>
+                <a:ea typeface="Trebuchet MS" pitchFamily="34" charset="-122"/>
+                <a:cs typeface="Trebuchet MS" pitchFamily="34" charset="-120"/>
+              </a:rPr>
+              <a:t>·</a:t>
+            </a:r>
+            <a:endParaRPr lang="en-US" sz="1600" dirty="0"/>
+          </a:p>
+        </p:txBody>
+      </p:sp>
+      <p:sp>
+        <p:nvSpPr>
+          <p:cNvPr id="28" name="Shape 26"/>
+          <p:cNvSpPr/>
+          <p:nvPr/>
+        </p:nvSpPr>
+        <p:spPr>
+          <a:xfrm>
+            <a:off x="5742432" y="3364992"/>
+            <a:ext cx="1645920" cy="475488"/>
+          </a:xfrm>
+          <a:prstGeom prst="rect">
+            <a:avLst>
+              <a:gd name="adj" fmla="val 9615"/>
+            </a:avLst>
+          </a:prstGeom>
+          <a:solidFill>
+            <a:srgbClr val="FFFFFF"/>
+          </a:solidFill>
+          <a:ln w="12700">
+            <a:solidFill>
+              <a:srgbClr val="0D9488"/>
+            </a:solidFill>
+            <a:prstDash val="solid"/>
+          </a:ln>
+        </p:spPr>
+      </p:sp>
+      <p:sp>
+        <p:nvSpPr>
+          <p:cNvPr id="29" name="Text 27"/>
+          <p:cNvSpPr/>
+          <p:nvPr/>
+        </p:nvSpPr>
+        <p:spPr>
+          <a:xfrm>
+            <a:off x="5742432" y="3364992"/>
+            <a:ext cx="1645920" cy="475488"/>
+          </a:xfrm>
+          <a:prstGeom prst="rect">
+            <a:avLst/>
+          </a:prstGeom>
+          <a:noFill/>
+          <a:ln/>
+        </p:spPr>
+        <p:txBody>
+          <a:bodyPr wrap="square" lIns="0" tIns="0" rIns="0" bIns="0" rtlCol="0" anchor="ctr"/>
+          <a:lstStyle/>
+          <a:p>
+            <a:pPr algn="ctr" indent="0" marL="0">
+              <a:buNone/>
+            </a:pPr>
+            <a:r>
+              <a:rPr lang="en-US" sz="1400" b="1" dirty="0">
+                <a:solidFill>
+                  <a:srgbClr val="0D9488"/>
+                </a:solidFill>
+                <a:latin typeface="Trebuchet MS" pitchFamily="34" charset="0"/>
+                <a:ea typeface="Trebuchet MS" pitchFamily="34" charset="-122"/>
+                <a:cs typeface="Trebuchet MS" pitchFamily="34" charset="-120"/>
+              </a:rPr>
+              <a:t>ing</a:t>
+            </a:r>
+            <a:endParaRPr lang="en-US" sz="1400" dirty="0"/>
+          </a:p>
+        </p:txBody>
+      </p:sp>
+      <p:sp>
+        <p:nvSpPr>
+          <p:cNvPr id="30" name="Shape 28"/>
+          <p:cNvSpPr/>
+          <p:nvPr/>
+        </p:nvSpPr>
+        <p:spPr>
+          <a:xfrm>
+            <a:off x="365760" y="4096512"/>
+            <a:ext cx="1371600" cy="804672"/>
+          </a:xfrm>
+          <a:prstGeom prst="rect">
+            <a:avLst>
+              <a:gd name="adj" fmla="val 6818"/>
+            </a:avLst>
+          </a:prstGeom>
+          <a:solidFill>
+            <a:srgbClr val="E2E8F0"/>
+          </a:solidFill>
+          <a:ln w="12700">
+            <a:solidFill>
+              <a:srgbClr val="E2E8F0"/>
+            </a:solidFill>
+            <a:prstDash val="solid"/>
+          </a:ln>
+        </p:spPr>
+      </p:sp>
+      <p:sp>
+        <p:nvSpPr>
+          <p:cNvPr id="31" name="Text 29"/>
+          <p:cNvSpPr/>
+          <p:nvPr/>
+        </p:nvSpPr>
+        <p:spPr>
+          <a:xfrm>
+            <a:off x="365760" y="4096512"/>
+            <a:ext cx="1371600" cy="804672"/>
+          </a:xfrm>
+          <a:prstGeom prst="rect">
+            <a:avLst/>
+          </a:prstGeom>
+          <a:noFill/>
+          <a:ln/>
+        </p:spPr>
+        <p:txBody>
+          <a:bodyPr wrap="square" lIns="0" tIns="0" rIns="0" bIns="0" rtlCol="0" anchor="ctr"/>
+          <a:lstStyle/>
+          <a:p>
+            <a:pPr algn="ctr" indent="0" marL="0">
+              <a:buNone/>
+            </a:pPr>
+            <a:r>
+              <a:rPr lang="en-US" sz="1100" b="1" dirty="0">
                 <a:solidFill>
                   <a:srgbClr val="475569"/>
                 </a:solidFill>
-                <a:latin typeface="Calibri" pitchFamily="34" charset="0"/>
-                <a:ea typeface="Calibri" pitchFamily="34" charset="-122"/>
-                <a:cs typeface="Calibri" pitchFamily="34" charset="-120"/>
-              </a:rPr>
-              <a:t>state or quality of</a:t>
-            </a:r>
-            <a:endParaRPr lang="en-US" sz="850" dirty="0"/>
-          </a:p>
-        </p:txBody>
-      </p:sp>
-      <p:sp>
-        <p:nvSpPr>
-          <p:cNvPr id="29" name="Shape 27"/>
-          <p:cNvSpPr/>
-          <p:nvPr/>
-        </p:nvSpPr>
-        <p:spPr>
-          <a:xfrm>
-            <a:off x="365760" y="3273552"/>
-            <a:ext cx="1371600" cy="658368"/>
+                <a:latin typeface="Trebuchet MS" pitchFamily="34" charset="0"/>
+                <a:ea typeface="Trebuchet MS" pitchFamily="34" charset="-122"/>
+                <a:cs typeface="Trebuchet MS" pitchFamily="34" charset="-120"/>
+              </a:rPr>
+              <a:t>Phonemes</a:t>
+            </a:r>
+            <a:endParaRPr lang="en-US" sz="1100" dirty="0"/>
+          </a:p>
+        </p:txBody>
+      </p:sp>
+      <p:sp>
+        <p:nvSpPr>
+          <p:cNvPr id="32" name="Shape 30"/>
+          <p:cNvSpPr/>
+          <p:nvPr/>
+        </p:nvSpPr>
+        <p:spPr>
+          <a:xfrm>
+            <a:off x="1874520" y="4096512"/>
+            <a:ext cx="6903720" cy="658368"/>
           </a:xfrm>
           <a:prstGeom prst="rect">
             <a:avLst>
@@ -31165,26 +30628,53 @@
             </a:avLst>
           </a:prstGeom>
           <a:solidFill>
-            <a:srgbClr val="E2E8F0"/>
-          </a:solidFill>
-          <a:ln w="12700">
-            <a:solidFill>
-              <a:srgbClr val="E2E8F0"/>
-            </a:solidFill>
-            <a:prstDash val="solid"/>
-          </a:ln>
-        </p:spPr>
-      </p:sp>
-      <p:sp>
-        <p:nvSpPr>
-          <p:cNvPr id="30" name="Text 28"/>
-          <p:cNvSpPr/>
-          <p:nvPr/>
-        </p:nvSpPr>
-        <p:spPr>
-          <a:xfrm>
-            <a:off x="365760" y="3273552"/>
-            <a:ext cx="1371600" cy="658368"/>
+            <a:srgbClr val="FCE7F3"/>
+          </a:solidFill>
+          <a:ln w="12700">
+            <a:solidFill>
+              <a:srgbClr val="DB2777"/>
+            </a:solidFill>
+            <a:prstDash val="solid"/>
+          </a:ln>
+        </p:spPr>
+      </p:sp>
+      <p:sp>
+        <p:nvSpPr>
+          <p:cNvPr id="33" name="Shape 31"/>
+          <p:cNvSpPr/>
+          <p:nvPr/>
+        </p:nvSpPr>
+        <p:spPr>
+          <a:xfrm>
+            <a:off x="2427732" y="4169664"/>
+            <a:ext cx="685800" cy="475488"/>
+          </a:xfrm>
+          <a:prstGeom prst="rect">
+            <a:avLst>
+              <a:gd name="adj" fmla="val 7692"/>
+            </a:avLst>
+          </a:prstGeom>
+          <a:solidFill>
+            <a:srgbClr val="FFFFFF"/>
+          </a:solidFill>
+          <a:ln w="12700">
+            <a:solidFill>
+              <a:srgbClr val="DB2777"/>
+            </a:solidFill>
+            <a:prstDash val="solid"/>
+          </a:ln>
+        </p:spPr>
+      </p:sp>
+      <p:sp>
+        <p:nvSpPr>
+          <p:cNvPr id="34" name="Text 32"/>
+          <p:cNvSpPr/>
+          <p:nvPr/>
+        </p:nvSpPr>
+        <p:spPr>
+          <a:xfrm>
+            <a:off x="2427732" y="4169664"/>
+            <a:ext cx="685800" cy="475488"/>
           </a:xfrm>
           <a:prstGeom prst="rect">
             <a:avLst/>
@@ -31200,84 +30690,57 @@
               <a:buNone/>
             </a:pPr>
             <a:r>
-              <a:rPr lang="en-US" sz="1100" b="1" dirty="0">
-                <a:solidFill>
-                  <a:srgbClr val="475569"/>
+              <a:rPr lang="en-US" sz="900" b="1" dirty="0">
+                <a:solidFill>
+                  <a:srgbClr val="9D174D"/>
                 </a:solidFill>
                 <a:latin typeface="Trebuchet MS" pitchFamily="34" charset="0"/>
                 <a:ea typeface="Trebuchet MS" pitchFamily="34" charset="-122"/>
                 <a:cs typeface="Trebuchet MS" pitchFamily="34" charset="-120"/>
               </a:rPr>
-              <a:t>Syllables</a:t>
-            </a:r>
-            <a:endParaRPr lang="en-US" sz="1100" dirty="0"/>
-          </a:p>
-        </p:txBody>
-      </p:sp>
-      <p:sp>
-        <p:nvSpPr>
-          <p:cNvPr id="31" name="Shape 29"/>
-          <p:cNvSpPr/>
-          <p:nvPr/>
-        </p:nvSpPr>
-        <p:spPr>
-          <a:xfrm>
-            <a:off x="1874520" y="3273552"/>
-            <a:ext cx="6903720" cy="658368"/>
+              <a:t>cl</a:t>
+            </a:r>
+            <a:endParaRPr lang="en-US" sz="900" dirty="0"/>
+          </a:p>
+        </p:txBody>
+      </p:sp>
+      <p:sp>
+        <p:nvSpPr>
+          <p:cNvPr id="35" name="Shape 33"/>
+          <p:cNvSpPr/>
+          <p:nvPr/>
+        </p:nvSpPr>
+        <p:spPr>
+          <a:xfrm>
+            <a:off x="3639312" y="4169664"/>
+            <a:ext cx="685800" cy="475488"/>
           </a:xfrm>
           <a:prstGeom prst="rect">
             <a:avLst>
-              <a:gd name="adj" fmla="val 8333"/>
+              <a:gd name="adj" fmla="val 7692"/>
             </a:avLst>
           </a:prstGeom>
           <a:solidFill>
-            <a:srgbClr val="CCFBF1"/>
-          </a:solidFill>
-          <a:ln w="12700">
-            <a:solidFill>
-              <a:srgbClr val="0D9488"/>
-            </a:solidFill>
-            <a:prstDash val="solid"/>
-          </a:ln>
-        </p:spPr>
-      </p:sp>
-      <p:sp>
-        <p:nvSpPr>
-          <p:cNvPr id="32" name="Shape 30"/>
-          <p:cNvSpPr/>
-          <p:nvPr/>
-        </p:nvSpPr>
-        <p:spPr>
-          <a:xfrm>
-            <a:off x="1975104" y="3364992"/>
-            <a:ext cx="1554480" cy="475488"/>
-          </a:xfrm>
-          <a:prstGeom prst="rect">
-            <a:avLst>
-              <a:gd name="adj" fmla="val 9615"/>
-            </a:avLst>
-          </a:prstGeom>
-          <a:solidFill>
             <a:srgbClr val="FFFFFF"/>
           </a:solidFill>
           <a:ln w="12700">
             <a:solidFill>
-              <a:srgbClr val="0D9488"/>
-            </a:solidFill>
-            <a:prstDash val="solid"/>
-          </a:ln>
-        </p:spPr>
-      </p:sp>
-      <p:sp>
-        <p:nvSpPr>
-          <p:cNvPr id="33" name="Text 31"/>
-          <p:cNvSpPr/>
-          <p:nvPr/>
-        </p:nvSpPr>
-        <p:spPr>
-          <a:xfrm>
-            <a:off x="1975104" y="3364992"/>
-            <a:ext cx="1554480" cy="475488"/>
+              <a:srgbClr val="DB2777"/>
+            </a:solidFill>
+            <a:prstDash val="solid"/>
+          </a:ln>
+        </p:spPr>
+      </p:sp>
+      <p:sp>
+        <p:nvSpPr>
+          <p:cNvPr id="36" name="Text 34"/>
+          <p:cNvSpPr/>
+          <p:nvPr/>
+        </p:nvSpPr>
+        <p:spPr>
+          <a:xfrm>
+            <a:off x="3639312" y="4169664"/>
+            <a:ext cx="685800" cy="475488"/>
           </a:xfrm>
           <a:prstGeom prst="rect">
             <a:avLst/>
@@ -31293,30 +30756,57 @@
               <a:buNone/>
             </a:pPr>
             <a:r>
-              <a:rPr lang="en-US" sz="1400" b="1" dirty="0">
-                <a:solidFill>
-                  <a:srgbClr val="0D9488"/>
+              <a:rPr lang="en-US" sz="900" b="1" dirty="0">
+                <a:solidFill>
+                  <a:srgbClr val="9D174D"/>
                 </a:solidFill>
                 <a:latin typeface="Trebuchet MS" pitchFamily="34" charset="0"/>
                 <a:ea typeface="Trebuchet MS" pitchFamily="34" charset="-122"/>
                 <a:cs typeface="Trebuchet MS" pitchFamily="34" charset="-120"/>
               </a:rPr>
-              <a:t>un</a:t>
-            </a:r>
-            <a:endParaRPr lang="en-US" sz="1400" dirty="0"/>
-          </a:p>
-        </p:txBody>
-      </p:sp>
-      <p:sp>
-        <p:nvSpPr>
-          <p:cNvPr id="34" name="Text 32"/>
-          <p:cNvSpPr/>
-          <p:nvPr/>
-        </p:nvSpPr>
-        <p:spPr>
-          <a:xfrm>
-            <a:off x="3529584" y="3364992"/>
-            <a:ext cx="73152" cy="475488"/>
+              <a:t>ea</a:t>
+            </a:r>
+            <a:endParaRPr lang="en-US" sz="900" dirty="0"/>
+          </a:p>
+        </p:txBody>
+      </p:sp>
+      <p:sp>
+        <p:nvSpPr>
+          <p:cNvPr id="37" name="Shape 35"/>
+          <p:cNvSpPr/>
+          <p:nvPr/>
+        </p:nvSpPr>
+        <p:spPr>
+          <a:xfrm>
+            <a:off x="4850892" y="4169664"/>
+            <a:ext cx="685800" cy="475488"/>
+          </a:xfrm>
+          <a:prstGeom prst="rect">
+            <a:avLst>
+              <a:gd name="adj" fmla="val 7692"/>
+            </a:avLst>
+          </a:prstGeom>
+          <a:solidFill>
+            <a:srgbClr val="FFFFFF"/>
+          </a:solidFill>
+          <a:ln w="12700">
+            <a:solidFill>
+              <a:srgbClr val="DB2777"/>
+            </a:solidFill>
+            <a:prstDash val="solid"/>
+          </a:ln>
+        </p:spPr>
+      </p:sp>
+      <p:sp>
+        <p:nvSpPr>
+          <p:cNvPr id="38" name="Text 36"/>
+          <p:cNvSpPr/>
+          <p:nvPr/>
+        </p:nvSpPr>
+        <p:spPr>
+          <a:xfrm>
+            <a:off x="4850892" y="4169664"/>
+            <a:ext cx="685800" cy="475488"/>
           </a:xfrm>
           <a:prstGeom prst="rect">
             <a:avLst/>
@@ -31332,34 +30822,34 @@
               <a:buNone/>
             </a:pPr>
             <a:r>
-              <a:rPr lang="en-US" sz="1600" b="1" dirty="0">
-                <a:solidFill>
-                  <a:srgbClr val="0D9488"/>
+              <a:rPr lang="en-US" sz="900" b="1" dirty="0">
+                <a:solidFill>
+                  <a:srgbClr val="9D174D"/>
                 </a:solidFill>
                 <a:latin typeface="Trebuchet MS" pitchFamily="34" charset="0"/>
                 <a:ea typeface="Trebuchet MS" pitchFamily="34" charset="-122"/>
                 <a:cs typeface="Trebuchet MS" pitchFamily="34" charset="-120"/>
               </a:rPr>
-              <a:t>·</a:t>
-            </a:r>
-            <a:endParaRPr lang="en-US" sz="1600" dirty="0"/>
-          </a:p>
-        </p:txBody>
-      </p:sp>
-      <p:sp>
-        <p:nvSpPr>
-          <p:cNvPr id="35" name="Shape 33"/>
-          <p:cNvSpPr/>
-          <p:nvPr/>
-        </p:nvSpPr>
-        <p:spPr>
-          <a:xfrm>
-            <a:off x="3602736" y="3364992"/>
-            <a:ext cx="1554480" cy="475488"/>
+              <a:t>n</a:t>
+            </a:r>
+            <a:endParaRPr lang="en-US" sz="900" dirty="0"/>
+          </a:p>
+        </p:txBody>
+      </p:sp>
+      <p:sp>
+        <p:nvSpPr>
+          <p:cNvPr id="39" name="Shape 37"/>
+          <p:cNvSpPr/>
+          <p:nvPr/>
+        </p:nvSpPr>
+        <p:spPr>
+          <a:xfrm>
+            <a:off x="6062472" y="4169664"/>
+            <a:ext cx="685800" cy="475488"/>
           </a:xfrm>
           <a:prstGeom prst="rect">
             <a:avLst>
-              <a:gd name="adj" fmla="val 9615"/>
+              <a:gd name="adj" fmla="val 7692"/>
             </a:avLst>
           </a:prstGeom>
           <a:solidFill>
@@ -31367,22 +30857,22 @@
           </a:solidFill>
           <a:ln w="12700">
             <a:solidFill>
-              <a:srgbClr val="0D9488"/>
-            </a:solidFill>
-            <a:prstDash val="solid"/>
-          </a:ln>
-        </p:spPr>
-      </p:sp>
-      <p:sp>
-        <p:nvSpPr>
-          <p:cNvPr id="36" name="Text 34"/>
-          <p:cNvSpPr/>
-          <p:nvPr/>
-        </p:nvSpPr>
-        <p:spPr>
-          <a:xfrm>
-            <a:off x="3602736" y="3364992"/>
-            <a:ext cx="1554480" cy="475488"/>
+              <a:srgbClr val="DB2777"/>
+            </a:solidFill>
+            <a:prstDash val="solid"/>
+          </a:ln>
+        </p:spPr>
+      </p:sp>
+      <p:sp>
+        <p:nvSpPr>
+          <p:cNvPr id="40" name="Text 38"/>
+          <p:cNvSpPr/>
+          <p:nvPr/>
+        </p:nvSpPr>
+        <p:spPr>
+          <a:xfrm>
+            <a:off x="6062472" y="4169664"/>
+            <a:ext cx="685800" cy="475488"/>
           </a:xfrm>
           <a:prstGeom prst="rect">
             <a:avLst/>
@@ -31398,30 +30888,57 @@
               <a:buNone/>
             </a:pPr>
             <a:r>
-              <a:rPr lang="en-US" sz="1400" b="1" dirty="0">
-                <a:solidFill>
-                  <a:srgbClr val="0D9488"/>
+              <a:rPr lang="en-US" sz="900" b="1" dirty="0">
+                <a:solidFill>
+                  <a:srgbClr val="9D174D"/>
                 </a:solidFill>
                 <a:latin typeface="Trebuchet MS" pitchFamily="34" charset="0"/>
                 <a:ea typeface="Trebuchet MS" pitchFamily="34" charset="-122"/>
                 <a:cs typeface="Trebuchet MS" pitchFamily="34" charset="-120"/>
               </a:rPr>
-              <a:t>clean</a:t>
-            </a:r>
-            <a:endParaRPr lang="en-US" sz="1400" dirty="0"/>
-          </a:p>
-        </p:txBody>
-      </p:sp>
-      <p:sp>
-        <p:nvSpPr>
-          <p:cNvPr id="37" name="Text 35"/>
-          <p:cNvSpPr/>
-          <p:nvPr/>
-        </p:nvSpPr>
-        <p:spPr>
-          <a:xfrm>
-            <a:off x="5157216" y="3364992"/>
-            <a:ext cx="73152" cy="475488"/>
+              <a:t>i</a:t>
+            </a:r>
+            <a:endParaRPr lang="en-US" sz="900" dirty="0"/>
+          </a:p>
+        </p:txBody>
+      </p:sp>
+      <p:sp>
+        <p:nvSpPr>
+          <p:cNvPr id="41" name="Shape 39"/>
+          <p:cNvSpPr/>
+          <p:nvPr/>
+        </p:nvSpPr>
+        <p:spPr>
+          <a:xfrm>
+            <a:off x="7274052" y="4169664"/>
+            <a:ext cx="685800" cy="475488"/>
+          </a:xfrm>
+          <a:prstGeom prst="rect">
+            <a:avLst>
+              <a:gd name="adj" fmla="val 7692"/>
+            </a:avLst>
+          </a:prstGeom>
+          <a:solidFill>
+            <a:srgbClr val="FFFFFF"/>
+          </a:solidFill>
+          <a:ln w="12700">
+            <a:solidFill>
+              <a:srgbClr val="DB2777"/>
+            </a:solidFill>
+            <a:prstDash val="solid"/>
+          </a:ln>
+        </p:spPr>
+      </p:sp>
+      <p:sp>
+        <p:nvSpPr>
+          <p:cNvPr id="42" name="Text 40"/>
+          <p:cNvSpPr/>
+          <p:nvPr/>
+        </p:nvSpPr>
+        <p:spPr>
+          <a:xfrm>
+            <a:off x="7274052" y="4169664"/>
+            <a:ext cx="685800" cy="475488"/>
           </a:xfrm>
           <a:prstGeom prst="rect">
             <a:avLst/>
@@ -31437,939 +30954,15 @@
               <a:buNone/>
             </a:pPr>
             <a:r>
-              <a:rPr lang="en-US" sz="1600" b="1" dirty="0">
-                <a:solidFill>
-                  <a:srgbClr val="0D9488"/>
+              <a:rPr lang="en-US" sz="900" b="1" dirty="0">
+                <a:solidFill>
+                  <a:srgbClr val="9D174D"/>
                 </a:solidFill>
                 <a:latin typeface="Trebuchet MS" pitchFamily="34" charset="0"/>
                 <a:ea typeface="Trebuchet MS" pitchFamily="34" charset="-122"/>
                 <a:cs typeface="Trebuchet MS" pitchFamily="34" charset="-120"/>
               </a:rPr>
-              <a:t>·</a:t>
-            </a:r>
-            <a:endParaRPr lang="en-US" sz="1600" dirty="0"/>
-          </a:p>
-        </p:txBody>
-      </p:sp>
-      <p:sp>
-        <p:nvSpPr>
-          <p:cNvPr id="38" name="Shape 36"/>
-          <p:cNvSpPr/>
-          <p:nvPr/>
-        </p:nvSpPr>
-        <p:spPr>
-          <a:xfrm>
-            <a:off x="5230368" y="3364992"/>
-            <a:ext cx="1554480" cy="475488"/>
-          </a:xfrm>
-          <a:prstGeom prst="rect">
-            <a:avLst>
-              <a:gd name="adj" fmla="val 9615"/>
-            </a:avLst>
-          </a:prstGeom>
-          <a:solidFill>
-            <a:srgbClr val="FFFFFF"/>
-          </a:solidFill>
-          <a:ln w="12700">
-            <a:solidFill>
-              <a:srgbClr val="0D9488"/>
-            </a:solidFill>
-            <a:prstDash val="solid"/>
-          </a:ln>
-        </p:spPr>
-      </p:sp>
-      <p:sp>
-        <p:nvSpPr>
-          <p:cNvPr id="39" name="Text 37"/>
-          <p:cNvSpPr/>
-          <p:nvPr/>
-        </p:nvSpPr>
-        <p:spPr>
-          <a:xfrm>
-            <a:off x="5230368" y="3364992"/>
-            <a:ext cx="1554480" cy="475488"/>
-          </a:xfrm>
-          <a:prstGeom prst="rect">
-            <a:avLst/>
-          </a:prstGeom>
-          <a:noFill/>
-          <a:ln/>
-        </p:spPr>
-        <p:txBody>
-          <a:bodyPr wrap="square" lIns="0" tIns="0" rIns="0" bIns="0" rtlCol="0" anchor="ctr"/>
-          <a:lstStyle/>
-          <a:p>
-            <a:pPr algn="ctr" indent="0" marL="0">
-              <a:buNone/>
-            </a:pPr>
-            <a:r>
-              <a:rPr lang="en-US" sz="1400" b="1" dirty="0">
-                <a:solidFill>
-                  <a:srgbClr val="0D9488"/>
-                </a:solidFill>
-                <a:latin typeface="Trebuchet MS" pitchFamily="34" charset="0"/>
-                <a:ea typeface="Trebuchet MS" pitchFamily="34" charset="-122"/>
-                <a:cs typeface="Trebuchet MS" pitchFamily="34" charset="-120"/>
-              </a:rPr>
-              <a:t>li</a:t>
-            </a:r>
-            <a:endParaRPr lang="en-US" sz="1400" dirty="0"/>
-          </a:p>
-        </p:txBody>
-      </p:sp>
-      <p:sp>
-        <p:nvSpPr>
-          <p:cNvPr id="40" name="Text 38"/>
-          <p:cNvSpPr/>
-          <p:nvPr/>
-        </p:nvSpPr>
-        <p:spPr>
-          <a:xfrm>
-            <a:off x="6784848" y="3364992"/>
-            <a:ext cx="73152" cy="475488"/>
-          </a:xfrm>
-          <a:prstGeom prst="rect">
-            <a:avLst/>
-          </a:prstGeom>
-          <a:noFill/>
-          <a:ln/>
-        </p:spPr>
-        <p:txBody>
-          <a:bodyPr wrap="square" lIns="0" tIns="0" rIns="0" bIns="0" rtlCol="0" anchor="ctr"/>
-          <a:lstStyle/>
-          <a:p>
-            <a:pPr algn="ctr" indent="0" marL="0">
-              <a:buNone/>
-            </a:pPr>
-            <a:r>
-              <a:rPr lang="en-US" sz="1600" b="1" dirty="0">
-                <a:solidFill>
-                  <a:srgbClr val="0D9488"/>
-                </a:solidFill>
-                <a:latin typeface="Trebuchet MS" pitchFamily="34" charset="0"/>
-                <a:ea typeface="Trebuchet MS" pitchFamily="34" charset="-122"/>
-                <a:cs typeface="Trebuchet MS" pitchFamily="34" charset="-120"/>
-              </a:rPr>
-              <a:t>·</a:t>
-            </a:r>
-            <a:endParaRPr lang="en-US" sz="1600" dirty="0"/>
-          </a:p>
-        </p:txBody>
-      </p:sp>
-      <p:sp>
-        <p:nvSpPr>
-          <p:cNvPr id="41" name="Shape 39"/>
-          <p:cNvSpPr/>
-          <p:nvPr/>
-        </p:nvSpPr>
-        <p:spPr>
-          <a:xfrm>
-            <a:off x="6858000" y="3364992"/>
-            <a:ext cx="1554480" cy="475488"/>
-          </a:xfrm>
-          <a:prstGeom prst="rect">
-            <a:avLst>
-              <a:gd name="adj" fmla="val 9615"/>
-            </a:avLst>
-          </a:prstGeom>
-          <a:solidFill>
-            <a:srgbClr val="FFFFFF"/>
-          </a:solidFill>
-          <a:ln w="12700">
-            <a:solidFill>
-              <a:srgbClr val="0D9488"/>
-            </a:solidFill>
-            <a:prstDash val="solid"/>
-          </a:ln>
-        </p:spPr>
-      </p:sp>
-      <p:sp>
-        <p:nvSpPr>
-          <p:cNvPr id="42" name="Text 40"/>
-          <p:cNvSpPr/>
-          <p:nvPr/>
-        </p:nvSpPr>
-        <p:spPr>
-          <a:xfrm>
-            <a:off x="6858000" y="3364992"/>
-            <a:ext cx="1554480" cy="475488"/>
-          </a:xfrm>
-          <a:prstGeom prst="rect">
-            <a:avLst/>
-          </a:prstGeom>
-          <a:noFill/>
-          <a:ln/>
-        </p:spPr>
-        <p:txBody>
-          <a:bodyPr wrap="square" lIns="0" tIns="0" rIns="0" bIns="0" rtlCol="0" anchor="ctr"/>
-          <a:lstStyle/>
-          <a:p>
-            <a:pPr algn="ctr" indent="0" marL="0">
-              <a:buNone/>
-            </a:pPr>
-            <a:r>
-              <a:rPr lang="en-US" sz="1400" b="1" dirty="0">
-                <a:solidFill>
-                  <a:srgbClr val="0D9488"/>
-                </a:solidFill>
-                <a:latin typeface="Trebuchet MS" pitchFamily="34" charset="0"/>
-                <a:ea typeface="Trebuchet MS" pitchFamily="34" charset="-122"/>
-                <a:cs typeface="Trebuchet MS" pitchFamily="34" charset="-120"/>
-              </a:rPr>
-              <a:t>ness</a:t>
-            </a:r>
-            <a:endParaRPr lang="en-US" sz="1400" dirty="0"/>
-          </a:p>
-        </p:txBody>
-      </p:sp>
-      <p:sp>
-        <p:nvSpPr>
-          <p:cNvPr id="43" name="Shape 41"/>
-          <p:cNvSpPr/>
-          <p:nvPr/>
-        </p:nvSpPr>
-        <p:spPr>
-          <a:xfrm>
-            <a:off x="365760" y="4096512"/>
-            <a:ext cx="1371600" cy="804672"/>
-          </a:xfrm>
-          <a:prstGeom prst="rect">
-            <a:avLst>
-              <a:gd name="adj" fmla="val 6818"/>
-            </a:avLst>
-          </a:prstGeom>
-          <a:solidFill>
-            <a:srgbClr val="E2E8F0"/>
-          </a:solidFill>
-          <a:ln w="12700">
-            <a:solidFill>
-              <a:srgbClr val="E2E8F0"/>
-            </a:solidFill>
-            <a:prstDash val="solid"/>
-          </a:ln>
-        </p:spPr>
-      </p:sp>
-      <p:sp>
-        <p:nvSpPr>
-          <p:cNvPr id="44" name="Text 42"/>
-          <p:cNvSpPr/>
-          <p:nvPr/>
-        </p:nvSpPr>
-        <p:spPr>
-          <a:xfrm>
-            <a:off x="365760" y="4096512"/>
-            <a:ext cx="1371600" cy="804672"/>
-          </a:xfrm>
-          <a:prstGeom prst="rect">
-            <a:avLst/>
-          </a:prstGeom>
-          <a:noFill/>
-          <a:ln/>
-        </p:spPr>
-        <p:txBody>
-          <a:bodyPr wrap="square" lIns="0" tIns="0" rIns="0" bIns="0" rtlCol="0" anchor="ctr"/>
-          <a:lstStyle/>
-          <a:p>
-            <a:pPr algn="ctr" indent="0" marL="0">
-              <a:buNone/>
-            </a:pPr>
-            <a:r>
-              <a:rPr lang="en-US" sz="1100" b="1" dirty="0">
-                <a:solidFill>
-                  <a:srgbClr val="475569"/>
-                </a:solidFill>
-                <a:latin typeface="Trebuchet MS" pitchFamily="34" charset="0"/>
-                <a:ea typeface="Trebuchet MS" pitchFamily="34" charset="-122"/>
-                <a:cs typeface="Trebuchet MS" pitchFamily="34" charset="-120"/>
-              </a:rPr>
-              <a:t>Phonemes</a:t>
-            </a:r>
-            <a:endParaRPr lang="en-US" sz="1100" dirty="0"/>
-          </a:p>
-        </p:txBody>
-      </p:sp>
-      <p:sp>
-        <p:nvSpPr>
-          <p:cNvPr id="45" name="Shape 43"/>
-          <p:cNvSpPr/>
-          <p:nvPr/>
-        </p:nvSpPr>
-        <p:spPr>
-          <a:xfrm>
-            <a:off x="1874520" y="4096512"/>
-            <a:ext cx="6903720" cy="658368"/>
-          </a:xfrm>
-          <a:prstGeom prst="rect">
-            <a:avLst>
-              <a:gd name="adj" fmla="val 8333"/>
-            </a:avLst>
-          </a:prstGeom>
-          <a:solidFill>
-            <a:srgbClr val="FCE7F3"/>
-          </a:solidFill>
-          <a:ln w="12700">
-            <a:solidFill>
-              <a:srgbClr val="DB2777"/>
-            </a:solidFill>
-            <a:prstDash val="solid"/>
-          </a:ln>
-        </p:spPr>
-      </p:sp>
-      <p:sp>
-        <p:nvSpPr>
-          <p:cNvPr id="46" name="Shape 44"/>
-          <p:cNvSpPr/>
-          <p:nvPr/>
-        </p:nvSpPr>
-        <p:spPr>
-          <a:xfrm>
-            <a:off x="1951828" y="4169664"/>
-            <a:ext cx="603504" cy="475488"/>
-          </a:xfrm>
-          <a:prstGeom prst="rect">
-            <a:avLst>
-              <a:gd name="adj" fmla="val 7692"/>
-            </a:avLst>
-          </a:prstGeom>
-          <a:solidFill>
-            <a:srgbClr val="FFFFFF"/>
-          </a:solidFill>
-          <a:ln w="12700">
-            <a:solidFill>
-              <a:srgbClr val="DB2777"/>
-            </a:solidFill>
-            <a:prstDash val="solid"/>
-          </a:ln>
-        </p:spPr>
-      </p:sp>
-      <p:sp>
-        <p:nvSpPr>
-          <p:cNvPr id="47" name="Text 45"/>
-          <p:cNvSpPr/>
-          <p:nvPr/>
-        </p:nvSpPr>
-        <p:spPr>
-          <a:xfrm>
-            <a:off x="1951828" y="4169664"/>
-            <a:ext cx="603504" cy="475488"/>
-          </a:xfrm>
-          <a:prstGeom prst="rect">
-            <a:avLst/>
-          </a:prstGeom>
-          <a:noFill/>
-          <a:ln/>
-        </p:spPr>
-        <p:txBody>
-          <a:bodyPr wrap="square" lIns="0" tIns="0" rIns="0" bIns="0" rtlCol="0" anchor="ctr"/>
-          <a:lstStyle/>
-          <a:p>
-            <a:pPr algn="ctr" indent="0" marL="0">
-              <a:buNone/>
-            </a:pPr>
-            <a:r>
-              <a:rPr lang="en-US" sz="900" b="1" dirty="0">
-                <a:solidFill>
-                  <a:srgbClr val="9D174D"/>
-                </a:solidFill>
-                <a:latin typeface="Trebuchet MS" pitchFamily="34" charset="0"/>
-                <a:ea typeface="Trebuchet MS" pitchFamily="34" charset="-122"/>
-                <a:cs typeface="Trebuchet MS" pitchFamily="34" charset="-120"/>
-              </a:rPr>
-              <a:t>u</a:t>
-            </a:r>
-            <a:endParaRPr lang="en-US" sz="900" dirty="0"/>
-          </a:p>
-        </p:txBody>
-      </p:sp>
-      <p:sp>
-        <p:nvSpPr>
-          <p:cNvPr id="48" name="Shape 46"/>
-          <p:cNvSpPr/>
-          <p:nvPr/>
-        </p:nvSpPr>
-        <p:spPr>
-          <a:xfrm>
-            <a:off x="2605209" y="4169664"/>
-            <a:ext cx="603504" cy="475488"/>
-          </a:xfrm>
-          <a:prstGeom prst="rect">
-            <a:avLst>
-              <a:gd name="adj" fmla="val 7692"/>
-            </a:avLst>
-          </a:prstGeom>
-          <a:solidFill>
-            <a:srgbClr val="FFFFFF"/>
-          </a:solidFill>
-          <a:ln w="12700">
-            <a:solidFill>
-              <a:srgbClr val="DB2777"/>
-            </a:solidFill>
-            <a:prstDash val="solid"/>
-          </a:ln>
-        </p:spPr>
-      </p:sp>
-      <p:sp>
-        <p:nvSpPr>
-          <p:cNvPr id="49" name="Text 47"/>
-          <p:cNvSpPr/>
-          <p:nvPr/>
-        </p:nvSpPr>
-        <p:spPr>
-          <a:xfrm>
-            <a:off x="2605209" y="4169664"/>
-            <a:ext cx="603504" cy="475488"/>
-          </a:xfrm>
-          <a:prstGeom prst="rect">
-            <a:avLst/>
-          </a:prstGeom>
-          <a:noFill/>
-          <a:ln/>
-        </p:spPr>
-        <p:txBody>
-          <a:bodyPr wrap="square" lIns="0" tIns="0" rIns="0" bIns="0" rtlCol="0" anchor="ctr"/>
-          <a:lstStyle/>
-          <a:p>
-            <a:pPr algn="ctr" indent="0" marL="0">
-              <a:buNone/>
-            </a:pPr>
-            <a:r>
-              <a:rPr lang="en-US" sz="900" b="1" dirty="0">
-                <a:solidFill>
-                  <a:srgbClr val="9D174D"/>
-                </a:solidFill>
-                <a:latin typeface="Trebuchet MS" pitchFamily="34" charset="0"/>
-                <a:ea typeface="Trebuchet MS" pitchFamily="34" charset="-122"/>
-                <a:cs typeface="Trebuchet MS" pitchFamily="34" charset="-120"/>
-              </a:rPr>
-              <a:t>n</a:t>
-            </a:r>
-            <a:endParaRPr lang="en-US" sz="900" dirty="0"/>
-          </a:p>
-        </p:txBody>
-      </p:sp>
-      <p:sp>
-        <p:nvSpPr>
-          <p:cNvPr id="50" name="Shape 48"/>
-          <p:cNvSpPr/>
-          <p:nvPr/>
-        </p:nvSpPr>
-        <p:spPr>
-          <a:xfrm>
-            <a:off x="3258589" y="4169664"/>
-            <a:ext cx="603504" cy="475488"/>
-          </a:xfrm>
-          <a:prstGeom prst="rect">
-            <a:avLst>
-              <a:gd name="adj" fmla="val 7692"/>
-            </a:avLst>
-          </a:prstGeom>
-          <a:solidFill>
-            <a:srgbClr val="FFFFFF"/>
-          </a:solidFill>
-          <a:ln w="12700">
-            <a:solidFill>
-              <a:srgbClr val="DB2777"/>
-            </a:solidFill>
-            <a:prstDash val="solid"/>
-          </a:ln>
-        </p:spPr>
-      </p:sp>
-      <p:sp>
-        <p:nvSpPr>
-          <p:cNvPr id="51" name="Text 49"/>
-          <p:cNvSpPr/>
-          <p:nvPr/>
-        </p:nvSpPr>
-        <p:spPr>
-          <a:xfrm>
-            <a:off x="3258589" y="4169664"/>
-            <a:ext cx="603504" cy="475488"/>
-          </a:xfrm>
-          <a:prstGeom prst="rect">
-            <a:avLst/>
-          </a:prstGeom>
-          <a:noFill/>
-          <a:ln/>
-        </p:spPr>
-        <p:txBody>
-          <a:bodyPr wrap="square" lIns="0" tIns="0" rIns="0" bIns="0" rtlCol="0" anchor="ctr"/>
-          <a:lstStyle/>
-          <a:p>
-            <a:pPr algn="ctr" indent="0" marL="0">
-              <a:buNone/>
-            </a:pPr>
-            <a:r>
-              <a:rPr lang="en-US" sz="900" b="1" dirty="0">
-                <a:solidFill>
-                  <a:srgbClr val="9D174D"/>
-                </a:solidFill>
-                <a:latin typeface="Trebuchet MS" pitchFamily="34" charset="0"/>
-                <a:ea typeface="Trebuchet MS" pitchFamily="34" charset="-122"/>
-                <a:cs typeface="Trebuchet MS" pitchFamily="34" charset="-120"/>
-              </a:rPr>
-              <a:t>cl</a:t>
-            </a:r>
-            <a:endParaRPr lang="en-US" sz="900" dirty="0"/>
-          </a:p>
-        </p:txBody>
-      </p:sp>
-      <p:sp>
-        <p:nvSpPr>
-          <p:cNvPr id="52" name="Shape 50"/>
-          <p:cNvSpPr/>
-          <p:nvPr/>
-        </p:nvSpPr>
-        <p:spPr>
-          <a:xfrm>
-            <a:off x="3911969" y="4169664"/>
-            <a:ext cx="603504" cy="475488"/>
-          </a:xfrm>
-          <a:prstGeom prst="rect">
-            <a:avLst>
-              <a:gd name="adj" fmla="val 7692"/>
-            </a:avLst>
-          </a:prstGeom>
-          <a:solidFill>
-            <a:srgbClr val="FFFFFF"/>
-          </a:solidFill>
-          <a:ln w="12700">
-            <a:solidFill>
-              <a:srgbClr val="DB2777"/>
-            </a:solidFill>
-            <a:prstDash val="solid"/>
-          </a:ln>
-        </p:spPr>
-      </p:sp>
-      <p:sp>
-        <p:nvSpPr>
-          <p:cNvPr id="53" name="Text 51"/>
-          <p:cNvSpPr/>
-          <p:nvPr/>
-        </p:nvSpPr>
-        <p:spPr>
-          <a:xfrm>
-            <a:off x="3911969" y="4169664"/>
-            <a:ext cx="603504" cy="475488"/>
-          </a:xfrm>
-          <a:prstGeom prst="rect">
-            <a:avLst/>
-          </a:prstGeom>
-          <a:noFill/>
-          <a:ln/>
-        </p:spPr>
-        <p:txBody>
-          <a:bodyPr wrap="square" lIns="0" tIns="0" rIns="0" bIns="0" rtlCol="0" anchor="ctr"/>
-          <a:lstStyle/>
-          <a:p>
-            <a:pPr algn="ctr" indent="0" marL="0">
-              <a:buNone/>
-            </a:pPr>
-            <a:r>
-              <a:rPr lang="en-US" sz="900" b="1" dirty="0">
-                <a:solidFill>
-                  <a:srgbClr val="9D174D"/>
-                </a:solidFill>
-                <a:latin typeface="Trebuchet MS" pitchFamily="34" charset="0"/>
-                <a:ea typeface="Trebuchet MS" pitchFamily="34" charset="-122"/>
-                <a:cs typeface="Trebuchet MS" pitchFamily="34" charset="-120"/>
-              </a:rPr>
-              <a:t>ea</a:t>
-            </a:r>
-            <a:endParaRPr lang="en-US" sz="900" dirty="0"/>
-          </a:p>
-        </p:txBody>
-      </p:sp>
-      <p:sp>
-        <p:nvSpPr>
-          <p:cNvPr id="54" name="Shape 52"/>
-          <p:cNvSpPr/>
-          <p:nvPr/>
-        </p:nvSpPr>
-        <p:spPr>
-          <a:xfrm>
-            <a:off x="4565350" y="4169664"/>
-            <a:ext cx="603504" cy="475488"/>
-          </a:xfrm>
-          <a:prstGeom prst="rect">
-            <a:avLst>
-              <a:gd name="adj" fmla="val 7692"/>
-            </a:avLst>
-          </a:prstGeom>
-          <a:solidFill>
-            <a:srgbClr val="FFFFFF"/>
-          </a:solidFill>
-          <a:ln w="12700">
-            <a:solidFill>
-              <a:srgbClr val="DB2777"/>
-            </a:solidFill>
-            <a:prstDash val="solid"/>
-          </a:ln>
-        </p:spPr>
-      </p:sp>
-      <p:sp>
-        <p:nvSpPr>
-          <p:cNvPr id="55" name="Text 53"/>
-          <p:cNvSpPr/>
-          <p:nvPr/>
-        </p:nvSpPr>
-        <p:spPr>
-          <a:xfrm>
-            <a:off x="4565350" y="4169664"/>
-            <a:ext cx="603504" cy="475488"/>
-          </a:xfrm>
-          <a:prstGeom prst="rect">
-            <a:avLst/>
-          </a:prstGeom>
-          <a:noFill/>
-          <a:ln/>
-        </p:spPr>
-        <p:txBody>
-          <a:bodyPr wrap="square" lIns="0" tIns="0" rIns="0" bIns="0" rtlCol="0" anchor="ctr"/>
-          <a:lstStyle/>
-          <a:p>
-            <a:pPr algn="ctr" indent="0" marL="0">
-              <a:buNone/>
-            </a:pPr>
-            <a:r>
-              <a:rPr lang="en-US" sz="900" b="1" dirty="0">
-                <a:solidFill>
-                  <a:srgbClr val="9D174D"/>
-                </a:solidFill>
-                <a:latin typeface="Trebuchet MS" pitchFamily="34" charset="0"/>
-                <a:ea typeface="Trebuchet MS" pitchFamily="34" charset="-122"/>
-                <a:cs typeface="Trebuchet MS" pitchFamily="34" charset="-120"/>
-              </a:rPr>
-              <a:t>n</a:t>
-            </a:r>
-            <a:endParaRPr lang="en-US" sz="900" dirty="0"/>
-          </a:p>
-        </p:txBody>
-      </p:sp>
-      <p:sp>
-        <p:nvSpPr>
-          <p:cNvPr id="56" name="Shape 54"/>
-          <p:cNvSpPr/>
-          <p:nvPr/>
-        </p:nvSpPr>
-        <p:spPr>
-          <a:xfrm>
-            <a:off x="5218730" y="4169664"/>
-            <a:ext cx="603504" cy="475488"/>
-          </a:xfrm>
-          <a:prstGeom prst="rect">
-            <a:avLst>
-              <a:gd name="adj" fmla="val 7692"/>
-            </a:avLst>
-          </a:prstGeom>
-          <a:solidFill>
-            <a:srgbClr val="FFFFFF"/>
-          </a:solidFill>
-          <a:ln w="12700">
-            <a:solidFill>
-              <a:srgbClr val="DB2777"/>
-            </a:solidFill>
-            <a:prstDash val="solid"/>
-          </a:ln>
-        </p:spPr>
-      </p:sp>
-      <p:sp>
-        <p:nvSpPr>
-          <p:cNvPr id="57" name="Text 55"/>
-          <p:cNvSpPr/>
-          <p:nvPr/>
-        </p:nvSpPr>
-        <p:spPr>
-          <a:xfrm>
-            <a:off x="5218730" y="4169664"/>
-            <a:ext cx="603504" cy="475488"/>
-          </a:xfrm>
-          <a:prstGeom prst="rect">
-            <a:avLst/>
-          </a:prstGeom>
-          <a:noFill/>
-          <a:ln/>
-        </p:spPr>
-        <p:txBody>
-          <a:bodyPr wrap="square" lIns="0" tIns="0" rIns="0" bIns="0" rtlCol="0" anchor="ctr"/>
-          <a:lstStyle/>
-          <a:p>
-            <a:pPr algn="ctr" indent="0" marL="0">
-              <a:buNone/>
-            </a:pPr>
-            <a:r>
-              <a:rPr lang="en-US" sz="900" b="1" dirty="0">
-                <a:solidFill>
-                  <a:srgbClr val="9D174D"/>
-                </a:solidFill>
-                <a:latin typeface="Trebuchet MS" pitchFamily="34" charset="0"/>
-                <a:ea typeface="Trebuchet MS" pitchFamily="34" charset="-122"/>
-                <a:cs typeface="Trebuchet MS" pitchFamily="34" charset="-120"/>
-              </a:rPr>
-              <a:t>l</a:t>
-            </a:r>
-            <a:endParaRPr lang="en-US" sz="900" dirty="0"/>
-          </a:p>
-        </p:txBody>
-      </p:sp>
-      <p:sp>
-        <p:nvSpPr>
-          <p:cNvPr id="58" name="Shape 56"/>
-          <p:cNvSpPr/>
-          <p:nvPr/>
-        </p:nvSpPr>
-        <p:spPr>
-          <a:xfrm>
-            <a:off x="5872111" y="4169664"/>
-            <a:ext cx="603504" cy="475488"/>
-          </a:xfrm>
-          <a:prstGeom prst="rect">
-            <a:avLst>
-              <a:gd name="adj" fmla="val 7692"/>
-            </a:avLst>
-          </a:prstGeom>
-          <a:solidFill>
-            <a:srgbClr val="FFFFFF"/>
-          </a:solidFill>
-          <a:ln w="12700">
-            <a:solidFill>
-              <a:srgbClr val="DB2777"/>
-            </a:solidFill>
-            <a:prstDash val="solid"/>
-          </a:ln>
-        </p:spPr>
-      </p:sp>
-      <p:sp>
-        <p:nvSpPr>
-          <p:cNvPr id="59" name="Text 57"/>
-          <p:cNvSpPr/>
-          <p:nvPr/>
-        </p:nvSpPr>
-        <p:spPr>
-          <a:xfrm>
-            <a:off x="5872111" y="4169664"/>
-            <a:ext cx="603504" cy="475488"/>
-          </a:xfrm>
-          <a:prstGeom prst="rect">
-            <a:avLst/>
-          </a:prstGeom>
-          <a:noFill/>
-          <a:ln/>
-        </p:spPr>
-        <p:txBody>
-          <a:bodyPr wrap="square" lIns="0" tIns="0" rIns="0" bIns="0" rtlCol="0" anchor="ctr"/>
-          <a:lstStyle/>
-          <a:p>
-            <a:pPr algn="ctr" indent="0" marL="0">
-              <a:buNone/>
-            </a:pPr>
-            <a:r>
-              <a:rPr lang="en-US" sz="900" b="1" dirty="0">
-                <a:solidFill>
-                  <a:srgbClr val="9D174D"/>
-                </a:solidFill>
-                <a:latin typeface="Trebuchet MS" pitchFamily="34" charset="0"/>
-                <a:ea typeface="Trebuchet MS" pitchFamily="34" charset="-122"/>
-                <a:cs typeface="Trebuchet MS" pitchFamily="34" charset="-120"/>
-              </a:rPr>
-              <a:t>i</a:t>
-            </a:r>
-            <a:endParaRPr lang="en-US" sz="900" dirty="0"/>
-          </a:p>
-        </p:txBody>
-      </p:sp>
-      <p:sp>
-        <p:nvSpPr>
-          <p:cNvPr id="60" name="Shape 58"/>
-          <p:cNvSpPr/>
-          <p:nvPr/>
-        </p:nvSpPr>
-        <p:spPr>
-          <a:xfrm>
-            <a:off x="6525491" y="4169664"/>
-            <a:ext cx="603504" cy="475488"/>
-          </a:xfrm>
-          <a:prstGeom prst="rect">
-            <a:avLst>
-              <a:gd name="adj" fmla="val 7692"/>
-            </a:avLst>
-          </a:prstGeom>
-          <a:solidFill>
-            <a:srgbClr val="FFFFFF"/>
-          </a:solidFill>
-          <a:ln w="12700">
-            <a:solidFill>
-              <a:srgbClr val="DB2777"/>
-            </a:solidFill>
-            <a:prstDash val="solid"/>
-          </a:ln>
-        </p:spPr>
-      </p:sp>
-      <p:sp>
-        <p:nvSpPr>
-          <p:cNvPr id="61" name="Text 59"/>
-          <p:cNvSpPr/>
-          <p:nvPr/>
-        </p:nvSpPr>
-        <p:spPr>
-          <a:xfrm>
-            <a:off x="6525491" y="4169664"/>
-            <a:ext cx="603504" cy="475488"/>
-          </a:xfrm>
-          <a:prstGeom prst="rect">
-            <a:avLst/>
-          </a:prstGeom>
-          <a:noFill/>
-          <a:ln/>
-        </p:spPr>
-        <p:txBody>
-          <a:bodyPr wrap="square" lIns="0" tIns="0" rIns="0" bIns="0" rtlCol="0" anchor="ctr"/>
-          <a:lstStyle/>
-          <a:p>
-            <a:pPr algn="ctr" indent="0" marL="0">
-              <a:buNone/>
-            </a:pPr>
-            <a:r>
-              <a:rPr lang="en-US" sz="900" b="1" dirty="0">
-                <a:solidFill>
-                  <a:srgbClr val="9D174D"/>
-                </a:solidFill>
-                <a:latin typeface="Trebuchet MS" pitchFamily="34" charset="0"/>
-                <a:ea typeface="Trebuchet MS" pitchFamily="34" charset="-122"/>
-                <a:cs typeface="Trebuchet MS" pitchFamily="34" charset="-120"/>
-              </a:rPr>
-              <a:t>n</a:t>
-            </a:r>
-            <a:endParaRPr lang="en-US" sz="900" dirty="0"/>
-          </a:p>
-        </p:txBody>
-      </p:sp>
-      <p:sp>
-        <p:nvSpPr>
-          <p:cNvPr id="62" name="Shape 60"/>
-          <p:cNvSpPr/>
-          <p:nvPr/>
-        </p:nvSpPr>
-        <p:spPr>
-          <a:xfrm>
-            <a:off x="7178871" y="4169664"/>
-            <a:ext cx="603504" cy="475488"/>
-          </a:xfrm>
-          <a:prstGeom prst="rect">
-            <a:avLst>
-              <a:gd name="adj" fmla="val 7692"/>
-            </a:avLst>
-          </a:prstGeom>
-          <a:solidFill>
-            <a:srgbClr val="FFFFFF"/>
-          </a:solidFill>
-          <a:ln w="12700">
-            <a:solidFill>
-              <a:srgbClr val="DB2777"/>
-            </a:solidFill>
-            <a:prstDash val="solid"/>
-          </a:ln>
-        </p:spPr>
-      </p:sp>
-      <p:sp>
-        <p:nvSpPr>
-          <p:cNvPr id="63" name="Text 61"/>
-          <p:cNvSpPr/>
-          <p:nvPr/>
-        </p:nvSpPr>
-        <p:spPr>
-          <a:xfrm>
-            <a:off x="7178871" y="4169664"/>
-            <a:ext cx="603504" cy="475488"/>
-          </a:xfrm>
-          <a:prstGeom prst="rect">
-            <a:avLst/>
-          </a:prstGeom>
-          <a:noFill/>
-          <a:ln/>
-        </p:spPr>
-        <p:txBody>
-          <a:bodyPr wrap="square" lIns="0" tIns="0" rIns="0" bIns="0" rtlCol="0" anchor="ctr"/>
-          <a:lstStyle/>
-          <a:p>
-            <a:pPr algn="ctr" indent="0" marL="0">
-              <a:buNone/>
-            </a:pPr>
-            <a:r>
-              <a:rPr lang="en-US" sz="900" b="1" dirty="0">
-                <a:solidFill>
-                  <a:srgbClr val="9D174D"/>
-                </a:solidFill>
-                <a:latin typeface="Trebuchet MS" pitchFamily="34" charset="0"/>
-                <a:ea typeface="Trebuchet MS" pitchFamily="34" charset="-122"/>
-                <a:cs typeface="Trebuchet MS" pitchFamily="34" charset="-120"/>
-              </a:rPr>
-              <a:t>e</a:t>
-            </a:r>
-            <a:endParaRPr lang="en-US" sz="900" dirty="0"/>
-          </a:p>
-        </p:txBody>
-      </p:sp>
-      <p:sp>
-        <p:nvSpPr>
-          <p:cNvPr id="64" name="Shape 62"/>
-          <p:cNvSpPr/>
-          <p:nvPr/>
-        </p:nvSpPr>
-        <p:spPr>
-          <a:xfrm>
-            <a:off x="7832252" y="4169664"/>
-            <a:ext cx="603504" cy="475488"/>
-          </a:xfrm>
-          <a:prstGeom prst="rect">
-            <a:avLst>
-              <a:gd name="adj" fmla="val 7692"/>
-            </a:avLst>
-          </a:prstGeom>
-          <a:solidFill>
-            <a:srgbClr val="FFFFFF"/>
-          </a:solidFill>
-          <a:ln w="12700">
-            <a:solidFill>
-              <a:srgbClr val="DB2777"/>
-            </a:solidFill>
-            <a:prstDash val="solid"/>
-          </a:ln>
-        </p:spPr>
-      </p:sp>
-      <p:sp>
-        <p:nvSpPr>
-          <p:cNvPr id="65" name="Text 63"/>
-          <p:cNvSpPr/>
-          <p:nvPr/>
-        </p:nvSpPr>
-        <p:spPr>
-          <a:xfrm>
-            <a:off x="7832252" y="4169664"/>
-            <a:ext cx="603504" cy="475488"/>
-          </a:xfrm>
-          <a:prstGeom prst="rect">
-            <a:avLst/>
-          </a:prstGeom>
-          <a:noFill/>
-          <a:ln/>
-        </p:spPr>
-        <p:txBody>
-          <a:bodyPr wrap="square" lIns="0" tIns="0" rIns="0" bIns="0" rtlCol="0" anchor="ctr"/>
-          <a:lstStyle/>
-          <a:p>
-            <a:pPr algn="ctr" indent="0" marL="0">
-              <a:buNone/>
-            </a:pPr>
-            <a:r>
-              <a:rPr lang="en-US" sz="900" b="1" dirty="0">
-                <a:solidFill>
-                  <a:srgbClr val="9D174D"/>
-                </a:solidFill>
-                <a:latin typeface="Trebuchet MS" pitchFamily="34" charset="0"/>
-                <a:ea typeface="Trebuchet MS" pitchFamily="34" charset="-122"/>
-                <a:cs typeface="Trebuchet MS" pitchFamily="34" charset="-120"/>
-              </a:rPr>
-              <a:t>ss</a:t>
+              <a:t>ng</a:t>
             </a:r>
             <a:endParaRPr lang="en-US" sz="900" dirty="0"/>
           </a:p>
@@ -32661,7 +31254,7 @@
                 <a:ea typeface="Calibri" pitchFamily="34" charset="-122"/>
                 <a:cs typeface="Calibri" pitchFamily="34" charset="-120"/>
               </a:rPr>
-              <a:t>Word Labs  •  wordlabs.app  •  Root: 'clean' = free from dirt, pure</a:t>
+              <a:t>Word Labs  •  wordlabs.app  •  Root: 'clean' = free from dirt or impurity</a:t>
             </a:r>
             <a:endParaRPr lang="en-US" sz="800" dirty="0"/>
           </a:p>
@@ -33830,7 +32423,7 @@
                 <a:ea typeface="Calibri" pitchFamily="34" charset="-122"/>
                 <a:cs typeface="Calibri" pitchFamily="34" charset="-120"/>
               </a:rPr>
-              <a:t>Word Labs  •  wordlabs.app  •  Root: 'clean' = free from dirt, pure</a:t>
+              <a:t>Word Labs  •  wordlabs.app  •  Root: 'clean' = free from dirt or impurity</a:t>
             </a:r>
             <a:endParaRPr lang="en-US" sz="800" dirty="0"/>
           </a:p>
@@ -34476,7 +33069,7 @@
                 <a:ea typeface="Trebuchet MS" pitchFamily="34" charset="-122"/>
                 <a:cs typeface="Trebuchet MS" pitchFamily="34" charset="-120"/>
               </a:rPr>
-              <a:t>pre-</a:t>
+              <a:t>squeaky-</a:t>
             </a:r>
             <a:endParaRPr lang="en-US" sz="1300" dirty="0"/>
           </a:p>
@@ -34629,7 +33222,7 @@
                 <a:ea typeface="Trebuchet MS" pitchFamily="34" charset="-122"/>
                 <a:cs typeface="Trebuchet MS" pitchFamily="34" charset="-120"/>
               </a:rPr>
-              <a:t>self-</a:t>
+              <a:t>dry-</a:t>
             </a:r>
             <a:endParaRPr lang="en-US" sz="1300" dirty="0"/>
           </a:p>
@@ -34782,7 +33375,7 @@
                 <a:ea typeface="Trebuchet MS" pitchFamily="34" charset="-122"/>
                 <a:cs typeface="Trebuchet MS" pitchFamily="34" charset="-120"/>
               </a:rPr>
-              <a:t>steam-</a:t>
+              <a:t>spring-</a:t>
             </a:r>
             <a:endParaRPr lang="en-US" sz="1300" dirty="0"/>
           </a:p>
@@ -35240,7 +33833,7 @@
                 <a:ea typeface="Trebuchet MS" pitchFamily="34" charset="-122"/>
                 <a:cs typeface="Trebuchet MS" pitchFamily="34" charset="-120"/>
               </a:rPr>
-              <a:t>unclean</a:t>
+              <a:t>cleaning</a:t>
             </a:r>
             <a:endParaRPr lang="en-US" sz="1200" dirty="0"/>
           </a:p>
@@ -35306,7 +33899,7 @@
                 <a:ea typeface="Trebuchet MS" pitchFamily="34" charset="-122"/>
                 <a:cs typeface="Trebuchet MS" pitchFamily="34" charset="-120"/>
               </a:rPr>
-              <a:t>reclean</a:t>
+              <a:t>unclean</a:t>
             </a:r>
             <a:endParaRPr lang="en-US" sz="1200" dirty="0"/>
           </a:p>
@@ -35372,7 +33965,7 @@
                 <a:ea typeface="Trebuchet MS" pitchFamily="34" charset="-122"/>
                 <a:cs typeface="Trebuchet MS" pitchFamily="34" charset="-120"/>
               </a:rPr>
-              <a:t>cleaning</a:t>
+              <a:t>reclean</a:t>
             </a:r>
             <a:endParaRPr lang="en-US" sz="1200" dirty="0"/>
           </a:p>
@@ -35438,7 +34031,7 @@
                 <a:ea typeface="Trebuchet MS" pitchFamily="34" charset="-122"/>
                 <a:cs typeface="Trebuchet MS" pitchFamily="34" charset="-120"/>
               </a:rPr>
-              <a:t>cleanness</a:t>
+              <a:t>cleanse</a:t>
             </a:r>
             <a:endParaRPr lang="en-US" sz="1200" dirty="0"/>
           </a:p>
@@ -35730,7 +34323,7 @@
                 <a:ea typeface="Calibri" pitchFamily="34" charset="-122"/>
                 <a:cs typeface="Calibri" pitchFamily="34" charset="-120"/>
               </a:rPr>
-              <a:t>Word Labs  •  wordlabs.app  •  Root: 'clean' = free from dirt, pure</a:t>
+              <a:t>Word Labs  •  wordlabs.app  •  Root: 'clean' = free from dirt or impurity</a:t>
             </a:r>
             <a:endParaRPr lang="en-US" sz="800" dirty="0"/>
           </a:p>
@@ -35894,7 +34487,7 @@
                 <a:ea typeface="Calibri" pitchFamily="34" charset="-122"/>
                 <a:cs typeface="Calibri" pitchFamily="34" charset="-120"/>
               </a:rPr>
-              <a:t>The core part of a word carrying its basic meaning. For example, 'clean' means 'free from dirt, pure'.</a:t>
+              <a:t>The core part of a word carrying its basic meaning. For example, 'clean' means 'free from dirt or impurity'.</a:t>
             </a:r>
             <a:endParaRPr lang="en-US" sz="1350" dirty="0"/>
           </a:p>
@@ -36514,7 +35107,7 @@
                 <a:ea typeface="Calibri" pitchFamily="34" charset="-122"/>
                 <a:cs typeface="Calibri" pitchFamily="34" charset="-120"/>
               </a:rPr>
-              <a:t>Word Labs  •  wordlabs.app  •  Root: 'clean' = free from dirt, pure</a:t>
+              <a:t>Word Labs  •  wordlabs.app  •  Root: 'clean' = free from dirt or impurity</a:t>
             </a:r>
             <a:endParaRPr lang="en-US" sz="800" dirty="0"/>
           </a:p>
@@ -36626,7 +35219,7 @@
                 <a:ea typeface="Calibri" pitchFamily="34" charset="-122"/>
                 <a:cs typeface="Calibri" pitchFamily="34" charset="-120"/>
               </a:rPr>
-              <a:t>1.  The word 'unclean' means not clean or dirty.</a:t>
+              <a:t>1.  The word 'unclean' uses the prefix 'un' to mean 'not clean'.</a:t>
             </a:r>
             <a:endParaRPr lang="en-US" sz="1300" dirty="0"/>
           </a:p>
@@ -36765,7 +35358,7 @@
                 <a:ea typeface="Calibri" pitchFamily="34" charset="-122"/>
                 <a:cs typeface="Calibri" pitchFamily="34" charset="-120"/>
               </a:rPr>
-              <a:t>2.  The root 'clean' comes from a Greek word.</a:t>
+              <a:t>2.  The word 'cleaner' can describe a person whose job is to remove dirt.</a:t>
             </a:r>
             <a:endParaRPr lang="en-US" sz="1300" dirty="0"/>
           </a:p>
@@ -36788,11 +35381,11 @@
             </a:avLst>
           </a:prstGeom>
           <a:solidFill>
-            <a:srgbClr val="FEE2E2"/>
-          </a:solidFill>
-          <a:ln w="12700">
-            <a:solidFill>
-              <a:srgbClr val="DC2626"/>
+            <a:srgbClr val="DCFCE7"/>
+          </a:solidFill>
+          <a:ln w="12700">
+            <a:solidFill>
+              <a:srgbClr val="16A34A"/>
             </a:solidFill>
             <a:prstDash val="solid"/>
           </a:ln>
@@ -36825,13 +35418,13 @@
             <a:r>
               <a:rPr lang="en-US" sz="1100" b="1" dirty="0">
                 <a:solidFill>
-                  <a:srgbClr val="DC2626"/>
+                  <a:srgbClr val="16A34A"/>
                 </a:solidFill>
                 <a:latin typeface="Trebuchet MS" pitchFamily="34" charset="0"/>
                 <a:ea typeface="Trebuchet MS" pitchFamily="34" charset="-122"/>
                 <a:cs typeface="Trebuchet MS" pitchFamily="34" charset="-120"/>
               </a:rPr>
-              <a:t>FALSE</a:t>
+              <a:t>TRUE</a:t>
             </a:r>
             <a:endParaRPr lang="en-US" sz="1100" dirty="0"/>
           </a:p>
@@ -36904,7 +35497,7 @@
                 <a:ea typeface="Calibri" pitchFamily="34" charset="-122"/>
                 <a:cs typeface="Calibri" pitchFamily="34" charset="-120"/>
               </a:rPr>
-              <a:t>3.  Adding '-ly' to 'clean' makes an adverb meaning in a clean way.</a:t>
+              <a:t>3.  The root 'clean' comes from a Greek word meaning 'to wash'.</a:t>
             </a:r>
             <a:endParaRPr lang="en-US" sz="1300" dirty="0"/>
           </a:p>
@@ -36927,11 +35520,11 @@
             </a:avLst>
           </a:prstGeom>
           <a:solidFill>
-            <a:srgbClr val="DCFCE7"/>
-          </a:solidFill>
-          <a:ln w="12700">
-            <a:solidFill>
-              <a:srgbClr val="16A34A"/>
+            <a:srgbClr val="FEE2E2"/>
+          </a:solidFill>
+          <a:ln w="12700">
+            <a:solidFill>
+              <a:srgbClr val="DC2626"/>
             </a:solidFill>
             <a:prstDash val="solid"/>
           </a:ln>
@@ -36964,13 +35557,13 @@
             <a:r>
               <a:rPr lang="en-US" sz="1100" b="1" dirty="0">
                 <a:solidFill>
-                  <a:srgbClr val="16A34A"/>
+                  <a:srgbClr val="DC2626"/>
                 </a:solidFill>
                 <a:latin typeface="Trebuchet MS" pitchFamily="34" charset="0"/>
                 <a:ea typeface="Trebuchet MS" pitchFamily="34" charset="-122"/>
                 <a:cs typeface="Trebuchet MS" pitchFamily="34" charset="-120"/>
               </a:rPr>
-              <a:t>TRUE</a:t>
+              <a:t>FALSE</a:t>
             </a:r>
             <a:endParaRPr lang="en-US" sz="1100" dirty="0"/>
           </a:p>
@@ -37043,7 +35636,7 @@
                 <a:ea typeface="Calibri" pitchFamily="34" charset="-122"/>
                 <a:cs typeface="Calibri" pitchFamily="34" charset="-120"/>
               </a:rPr>
-              <a:t>4.  The word 'cleanliness' contains the root 'clean'.</a:t>
+              <a:t>4.  The suffix '-ly' in 'cleanly' changes the word to mean 'the most clean'.</a:t>
             </a:r>
             <a:endParaRPr lang="en-US" sz="1300" dirty="0"/>
           </a:p>
@@ -37066,11 +35659,11 @@
             </a:avLst>
           </a:prstGeom>
           <a:solidFill>
-            <a:srgbClr val="DCFCE7"/>
-          </a:solidFill>
-          <a:ln w="12700">
-            <a:solidFill>
-              <a:srgbClr val="16A34A"/>
+            <a:srgbClr val="FEE2E2"/>
+          </a:solidFill>
+          <a:ln w="12700">
+            <a:solidFill>
+              <a:srgbClr val="DC2626"/>
             </a:solidFill>
             <a:prstDash val="solid"/>
           </a:ln>
@@ -37103,13 +35696,13 @@
             <a:r>
               <a:rPr lang="en-US" sz="1100" b="1" dirty="0">
                 <a:solidFill>
-                  <a:srgbClr val="16A34A"/>
+                  <a:srgbClr val="DC2626"/>
                 </a:solidFill>
                 <a:latin typeface="Trebuchet MS" pitchFamily="34" charset="0"/>
                 <a:ea typeface="Trebuchet MS" pitchFamily="34" charset="-122"/>
                 <a:cs typeface="Trebuchet MS" pitchFamily="34" charset="-120"/>
               </a:rPr>
-              <a:t>TRUE</a:t>
+              <a:t>FALSE</a:t>
             </a:r>
             <a:endParaRPr lang="en-US" sz="1100" dirty="0"/>
           </a:p>
@@ -37182,7 +35775,7 @@
                 <a:ea typeface="Calibri" pitchFamily="34" charset="-122"/>
                 <a:cs typeface="Calibri" pitchFamily="34" charset="-120"/>
               </a:rPr>
-              <a:t>5.  The word 'cleaner' means the same thing as 'cleanest'.</a:t>
+              <a:t>5.  Adding the suffix '-ness' to 'clean' makes the noun 'cleanliness'.</a:t>
             </a:r>
             <a:endParaRPr lang="en-US" sz="1300" dirty="0"/>
           </a:p>
@@ -37205,11 +35798,11 @@
             </a:avLst>
           </a:prstGeom>
           <a:solidFill>
-            <a:srgbClr val="FEE2E2"/>
-          </a:solidFill>
-          <a:ln w="12700">
-            <a:solidFill>
-              <a:srgbClr val="DC2626"/>
+            <a:srgbClr val="DCFCE7"/>
+          </a:solidFill>
+          <a:ln w="12700">
+            <a:solidFill>
+              <a:srgbClr val="16A34A"/>
             </a:solidFill>
             <a:prstDash val="solid"/>
           </a:ln>
@@ -37242,13 +35835,13 @@
             <a:r>
               <a:rPr lang="en-US" sz="1100" b="1" dirty="0">
                 <a:solidFill>
-                  <a:srgbClr val="DC2626"/>
+                  <a:srgbClr val="16A34A"/>
                 </a:solidFill>
                 <a:latin typeface="Trebuchet MS" pitchFamily="34" charset="0"/>
                 <a:ea typeface="Trebuchet MS" pitchFamily="34" charset="-122"/>
                 <a:cs typeface="Trebuchet MS" pitchFamily="34" charset="-120"/>
               </a:rPr>
-              <a:t>FALSE</a:t>
+              <a:t>TRUE</a:t>
             </a:r>
             <a:endParaRPr lang="en-US" sz="1100" dirty="0"/>
           </a:p>
@@ -37540,7 +36133,7 @@
                 <a:ea typeface="Calibri" pitchFamily="34" charset="-122"/>
                 <a:cs typeface="Calibri" pitchFamily="34" charset="-120"/>
               </a:rPr>
-              <a:t>Word Labs  •  wordlabs.app  •  Root: 'clean' = free from dirt, pure</a:t>
+              <a:t>Word Labs  •  wordlabs.app  •  Root: 'clean' = free from dirt or impurity</a:t>
             </a:r>
             <a:endParaRPr lang="en-US" sz="800" dirty="0"/>
           </a:p>
@@ -37677,7 +36270,7 @@
                 <a:ea typeface="Trebuchet MS" pitchFamily="34" charset="-122"/>
                 <a:cs typeface="Trebuchet MS" pitchFamily="34" charset="-120"/>
               </a:rPr>
-              <a:t>free from dirt, pure</a:t>
+              <a:t>free from dirt or impurity</a:t>
             </a:r>
             <a:endParaRPr lang="en-US" sz="2000" dirty="0"/>
           </a:p>
@@ -38085,7 +36678,7 @@
                 <a:ea typeface="Trebuchet MS" pitchFamily="34" charset="-122"/>
                 <a:cs typeface="Trebuchet MS" pitchFamily="34" charset="-120"/>
               </a:rPr>
-              <a:t>unclean</a:t>
+              <a:t>cleaning</a:t>
             </a:r>
             <a:endParaRPr lang="en-US" sz="1300" dirty="0"/>
           </a:p>
@@ -38151,7 +36744,7 @@
                 <a:ea typeface="Trebuchet MS" pitchFamily="34" charset="-122"/>
                 <a:cs typeface="Trebuchet MS" pitchFamily="34" charset="-120"/>
               </a:rPr>
-              <a:t>reclean</a:t>
+              <a:t>unclean</a:t>
             </a:r>
             <a:endParaRPr lang="en-US" sz="1300" dirty="0"/>
           </a:p>
@@ -38217,7 +36810,7 @@
                 <a:ea typeface="Trebuchet MS" pitchFamily="34" charset="-122"/>
                 <a:cs typeface="Trebuchet MS" pitchFamily="34" charset="-120"/>
               </a:rPr>
-              <a:t>cleaning</a:t>
+              <a:t>reclean</a:t>
             </a:r>
             <a:endParaRPr lang="en-US" sz="1300" dirty="0"/>
           </a:p>
@@ -38509,7 +37102,7 @@
                 <a:ea typeface="Calibri" pitchFamily="34" charset="-122"/>
                 <a:cs typeface="Calibri" pitchFamily="34" charset="-120"/>
               </a:rPr>
-              <a:t>Word Labs  •  wordlabs.app  •  Root: 'clean' = free from dirt, pure</a:t>
+              <a:t>Word Labs  •  wordlabs.app  •  Root: 'clean' = free from dirt or impurity</a:t>
             </a:r>
             <a:endParaRPr lang="en-US" sz="800" dirty="0"/>
           </a:p>
@@ -39155,7 +37748,7 @@
                 <a:ea typeface="Trebuchet MS" pitchFamily="34" charset="-122"/>
                 <a:cs typeface="Trebuchet MS" pitchFamily="34" charset="-120"/>
               </a:rPr>
-              <a:t>pre-</a:t>
+              <a:t>squeaky-</a:t>
             </a:r>
             <a:endParaRPr lang="en-US" sz="1300" dirty="0"/>
           </a:p>
@@ -39308,7 +37901,7 @@
                 <a:ea typeface="Trebuchet MS" pitchFamily="34" charset="-122"/>
                 <a:cs typeface="Trebuchet MS" pitchFamily="34" charset="-120"/>
               </a:rPr>
-              <a:t>self-</a:t>
+              <a:t>dry-</a:t>
             </a:r>
             <a:endParaRPr lang="en-US" sz="1300" dirty="0"/>
           </a:p>
@@ -39461,7 +38054,7 @@
                 <a:ea typeface="Trebuchet MS" pitchFamily="34" charset="-122"/>
                 <a:cs typeface="Trebuchet MS" pitchFamily="34" charset="-120"/>
               </a:rPr>
-              <a:t>steam-</a:t>
+              <a:t>spring-</a:t>
             </a:r>
             <a:endParaRPr lang="en-US" sz="1300" dirty="0"/>
           </a:p>
@@ -40283,7 +38876,7 @@
                 <a:ea typeface="Calibri" pitchFamily="34" charset="-122"/>
                 <a:cs typeface="Calibri" pitchFamily="34" charset="-120"/>
               </a:rPr>
-              <a:t>Word Labs  •  wordlabs.app  •  Root: 'clean' = free from dirt, pure</a:t>
+              <a:t>Word Labs  •  wordlabs.app  •  Root: 'clean' = free from dirt or impurity</a:t>
             </a:r>
             <a:endParaRPr lang="en-US" sz="800" dirty="0"/>
           </a:p>
@@ -40461,7 +39054,7 @@
                 <a:ea typeface="Calibri" pitchFamily="34" charset="-122"/>
                 <a:cs typeface="Calibri" pitchFamily="34" charset="-120"/>
               </a:rPr>
-              <a:t>The action of making something free from dirt.</a:t>
+              <a:t>To clean something again because it wasn't clean enough the first time.</a:t>
             </a:r>
             <a:endParaRPr lang="en-US" sz="1200" dirty="0"/>
           </a:p>
@@ -40600,7 +39193,7 @@
                 <a:ea typeface="Calibri" pitchFamily="34" charset="-122"/>
                 <a:cs typeface="Calibri" pitchFamily="34" charset="-120"/>
               </a:rPr>
-              <a:t>The habit of keeping yourself or things free from dirt.</a:t>
+              <a:t>The habit or quality of keeping things clean and free from dirt.</a:t>
             </a:r>
             <a:endParaRPr lang="en-US" sz="1200" dirty="0"/>
           </a:p>
@@ -40739,7 +39332,7 @@
                 <a:ea typeface="Calibri" pitchFamily="34" charset="-122"/>
                 <a:cs typeface="Calibri" pitchFamily="34" charset="-120"/>
               </a:rPr>
-              <a:t>To clean something again because it wasn't clean enough.</a:t>
+              <a:t>Not clean; dirty or impure.</a:t>
             </a:r>
             <a:endParaRPr lang="en-US" sz="1200" dirty="0"/>
           </a:p>
@@ -40878,7 +39471,7 @@
                 <a:ea typeface="Calibri" pitchFamily="34" charset="-122"/>
                 <a:cs typeface="Calibri" pitchFamily="34" charset="-120"/>
               </a:rPr>
-              <a:t>Not clean; dirty or impure.</a:t>
+              <a:t>The act of removing dirt or mess from something.</a:t>
             </a:r>
             <a:endParaRPr lang="en-US" sz="1200" dirty="0"/>
           </a:p>
@@ -40951,7 +39544,7 @@
                 <a:ea typeface="Trebuchet MS" pitchFamily="34" charset="-122"/>
                 <a:cs typeface="Trebuchet MS" pitchFamily="34" charset="-120"/>
               </a:rPr>
-              <a:t>unclean</a:t>
+              <a:t>cleaning</a:t>
             </a:r>
             <a:endParaRPr lang="en-US" sz="1200" dirty="0"/>
           </a:p>
@@ -41017,7 +39610,7 @@
                 <a:ea typeface="Calibri" pitchFamily="34" charset="-122"/>
                 <a:cs typeface="Calibri" pitchFamily="34" charset="-120"/>
               </a:rPr>
-              <a:t>A person or machine that removes dirt and mess.</a:t>
+              <a:t>A person or thing that removes dirt and makes something clean.</a:t>
             </a:r>
             <a:endParaRPr lang="en-US" sz="1200" dirty="0"/>
           </a:p>
@@ -41090,7 +39683,7 @@
                 <a:ea typeface="Trebuchet MS" pitchFamily="34" charset="-122"/>
                 <a:cs typeface="Trebuchet MS" pitchFamily="34" charset="-120"/>
               </a:rPr>
-              <a:t>reclean</a:t>
+              <a:t>unclean</a:t>
             </a:r>
             <a:endParaRPr lang="en-US" sz="1200" dirty="0"/>
           </a:p>
@@ -41156,7 +39749,7 @@
                 <a:ea typeface="Calibri" pitchFamily="34" charset="-122"/>
                 <a:cs typeface="Calibri" pitchFamily="34" charset="-120"/>
               </a:rPr>
-              <a:t>In a neat and tidy way, without making a mess.</a:t>
+              <a:t>In a clean and tidy way, without making a mess.</a:t>
             </a:r>
             <a:endParaRPr lang="en-US" sz="1200" dirty="0"/>
           </a:p>
@@ -41229,7 +39822,7 @@
                 <a:ea typeface="Trebuchet MS" pitchFamily="34" charset="-122"/>
                 <a:cs typeface="Trebuchet MS" pitchFamily="34" charset="-120"/>
               </a:rPr>
-              <a:t>cleaning</a:t>
+              <a:t>reclean</a:t>
             </a:r>
             <a:endParaRPr lang="en-US" sz="1200" dirty="0"/>
           </a:p>
@@ -41295,7 +39888,7 @@
                 <a:ea typeface="Calibri" pitchFamily="34" charset="-122"/>
                 <a:cs typeface="Calibri" pitchFamily="34" charset="-120"/>
               </a:rPr>
-              <a:t>The most free from dirt of all things being compared.</a:t>
+              <a:t>The most clean of all — not dirty at all.</a:t>
             </a:r>
             <a:endParaRPr lang="en-US" sz="1200" dirty="0"/>
           </a:p>
@@ -41587,7 +40180,7 @@
                 <a:ea typeface="Calibri" pitchFamily="34" charset="-122"/>
                 <a:cs typeface="Calibri" pitchFamily="34" charset="-120"/>
               </a:rPr>
-              <a:t>Word Labs  •  wordlabs.app  •  Root: 'clean' = free from dirt, pure</a:t>
+              <a:t>Word Labs  •  wordlabs.app  •  Root: 'clean' = free from dirt or impurity</a:t>
             </a:r>
             <a:endParaRPr lang="en-US" sz="800" dirty="0"/>
           </a:p>
@@ -41790,7 +40383,7 @@
                 <a:ea typeface="Calibri" pitchFamily="34" charset="-122"/>
                 <a:cs typeface="Calibri" pitchFamily="34" charset="-120"/>
               </a:rPr>
-              <a:t>After the art project, the teacher asked everyone to cleaning up their workspace carefully.</a:t>
+              <a:t>After the art lesson, the teacher asked everyone to clean their brushes carefully before putting them away.</a:t>
             </a:r>
             <a:endParaRPr lang="en-US" sz="1500" dirty="0"/>
           </a:p>
@@ -41954,7 +40547,7 @@
                 <a:ea typeface="Calibri" pitchFamily="34" charset="-122"/>
                 <a:cs typeface="Calibri" pitchFamily="34" charset="-120"/>
               </a:rPr>
-              <a:t>Mia was the cleanest student in the class because she always washed her hands before lunch.</a:t>
+              <a:t>The cleaner at our school works very hard every afternoon to make sure the classrooms are tidy and spotless.</a:t>
             </a:r>
             <a:endParaRPr lang="en-US" sz="1500" dirty="0"/>
           </a:p>
@@ -42118,7 +40711,7 @@
                 <a:ea typeface="Calibri" pitchFamily="34" charset="-122"/>
                 <a:cs typeface="Calibri" pitchFamily="34" charset="-120"/>
               </a:rPr>
-              <a:t>The school cleaner worked very hard each evening to make sure the classrooms were spotless.</a:t>
+              <a:t>Mum reminded us that cleanliness in the kitchen is important so that we don't spread germs when we cook.</a:t>
             </a:r>
             <a:endParaRPr lang="en-US" sz="1500" dirty="0"/>
           </a:p>

--- a/output/wordlabs-clean-3day.pptx
+++ b/output/wordlabs-clean-3day.pptx
@@ -4240,7 +4240,7 @@
                 <a:ea typeface="Calibri" pitchFamily="34" charset="-122"/>
                 <a:cs typeface="Calibri" pitchFamily="34" charset="-120"/>
               </a:rPr>
-              <a:t>"free from dirt or impurity"</a:t>
+              <a:t>"free from dirt"</a:t>
             </a:r>
             <a:endParaRPr lang="en-US" sz="2200" dirty="0"/>
           </a:p>
@@ -4279,7 +4279,7 @@
                 <a:ea typeface="Calibri" pitchFamily="34" charset="-122"/>
                 <a:cs typeface="Calibri" pitchFamily="34" charset="-120"/>
               </a:rPr>
-              <a:t>Origin: Latin: clarus</a:t>
+              <a:t>Origin: Anglo-Saxon (Old English) root</a:t>
             </a:r>
             <a:endParaRPr lang="en-US" sz="1300" dirty="0"/>
           </a:p>
@@ -5288,7 +5288,7 @@
                 <a:ea typeface="Calibri" pitchFamily="34" charset="-122"/>
                 <a:cs typeface="Calibri" pitchFamily="34" charset="-120"/>
               </a:rPr>
-              <a:t>Word Labs  •  wordlabs.app  •  Root: 'clean' = free from dirt or impurity</a:t>
+              <a:t>Word Labs  •  wordlabs.app  •  Root: 'clean' = free from dirt</a:t>
             </a:r>
             <a:endParaRPr lang="en-US" sz="800" dirty="0"/>
           </a:p>
@@ -5622,7 +5622,7 @@
                 <a:ea typeface="Trebuchet MS" pitchFamily="34" charset="-122"/>
                 <a:cs typeface="Trebuchet MS" pitchFamily="34" charset="-120"/>
               </a:rPr>
-              <a:t>2</a:t>
+              <a:t>0</a:t>
             </a:r>
             <a:pPr algn="ctr" indent="0" marL="0">
               <a:buNone/>
@@ -5636,7 +5636,7 @@
                 <a:ea typeface="Trebuchet MS" pitchFamily="34" charset="-122"/>
                 <a:cs typeface="Trebuchet MS" pitchFamily="34" charset="-120"/>
               </a:rPr>
-              <a:t>  punctuation marks</a:t>
+              <a:t>  punctuation mark</a:t>
             </a:r>
             <a:endParaRPr lang="en-US" sz="2800" dirty="0"/>
           </a:p>
@@ -5928,7 +5928,7 @@
                 <a:ea typeface="Calibri" pitchFamily="34" charset="-122"/>
                 <a:cs typeface="Calibri" pitchFamily="34" charset="-120"/>
               </a:rPr>
-              <a:t>Word Labs  •  wordlabs.app  •  Root: 'clean' = free from dirt or impurity</a:t>
+              <a:t>Word Labs  •  wordlabs.app  •  Root: 'clean' = free from dirt</a:t>
             </a:r>
             <a:endParaRPr lang="en-US" sz="800" dirty="0"/>
           </a:p>
@@ -6040,7 +6040,7 @@
                 <a:ea typeface="Calibri" pitchFamily="34" charset="-122"/>
                 <a:cs typeface="Calibri" pitchFamily="34" charset="-120"/>
               </a:rPr>
-              <a:t>After playing in the mud, she needed a thorough </a:t>
+              <a:t>The </a:t>
             </a:r>
             <a:pPr algn="l" indent="0" marL="0">
               <a:buNone/>
@@ -6057,7 +6057,7 @@
                 <a:ea typeface="Calibri" pitchFamily="34" charset="-122"/>
                 <a:cs typeface="Calibri" pitchFamily="34" charset="-120"/>
               </a:rPr>
-              <a:t>cleansing</a:t>
+              <a:t>cleaners</a:t>
             </a:r>
             <a:pPr algn="l" indent="0" marL="0">
               <a:buNone/>
@@ -6071,7 +6071,7 @@
                 <a:ea typeface="Calibri" pitchFamily="34" charset="-122"/>
                 <a:cs typeface="Calibri" pitchFamily="34" charset="-120"/>
               </a:rPr>
-              <a:t>, and her mum said the bathroom had never looked </a:t>
+              <a:t> arrive at the office early each morning. Our classroom was the </a:t>
             </a:r>
             <a:pPr algn="l" indent="0" marL="0">
               <a:buNone/>
@@ -6088,7 +6088,7 @@
                 <a:ea typeface="Calibri" pitchFamily="34" charset="-122"/>
                 <a:cs typeface="Calibri" pitchFamily="34" charset="-120"/>
               </a:rPr>
-              <a:t>cleaner</a:t>
+              <a:t>cleanest</a:t>
             </a:r>
             <a:pPr algn="l" indent="0" marL="0">
               <a:buNone/>
@@ -6102,7 +6102,7 @@
                 <a:ea typeface="Calibri" pitchFamily="34" charset="-122"/>
                 <a:cs typeface="Calibri" pitchFamily="34" charset="-120"/>
               </a:rPr>
-              <a:t>!</a:t>
+              <a:t> in the whole school.</a:t>
             </a:r>
             <a:endParaRPr lang="en-US" sz="1800" dirty="0"/>
           </a:p>
@@ -6257,7 +6257,7 @@
                 <a:ea typeface="Trebuchet MS" pitchFamily="34" charset="-122"/>
                 <a:cs typeface="Trebuchet MS" pitchFamily="34" charset="-120"/>
               </a:rPr>
-              <a:t>cleansing</a:t>
+              <a:t>cleaners</a:t>
             </a:r>
             <a:endParaRPr lang="en-US" sz="1400" dirty="0"/>
           </a:p>
@@ -6385,7 +6385,7 @@
                 <a:ea typeface="Trebuchet MS" pitchFamily="34" charset="-122"/>
                 <a:cs typeface="Trebuchet MS" pitchFamily="34" charset="-120"/>
               </a:rPr>
-              <a:t>cleaner</a:t>
+              <a:t>cleanest</a:t>
             </a:r>
             <a:endParaRPr lang="en-US" sz="1400" dirty="0"/>
           </a:p>
@@ -6716,7 +6716,7 @@
                 <a:ea typeface="Calibri" pitchFamily="34" charset="-122"/>
                 <a:cs typeface="Calibri" pitchFamily="34" charset="-120"/>
               </a:rPr>
-              <a:t>Word Labs  •  wordlabs.app  •  Root: 'clean' = free from dirt or impurity</a:t>
+              <a:t>Word Labs  •  wordlabs.app  •  Root: 'clean' = free from dirt</a:t>
             </a:r>
             <a:endParaRPr lang="en-US" sz="800" dirty="0"/>
           </a:p>
@@ -6855,7 +6855,7 @@
                 <a:ea typeface="Trebuchet MS" pitchFamily="34" charset="-122"/>
                 <a:cs typeface="Trebuchet MS" pitchFamily="34" charset="-120"/>
               </a:rPr>
-              <a:t>cleansing</a:t>
+              <a:t>cleaners</a:t>
             </a:r>
             <a:endParaRPr lang="en-US" sz="2800" dirty="0"/>
           </a:p>
@@ -7543,7 +7543,7 @@
                 <a:ea typeface="Calibri" pitchFamily="34" charset="-122"/>
                 <a:cs typeface="Calibri" pitchFamily="34" charset="-120"/>
               </a:rPr>
-              <a:t>Word Labs  •  wordlabs.app  •  Root: 'clean' = free from dirt or impurity</a:t>
+              <a:t>Word Labs  •  wordlabs.app  •  Root: 'clean' = free from dirt</a:t>
             </a:r>
             <a:endParaRPr lang="en-US" sz="800" dirty="0"/>
           </a:p>
@@ -7682,7 +7682,7 @@
                 <a:ea typeface="Trebuchet MS" pitchFamily="34" charset="-122"/>
                 <a:cs typeface="Trebuchet MS" pitchFamily="34" charset="-120"/>
               </a:rPr>
-              <a:t>cleansing</a:t>
+              <a:t>cleaners</a:t>
             </a:r>
             <a:endParaRPr lang="en-US" sz="2800" dirty="0"/>
           </a:p>
@@ -7762,7 +7762,7 @@
         </p:nvSpPr>
         <p:spPr>
           <a:xfrm>
-            <a:off x="2938272" y="2258568"/>
+            <a:off x="2221992" y="2258568"/>
             <a:ext cx="1828800" cy="292608"/>
           </a:xfrm>
           <a:prstGeom prst="rect">
@@ -7771,11 +7771,11 @@
             </a:avLst>
           </a:prstGeom>
           <a:solidFill>
-            <a:srgbClr val="DDD6FE"/>
+            <a:srgbClr val="CCFBF1"/>
           </a:solidFill>
           <a:ln w="19050">
             <a:solidFill>
-              <a:srgbClr val="7C3AED"/>
+              <a:srgbClr val="0D9488"/>
             </a:solidFill>
             <a:prstDash val="solid"/>
           </a:ln>
@@ -7796,7 +7796,7 @@
         </p:nvSpPr>
         <p:spPr>
           <a:xfrm>
-            <a:off x="2938272" y="2258568"/>
+            <a:off x="2221992" y="2258568"/>
             <a:ext cx="1828800" cy="292608"/>
           </a:xfrm>
           <a:prstGeom prst="rect">
@@ -7815,13 +7815,13 @@
             <a:r>
               <a:rPr lang="en-US" sz="1300" b="1" dirty="0">
                 <a:solidFill>
-                  <a:srgbClr val="4C1D95"/>
+                  <a:srgbClr val="0F766E"/>
                 </a:solidFill>
                 <a:latin typeface="Trebuchet MS" pitchFamily="34" charset="0"/>
                 <a:ea typeface="Trebuchet MS" pitchFamily="34" charset="-122"/>
                 <a:cs typeface="Trebuchet MS" pitchFamily="34" charset="-120"/>
               </a:rPr>
-              <a:t>cleanse</a:t>
+              <a:t>clean</a:t>
             </a:r>
             <a:endParaRPr lang="en-US" sz="1300" dirty="0"/>
           </a:p>
@@ -7835,7 +7835,7 @@
         </p:nvSpPr>
         <p:spPr>
           <a:xfrm>
-            <a:off x="2938272" y="2569464"/>
+            <a:off x="2221992" y="2569464"/>
             <a:ext cx="1828800" cy="201168"/>
           </a:xfrm>
           <a:prstGeom prst="rect">
@@ -7860,7 +7860,7 @@
                 <a:ea typeface="Calibri" pitchFamily="34" charset="-122"/>
                 <a:cs typeface="Calibri" pitchFamily="34" charset="-120"/>
               </a:rPr>
-              <a:t>to make thoroughly clean</a:t>
+              <a:t>free from dirt</a:t>
             </a:r>
             <a:endParaRPr lang="en-US" sz="850" dirty="0"/>
           </a:p>
@@ -7874,7 +7874,7 @@
         </p:nvSpPr>
         <p:spPr>
           <a:xfrm>
-            <a:off x="5803392" y="2258568"/>
+            <a:off x="4370832" y="2258568"/>
             <a:ext cx="1828800" cy="292608"/>
           </a:xfrm>
           <a:prstGeom prst="rect">
@@ -7908,7 +7908,7 @@
         </p:nvSpPr>
         <p:spPr>
           <a:xfrm>
-            <a:off x="5803392" y="2258568"/>
+            <a:off x="4370832" y="2258568"/>
             <a:ext cx="1828800" cy="292608"/>
           </a:xfrm>
           <a:prstGeom prst="rect">
@@ -7933,7 +7933,7 @@
                 <a:ea typeface="Trebuchet MS" pitchFamily="34" charset="-122"/>
                 <a:cs typeface="Trebuchet MS" pitchFamily="34" charset="-120"/>
               </a:rPr>
-              <a:t>ing</a:t>
+              <a:t>er</a:t>
             </a:r>
             <a:endParaRPr lang="en-US" sz="1300" dirty="0"/>
           </a:p>
@@ -7947,7 +7947,7 @@
         </p:nvSpPr>
         <p:spPr>
           <a:xfrm>
-            <a:off x="5803392" y="2569464"/>
+            <a:off x="4370832" y="2569464"/>
             <a:ext cx="1828800" cy="201168"/>
           </a:xfrm>
           <a:prstGeom prst="rect">
@@ -7972,7 +7972,7 @@
                 <a:ea typeface="Calibri" pitchFamily="34" charset="-122"/>
                 <a:cs typeface="Calibri" pitchFamily="34" charset="-120"/>
               </a:rPr>
-              <a:t>action happening now</a:t>
+              <a:t>person who; more</a:t>
             </a:r>
             <a:endParaRPr lang="en-US" sz="850" dirty="0"/>
           </a:p>
@@ -7981,6 +7981,118 @@
       <p:sp>
         <p:nvSpPr>
           <p:cNvPr id="22" name="Shape 20"/>
+          <p:cNvSpPr/>
+          <p:nvPr/>
+        </p:nvSpPr>
+        <p:spPr>
+          <a:xfrm>
+            <a:off x="6519672" y="2258568"/>
+            <a:ext cx="1828800" cy="292608"/>
+          </a:xfrm>
+          <a:prstGeom prst="rect">
+            <a:avLst>
+              <a:gd name="adj" fmla="val 25000"/>
+            </a:avLst>
+          </a:prstGeom>
+          <a:solidFill>
+            <a:srgbClr val="FCE7F3"/>
+          </a:solidFill>
+          <a:ln w="19050">
+            <a:solidFill>
+              <a:srgbClr val="DB2777"/>
+            </a:solidFill>
+            <a:prstDash val="solid"/>
+          </a:ln>
+          <a:effectLst>
+            <a:outerShdw sx="100000" sy="100000" kx="0" ky="0" algn="bl" rotWithShape="0" blurRad="101600" dist="38100" dir="8100000">
+              <a:srgbClr val="000000">
+                <a:alpha val="12000"/>
+              </a:srgbClr>
+            </a:outerShdw>
+          </a:effectLst>
+        </p:spPr>
+      </p:sp>
+      <p:sp>
+        <p:nvSpPr>
+          <p:cNvPr id="23" name="Text 21"/>
+          <p:cNvSpPr/>
+          <p:nvPr/>
+        </p:nvSpPr>
+        <p:spPr>
+          <a:xfrm>
+            <a:off x="6519672" y="2258568"/>
+            <a:ext cx="1828800" cy="292608"/>
+          </a:xfrm>
+          <a:prstGeom prst="rect">
+            <a:avLst/>
+          </a:prstGeom>
+          <a:noFill/>
+          <a:ln/>
+        </p:spPr>
+        <p:txBody>
+          <a:bodyPr wrap="square" lIns="0" tIns="0" rIns="0" bIns="0" rtlCol="0" anchor="ctr"/>
+          <a:lstStyle/>
+          <a:p>
+            <a:pPr algn="ctr" indent="0" marL="0">
+              <a:buNone/>
+            </a:pPr>
+            <a:r>
+              <a:rPr lang="en-US" sz="1300" b="1" dirty="0">
+                <a:solidFill>
+                  <a:srgbClr val="9D174D"/>
+                </a:solidFill>
+                <a:latin typeface="Trebuchet MS" pitchFamily="34" charset="0"/>
+                <a:ea typeface="Trebuchet MS" pitchFamily="34" charset="-122"/>
+                <a:cs typeface="Trebuchet MS" pitchFamily="34" charset="-120"/>
+              </a:rPr>
+              <a:t>s</a:t>
+            </a:r>
+            <a:endParaRPr lang="en-US" sz="1300" dirty="0"/>
+          </a:p>
+        </p:txBody>
+      </p:sp>
+      <p:sp>
+        <p:nvSpPr>
+          <p:cNvPr id="24" name="Text 22"/>
+          <p:cNvSpPr/>
+          <p:nvPr/>
+        </p:nvSpPr>
+        <p:spPr>
+          <a:xfrm>
+            <a:off x="6519672" y="2569464"/>
+            <a:ext cx="1828800" cy="201168"/>
+          </a:xfrm>
+          <a:prstGeom prst="rect">
+            <a:avLst/>
+          </a:prstGeom>
+          <a:noFill/>
+          <a:ln/>
+        </p:spPr>
+        <p:txBody>
+          <a:bodyPr wrap="square" lIns="0" tIns="0" rIns="0" bIns="0" rtlCol="0" anchor="t"/>
+          <a:lstStyle/>
+          <a:p>
+            <a:pPr algn="ctr" indent="0" marL="0">
+              <a:buNone/>
+            </a:pPr>
+            <a:r>
+              <a:rPr lang="en-US" sz="850" dirty="0">
+                <a:solidFill>
+                  <a:srgbClr val="475569"/>
+                </a:solidFill>
+                <a:latin typeface="Calibri" pitchFamily="34" charset="0"/>
+                <a:ea typeface="Calibri" pitchFamily="34" charset="-122"/>
+                <a:cs typeface="Calibri" pitchFamily="34" charset="-120"/>
+              </a:rPr>
+              <a:t>plural or present tense</a:t>
+            </a:r>
+            <a:endParaRPr lang="en-US" sz="850" dirty="0"/>
+          </a:p>
+        </p:txBody>
+      </p:sp>
+      <p:sp>
+        <p:nvSpPr>
+          <p:cNvPr id="25" name="Shape 23"/>
           <p:cNvSpPr/>
           <p:nvPr/>
         </p:nvSpPr>
@@ -8007,7 +8119,7 @@
       </p:sp>
       <p:sp>
         <p:nvSpPr>
-          <p:cNvPr id="23" name="Text 21"/>
+          <p:cNvPr id="26" name="Text 24"/>
           <p:cNvSpPr/>
           <p:nvPr/>
         </p:nvSpPr>
@@ -8046,7 +8158,7 @@
       </p:sp>
       <p:sp>
         <p:nvSpPr>
-          <p:cNvPr id="24" name="Shape 22"/>
+          <p:cNvPr id="27" name="Shape 25"/>
           <p:cNvSpPr/>
           <p:nvPr/>
         </p:nvSpPr>
@@ -8073,7 +8185,7 @@
       </p:sp>
       <p:sp>
         <p:nvSpPr>
-          <p:cNvPr id="25" name="Text 23"/>
+          <p:cNvPr id="28" name="Text 26"/>
           <p:cNvSpPr/>
           <p:nvPr/>
         </p:nvSpPr>
@@ -8112,7 +8224,7 @@
       </p:sp>
       <p:sp>
         <p:nvSpPr>
-          <p:cNvPr id="26" name="Shape 24"/>
+          <p:cNvPr id="29" name="Shape 27"/>
           <p:cNvSpPr/>
           <p:nvPr/>
         </p:nvSpPr>
@@ -8139,7 +8251,7 @@
       </p:sp>
       <p:sp>
         <p:nvSpPr>
-          <p:cNvPr id="27" name="Text 25"/>
+          <p:cNvPr id="30" name="Text 28"/>
           <p:cNvSpPr/>
           <p:nvPr/>
         </p:nvSpPr>
@@ -8178,7 +8290,7 @@
       </p:sp>
       <p:sp>
         <p:nvSpPr>
-          <p:cNvPr id="28" name="Shape 26"/>
+          <p:cNvPr id="31" name="Shape 29"/>
           <p:cNvSpPr/>
           <p:nvPr/>
         </p:nvSpPr>
@@ -8205,7 +8317,7 @@
       </p:sp>
       <p:sp>
         <p:nvSpPr>
-          <p:cNvPr id="29" name="Text 27"/>
+          <p:cNvPr id="32" name="Text 30"/>
           <p:cNvSpPr/>
           <p:nvPr/>
         </p:nvSpPr>
@@ -8528,7 +8640,7 @@
                 <a:ea typeface="Calibri" pitchFamily="34" charset="-122"/>
                 <a:cs typeface="Calibri" pitchFamily="34" charset="-120"/>
               </a:rPr>
-              <a:t>Word Labs  •  wordlabs.app  •  Root: 'clean' = free from dirt or impurity</a:t>
+              <a:t>Word Labs  •  wordlabs.app  •  Root: 'clean' = free from dirt</a:t>
             </a:r>
             <a:endParaRPr lang="en-US" sz="800" dirty="0"/>
           </a:p>
@@ -8667,7 +8779,7 @@
                 <a:ea typeface="Trebuchet MS" pitchFamily="34" charset="-122"/>
                 <a:cs typeface="Trebuchet MS" pitchFamily="34" charset="-120"/>
               </a:rPr>
-              <a:t>cleansing</a:t>
+              <a:t>cleaners</a:t>
             </a:r>
             <a:endParaRPr lang="en-US" sz="2800" dirty="0"/>
           </a:p>
@@ -8747,7 +8859,7 @@
         </p:nvSpPr>
         <p:spPr>
           <a:xfrm>
-            <a:off x="2938272" y="2258568"/>
+            <a:off x="2221992" y="2258568"/>
             <a:ext cx="1828800" cy="292608"/>
           </a:xfrm>
           <a:prstGeom prst="rect">
@@ -8756,11 +8868,11 @@
             </a:avLst>
           </a:prstGeom>
           <a:solidFill>
-            <a:srgbClr val="DDD6FE"/>
+            <a:srgbClr val="CCFBF1"/>
           </a:solidFill>
           <a:ln w="19050">
             <a:solidFill>
-              <a:srgbClr val="7C3AED"/>
+              <a:srgbClr val="0D9488"/>
             </a:solidFill>
             <a:prstDash val="solid"/>
           </a:ln>
@@ -8781,7 +8893,7 @@
         </p:nvSpPr>
         <p:spPr>
           <a:xfrm>
-            <a:off x="2938272" y="2258568"/>
+            <a:off x="2221992" y="2258568"/>
             <a:ext cx="1828800" cy="292608"/>
           </a:xfrm>
           <a:prstGeom prst="rect">
@@ -8800,13 +8912,13 @@
             <a:r>
               <a:rPr lang="en-US" sz="1300" b="1" dirty="0">
                 <a:solidFill>
-                  <a:srgbClr val="4C1D95"/>
+                  <a:srgbClr val="0F766E"/>
                 </a:solidFill>
                 <a:latin typeface="Trebuchet MS" pitchFamily="34" charset="0"/>
                 <a:ea typeface="Trebuchet MS" pitchFamily="34" charset="-122"/>
                 <a:cs typeface="Trebuchet MS" pitchFamily="34" charset="-120"/>
               </a:rPr>
-              <a:t>cleanse</a:t>
+              <a:t>clean</a:t>
             </a:r>
             <a:endParaRPr lang="en-US" sz="1300" dirty="0"/>
           </a:p>
@@ -8820,7 +8932,7 @@
         </p:nvSpPr>
         <p:spPr>
           <a:xfrm>
-            <a:off x="2938272" y="2569464"/>
+            <a:off x="2221992" y="2569464"/>
             <a:ext cx="1828800" cy="201168"/>
           </a:xfrm>
           <a:prstGeom prst="rect">
@@ -8845,7 +8957,7 @@
                 <a:ea typeface="Calibri" pitchFamily="34" charset="-122"/>
                 <a:cs typeface="Calibri" pitchFamily="34" charset="-120"/>
               </a:rPr>
-              <a:t>to make thoroughly clean</a:t>
+              <a:t>free from dirt</a:t>
             </a:r>
             <a:endParaRPr lang="en-US" sz="850" dirty="0"/>
           </a:p>
@@ -8859,7 +8971,7 @@
         </p:nvSpPr>
         <p:spPr>
           <a:xfrm>
-            <a:off x="5803392" y="2258568"/>
+            <a:off x="4370832" y="2258568"/>
             <a:ext cx="1828800" cy="292608"/>
           </a:xfrm>
           <a:prstGeom prst="rect">
@@ -8893,7 +9005,7 @@
         </p:nvSpPr>
         <p:spPr>
           <a:xfrm>
-            <a:off x="5803392" y="2258568"/>
+            <a:off x="4370832" y="2258568"/>
             <a:ext cx="1828800" cy="292608"/>
           </a:xfrm>
           <a:prstGeom prst="rect">
@@ -8918,7 +9030,7 @@
                 <a:ea typeface="Trebuchet MS" pitchFamily="34" charset="-122"/>
                 <a:cs typeface="Trebuchet MS" pitchFamily="34" charset="-120"/>
               </a:rPr>
-              <a:t>ing</a:t>
+              <a:t>er</a:t>
             </a:r>
             <a:endParaRPr lang="en-US" sz="1300" dirty="0"/>
           </a:p>
@@ -8932,7 +9044,7 @@
         </p:nvSpPr>
         <p:spPr>
           <a:xfrm>
-            <a:off x="5803392" y="2569464"/>
+            <a:off x="4370832" y="2569464"/>
             <a:ext cx="1828800" cy="201168"/>
           </a:xfrm>
           <a:prstGeom prst="rect">
@@ -8957,7 +9069,7 @@
                 <a:ea typeface="Calibri" pitchFamily="34" charset="-122"/>
                 <a:cs typeface="Calibri" pitchFamily="34" charset="-120"/>
               </a:rPr>
-              <a:t>action happening now</a:t>
+              <a:t>person who; more</a:t>
             </a:r>
             <a:endParaRPr lang="en-US" sz="850" dirty="0"/>
           </a:p>
@@ -8966,6 +9078,118 @@
       <p:sp>
         <p:nvSpPr>
           <p:cNvPr id="22" name="Shape 20"/>
+          <p:cNvSpPr/>
+          <p:nvPr/>
+        </p:nvSpPr>
+        <p:spPr>
+          <a:xfrm>
+            <a:off x="6519672" y="2258568"/>
+            <a:ext cx="1828800" cy="292608"/>
+          </a:xfrm>
+          <a:prstGeom prst="rect">
+            <a:avLst>
+              <a:gd name="adj" fmla="val 25000"/>
+            </a:avLst>
+          </a:prstGeom>
+          <a:solidFill>
+            <a:srgbClr val="FCE7F3"/>
+          </a:solidFill>
+          <a:ln w="19050">
+            <a:solidFill>
+              <a:srgbClr val="DB2777"/>
+            </a:solidFill>
+            <a:prstDash val="solid"/>
+          </a:ln>
+          <a:effectLst>
+            <a:outerShdw sx="100000" sy="100000" kx="0" ky="0" algn="bl" rotWithShape="0" blurRad="101600" dist="38100" dir="8100000">
+              <a:srgbClr val="000000">
+                <a:alpha val="12000"/>
+              </a:srgbClr>
+            </a:outerShdw>
+          </a:effectLst>
+        </p:spPr>
+      </p:sp>
+      <p:sp>
+        <p:nvSpPr>
+          <p:cNvPr id="23" name="Text 21"/>
+          <p:cNvSpPr/>
+          <p:nvPr/>
+        </p:nvSpPr>
+        <p:spPr>
+          <a:xfrm>
+            <a:off x="6519672" y="2258568"/>
+            <a:ext cx="1828800" cy="292608"/>
+          </a:xfrm>
+          <a:prstGeom prst="rect">
+            <a:avLst/>
+          </a:prstGeom>
+          <a:noFill/>
+          <a:ln/>
+        </p:spPr>
+        <p:txBody>
+          <a:bodyPr wrap="square" lIns="0" tIns="0" rIns="0" bIns="0" rtlCol="0" anchor="ctr"/>
+          <a:lstStyle/>
+          <a:p>
+            <a:pPr algn="ctr" indent="0" marL="0">
+              <a:buNone/>
+            </a:pPr>
+            <a:r>
+              <a:rPr lang="en-US" sz="1300" b="1" dirty="0">
+                <a:solidFill>
+                  <a:srgbClr val="9D174D"/>
+                </a:solidFill>
+                <a:latin typeface="Trebuchet MS" pitchFamily="34" charset="0"/>
+                <a:ea typeface="Trebuchet MS" pitchFamily="34" charset="-122"/>
+                <a:cs typeface="Trebuchet MS" pitchFamily="34" charset="-120"/>
+              </a:rPr>
+              <a:t>s</a:t>
+            </a:r>
+            <a:endParaRPr lang="en-US" sz="1300" dirty="0"/>
+          </a:p>
+        </p:txBody>
+      </p:sp>
+      <p:sp>
+        <p:nvSpPr>
+          <p:cNvPr id="24" name="Text 22"/>
+          <p:cNvSpPr/>
+          <p:nvPr/>
+        </p:nvSpPr>
+        <p:spPr>
+          <a:xfrm>
+            <a:off x="6519672" y="2569464"/>
+            <a:ext cx="1828800" cy="201168"/>
+          </a:xfrm>
+          <a:prstGeom prst="rect">
+            <a:avLst/>
+          </a:prstGeom>
+          <a:noFill/>
+          <a:ln/>
+        </p:spPr>
+        <p:txBody>
+          <a:bodyPr wrap="square" lIns="0" tIns="0" rIns="0" bIns="0" rtlCol="0" anchor="t"/>
+          <a:lstStyle/>
+          <a:p>
+            <a:pPr algn="ctr" indent="0" marL="0">
+              <a:buNone/>
+            </a:pPr>
+            <a:r>
+              <a:rPr lang="en-US" sz="850" dirty="0">
+                <a:solidFill>
+                  <a:srgbClr val="475569"/>
+                </a:solidFill>
+                <a:latin typeface="Calibri" pitchFamily="34" charset="0"/>
+                <a:ea typeface="Calibri" pitchFamily="34" charset="-122"/>
+                <a:cs typeface="Calibri" pitchFamily="34" charset="-120"/>
+              </a:rPr>
+              <a:t>plural or present tense</a:t>
+            </a:r>
+            <a:endParaRPr lang="en-US" sz="850" dirty="0"/>
+          </a:p>
+        </p:txBody>
+      </p:sp>
+      <p:sp>
+        <p:nvSpPr>
+          <p:cNvPr id="25" name="Shape 23"/>
           <p:cNvSpPr/>
           <p:nvPr/>
         </p:nvSpPr>
@@ -8992,7 +9216,7 @@
       </p:sp>
       <p:sp>
         <p:nvSpPr>
-          <p:cNvPr id="23" name="Text 21"/>
+          <p:cNvPr id="26" name="Text 24"/>
           <p:cNvSpPr/>
           <p:nvPr/>
         </p:nvSpPr>
@@ -9031,7 +9255,7 @@
       </p:sp>
       <p:sp>
         <p:nvSpPr>
-          <p:cNvPr id="24" name="Shape 22"/>
+          <p:cNvPr id="27" name="Shape 25"/>
           <p:cNvSpPr/>
           <p:nvPr/>
         </p:nvSpPr>
@@ -9058,7 +9282,7 @@
       </p:sp>
       <p:sp>
         <p:nvSpPr>
-          <p:cNvPr id="25" name="Shape 23"/>
+          <p:cNvPr id="28" name="Shape 26"/>
           <p:cNvSpPr/>
           <p:nvPr/>
         </p:nvSpPr>
@@ -9085,7 +9309,7 @@
       </p:sp>
       <p:sp>
         <p:nvSpPr>
-          <p:cNvPr id="26" name="Text 24"/>
+          <p:cNvPr id="29" name="Text 27"/>
           <p:cNvSpPr/>
           <p:nvPr/>
         </p:nvSpPr>
@@ -9116,7 +9340,7 @@
                 <a:ea typeface="Trebuchet MS" pitchFamily="34" charset="-122"/>
                 <a:cs typeface="Trebuchet MS" pitchFamily="34" charset="-120"/>
               </a:rPr>
-              <a:t>cleans</a:t>
+              <a:t>clean</a:t>
             </a:r>
             <a:endParaRPr lang="en-US" sz="1400" dirty="0"/>
           </a:p>
@@ -9124,7 +9348,7 @@
       </p:sp>
       <p:sp>
         <p:nvSpPr>
-          <p:cNvPr id="27" name="Text 25"/>
+          <p:cNvPr id="30" name="Text 28"/>
           <p:cNvSpPr/>
           <p:nvPr/>
         </p:nvSpPr>
@@ -9163,7 +9387,7 @@
       </p:sp>
       <p:sp>
         <p:nvSpPr>
-          <p:cNvPr id="28" name="Shape 26"/>
+          <p:cNvPr id="31" name="Shape 29"/>
           <p:cNvSpPr/>
           <p:nvPr/>
         </p:nvSpPr>
@@ -9190,7 +9414,7 @@
       </p:sp>
       <p:sp>
         <p:nvSpPr>
-          <p:cNvPr id="29" name="Text 27"/>
+          <p:cNvPr id="32" name="Text 30"/>
           <p:cNvSpPr/>
           <p:nvPr/>
         </p:nvSpPr>
@@ -9221,7 +9445,7 @@
                 <a:ea typeface="Trebuchet MS" pitchFamily="34" charset="-122"/>
                 <a:cs typeface="Trebuchet MS" pitchFamily="34" charset="-120"/>
               </a:rPr>
-              <a:t>ing</a:t>
+              <a:t>ers</a:t>
             </a:r>
             <a:endParaRPr lang="en-US" sz="1400" dirty="0"/>
           </a:p>
@@ -9229,7 +9453,7 @@
       </p:sp>
       <p:sp>
         <p:nvSpPr>
-          <p:cNvPr id="30" name="Shape 28"/>
+          <p:cNvPr id="33" name="Shape 31"/>
           <p:cNvSpPr/>
           <p:nvPr/>
         </p:nvSpPr>
@@ -9256,7 +9480,7 @@
       </p:sp>
       <p:sp>
         <p:nvSpPr>
-          <p:cNvPr id="31" name="Text 29"/>
+          <p:cNvPr id="34" name="Text 32"/>
           <p:cNvSpPr/>
           <p:nvPr/>
         </p:nvSpPr>
@@ -9295,7 +9519,7 @@
       </p:sp>
       <p:sp>
         <p:nvSpPr>
-          <p:cNvPr id="32" name="Shape 30"/>
+          <p:cNvPr id="35" name="Shape 33"/>
           <p:cNvSpPr/>
           <p:nvPr/>
         </p:nvSpPr>
@@ -9322,7 +9546,7 @@
       </p:sp>
       <p:sp>
         <p:nvSpPr>
-          <p:cNvPr id="33" name="Text 31"/>
+          <p:cNvPr id="36" name="Text 34"/>
           <p:cNvSpPr/>
           <p:nvPr/>
         </p:nvSpPr>
@@ -9645,7 +9869,7 @@
                 <a:ea typeface="Calibri" pitchFamily="34" charset="-122"/>
                 <a:cs typeface="Calibri" pitchFamily="34" charset="-120"/>
               </a:rPr>
-              <a:t>Word Labs  •  wordlabs.app  •  Root: 'clean' = free from dirt or impurity</a:t>
+              <a:t>Word Labs  •  wordlabs.app  •  Root: 'clean' = free from dirt</a:t>
             </a:r>
             <a:endParaRPr lang="en-US" sz="800" dirty="0"/>
           </a:p>
@@ -9784,7 +10008,7 @@
                 <a:ea typeface="Trebuchet MS" pitchFamily="34" charset="-122"/>
                 <a:cs typeface="Trebuchet MS" pitchFamily="34" charset="-120"/>
               </a:rPr>
-              <a:t>cleansing</a:t>
+              <a:t>cleaners</a:t>
             </a:r>
             <a:endParaRPr lang="en-US" sz="2800" dirty="0"/>
           </a:p>
@@ -9864,7 +10088,7 @@
         </p:nvSpPr>
         <p:spPr>
           <a:xfrm>
-            <a:off x="2938272" y="2258568"/>
+            <a:off x="2221992" y="2258568"/>
             <a:ext cx="1828800" cy="292608"/>
           </a:xfrm>
           <a:prstGeom prst="rect">
@@ -9873,11 +10097,11 @@
             </a:avLst>
           </a:prstGeom>
           <a:solidFill>
-            <a:srgbClr val="DDD6FE"/>
+            <a:srgbClr val="CCFBF1"/>
           </a:solidFill>
           <a:ln w="19050">
             <a:solidFill>
-              <a:srgbClr val="7C3AED"/>
+              <a:srgbClr val="0D9488"/>
             </a:solidFill>
             <a:prstDash val="solid"/>
           </a:ln>
@@ -9898,7 +10122,7 @@
         </p:nvSpPr>
         <p:spPr>
           <a:xfrm>
-            <a:off x="2938272" y="2258568"/>
+            <a:off x="2221992" y="2258568"/>
             <a:ext cx="1828800" cy="292608"/>
           </a:xfrm>
           <a:prstGeom prst="rect">
@@ -9917,13 +10141,13 @@
             <a:r>
               <a:rPr lang="en-US" sz="1300" b="1" dirty="0">
                 <a:solidFill>
-                  <a:srgbClr val="4C1D95"/>
+                  <a:srgbClr val="0F766E"/>
                 </a:solidFill>
                 <a:latin typeface="Trebuchet MS" pitchFamily="34" charset="0"/>
                 <a:ea typeface="Trebuchet MS" pitchFamily="34" charset="-122"/>
                 <a:cs typeface="Trebuchet MS" pitchFamily="34" charset="-120"/>
               </a:rPr>
-              <a:t>cleanse</a:t>
+              <a:t>clean</a:t>
             </a:r>
             <a:endParaRPr lang="en-US" sz="1300" dirty="0"/>
           </a:p>
@@ -9937,7 +10161,7 @@
         </p:nvSpPr>
         <p:spPr>
           <a:xfrm>
-            <a:off x="2938272" y="2569464"/>
+            <a:off x="2221992" y="2569464"/>
             <a:ext cx="1828800" cy="201168"/>
           </a:xfrm>
           <a:prstGeom prst="rect">
@@ -9962,7 +10186,7 @@
                 <a:ea typeface="Calibri" pitchFamily="34" charset="-122"/>
                 <a:cs typeface="Calibri" pitchFamily="34" charset="-120"/>
               </a:rPr>
-              <a:t>to make thoroughly clean</a:t>
+              <a:t>free from dirt</a:t>
             </a:r>
             <a:endParaRPr lang="en-US" sz="850" dirty="0"/>
           </a:p>
@@ -9976,7 +10200,7 @@
         </p:nvSpPr>
         <p:spPr>
           <a:xfrm>
-            <a:off x="5803392" y="2258568"/>
+            <a:off x="4370832" y="2258568"/>
             <a:ext cx="1828800" cy="292608"/>
           </a:xfrm>
           <a:prstGeom prst="rect">
@@ -10010,7 +10234,7 @@
         </p:nvSpPr>
         <p:spPr>
           <a:xfrm>
-            <a:off x="5803392" y="2258568"/>
+            <a:off x="4370832" y="2258568"/>
             <a:ext cx="1828800" cy="292608"/>
           </a:xfrm>
           <a:prstGeom prst="rect">
@@ -10035,7 +10259,7 @@
                 <a:ea typeface="Trebuchet MS" pitchFamily="34" charset="-122"/>
                 <a:cs typeface="Trebuchet MS" pitchFamily="34" charset="-120"/>
               </a:rPr>
-              <a:t>ing</a:t>
+              <a:t>er</a:t>
             </a:r>
             <a:endParaRPr lang="en-US" sz="1300" dirty="0"/>
           </a:p>
@@ -10049,7 +10273,7 @@
         </p:nvSpPr>
         <p:spPr>
           <a:xfrm>
-            <a:off x="5803392" y="2569464"/>
+            <a:off x="4370832" y="2569464"/>
             <a:ext cx="1828800" cy="201168"/>
           </a:xfrm>
           <a:prstGeom prst="rect">
@@ -10074,7 +10298,7 @@
                 <a:ea typeface="Calibri" pitchFamily="34" charset="-122"/>
                 <a:cs typeface="Calibri" pitchFamily="34" charset="-120"/>
               </a:rPr>
-              <a:t>action happening now</a:t>
+              <a:t>person who; more</a:t>
             </a:r>
             <a:endParaRPr lang="en-US" sz="850" dirty="0"/>
           </a:p>
@@ -10083,6 +10307,118 @@
       <p:sp>
         <p:nvSpPr>
           <p:cNvPr id="22" name="Shape 20"/>
+          <p:cNvSpPr/>
+          <p:nvPr/>
+        </p:nvSpPr>
+        <p:spPr>
+          <a:xfrm>
+            <a:off x="6519672" y="2258568"/>
+            <a:ext cx="1828800" cy="292608"/>
+          </a:xfrm>
+          <a:prstGeom prst="rect">
+            <a:avLst>
+              <a:gd name="adj" fmla="val 25000"/>
+            </a:avLst>
+          </a:prstGeom>
+          <a:solidFill>
+            <a:srgbClr val="FCE7F3"/>
+          </a:solidFill>
+          <a:ln w="19050">
+            <a:solidFill>
+              <a:srgbClr val="DB2777"/>
+            </a:solidFill>
+            <a:prstDash val="solid"/>
+          </a:ln>
+          <a:effectLst>
+            <a:outerShdw sx="100000" sy="100000" kx="0" ky="0" algn="bl" rotWithShape="0" blurRad="101600" dist="38100" dir="8100000">
+              <a:srgbClr val="000000">
+                <a:alpha val="12000"/>
+              </a:srgbClr>
+            </a:outerShdw>
+          </a:effectLst>
+        </p:spPr>
+      </p:sp>
+      <p:sp>
+        <p:nvSpPr>
+          <p:cNvPr id="23" name="Text 21"/>
+          <p:cNvSpPr/>
+          <p:nvPr/>
+        </p:nvSpPr>
+        <p:spPr>
+          <a:xfrm>
+            <a:off x="6519672" y="2258568"/>
+            <a:ext cx="1828800" cy="292608"/>
+          </a:xfrm>
+          <a:prstGeom prst="rect">
+            <a:avLst/>
+          </a:prstGeom>
+          <a:noFill/>
+          <a:ln/>
+        </p:spPr>
+        <p:txBody>
+          <a:bodyPr wrap="square" lIns="0" tIns="0" rIns="0" bIns="0" rtlCol="0" anchor="ctr"/>
+          <a:lstStyle/>
+          <a:p>
+            <a:pPr algn="ctr" indent="0" marL="0">
+              <a:buNone/>
+            </a:pPr>
+            <a:r>
+              <a:rPr lang="en-US" sz="1300" b="1" dirty="0">
+                <a:solidFill>
+                  <a:srgbClr val="9D174D"/>
+                </a:solidFill>
+                <a:latin typeface="Trebuchet MS" pitchFamily="34" charset="0"/>
+                <a:ea typeface="Trebuchet MS" pitchFamily="34" charset="-122"/>
+                <a:cs typeface="Trebuchet MS" pitchFamily="34" charset="-120"/>
+              </a:rPr>
+              <a:t>s</a:t>
+            </a:r>
+            <a:endParaRPr lang="en-US" sz="1300" dirty="0"/>
+          </a:p>
+        </p:txBody>
+      </p:sp>
+      <p:sp>
+        <p:nvSpPr>
+          <p:cNvPr id="24" name="Text 22"/>
+          <p:cNvSpPr/>
+          <p:nvPr/>
+        </p:nvSpPr>
+        <p:spPr>
+          <a:xfrm>
+            <a:off x="6519672" y="2569464"/>
+            <a:ext cx="1828800" cy="201168"/>
+          </a:xfrm>
+          <a:prstGeom prst="rect">
+            <a:avLst/>
+          </a:prstGeom>
+          <a:noFill/>
+          <a:ln/>
+        </p:spPr>
+        <p:txBody>
+          <a:bodyPr wrap="square" lIns="0" tIns="0" rIns="0" bIns="0" rtlCol="0" anchor="t"/>
+          <a:lstStyle/>
+          <a:p>
+            <a:pPr algn="ctr" indent="0" marL="0">
+              <a:buNone/>
+            </a:pPr>
+            <a:r>
+              <a:rPr lang="en-US" sz="850" dirty="0">
+                <a:solidFill>
+                  <a:srgbClr val="475569"/>
+                </a:solidFill>
+                <a:latin typeface="Calibri" pitchFamily="34" charset="0"/>
+                <a:ea typeface="Calibri" pitchFamily="34" charset="-122"/>
+                <a:cs typeface="Calibri" pitchFamily="34" charset="-120"/>
+              </a:rPr>
+              <a:t>plural or present tense</a:t>
+            </a:r>
+            <a:endParaRPr lang="en-US" sz="850" dirty="0"/>
+          </a:p>
+        </p:txBody>
+      </p:sp>
+      <p:sp>
+        <p:nvSpPr>
+          <p:cNvPr id="25" name="Shape 23"/>
           <p:cNvSpPr/>
           <p:nvPr/>
         </p:nvSpPr>
@@ -10109,7 +10445,7 @@
       </p:sp>
       <p:sp>
         <p:nvSpPr>
-          <p:cNvPr id="23" name="Text 21"/>
+          <p:cNvPr id="26" name="Text 24"/>
           <p:cNvSpPr/>
           <p:nvPr/>
         </p:nvSpPr>
@@ -10148,7 +10484,7 @@
       </p:sp>
       <p:sp>
         <p:nvSpPr>
-          <p:cNvPr id="24" name="Shape 22"/>
+          <p:cNvPr id="27" name="Shape 25"/>
           <p:cNvSpPr/>
           <p:nvPr/>
         </p:nvSpPr>
@@ -10175,7 +10511,7 @@
       </p:sp>
       <p:sp>
         <p:nvSpPr>
-          <p:cNvPr id="25" name="Shape 23"/>
+          <p:cNvPr id="28" name="Shape 26"/>
           <p:cNvSpPr/>
           <p:nvPr/>
         </p:nvSpPr>
@@ -10202,7 +10538,7 @@
       </p:sp>
       <p:sp>
         <p:nvSpPr>
-          <p:cNvPr id="26" name="Text 24"/>
+          <p:cNvPr id="29" name="Text 27"/>
           <p:cNvSpPr/>
           <p:nvPr/>
         </p:nvSpPr>
@@ -10233,7 +10569,7 @@
                 <a:ea typeface="Trebuchet MS" pitchFamily="34" charset="-122"/>
                 <a:cs typeface="Trebuchet MS" pitchFamily="34" charset="-120"/>
               </a:rPr>
-              <a:t>cleans</a:t>
+              <a:t>clean</a:t>
             </a:r>
             <a:endParaRPr lang="en-US" sz="1400" dirty="0"/>
           </a:p>
@@ -10241,7 +10577,7 @@
       </p:sp>
       <p:sp>
         <p:nvSpPr>
-          <p:cNvPr id="27" name="Text 25"/>
+          <p:cNvPr id="30" name="Text 28"/>
           <p:cNvSpPr/>
           <p:nvPr/>
         </p:nvSpPr>
@@ -10280,7 +10616,7 @@
       </p:sp>
       <p:sp>
         <p:nvSpPr>
-          <p:cNvPr id="28" name="Shape 26"/>
+          <p:cNvPr id="31" name="Shape 29"/>
           <p:cNvSpPr/>
           <p:nvPr/>
         </p:nvSpPr>
@@ -10307,7 +10643,7 @@
       </p:sp>
       <p:sp>
         <p:nvSpPr>
-          <p:cNvPr id="29" name="Text 27"/>
+          <p:cNvPr id="32" name="Text 30"/>
           <p:cNvSpPr/>
           <p:nvPr/>
         </p:nvSpPr>
@@ -10338,7 +10674,7 @@
                 <a:ea typeface="Trebuchet MS" pitchFamily="34" charset="-122"/>
                 <a:cs typeface="Trebuchet MS" pitchFamily="34" charset="-120"/>
               </a:rPr>
-              <a:t>ing</a:t>
+              <a:t>ers</a:t>
             </a:r>
             <a:endParaRPr lang="en-US" sz="1400" dirty="0"/>
           </a:p>
@@ -10346,7 +10682,7 @@
       </p:sp>
       <p:sp>
         <p:nvSpPr>
-          <p:cNvPr id="30" name="Shape 28"/>
+          <p:cNvPr id="33" name="Shape 31"/>
           <p:cNvSpPr/>
           <p:nvPr/>
         </p:nvSpPr>
@@ -10373,7 +10709,7 @@
       </p:sp>
       <p:sp>
         <p:nvSpPr>
-          <p:cNvPr id="31" name="Text 29"/>
+          <p:cNvPr id="34" name="Text 32"/>
           <p:cNvSpPr/>
           <p:nvPr/>
         </p:nvSpPr>
@@ -10412,7 +10748,7 @@
       </p:sp>
       <p:sp>
         <p:nvSpPr>
-          <p:cNvPr id="32" name="Shape 30"/>
+          <p:cNvPr id="35" name="Shape 33"/>
           <p:cNvSpPr/>
           <p:nvPr/>
         </p:nvSpPr>
@@ -10439,7 +10775,7 @@
       </p:sp>
       <p:sp>
         <p:nvSpPr>
-          <p:cNvPr id="33" name="Shape 31"/>
+          <p:cNvPr id="36" name="Shape 34"/>
           <p:cNvSpPr/>
           <p:nvPr/>
         </p:nvSpPr>
@@ -10466,7 +10802,7 @@
       </p:sp>
       <p:sp>
         <p:nvSpPr>
-          <p:cNvPr id="34" name="Text 32"/>
+          <p:cNvPr id="37" name="Text 35"/>
           <p:cNvSpPr/>
           <p:nvPr/>
         </p:nvSpPr>
@@ -10497,7 +10833,7 @@
                 <a:ea typeface="Trebuchet MS" pitchFamily="34" charset="-122"/>
                 <a:cs typeface="Trebuchet MS" pitchFamily="34" charset="-120"/>
               </a:rPr>
-              <a:t>cl</a:t>
+              <a:t>c</a:t>
             </a:r>
             <a:endParaRPr lang="en-US" sz="900" dirty="0"/>
           </a:p>
@@ -10505,7 +10841,7 @@
       </p:sp>
       <p:sp>
         <p:nvSpPr>
-          <p:cNvPr id="35" name="Shape 33"/>
+          <p:cNvPr id="38" name="Shape 36"/>
           <p:cNvSpPr/>
           <p:nvPr/>
         </p:nvSpPr>
@@ -10532,7 +10868,7 @@
       </p:sp>
       <p:sp>
         <p:nvSpPr>
-          <p:cNvPr id="36" name="Text 34"/>
+          <p:cNvPr id="39" name="Text 37"/>
           <p:cNvSpPr/>
           <p:nvPr/>
         </p:nvSpPr>
@@ -10563,7 +10899,7 @@
                 <a:ea typeface="Trebuchet MS" pitchFamily="34" charset="-122"/>
                 <a:cs typeface="Trebuchet MS" pitchFamily="34" charset="-120"/>
               </a:rPr>
-              <a:t>ea</a:t>
+              <a:t>l</a:t>
             </a:r>
             <a:endParaRPr lang="en-US" sz="900" dirty="0"/>
           </a:p>
@@ -10571,7 +10907,7 @@
       </p:sp>
       <p:sp>
         <p:nvSpPr>
-          <p:cNvPr id="37" name="Shape 35"/>
+          <p:cNvPr id="40" name="Shape 38"/>
           <p:cNvSpPr/>
           <p:nvPr/>
         </p:nvSpPr>
@@ -10598,7 +10934,7 @@
       </p:sp>
       <p:sp>
         <p:nvSpPr>
-          <p:cNvPr id="38" name="Text 36"/>
+          <p:cNvPr id="41" name="Text 39"/>
           <p:cNvSpPr/>
           <p:nvPr/>
         </p:nvSpPr>
@@ -10629,7 +10965,7 @@
                 <a:ea typeface="Trebuchet MS" pitchFamily="34" charset="-122"/>
                 <a:cs typeface="Trebuchet MS" pitchFamily="34" charset="-120"/>
               </a:rPr>
-              <a:t>n</a:t>
+              <a:t>ea</a:t>
             </a:r>
             <a:endParaRPr lang="en-US" sz="900" dirty="0"/>
           </a:p>
@@ -10637,7 +10973,7 @@
       </p:sp>
       <p:sp>
         <p:nvSpPr>
-          <p:cNvPr id="39" name="Shape 37"/>
+          <p:cNvPr id="42" name="Shape 40"/>
           <p:cNvSpPr/>
           <p:nvPr/>
         </p:nvSpPr>
@@ -10664,7 +11000,7 @@
       </p:sp>
       <p:sp>
         <p:nvSpPr>
-          <p:cNvPr id="40" name="Text 38"/>
+          <p:cNvPr id="43" name="Text 41"/>
           <p:cNvSpPr/>
           <p:nvPr/>
         </p:nvSpPr>
@@ -10695,7 +11031,7 @@
                 <a:ea typeface="Trebuchet MS" pitchFamily="34" charset="-122"/>
                 <a:cs typeface="Trebuchet MS" pitchFamily="34" charset="-120"/>
               </a:rPr>
-              <a:t>s</a:t>
+              <a:t>n</a:t>
             </a:r>
             <a:endParaRPr lang="en-US" sz="900" dirty="0"/>
           </a:p>
@@ -10703,7 +11039,7 @@
       </p:sp>
       <p:sp>
         <p:nvSpPr>
-          <p:cNvPr id="41" name="Shape 39"/>
+          <p:cNvPr id="44" name="Shape 42"/>
           <p:cNvSpPr/>
           <p:nvPr/>
         </p:nvSpPr>
@@ -10730,7 +11066,7 @@
       </p:sp>
       <p:sp>
         <p:nvSpPr>
-          <p:cNvPr id="42" name="Text 40"/>
+          <p:cNvPr id="45" name="Text 43"/>
           <p:cNvSpPr/>
           <p:nvPr/>
         </p:nvSpPr>
@@ -10761,7 +11097,7 @@
                 <a:ea typeface="Trebuchet MS" pitchFamily="34" charset="-122"/>
                 <a:cs typeface="Trebuchet MS" pitchFamily="34" charset="-120"/>
               </a:rPr>
-              <a:t>i</a:t>
+              <a:t>er</a:t>
             </a:r>
             <a:endParaRPr lang="en-US" sz="900" dirty="0"/>
           </a:p>
@@ -10769,7 +11105,7 @@
       </p:sp>
       <p:sp>
         <p:nvSpPr>
-          <p:cNvPr id="43" name="Shape 41"/>
+          <p:cNvPr id="46" name="Shape 44"/>
           <p:cNvSpPr/>
           <p:nvPr/>
         </p:nvSpPr>
@@ -10796,7 +11132,7 @@
       </p:sp>
       <p:sp>
         <p:nvSpPr>
-          <p:cNvPr id="44" name="Text 42"/>
+          <p:cNvPr id="47" name="Text 45"/>
           <p:cNvSpPr/>
           <p:nvPr/>
         </p:nvSpPr>
@@ -10827,7 +11163,7 @@
                 <a:ea typeface="Trebuchet MS" pitchFamily="34" charset="-122"/>
                 <a:cs typeface="Trebuchet MS" pitchFamily="34" charset="-120"/>
               </a:rPr>
-              <a:t>ng</a:t>
+              <a:t>s</a:t>
             </a:r>
             <a:endParaRPr lang="en-US" sz="900" dirty="0"/>
           </a:p>
@@ -11119,7 +11455,7 @@
                 <a:ea typeface="Calibri" pitchFamily="34" charset="-122"/>
                 <a:cs typeface="Calibri" pitchFamily="34" charset="-120"/>
               </a:rPr>
-              <a:t>Word Labs  •  wordlabs.app  •  Root: 'clean' = free from dirt or impurity</a:t>
+              <a:t>Word Labs  •  wordlabs.app  •  Root: 'clean' = free from dirt</a:t>
             </a:r>
             <a:endParaRPr lang="en-US" sz="800" dirty="0"/>
           </a:p>
@@ -11258,7 +11594,7 @@
                 <a:ea typeface="Trebuchet MS" pitchFamily="34" charset="-122"/>
                 <a:cs typeface="Trebuchet MS" pitchFamily="34" charset="-120"/>
               </a:rPr>
-              <a:t>cleaner</a:t>
+              <a:t>cleanest</a:t>
             </a:r>
             <a:endParaRPr lang="en-US" sz="2800" dirty="0"/>
           </a:p>
@@ -11946,7 +12282,7 @@
                 <a:ea typeface="Calibri" pitchFamily="34" charset="-122"/>
                 <a:cs typeface="Calibri" pitchFamily="34" charset="-120"/>
               </a:rPr>
-              <a:t>Word Labs  •  wordlabs.app  •  Root: 'clean' = free from dirt or impurity</a:t>
+              <a:t>Word Labs  •  wordlabs.app  •  Root: 'clean' = free from dirt</a:t>
             </a:r>
             <a:endParaRPr lang="en-US" sz="800" dirty="0"/>
           </a:p>
@@ -12085,7 +12421,7 @@
                 <a:ea typeface="Trebuchet MS" pitchFamily="34" charset="-122"/>
                 <a:cs typeface="Trebuchet MS" pitchFamily="34" charset="-120"/>
               </a:rPr>
-              <a:t>cleaner</a:t>
+              <a:t>cleanest</a:t>
             </a:r>
             <a:endParaRPr lang="en-US" sz="2800" dirty="0"/>
           </a:p>
@@ -12336,7 +12672,7 @@
                 <a:ea typeface="Trebuchet MS" pitchFamily="34" charset="-122"/>
                 <a:cs typeface="Trebuchet MS" pitchFamily="34" charset="-120"/>
               </a:rPr>
-              <a:t>er</a:t>
+              <a:t>est</a:t>
             </a:r>
             <a:endParaRPr lang="en-US" sz="1300" dirty="0"/>
           </a:p>
@@ -12375,7 +12711,7 @@
                 <a:ea typeface="Calibri" pitchFamily="34" charset="-122"/>
                 <a:cs typeface="Calibri" pitchFamily="34" charset="-120"/>
               </a:rPr>
-              <a:t>more, or one who does</a:t>
+              <a:t>most</a:t>
             </a:r>
             <a:endParaRPr lang="en-US" sz="850" dirty="0"/>
           </a:p>
@@ -12931,7 +13267,7 @@
                 <a:ea typeface="Calibri" pitchFamily="34" charset="-122"/>
                 <a:cs typeface="Calibri" pitchFamily="34" charset="-120"/>
               </a:rPr>
-              <a:t>Word Labs  •  wordlabs.app  •  Root: 'clean' = free from dirt or impurity</a:t>
+              <a:t>Word Labs  •  wordlabs.app  •  Root: 'clean' = free from dirt</a:t>
             </a:r>
             <a:endParaRPr lang="en-US" sz="800" dirty="0"/>
           </a:p>
@@ -13070,7 +13406,7 @@
                 <a:ea typeface="Trebuchet MS" pitchFamily="34" charset="-122"/>
                 <a:cs typeface="Trebuchet MS" pitchFamily="34" charset="-120"/>
               </a:rPr>
-              <a:t>cleaner</a:t>
+              <a:t>cleanest</a:t>
             </a:r>
             <a:endParaRPr lang="en-US" sz="2800" dirty="0"/>
           </a:p>
@@ -13321,7 +13657,7 @@
                 <a:ea typeface="Trebuchet MS" pitchFamily="34" charset="-122"/>
                 <a:cs typeface="Trebuchet MS" pitchFamily="34" charset="-120"/>
               </a:rPr>
-              <a:t>er</a:t>
+              <a:t>est</a:t>
             </a:r>
             <a:endParaRPr lang="en-US" sz="1300" dirty="0"/>
           </a:p>
@@ -13360,7 +13696,7 @@
                 <a:ea typeface="Calibri" pitchFamily="34" charset="-122"/>
                 <a:cs typeface="Calibri" pitchFamily="34" charset="-120"/>
               </a:rPr>
-              <a:t>more, or one who does</a:t>
+              <a:t>most</a:t>
             </a:r>
             <a:endParaRPr lang="en-US" sz="850" dirty="0"/>
           </a:p>
@@ -13624,7 +13960,7 @@
                 <a:ea typeface="Trebuchet MS" pitchFamily="34" charset="-122"/>
                 <a:cs typeface="Trebuchet MS" pitchFamily="34" charset="-120"/>
               </a:rPr>
-              <a:t>er</a:t>
+              <a:t>est</a:t>
             </a:r>
             <a:endParaRPr lang="en-US" sz="1400" dirty="0"/>
           </a:p>
@@ -13957,7 +14293,7 @@
                 <a:ea typeface="Calibri" pitchFamily="34" charset="-122"/>
                 <a:cs typeface="Calibri" pitchFamily="34" charset="-120"/>
               </a:rPr>
-              <a:t>Root 'clean' — free from dirt or impurity</a:t>
+              <a:t>Root 'clean' — free from dirt</a:t>
             </a:r>
             <a:endParaRPr lang="en-US" sz="1600" dirty="0"/>
           </a:p>
@@ -14313,7 +14649,7 @@
                 <a:ea typeface="Calibri" pitchFamily="34" charset="-122"/>
                 <a:cs typeface="Calibri" pitchFamily="34" charset="-120"/>
               </a:rPr>
-              <a:t>Word Labs  •  wordlabs.app  •  Root: 'clean' = free from dirt or impurity</a:t>
+              <a:t>Word Labs  •  wordlabs.app  •  Root: 'clean' = free from dirt</a:t>
             </a:r>
             <a:endParaRPr lang="en-US" sz="800" dirty="0"/>
           </a:p>
@@ -14452,7 +14788,7 @@
                 <a:ea typeface="Trebuchet MS" pitchFamily="34" charset="-122"/>
                 <a:cs typeface="Trebuchet MS" pitchFamily="34" charset="-120"/>
               </a:rPr>
-              <a:t>cleaner</a:t>
+              <a:t>cleanest</a:t>
             </a:r>
             <a:endParaRPr lang="en-US" sz="2800" dirty="0"/>
           </a:p>
@@ -14703,7 +15039,7 @@
                 <a:ea typeface="Trebuchet MS" pitchFamily="34" charset="-122"/>
                 <a:cs typeface="Trebuchet MS" pitchFamily="34" charset="-120"/>
               </a:rPr>
-              <a:t>er</a:t>
+              <a:t>est</a:t>
             </a:r>
             <a:endParaRPr lang="en-US" sz="1300" dirty="0"/>
           </a:p>
@@ -14742,7 +15078,7 @@
                 <a:ea typeface="Calibri" pitchFamily="34" charset="-122"/>
                 <a:cs typeface="Calibri" pitchFamily="34" charset="-120"/>
               </a:rPr>
-              <a:t>more, or one who does</a:t>
+              <a:t>most</a:t>
             </a:r>
             <a:endParaRPr lang="en-US" sz="850" dirty="0"/>
           </a:p>
@@ -15006,7 +15342,7 @@
                 <a:ea typeface="Trebuchet MS" pitchFamily="34" charset="-122"/>
                 <a:cs typeface="Trebuchet MS" pitchFamily="34" charset="-120"/>
               </a:rPr>
-              <a:t>er</a:t>
+              <a:t>est</a:t>
             </a:r>
             <a:endParaRPr lang="en-US" sz="1400" dirty="0"/>
           </a:p>
@@ -15113,7 +15449,7 @@
         </p:nvSpPr>
         <p:spPr>
           <a:xfrm>
-            <a:off x="2670048" y="4169664"/>
+            <a:off x="2124837" y="4169664"/>
             <a:ext cx="685800" cy="475488"/>
           </a:xfrm>
           <a:prstGeom prst="rect">
@@ -15140,7 +15476,7 @@
         </p:nvSpPr>
         <p:spPr>
           <a:xfrm>
-            <a:off x="2670048" y="4169664"/>
+            <a:off x="2124837" y="4169664"/>
             <a:ext cx="685800" cy="475488"/>
           </a:xfrm>
           <a:prstGeom prst="rect">
@@ -15165,7 +15501,7 @@
                 <a:ea typeface="Trebuchet MS" pitchFamily="34" charset="-122"/>
                 <a:cs typeface="Trebuchet MS" pitchFamily="34" charset="-120"/>
               </a:rPr>
-              <a:t>cl</a:t>
+              <a:t>c</a:t>
             </a:r>
             <a:endParaRPr lang="en-US" sz="900" dirty="0"/>
           </a:p>
@@ -15179,7 +15515,7 @@
         </p:nvSpPr>
         <p:spPr>
           <a:xfrm>
-            <a:off x="4123944" y="4169664"/>
+            <a:off x="3033522" y="4169664"/>
             <a:ext cx="685800" cy="475488"/>
           </a:xfrm>
           <a:prstGeom prst="rect">
@@ -15206,7 +15542,7 @@
         </p:nvSpPr>
         <p:spPr>
           <a:xfrm>
-            <a:off x="4123944" y="4169664"/>
+            <a:off x="3033522" y="4169664"/>
             <a:ext cx="685800" cy="475488"/>
           </a:xfrm>
           <a:prstGeom prst="rect">
@@ -15231,7 +15567,7 @@
                 <a:ea typeface="Trebuchet MS" pitchFamily="34" charset="-122"/>
                 <a:cs typeface="Trebuchet MS" pitchFamily="34" charset="-120"/>
               </a:rPr>
-              <a:t>ea</a:t>
+              <a:t>l</a:t>
             </a:r>
             <a:endParaRPr lang="en-US" sz="900" dirty="0"/>
           </a:p>
@@ -15245,7 +15581,7 @@
         </p:nvSpPr>
         <p:spPr>
           <a:xfrm>
-            <a:off x="5577840" y="4169664"/>
+            <a:off x="3942207" y="4169664"/>
             <a:ext cx="685800" cy="475488"/>
           </a:xfrm>
           <a:prstGeom prst="rect">
@@ -15272,7 +15608,7 @@
         </p:nvSpPr>
         <p:spPr>
           <a:xfrm>
-            <a:off x="5577840" y="4169664"/>
+            <a:off x="3942207" y="4169664"/>
             <a:ext cx="685800" cy="475488"/>
           </a:xfrm>
           <a:prstGeom prst="rect">
@@ -15297,7 +15633,7 @@
                 <a:ea typeface="Trebuchet MS" pitchFamily="34" charset="-122"/>
                 <a:cs typeface="Trebuchet MS" pitchFamily="34" charset="-120"/>
               </a:rPr>
-              <a:t>n</a:t>
+              <a:t>ea</a:t>
             </a:r>
             <a:endParaRPr lang="en-US" sz="900" dirty="0"/>
           </a:p>
@@ -15311,7 +15647,7 @@
         </p:nvSpPr>
         <p:spPr>
           <a:xfrm>
-            <a:off x="7031736" y="4169664"/>
+            <a:off x="4850892" y="4169664"/>
             <a:ext cx="685800" cy="475488"/>
           </a:xfrm>
           <a:prstGeom prst="rect">
@@ -15338,7 +15674,7 @@
         </p:nvSpPr>
         <p:spPr>
           <a:xfrm>
-            <a:off x="7031736" y="4169664"/>
+            <a:off x="4850892" y="4169664"/>
             <a:ext cx="685800" cy="475488"/>
           </a:xfrm>
           <a:prstGeom prst="rect">
@@ -15363,7 +15699,205 @@
                 <a:ea typeface="Trebuchet MS" pitchFamily="34" charset="-122"/>
                 <a:cs typeface="Trebuchet MS" pitchFamily="34" charset="-120"/>
               </a:rPr>
-              <a:t>er</a:t>
+              <a:t>n</a:t>
+            </a:r>
+            <a:endParaRPr lang="en-US" sz="900" dirty="0"/>
+          </a:p>
+        </p:txBody>
+      </p:sp>
+      <p:sp>
+        <p:nvSpPr>
+          <p:cNvPr id="41" name="Shape 39"/>
+          <p:cNvSpPr/>
+          <p:nvPr/>
+        </p:nvSpPr>
+        <p:spPr>
+          <a:xfrm>
+            <a:off x="5759577" y="4169664"/>
+            <a:ext cx="685800" cy="475488"/>
+          </a:xfrm>
+          <a:prstGeom prst="rect">
+            <a:avLst>
+              <a:gd name="adj" fmla="val 7692"/>
+            </a:avLst>
+          </a:prstGeom>
+          <a:solidFill>
+            <a:srgbClr val="FFFFFF"/>
+          </a:solidFill>
+          <a:ln w="12700">
+            <a:solidFill>
+              <a:srgbClr val="DB2777"/>
+            </a:solidFill>
+            <a:prstDash val="solid"/>
+          </a:ln>
+        </p:spPr>
+      </p:sp>
+      <p:sp>
+        <p:nvSpPr>
+          <p:cNvPr id="42" name="Text 40"/>
+          <p:cNvSpPr/>
+          <p:nvPr/>
+        </p:nvSpPr>
+        <p:spPr>
+          <a:xfrm>
+            <a:off x="5759577" y="4169664"/>
+            <a:ext cx="685800" cy="475488"/>
+          </a:xfrm>
+          <a:prstGeom prst="rect">
+            <a:avLst/>
+          </a:prstGeom>
+          <a:noFill/>
+          <a:ln/>
+        </p:spPr>
+        <p:txBody>
+          <a:bodyPr wrap="square" lIns="0" tIns="0" rIns="0" bIns="0" rtlCol="0" anchor="ctr"/>
+          <a:lstStyle/>
+          <a:p>
+            <a:pPr algn="ctr" indent="0" marL="0">
+              <a:buNone/>
+            </a:pPr>
+            <a:r>
+              <a:rPr lang="en-US" sz="900" b="1" dirty="0">
+                <a:solidFill>
+                  <a:srgbClr val="9D174D"/>
+                </a:solidFill>
+                <a:latin typeface="Trebuchet MS" pitchFamily="34" charset="0"/>
+                <a:ea typeface="Trebuchet MS" pitchFamily="34" charset="-122"/>
+                <a:cs typeface="Trebuchet MS" pitchFamily="34" charset="-120"/>
+              </a:rPr>
+              <a:t>e</a:t>
+            </a:r>
+            <a:endParaRPr lang="en-US" sz="900" dirty="0"/>
+          </a:p>
+        </p:txBody>
+      </p:sp>
+      <p:sp>
+        <p:nvSpPr>
+          <p:cNvPr id="43" name="Shape 41"/>
+          <p:cNvSpPr/>
+          <p:nvPr/>
+        </p:nvSpPr>
+        <p:spPr>
+          <a:xfrm>
+            <a:off x="6668262" y="4169664"/>
+            <a:ext cx="685800" cy="475488"/>
+          </a:xfrm>
+          <a:prstGeom prst="rect">
+            <a:avLst>
+              <a:gd name="adj" fmla="val 7692"/>
+            </a:avLst>
+          </a:prstGeom>
+          <a:solidFill>
+            <a:srgbClr val="FFFFFF"/>
+          </a:solidFill>
+          <a:ln w="12700">
+            <a:solidFill>
+              <a:srgbClr val="DB2777"/>
+            </a:solidFill>
+            <a:prstDash val="solid"/>
+          </a:ln>
+        </p:spPr>
+      </p:sp>
+      <p:sp>
+        <p:nvSpPr>
+          <p:cNvPr id="44" name="Text 42"/>
+          <p:cNvSpPr/>
+          <p:nvPr/>
+        </p:nvSpPr>
+        <p:spPr>
+          <a:xfrm>
+            <a:off x="6668262" y="4169664"/>
+            <a:ext cx="685800" cy="475488"/>
+          </a:xfrm>
+          <a:prstGeom prst="rect">
+            <a:avLst/>
+          </a:prstGeom>
+          <a:noFill/>
+          <a:ln/>
+        </p:spPr>
+        <p:txBody>
+          <a:bodyPr wrap="square" lIns="0" tIns="0" rIns="0" bIns="0" rtlCol="0" anchor="ctr"/>
+          <a:lstStyle/>
+          <a:p>
+            <a:pPr algn="ctr" indent="0" marL="0">
+              <a:buNone/>
+            </a:pPr>
+            <a:r>
+              <a:rPr lang="en-US" sz="900" b="1" dirty="0">
+                <a:solidFill>
+                  <a:srgbClr val="9D174D"/>
+                </a:solidFill>
+                <a:latin typeface="Trebuchet MS" pitchFamily="34" charset="0"/>
+                <a:ea typeface="Trebuchet MS" pitchFamily="34" charset="-122"/>
+                <a:cs typeface="Trebuchet MS" pitchFamily="34" charset="-120"/>
+              </a:rPr>
+              <a:t>s</a:t>
+            </a:r>
+            <a:endParaRPr lang="en-US" sz="900" dirty="0"/>
+          </a:p>
+        </p:txBody>
+      </p:sp>
+      <p:sp>
+        <p:nvSpPr>
+          <p:cNvPr id="45" name="Shape 43"/>
+          <p:cNvSpPr/>
+          <p:nvPr/>
+        </p:nvSpPr>
+        <p:spPr>
+          <a:xfrm>
+            <a:off x="7576947" y="4169664"/>
+            <a:ext cx="685800" cy="475488"/>
+          </a:xfrm>
+          <a:prstGeom prst="rect">
+            <a:avLst>
+              <a:gd name="adj" fmla="val 7692"/>
+            </a:avLst>
+          </a:prstGeom>
+          <a:solidFill>
+            <a:srgbClr val="FFFFFF"/>
+          </a:solidFill>
+          <a:ln w="12700">
+            <a:solidFill>
+              <a:srgbClr val="DB2777"/>
+            </a:solidFill>
+            <a:prstDash val="solid"/>
+          </a:ln>
+        </p:spPr>
+      </p:sp>
+      <p:sp>
+        <p:nvSpPr>
+          <p:cNvPr id="46" name="Text 44"/>
+          <p:cNvSpPr/>
+          <p:nvPr/>
+        </p:nvSpPr>
+        <p:spPr>
+          <a:xfrm>
+            <a:off x="7576947" y="4169664"/>
+            <a:ext cx="685800" cy="475488"/>
+          </a:xfrm>
+          <a:prstGeom prst="rect">
+            <a:avLst/>
+          </a:prstGeom>
+          <a:noFill/>
+          <a:ln/>
+        </p:spPr>
+        <p:txBody>
+          <a:bodyPr wrap="square" lIns="0" tIns="0" rIns="0" bIns="0" rtlCol="0" anchor="ctr"/>
+          <a:lstStyle/>
+          <a:p>
+            <a:pPr algn="ctr" indent="0" marL="0">
+              <a:buNone/>
+            </a:pPr>
+            <a:r>
+              <a:rPr lang="en-US" sz="900" b="1" dirty="0">
+                <a:solidFill>
+                  <a:srgbClr val="9D174D"/>
+                </a:solidFill>
+                <a:latin typeface="Trebuchet MS" pitchFamily="34" charset="0"/>
+                <a:ea typeface="Trebuchet MS" pitchFamily="34" charset="-122"/>
+                <a:cs typeface="Trebuchet MS" pitchFamily="34" charset="-120"/>
+              </a:rPr>
+              <a:t>t</a:t>
             </a:r>
             <a:endParaRPr lang="en-US" sz="900" dirty="0"/>
           </a:p>
@@ -15937,7 +16471,7 @@
                 <a:ea typeface="Calibri" pitchFamily="34" charset="-122"/>
                 <a:cs typeface="Calibri" pitchFamily="34" charset="-120"/>
               </a:rPr>
-              <a:t>Word Labs  •  wordlabs.app  •  Root: 'clean' = free from dirt or impurity</a:t>
+              <a:t>Word Labs  •  wordlabs.app  •  Root: 'clean' = free from dirt</a:t>
             </a:r>
             <a:endParaRPr lang="en-US" sz="800" dirty="0"/>
           </a:p>
@@ -16271,7 +16805,7 @@
                 <a:ea typeface="Trebuchet MS" pitchFamily="34" charset="-122"/>
                 <a:cs typeface="Trebuchet MS" pitchFamily="34" charset="-120"/>
               </a:rPr>
-              <a:t>2</a:t>
+              <a:t>0</a:t>
             </a:r>
             <a:pPr algn="ctr" indent="0" marL="0">
               <a:buNone/>
@@ -16285,7 +16819,7 @@
                 <a:ea typeface="Trebuchet MS" pitchFamily="34" charset="-122"/>
                 <a:cs typeface="Trebuchet MS" pitchFamily="34" charset="-120"/>
               </a:rPr>
-              <a:t>  punctuation marks</a:t>
+              <a:t>  punctuation mark</a:t>
             </a:r>
             <a:endParaRPr lang="en-US" sz="2800" dirty="0"/>
           </a:p>
@@ -16577,7 +17111,7 @@
                 <a:ea typeface="Calibri" pitchFamily="34" charset="-122"/>
                 <a:cs typeface="Calibri" pitchFamily="34" charset="-120"/>
               </a:rPr>
-              <a:t>Word Labs  •  wordlabs.app  •  Root: 'clean' = free from dirt or impurity</a:t>
+              <a:t>Word Labs  •  wordlabs.app  •  Root: 'clean' = free from dirt</a:t>
             </a:r>
             <a:endParaRPr lang="en-US" sz="800" dirty="0"/>
           </a:p>
@@ -16689,7 +17223,7 @@
                 <a:ea typeface="Calibri" pitchFamily="34" charset="-122"/>
                 <a:cs typeface="Calibri" pitchFamily="34" charset="-120"/>
               </a:rPr>
-              <a:t>The </a:t>
+              <a:t>Dad spent the morning </a:t>
             </a:r>
             <a:pPr algn="l" indent="0" marL="0">
               <a:buNone/>
@@ -16706,7 +17240,7 @@
                 <a:ea typeface="Calibri" pitchFamily="34" charset="-122"/>
                 <a:cs typeface="Calibri" pitchFamily="34" charset="-120"/>
               </a:rPr>
-              <a:t>unclean</a:t>
+              <a:t>cleaning</a:t>
             </a:r>
             <a:pPr algn="l" indent="0" marL="0">
               <a:buNone/>
@@ -16720,7 +17254,7 @@
                 <a:ea typeface="Calibri" pitchFamily="34" charset="-122"/>
                 <a:cs typeface="Calibri" pitchFamily="34" charset="-120"/>
               </a:rPr>
-              <a:t> surfaces were scrubbed until they shone; Jayden then sprayed a </a:t>
+              <a:t> the car. The nurse used an antiseptic wipe for </a:t>
             </a:r>
             <a:pPr algn="l" indent="0" marL="0">
               <a:buNone/>
@@ -16737,7 +17271,7 @@
                 <a:ea typeface="Calibri" pitchFamily="34" charset="-122"/>
                 <a:cs typeface="Calibri" pitchFamily="34" charset="-120"/>
               </a:rPr>
-              <a:t>cleanly</a:t>
+              <a:t>cleansing</a:t>
             </a:r>
             <a:pPr algn="l" indent="0" marL="0">
               <a:buNone/>
@@ -16751,7 +17285,7 @@
                 <a:ea typeface="Calibri" pitchFamily="34" charset="-122"/>
                 <a:cs typeface="Calibri" pitchFamily="34" charset="-120"/>
               </a:rPr>
-              <a:t> scented mist, making the whole room feel fresh, and finally handed the </a:t>
+              <a:t> the wound. The hotel was famous for its </a:t>
             </a:r>
             <a:pPr algn="l" indent="0" marL="0">
               <a:buNone/>
@@ -16768,7 +17302,7 @@
                 <a:ea typeface="Calibri" pitchFamily="34" charset="-122"/>
                 <a:cs typeface="Calibri" pitchFamily="34" charset="-120"/>
               </a:rPr>
-              <a:t>cleaning</a:t>
+              <a:t>cleanliness</a:t>
             </a:r>
             <a:pPr algn="l" indent="0" marL="0">
               <a:buNone/>
@@ -16782,7 +17316,7 @@
                 <a:ea typeface="Calibri" pitchFamily="34" charset="-122"/>
                 <a:cs typeface="Calibri" pitchFamily="34" charset="-120"/>
               </a:rPr>
-              <a:t> supplies back to his teacher.</a:t>
+              <a:t>.</a:t>
             </a:r>
             <a:endParaRPr lang="en-US" sz="1800" dirty="0"/>
           </a:p>
@@ -16937,7 +17471,7 @@
                 <a:ea typeface="Trebuchet MS" pitchFamily="34" charset="-122"/>
                 <a:cs typeface="Trebuchet MS" pitchFamily="34" charset="-120"/>
               </a:rPr>
-              <a:t>unclean</a:t>
+              <a:t>cleaning</a:t>
             </a:r>
             <a:endParaRPr lang="en-US" sz="1400" dirty="0"/>
           </a:p>
@@ -17065,7 +17599,7 @@
                 <a:ea typeface="Trebuchet MS" pitchFamily="34" charset="-122"/>
                 <a:cs typeface="Trebuchet MS" pitchFamily="34" charset="-120"/>
               </a:rPr>
-              <a:t>cleanly</a:t>
+              <a:t>cleansing</a:t>
             </a:r>
             <a:endParaRPr lang="en-US" sz="1400" dirty="0"/>
           </a:p>
@@ -17193,7 +17727,7 @@
                 <a:ea typeface="Trebuchet MS" pitchFamily="34" charset="-122"/>
                 <a:cs typeface="Trebuchet MS" pitchFamily="34" charset="-120"/>
               </a:rPr>
-              <a:t>cleaning</a:t>
+              <a:t>cleanliness</a:t>
             </a:r>
             <a:endParaRPr lang="en-US" sz="1400" dirty="0"/>
           </a:p>
@@ -17524,7 +18058,7 @@
                 <a:ea typeface="Calibri" pitchFamily="34" charset="-122"/>
                 <a:cs typeface="Calibri" pitchFamily="34" charset="-120"/>
               </a:rPr>
-              <a:t>Word Labs  •  wordlabs.app  •  Root: 'clean' = free from dirt or impurity</a:t>
+              <a:t>Word Labs  •  wordlabs.app  •  Root: 'clean' = free from dirt</a:t>
             </a:r>
             <a:endParaRPr lang="en-US" sz="800" dirty="0"/>
           </a:p>
@@ -17663,7 +18197,7 @@
                 <a:ea typeface="Trebuchet MS" pitchFamily="34" charset="-122"/>
                 <a:cs typeface="Trebuchet MS" pitchFamily="34" charset="-120"/>
               </a:rPr>
-              <a:t>unclean</a:t>
+              <a:t>cleaning</a:t>
             </a:r>
             <a:endParaRPr lang="en-US" sz="2800" dirty="0"/>
           </a:p>
@@ -18351,7 +18885,7 @@
                 <a:ea typeface="Calibri" pitchFamily="34" charset="-122"/>
                 <a:cs typeface="Calibri" pitchFamily="34" charset="-120"/>
               </a:rPr>
-              <a:t>Word Labs  •  wordlabs.app  •  Root: 'clean' = free from dirt or impurity</a:t>
+              <a:t>Word Labs  •  wordlabs.app  •  Root: 'clean' = free from dirt</a:t>
             </a:r>
             <a:endParaRPr lang="en-US" sz="800" dirty="0"/>
           </a:p>
@@ -18490,7 +19024,7 @@
                 <a:ea typeface="Trebuchet MS" pitchFamily="34" charset="-122"/>
                 <a:cs typeface="Trebuchet MS" pitchFamily="34" charset="-120"/>
               </a:rPr>
-              <a:t>unclean</a:t>
+              <a:t>cleaning</a:t>
             </a:r>
             <a:endParaRPr lang="en-US" sz="2800" dirty="0"/>
           </a:p>
@@ -18579,11 +19113,11 @@
             </a:avLst>
           </a:prstGeom>
           <a:solidFill>
-            <a:srgbClr val="DDD6FE"/>
+            <a:srgbClr val="CCFBF1"/>
           </a:solidFill>
           <a:ln w="19050">
             <a:solidFill>
-              <a:srgbClr val="7C3AED"/>
+              <a:srgbClr val="0D9488"/>
             </a:solidFill>
             <a:prstDash val="solid"/>
           </a:ln>
@@ -18623,13 +19157,13 @@
             <a:r>
               <a:rPr lang="en-US" sz="1300" b="1" dirty="0">
                 <a:solidFill>
-                  <a:srgbClr val="4C1D95"/>
+                  <a:srgbClr val="0F766E"/>
                 </a:solidFill>
                 <a:latin typeface="Trebuchet MS" pitchFamily="34" charset="0"/>
                 <a:ea typeface="Trebuchet MS" pitchFamily="34" charset="-122"/>
                 <a:cs typeface="Trebuchet MS" pitchFamily="34" charset="-120"/>
               </a:rPr>
-              <a:t>un</a:t>
+              <a:t>clean</a:t>
             </a:r>
             <a:endParaRPr lang="en-US" sz="1300" dirty="0"/>
           </a:p>
@@ -18668,7 +19202,7 @@
                 <a:ea typeface="Calibri" pitchFamily="34" charset="-122"/>
                 <a:cs typeface="Calibri" pitchFamily="34" charset="-120"/>
               </a:rPr>
-              <a:t>not</a:t>
+              <a:t>free from dirt</a:t>
             </a:r>
             <a:endParaRPr lang="en-US" sz="850" dirty="0"/>
           </a:p>
@@ -18691,11 +19225,11 @@
             </a:avLst>
           </a:prstGeom>
           <a:solidFill>
-            <a:srgbClr val="CCFBF1"/>
+            <a:srgbClr val="FCE7F3"/>
           </a:solidFill>
           <a:ln w="19050">
             <a:solidFill>
-              <a:srgbClr val="0D9488"/>
+              <a:srgbClr val="DB2777"/>
             </a:solidFill>
             <a:prstDash val="solid"/>
           </a:ln>
@@ -18735,13 +19269,13 @@
             <a:r>
               <a:rPr lang="en-US" sz="1300" b="1" dirty="0">
                 <a:solidFill>
-                  <a:srgbClr val="0F766E"/>
+                  <a:srgbClr val="9D174D"/>
                 </a:solidFill>
                 <a:latin typeface="Trebuchet MS" pitchFamily="34" charset="0"/>
                 <a:ea typeface="Trebuchet MS" pitchFamily="34" charset="-122"/>
                 <a:cs typeface="Trebuchet MS" pitchFamily="34" charset="-120"/>
               </a:rPr>
-              <a:t>clean</a:t>
+              <a:t>ing</a:t>
             </a:r>
             <a:endParaRPr lang="en-US" sz="1300" dirty="0"/>
           </a:p>
@@ -18780,7 +19314,7 @@
                 <a:ea typeface="Calibri" pitchFamily="34" charset="-122"/>
                 <a:cs typeface="Calibri" pitchFamily="34" charset="-120"/>
               </a:rPr>
-              <a:t>free from dirt</a:t>
+              <a:t>happening now</a:t>
             </a:r>
             <a:endParaRPr lang="en-US" sz="850" dirty="0"/>
           </a:p>
@@ -19336,7 +19870,7 @@
                 <a:ea typeface="Calibri" pitchFamily="34" charset="-122"/>
                 <a:cs typeface="Calibri" pitchFamily="34" charset="-120"/>
               </a:rPr>
-              <a:t>Word Labs  •  wordlabs.app  •  Root: 'clean' = free from dirt or impurity</a:t>
+              <a:t>Word Labs  •  wordlabs.app  •  Root: 'clean' = free from dirt</a:t>
             </a:r>
             <a:endParaRPr lang="en-US" sz="800" dirty="0"/>
           </a:p>
@@ -19475,7 +20009,7 @@
                 <a:ea typeface="Trebuchet MS" pitchFamily="34" charset="-122"/>
                 <a:cs typeface="Trebuchet MS" pitchFamily="34" charset="-120"/>
               </a:rPr>
-              <a:t>unclean</a:t>
+              <a:t>cleaning</a:t>
             </a:r>
             <a:endParaRPr lang="en-US" sz="2800" dirty="0"/>
           </a:p>
@@ -19564,11 +20098,11 @@
             </a:avLst>
           </a:prstGeom>
           <a:solidFill>
-            <a:srgbClr val="DDD6FE"/>
+            <a:srgbClr val="CCFBF1"/>
           </a:solidFill>
           <a:ln w="19050">
             <a:solidFill>
-              <a:srgbClr val="7C3AED"/>
+              <a:srgbClr val="0D9488"/>
             </a:solidFill>
             <a:prstDash val="solid"/>
           </a:ln>
@@ -19608,13 +20142,13 @@
             <a:r>
               <a:rPr lang="en-US" sz="1300" b="1" dirty="0">
                 <a:solidFill>
-                  <a:srgbClr val="4C1D95"/>
+                  <a:srgbClr val="0F766E"/>
                 </a:solidFill>
                 <a:latin typeface="Trebuchet MS" pitchFamily="34" charset="0"/>
                 <a:ea typeface="Trebuchet MS" pitchFamily="34" charset="-122"/>
                 <a:cs typeface="Trebuchet MS" pitchFamily="34" charset="-120"/>
               </a:rPr>
-              <a:t>un</a:t>
+              <a:t>clean</a:t>
             </a:r>
             <a:endParaRPr lang="en-US" sz="1300" dirty="0"/>
           </a:p>
@@ -19653,7 +20187,7 @@
                 <a:ea typeface="Calibri" pitchFamily="34" charset="-122"/>
                 <a:cs typeface="Calibri" pitchFamily="34" charset="-120"/>
               </a:rPr>
-              <a:t>not</a:t>
+              <a:t>free from dirt</a:t>
             </a:r>
             <a:endParaRPr lang="en-US" sz="850" dirty="0"/>
           </a:p>
@@ -19676,11 +20210,11 @@
             </a:avLst>
           </a:prstGeom>
           <a:solidFill>
-            <a:srgbClr val="CCFBF1"/>
+            <a:srgbClr val="FCE7F3"/>
           </a:solidFill>
           <a:ln w="19050">
             <a:solidFill>
-              <a:srgbClr val="0D9488"/>
+              <a:srgbClr val="DB2777"/>
             </a:solidFill>
             <a:prstDash val="solid"/>
           </a:ln>
@@ -19720,13 +20254,13 @@
             <a:r>
               <a:rPr lang="en-US" sz="1300" b="1" dirty="0">
                 <a:solidFill>
-                  <a:srgbClr val="0F766E"/>
+                  <a:srgbClr val="9D174D"/>
                 </a:solidFill>
                 <a:latin typeface="Trebuchet MS" pitchFamily="34" charset="0"/>
                 <a:ea typeface="Trebuchet MS" pitchFamily="34" charset="-122"/>
                 <a:cs typeface="Trebuchet MS" pitchFamily="34" charset="-120"/>
               </a:rPr>
-              <a:t>clean</a:t>
+              <a:t>ing</a:t>
             </a:r>
             <a:endParaRPr lang="en-US" sz="1300" dirty="0"/>
           </a:p>
@@ -19765,7 +20299,7 @@
                 <a:ea typeface="Calibri" pitchFamily="34" charset="-122"/>
                 <a:cs typeface="Calibri" pitchFamily="34" charset="-120"/>
               </a:rPr>
-              <a:t>free from dirt</a:t>
+              <a:t>happening now</a:t>
             </a:r>
             <a:endParaRPr lang="en-US" sz="850" dirty="0"/>
           </a:p>
@@ -19924,7 +20458,7 @@
                 <a:ea typeface="Trebuchet MS" pitchFamily="34" charset="-122"/>
                 <a:cs typeface="Trebuchet MS" pitchFamily="34" charset="-120"/>
               </a:rPr>
-              <a:t>un</a:t>
+              <a:t>clean</a:t>
             </a:r>
             <a:endParaRPr lang="en-US" sz="1400" dirty="0"/>
           </a:p>
@@ -20029,7 +20563,7 @@
                 <a:ea typeface="Trebuchet MS" pitchFamily="34" charset="-122"/>
                 <a:cs typeface="Trebuchet MS" pitchFamily="34" charset="-120"/>
               </a:rPr>
-              <a:t>clean</a:t>
+              <a:t>ing</a:t>
             </a:r>
             <a:endParaRPr lang="en-US" sz="1400" dirty="0"/>
           </a:p>
@@ -20453,7 +20987,7 @@
                 <a:ea typeface="Calibri" pitchFamily="34" charset="-122"/>
                 <a:cs typeface="Calibri" pitchFamily="34" charset="-120"/>
               </a:rPr>
-              <a:t>Word Labs  •  wordlabs.app  •  Root: 'clean' = free from dirt or impurity</a:t>
+              <a:t>Word Labs  •  wordlabs.app  •  Root: 'clean' = free from dirt</a:t>
             </a:r>
             <a:endParaRPr lang="en-US" sz="800" dirty="0"/>
           </a:p>
@@ -20592,7 +21126,7 @@
                 <a:ea typeface="Trebuchet MS" pitchFamily="34" charset="-122"/>
                 <a:cs typeface="Trebuchet MS" pitchFamily="34" charset="-120"/>
               </a:rPr>
-              <a:t>unclean</a:t>
+              <a:t>cleaning</a:t>
             </a:r>
             <a:endParaRPr lang="en-US" sz="2800" dirty="0"/>
           </a:p>
@@ -20681,11 +21215,11 @@
             </a:avLst>
           </a:prstGeom>
           <a:solidFill>
-            <a:srgbClr val="DDD6FE"/>
+            <a:srgbClr val="CCFBF1"/>
           </a:solidFill>
           <a:ln w="19050">
             <a:solidFill>
-              <a:srgbClr val="7C3AED"/>
+              <a:srgbClr val="0D9488"/>
             </a:solidFill>
             <a:prstDash val="solid"/>
           </a:ln>
@@ -20725,13 +21259,13 @@
             <a:r>
               <a:rPr lang="en-US" sz="1300" b="1" dirty="0">
                 <a:solidFill>
-                  <a:srgbClr val="4C1D95"/>
+                  <a:srgbClr val="0F766E"/>
                 </a:solidFill>
                 <a:latin typeface="Trebuchet MS" pitchFamily="34" charset="0"/>
                 <a:ea typeface="Trebuchet MS" pitchFamily="34" charset="-122"/>
                 <a:cs typeface="Trebuchet MS" pitchFamily="34" charset="-120"/>
               </a:rPr>
-              <a:t>un</a:t>
+              <a:t>clean</a:t>
             </a:r>
             <a:endParaRPr lang="en-US" sz="1300" dirty="0"/>
           </a:p>
@@ -20770,7 +21304,7 @@
                 <a:ea typeface="Calibri" pitchFamily="34" charset="-122"/>
                 <a:cs typeface="Calibri" pitchFamily="34" charset="-120"/>
               </a:rPr>
-              <a:t>not</a:t>
+              <a:t>free from dirt</a:t>
             </a:r>
             <a:endParaRPr lang="en-US" sz="850" dirty="0"/>
           </a:p>
@@ -20793,11 +21327,11 @@
             </a:avLst>
           </a:prstGeom>
           <a:solidFill>
-            <a:srgbClr val="CCFBF1"/>
+            <a:srgbClr val="FCE7F3"/>
           </a:solidFill>
           <a:ln w="19050">
             <a:solidFill>
-              <a:srgbClr val="0D9488"/>
+              <a:srgbClr val="DB2777"/>
             </a:solidFill>
             <a:prstDash val="solid"/>
           </a:ln>
@@ -20837,13 +21371,13 @@
             <a:r>
               <a:rPr lang="en-US" sz="1300" b="1" dirty="0">
                 <a:solidFill>
-                  <a:srgbClr val="0F766E"/>
+                  <a:srgbClr val="9D174D"/>
                 </a:solidFill>
                 <a:latin typeface="Trebuchet MS" pitchFamily="34" charset="0"/>
                 <a:ea typeface="Trebuchet MS" pitchFamily="34" charset="-122"/>
                 <a:cs typeface="Trebuchet MS" pitchFamily="34" charset="-120"/>
               </a:rPr>
-              <a:t>clean</a:t>
+              <a:t>ing</a:t>
             </a:r>
             <a:endParaRPr lang="en-US" sz="1300" dirty="0"/>
           </a:p>
@@ -20882,7 +21416,7 @@
                 <a:ea typeface="Calibri" pitchFamily="34" charset="-122"/>
                 <a:cs typeface="Calibri" pitchFamily="34" charset="-120"/>
               </a:rPr>
-              <a:t>free from dirt</a:t>
+              <a:t>happening now</a:t>
             </a:r>
             <a:endParaRPr lang="en-US" sz="850" dirty="0"/>
           </a:p>
@@ -21041,7 +21575,7 @@
                 <a:ea typeface="Trebuchet MS" pitchFamily="34" charset="-122"/>
                 <a:cs typeface="Trebuchet MS" pitchFamily="34" charset="-120"/>
               </a:rPr>
-              <a:t>un</a:t>
+              <a:t>clean</a:t>
             </a:r>
             <a:endParaRPr lang="en-US" sz="1400" dirty="0"/>
           </a:p>
@@ -21146,7 +21680,7 @@
                 <a:ea typeface="Trebuchet MS" pitchFamily="34" charset="-122"/>
                 <a:cs typeface="Trebuchet MS" pitchFamily="34" charset="-120"/>
               </a:rPr>
-              <a:t>clean</a:t>
+              <a:t>ing</a:t>
             </a:r>
             <a:endParaRPr lang="en-US" sz="1400" dirty="0"/>
           </a:p>
@@ -21253,7 +21787,7 @@
         </p:nvSpPr>
         <p:spPr>
           <a:xfrm>
-            <a:off x="2427732" y="4169664"/>
+            <a:off x="2254649" y="4169664"/>
             <a:ext cx="685800" cy="475488"/>
           </a:xfrm>
           <a:prstGeom prst="rect">
@@ -21280,7 +21814,7 @@
         </p:nvSpPr>
         <p:spPr>
           <a:xfrm>
-            <a:off x="2427732" y="4169664"/>
+            <a:off x="2254649" y="4169664"/>
             <a:ext cx="685800" cy="475488"/>
           </a:xfrm>
           <a:prstGeom prst="rect">
@@ -21305,7 +21839,7 @@
                 <a:ea typeface="Trebuchet MS" pitchFamily="34" charset="-122"/>
                 <a:cs typeface="Trebuchet MS" pitchFamily="34" charset="-120"/>
               </a:rPr>
-              <a:t>u</a:t>
+              <a:t>c</a:t>
             </a:r>
             <a:endParaRPr lang="en-US" sz="900" dirty="0"/>
           </a:p>
@@ -21319,7 +21853,7 @@
         </p:nvSpPr>
         <p:spPr>
           <a:xfrm>
-            <a:off x="3639312" y="4169664"/>
+            <a:off x="3293146" y="4169664"/>
             <a:ext cx="685800" cy="475488"/>
           </a:xfrm>
           <a:prstGeom prst="rect">
@@ -21346,7 +21880,7 @@
         </p:nvSpPr>
         <p:spPr>
           <a:xfrm>
-            <a:off x="3639312" y="4169664"/>
+            <a:off x="3293146" y="4169664"/>
             <a:ext cx="685800" cy="475488"/>
           </a:xfrm>
           <a:prstGeom prst="rect">
@@ -21371,7 +21905,7 @@
                 <a:ea typeface="Trebuchet MS" pitchFamily="34" charset="-122"/>
                 <a:cs typeface="Trebuchet MS" pitchFamily="34" charset="-120"/>
               </a:rPr>
-              <a:t>n</a:t>
+              <a:t>l</a:t>
             </a:r>
             <a:endParaRPr lang="en-US" sz="900" dirty="0"/>
           </a:p>
@@ -21385,7 +21919,7 @@
         </p:nvSpPr>
         <p:spPr>
           <a:xfrm>
-            <a:off x="4850892" y="4169664"/>
+            <a:off x="4331643" y="4169664"/>
             <a:ext cx="685800" cy="475488"/>
           </a:xfrm>
           <a:prstGeom prst="rect">
@@ -21412,7 +21946,7 @@
         </p:nvSpPr>
         <p:spPr>
           <a:xfrm>
-            <a:off x="4850892" y="4169664"/>
+            <a:off x="4331643" y="4169664"/>
             <a:ext cx="685800" cy="475488"/>
           </a:xfrm>
           <a:prstGeom prst="rect">
@@ -21437,7 +21971,7 @@
                 <a:ea typeface="Trebuchet MS" pitchFamily="34" charset="-122"/>
                 <a:cs typeface="Trebuchet MS" pitchFamily="34" charset="-120"/>
               </a:rPr>
-              <a:t>cl</a:t>
+              <a:t>ea</a:t>
             </a:r>
             <a:endParaRPr lang="en-US" sz="900" dirty="0"/>
           </a:p>
@@ -21451,7 +21985,7 @@
         </p:nvSpPr>
         <p:spPr>
           <a:xfrm>
-            <a:off x="6062472" y="4169664"/>
+            <a:off x="5370141" y="4169664"/>
             <a:ext cx="685800" cy="475488"/>
           </a:xfrm>
           <a:prstGeom prst="rect">
@@ -21478,7 +22012,7 @@
         </p:nvSpPr>
         <p:spPr>
           <a:xfrm>
-            <a:off x="6062472" y="4169664"/>
+            <a:off x="5370141" y="4169664"/>
             <a:ext cx="685800" cy="475488"/>
           </a:xfrm>
           <a:prstGeom prst="rect">
@@ -21503,7 +22037,7 @@
                 <a:ea typeface="Trebuchet MS" pitchFamily="34" charset="-122"/>
                 <a:cs typeface="Trebuchet MS" pitchFamily="34" charset="-120"/>
               </a:rPr>
-              <a:t>ea</a:t>
+              <a:t>n</a:t>
             </a:r>
             <a:endParaRPr lang="en-US" sz="900" dirty="0"/>
           </a:p>
@@ -21517,7 +22051,7 @@
         </p:nvSpPr>
         <p:spPr>
           <a:xfrm>
-            <a:off x="7274052" y="4169664"/>
+            <a:off x="6408638" y="4169664"/>
             <a:ext cx="685800" cy="475488"/>
           </a:xfrm>
           <a:prstGeom prst="rect">
@@ -21544,7 +22078,7 @@
         </p:nvSpPr>
         <p:spPr>
           <a:xfrm>
-            <a:off x="7274052" y="4169664"/>
+            <a:off x="6408638" y="4169664"/>
             <a:ext cx="685800" cy="475488"/>
           </a:xfrm>
           <a:prstGeom prst="rect">
@@ -21569,7 +22103,73 @@
                 <a:ea typeface="Trebuchet MS" pitchFamily="34" charset="-122"/>
                 <a:cs typeface="Trebuchet MS" pitchFamily="34" charset="-120"/>
               </a:rPr>
-              <a:t>n</a:t>
+              <a:t>i</a:t>
+            </a:r>
+            <a:endParaRPr lang="en-US" sz="900" dirty="0"/>
+          </a:p>
+        </p:txBody>
+      </p:sp>
+      <p:sp>
+        <p:nvSpPr>
+          <p:cNvPr id="43" name="Shape 41"/>
+          <p:cNvSpPr/>
+          <p:nvPr/>
+        </p:nvSpPr>
+        <p:spPr>
+          <a:xfrm>
+            <a:off x="7447135" y="4169664"/>
+            <a:ext cx="685800" cy="475488"/>
+          </a:xfrm>
+          <a:prstGeom prst="rect">
+            <a:avLst>
+              <a:gd name="adj" fmla="val 7692"/>
+            </a:avLst>
+          </a:prstGeom>
+          <a:solidFill>
+            <a:srgbClr val="FFFFFF"/>
+          </a:solidFill>
+          <a:ln w="12700">
+            <a:solidFill>
+              <a:srgbClr val="DB2777"/>
+            </a:solidFill>
+            <a:prstDash val="solid"/>
+          </a:ln>
+        </p:spPr>
+      </p:sp>
+      <p:sp>
+        <p:nvSpPr>
+          <p:cNvPr id="44" name="Text 42"/>
+          <p:cNvSpPr/>
+          <p:nvPr/>
+        </p:nvSpPr>
+        <p:spPr>
+          <a:xfrm>
+            <a:off x="7447135" y="4169664"/>
+            <a:ext cx="685800" cy="475488"/>
+          </a:xfrm>
+          <a:prstGeom prst="rect">
+            <a:avLst/>
+          </a:prstGeom>
+          <a:noFill/>
+          <a:ln/>
+        </p:spPr>
+        <p:txBody>
+          <a:bodyPr wrap="square" lIns="0" tIns="0" rIns="0" bIns="0" rtlCol="0" anchor="ctr"/>
+          <a:lstStyle/>
+          <a:p>
+            <a:pPr algn="ctr" indent="0" marL="0">
+              <a:buNone/>
+            </a:pPr>
+            <a:r>
+              <a:rPr lang="en-US" sz="900" b="1" dirty="0">
+                <a:solidFill>
+                  <a:srgbClr val="9D174D"/>
+                </a:solidFill>
+                <a:latin typeface="Trebuchet MS" pitchFamily="34" charset="0"/>
+                <a:ea typeface="Trebuchet MS" pitchFamily="34" charset="-122"/>
+                <a:cs typeface="Trebuchet MS" pitchFamily="34" charset="-120"/>
+              </a:rPr>
+              <a:t>ng</a:t>
             </a:r>
             <a:endParaRPr lang="en-US" sz="900" dirty="0"/>
           </a:p>
@@ -21861,7 +22461,7 @@
                 <a:ea typeface="Calibri" pitchFamily="34" charset="-122"/>
                 <a:cs typeface="Calibri" pitchFamily="34" charset="-120"/>
               </a:rPr>
-              <a:t>Word Labs  •  wordlabs.app  •  Root: 'clean' = free from dirt or impurity</a:t>
+              <a:t>Word Labs  •  wordlabs.app  •  Root: 'clean' = free from dirt</a:t>
             </a:r>
             <a:endParaRPr lang="en-US" sz="800" dirty="0"/>
           </a:p>
@@ -22000,7 +22600,7 @@
                 <a:ea typeface="Trebuchet MS" pitchFamily="34" charset="-122"/>
                 <a:cs typeface="Trebuchet MS" pitchFamily="34" charset="-120"/>
               </a:rPr>
-              <a:t>cleanly</a:t>
+              <a:t>cleansing</a:t>
             </a:r>
             <a:endParaRPr lang="en-US" sz="2800" dirty="0"/>
           </a:p>
@@ -22688,7 +23288,7 @@
                 <a:ea typeface="Calibri" pitchFamily="34" charset="-122"/>
                 <a:cs typeface="Calibri" pitchFamily="34" charset="-120"/>
               </a:rPr>
-              <a:t>Word Labs  •  wordlabs.app  •  Root: 'clean' = free from dirt or impurity</a:t>
+              <a:t>Word Labs  •  wordlabs.app  •  Root: 'clean' = free from dirt</a:t>
             </a:r>
             <a:endParaRPr lang="en-US" sz="800" dirty="0"/>
           </a:p>
@@ -22827,7 +23427,7 @@
                 <a:ea typeface="Trebuchet MS" pitchFamily="34" charset="-122"/>
                 <a:cs typeface="Trebuchet MS" pitchFamily="34" charset="-120"/>
               </a:rPr>
-              <a:t>cleanly</a:t>
+              <a:t>cleansing</a:t>
             </a:r>
             <a:endParaRPr lang="en-US" sz="2800" dirty="0"/>
           </a:p>
@@ -22907,7 +23507,7 @@
         </p:nvSpPr>
         <p:spPr>
           <a:xfrm>
-            <a:off x="2938272" y="2258568"/>
+            <a:off x="2221992" y="2258568"/>
             <a:ext cx="1828800" cy="292608"/>
           </a:xfrm>
           <a:prstGeom prst="rect">
@@ -22941,7 +23541,7 @@
         </p:nvSpPr>
         <p:spPr>
           <a:xfrm>
-            <a:off x="2938272" y="2258568"/>
+            <a:off x="2221992" y="2258568"/>
             <a:ext cx="1828800" cy="292608"/>
           </a:xfrm>
           <a:prstGeom prst="rect">
@@ -22980,7 +23580,7 @@
         </p:nvSpPr>
         <p:spPr>
           <a:xfrm>
-            <a:off x="2938272" y="2569464"/>
+            <a:off x="2221992" y="2569464"/>
             <a:ext cx="1828800" cy="201168"/>
           </a:xfrm>
           <a:prstGeom prst="rect">
@@ -23019,7 +23619,7 @@
         </p:nvSpPr>
         <p:spPr>
           <a:xfrm>
-            <a:off x="5803392" y="2258568"/>
+            <a:off x="4370832" y="2258568"/>
             <a:ext cx="1828800" cy="292608"/>
           </a:xfrm>
           <a:prstGeom prst="rect">
@@ -23053,7 +23653,7 @@
         </p:nvSpPr>
         <p:spPr>
           <a:xfrm>
-            <a:off x="5803392" y="2258568"/>
+            <a:off x="4370832" y="2258568"/>
             <a:ext cx="1828800" cy="292608"/>
           </a:xfrm>
           <a:prstGeom prst="rect">
@@ -23078,7 +23678,7 @@
                 <a:ea typeface="Trebuchet MS" pitchFamily="34" charset="-122"/>
                 <a:cs typeface="Trebuchet MS" pitchFamily="34" charset="-120"/>
               </a:rPr>
-              <a:t>ly</a:t>
+              <a:t>s</a:t>
             </a:r>
             <a:endParaRPr lang="en-US" sz="1300" dirty="0"/>
           </a:p>
@@ -23092,7 +23692,7 @@
         </p:nvSpPr>
         <p:spPr>
           <a:xfrm>
-            <a:off x="5803392" y="2569464"/>
+            <a:off x="4370832" y="2569464"/>
             <a:ext cx="1828800" cy="201168"/>
           </a:xfrm>
           <a:prstGeom prst="rect">
@@ -23117,7 +23717,7 @@
                 <a:ea typeface="Calibri" pitchFamily="34" charset="-122"/>
                 <a:cs typeface="Calibri" pitchFamily="34" charset="-120"/>
               </a:rPr>
-              <a:t>in the manner of</a:t>
+              <a:t>plural or present tense</a:t>
             </a:r>
             <a:endParaRPr lang="en-US" sz="850" dirty="0"/>
           </a:p>
@@ -23126,6 +23726,118 @@
       <p:sp>
         <p:nvSpPr>
           <p:cNvPr id="22" name="Shape 20"/>
+          <p:cNvSpPr/>
+          <p:nvPr/>
+        </p:nvSpPr>
+        <p:spPr>
+          <a:xfrm>
+            <a:off x="6519672" y="2258568"/>
+            <a:ext cx="1828800" cy="292608"/>
+          </a:xfrm>
+          <a:prstGeom prst="rect">
+            <a:avLst>
+              <a:gd name="adj" fmla="val 25000"/>
+            </a:avLst>
+          </a:prstGeom>
+          <a:solidFill>
+            <a:srgbClr val="FCE7F3"/>
+          </a:solidFill>
+          <a:ln w="19050">
+            <a:solidFill>
+              <a:srgbClr val="DB2777"/>
+            </a:solidFill>
+            <a:prstDash val="solid"/>
+          </a:ln>
+          <a:effectLst>
+            <a:outerShdw sx="100000" sy="100000" kx="0" ky="0" algn="bl" rotWithShape="0" blurRad="101600" dist="38100" dir="8100000">
+              <a:srgbClr val="000000">
+                <a:alpha val="12000"/>
+              </a:srgbClr>
+            </a:outerShdw>
+          </a:effectLst>
+        </p:spPr>
+      </p:sp>
+      <p:sp>
+        <p:nvSpPr>
+          <p:cNvPr id="23" name="Text 21"/>
+          <p:cNvSpPr/>
+          <p:nvPr/>
+        </p:nvSpPr>
+        <p:spPr>
+          <a:xfrm>
+            <a:off x="6519672" y="2258568"/>
+            <a:ext cx="1828800" cy="292608"/>
+          </a:xfrm>
+          <a:prstGeom prst="rect">
+            <a:avLst/>
+          </a:prstGeom>
+          <a:noFill/>
+          <a:ln/>
+        </p:spPr>
+        <p:txBody>
+          <a:bodyPr wrap="square" lIns="0" tIns="0" rIns="0" bIns="0" rtlCol="0" anchor="ctr"/>
+          <a:lstStyle/>
+          <a:p>
+            <a:pPr algn="ctr" indent="0" marL="0">
+              <a:buNone/>
+            </a:pPr>
+            <a:r>
+              <a:rPr lang="en-US" sz="1300" b="1" dirty="0">
+                <a:solidFill>
+                  <a:srgbClr val="9D174D"/>
+                </a:solidFill>
+                <a:latin typeface="Trebuchet MS" pitchFamily="34" charset="0"/>
+                <a:ea typeface="Trebuchet MS" pitchFamily="34" charset="-122"/>
+                <a:cs typeface="Trebuchet MS" pitchFamily="34" charset="-120"/>
+              </a:rPr>
+              <a:t>ing</a:t>
+            </a:r>
+            <a:endParaRPr lang="en-US" sz="1300" dirty="0"/>
+          </a:p>
+        </p:txBody>
+      </p:sp>
+      <p:sp>
+        <p:nvSpPr>
+          <p:cNvPr id="24" name="Text 22"/>
+          <p:cNvSpPr/>
+          <p:nvPr/>
+        </p:nvSpPr>
+        <p:spPr>
+          <a:xfrm>
+            <a:off x="6519672" y="2569464"/>
+            <a:ext cx="1828800" cy="201168"/>
+          </a:xfrm>
+          <a:prstGeom prst="rect">
+            <a:avLst/>
+          </a:prstGeom>
+          <a:noFill/>
+          <a:ln/>
+        </p:spPr>
+        <p:txBody>
+          <a:bodyPr wrap="square" lIns="0" tIns="0" rIns="0" bIns="0" rtlCol="0" anchor="t"/>
+          <a:lstStyle/>
+          <a:p>
+            <a:pPr algn="ctr" indent="0" marL="0">
+              <a:buNone/>
+            </a:pPr>
+            <a:r>
+              <a:rPr lang="en-US" sz="850" dirty="0">
+                <a:solidFill>
+                  <a:srgbClr val="475569"/>
+                </a:solidFill>
+                <a:latin typeface="Calibri" pitchFamily="34" charset="0"/>
+                <a:ea typeface="Calibri" pitchFamily="34" charset="-122"/>
+                <a:cs typeface="Calibri" pitchFamily="34" charset="-120"/>
+              </a:rPr>
+              <a:t>happening now</a:t>
+            </a:r>
+            <a:endParaRPr lang="en-US" sz="850" dirty="0"/>
+          </a:p>
+        </p:txBody>
+      </p:sp>
+      <p:sp>
+        <p:nvSpPr>
+          <p:cNvPr id="25" name="Shape 23"/>
           <p:cNvSpPr/>
           <p:nvPr/>
         </p:nvSpPr>
@@ -23152,7 +23864,7 @@
       </p:sp>
       <p:sp>
         <p:nvSpPr>
-          <p:cNvPr id="23" name="Text 21"/>
+          <p:cNvPr id="26" name="Text 24"/>
           <p:cNvSpPr/>
           <p:nvPr/>
         </p:nvSpPr>
@@ -23191,7 +23903,7 @@
       </p:sp>
       <p:sp>
         <p:nvSpPr>
-          <p:cNvPr id="24" name="Shape 22"/>
+          <p:cNvPr id="27" name="Shape 25"/>
           <p:cNvSpPr/>
           <p:nvPr/>
         </p:nvSpPr>
@@ -23218,7 +23930,7 @@
       </p:sp>
       <p:sp>
         <p:nvSpPr>
-          <p:cNvPr id="25" name="Text 23"/>
+          <p:cNvPr id="28" name="Text 26"/>
           <p:cNvSpPr/>
           <p:nvPr/>
         </p:nvSpPr>
@@ -23257,7 +23969,7 @@
       </p:sp>
       <p:sp>
         <p:nvSpPr>
-          <p:cNvPr id="26" name="Shape 24"/>
+          <p:cNvPr id="29" name="Shape 27"/>
           <p:cNvSpPr/>
           <p:nvPr/>
         </p:nvSpPr>
@@ -23284,7 +23996,7 @@
       </p:sp>
       <p:sp>
         <p:nvSpPr>
-          <p:cNvPr id="27" name="Text 25"/>
+          <p:cNvPr id="30" name="Text 28"/>
           <p:cNvSpPr/>
           <p:nvPr/>
         </p:nvSpPr>
@@ -23323,7 +24035,7 @@
       </p:sp>
       <p:sp>
         <p:nvSpPr>
-          <p:cNvPr id="28" name="Shape 26"/>
+          <p:cNvPr id="31" name="Shape 29"/>
           <p:cNvSpPr/>
           <p:nvPr/>
         </p:nvSpPr>
@@ -23350,7 +24062,7 @@
       </p:sp>
       <p:sp>
         <p:nvSpPr>
-          <p:cNvPr id="29" name="Text 27"/>
+          <p:cNvPr id="32" name="Text 30"/>
           <p:cNvSpPr/>
           <p:nvPr/>
         </p:nvSpPr>
@@ -23673,7 +24385,7 @@
                 <a:ea typeface="Calibri" pitchFamily="34" charset="-122"/>
                 <a:cs typeface="Calibri" pitchFamily="34" charset="-120"/>
               </a:rPr>
-              <a:t>Word Labs  •  wordlabs.app  •  Root: 'clean' = free from dirt or impurity</a:t>
+              <a:t>Word Labs  •  wordlabs.app  •  Root: 'clean' = free from dirt</a:t>
             </a:r>
             <a:endParaRPr lang="en-US" sz="800" dirty="0"/>
           </a:p>
@@ -23746,7 +24458,7 @@
                 <a:ea typeface="Trebuchet MS" pitchFamily="34" charset="-122"/>
                 <a:cs typeface="Trebuchet MS" pitchFamily="34" charset="-120"/>
               </a:rPr>
-              <a:t>We are learning that the root 'clean' means 'free from dirt or impurity'.</a:t>
+              <a:t>We are learning that the root 'clean' means 'free from dirt'.</a:t>
             </a:r>
             <a:endParaRPr lang="en-US" sz="2000" dirty="0"/>
           </a:p>
@@ -24392,7 +25104,7 @@
                 <a:ea typeface="Calibri" pitchFamily="34" charset="-122"/>
                 <a:cs typeface="Calibri" pitchFamily="34" charset="-120"/>
               </a:rPr>
-              <a:t>Word Labs  •  wordlabs.app  •  Root: 'clean' = free from dirt or impurity</a:t>
+              <a:t>Word Labs  •  wordlabs.app  •  Root: 'clean' = free from dirt</a:t>
             </a:r>
             <a:endParaRPr lang="en-US" sz="800" dirty="0"/>
           </a:p>
@@ -24531,7 +25243,7 @@
                 <a:ea typeface="Trebuchet MS" pitchFamily="34" charset="-122"/>
                 <a:cs typeface="Trebuchet MS" pitchFamily="34" charset="-120"/>
               </a:rPr>
-              <a:t>cleanly</a:t>
+              <a:t>cleansing</a:t>
             </a:r>
             <a:endParaRPr lang="en-US" sz="2800" dirty="0"/>
           </a:p>
@@ -24611,7 +25323,7 @@
         </p:nvSpPr>
         <p:spPr>
           <a:xfrm>
-            <a:off x="2938272" y="2258568"/>
+            <a:off x="2221992" y="2258568"/>
             <a:ext cx="1828800" cy="292608"/>
           </a:xfrm>
           <a:prstGeom prst="rect">
@@ -24645,7 +25357,7 @@
         </p:nvSpPr>
         <p:spPr>
           <a:xfrm>
-            <a:off x="2938272" y="2258568"/>
+            <a:off x="2221992" y="2258568"/>
             <a:ext cx="1828800" cy="292608"/>
           </a:xfrm>
           <a:prstGeom prst="rect">
@@ -24684,7 +25396,7 @@
         </p:nvSpPr>
         <p:spPr>
           <a:xfrm>
-            <a:off x="2938272" y="2569464"/>
+            <a:off x="2221992" y="2569464"/>
             <a:ext cx="1828800" cy="201168"/>
           </a:xfrm>
           <a:prstGeom prst="rect">
@@ -24723,7 +25435,7 @@
         </p:nvSpPr>
         <p:spPr>
           <a:xfrm>
-            <a:off x="5803392" y="2258568"/>
+            <a:off x="4370832" y="2258568"/>
             <a:ext cx="1828800" cy="292608"/>
           </a:xfrm>
           <a:prstGeom prst="rect">
@@ -24757,7 +25469,7 @@
         </p:nvSpPr>
         <p:spPr>
           <a:xfrm>
-            <a:off x="5803392" y="2258568"/>
+            <a:off x="4370832" y="2258568"/>
             <a:ext cx="1828800" cy="292608"/>
           </a:xfrm>
           <a:prstGeom prst="rect">
@@ -24782,7 +25494,7 @@
                 <a:ea typeface="Trebuchet MS" pitchFamily="34" charset="-122"/>
                 <a:cs typeface="Trebuchet MS" pitchFamily="34" charset="-120"/>
               </a:rPr>
-              <a:t>ly</a:t>
+              <a:t>s</a:t>
             </a:r>
             <a:endParaRPr lang="en-US" sz="1300" dirty="0"/>
           </a:p>
@@ -24796,7 +25508,7 @@
         </p:nvSpPr>
         <p:spPr>
           <a:xfrm>
-            <a:off x="5803392" y="2569464"/>
+            <a:off x="4370832" y="2569464"/>
             <a:ext cx="1828800" cy="201168"/>
           </a:xfrm>
           <a:prstGeom prst="rect">
@@ -24821,7 +25533,7 @@
                 <a:ea typeface="Calibri" pitchFamily="34" charset="-122"/>
                 <a:cs typeface="Calibri" pitchFamily="34" charset="-120"/>
               </a:rPr>
-              <a:t>in the manner of</a:t>
+              <a:t>plural or present tense</a:t>
             </a:r>
             <a:endParaRPr lang="en-US" sz="850" dirty="0"/>
           </a:p>
@@ -24830,6 +25542,118 @@
       <p:sp>
         <p:nvSpPr>
           <p:cNvPr id="22" name="Shape 20"/>
+          <p:cNvSpPr/>
+          <p:nvPr/>
+        </p:nvSpPr>
+        <p:spPr>
+          <a:xfrm>
+            <a:off x="6519672" y="2258568"/>
+            <a:ext cx="1828800" cy="292608"/>
+          </a:xfrm>
+          <a:prstGeom prst="rect">
+            <a:avLst>
+              <a:gd name="adj" fmla="val 25000"/>
+            </a:avLst>
+          </a:prstGeom>
+          <a:solidFill>
+            <a:srgbClr val="FCE7F3"/>
+          </a:solidFill>
+          <a:ln w="19050">
+            <a:solidFill>
+              <a:srgbClr val="DB2777"/>
+            </a:solidFill>
+            <a:prstDash val="solid"/>
+          </a:ln>
+          <a:effectLst>
+            <a:outerShdw sx="100000" sy="100000" kx="0" ky="0" algn="bl" rotWithShape="0" blurRad="101600" dist="38100" dir="8100000">
+              <a:srgbClr val="000000">
+                <a:alpha val="12000"/>
+              </a:srgbClr>
+            </a:outerShdw>
+          </a:effectLst>
+        </p:spPr>
+      </p:sp>
+      <p:sp>
+        <p:nvSpPr>
+          <p:cNvPr id="23" name="Text 21"/>
+          <p:cNvSpPr/>
+          <p:nvPr/>
+        </p:nvSpPr>
+        <p:spPr>
+          <a:xfrm>
+            <a:off x="6519672" y="2258568"/>
+            <a:ext cx="1828800" cy="292608"/>
+          </a:xfrm>
+          <a:prstGeom prst="rect">
+            <a:avLst/>
+          </a:prstGeom>
+          <a:noFill/>
+          <a:ln/>
+        </p:spPr>
+        <p:txBody>
+          <a:bodyPr wrap="square" lIns="0" tIns="0" rIns="0" bIns="0" rtlCol="0" anchor="ctr"/>
+          <a:lstStyle/>
+          <a:p>
+            <a:pPr algn="ctr" indent="0" marL="0">
+              <a:buNone/>
+            </a:pPr>
+            <a:r>
+              <a:rPr lang="en-US" sz="1300" b="1" dirty="0">
+                <a:solidFill>
+                  <a:srgbClr val="9D174D"/>
+                </a:solidFill>
+                <a:latin typeface="Trebuchet MS" pitchFamily="34" charset="0"/>
+                <a:ea typeface="Trebuchet MS" pitchFamily="34" charset="-122"/>
+                <a:cs typeface="Trebuchet MS" pitchFamily="34" charset="-120"/>
+              </a:rPr>
+              <a:t>ing</a:t>
+            </a:r>
+            <a:endParaRPr lang="en-US" sz="1300" dirty="0"/>
+          </a:p>
+        </p:txBody>
+      </p:sp>
+      <p:sp>
+        <p:nvSpPr>
+          <p:cNvPr id="24" name="Text 22"/>
+          <p:cNvSpPr/>
+          <p:nvPr/>
+        </p:nvSpPr>
+        <p:spPr>
+          <a:xfrm>
+            <a:off x="6519672" y="2569464"/>
+            <a:ext cx="1828800" cy="201168"/>
+          </a:xfrm>
+          <a:prstGeom prst="rect">
+            <a:avLst/>
+          </a:prstGeom>
+          <a:noFill/>
+          <a:ln/>
+        </p:spPr>
+        <p:txBody>
+          <a:bodyPr wrap="square" lIns="0" tIns="0" rIns="0" bIns="0" rtlCol="0" anchor="t"/>
+          <a:lstStyle/>
+          <a:p>
+            <a:pPr algn="ctr" indent="0" marL="0">
+              <a:buNone/>
+            </a:pPr>
+            <a:r>
+              <a:rPr lang="en-US" sz="850" dirty="0">
+                <a:solidFill>
+                  <a:srgbClr val="475569"/>
+                </a:solidFill>
+                <a:latin typeface="Calibri" pitchFamily="34" charset="0"/>
+                <a:ea typeface="Calibri" pitchFamily="34" charset="-122"/>
+                <a:cs typeface="Calibri" pitchFamily="34" charset="-120"/>
+              </a:rPr>
+              <a:t>happening now</a:t>
+            </a:r>
+            <a:endParaRPr lang="en-US" sz="850" dirty="0"/>
+          </a:p>
+        </p:txBody>
+      </p:sp>
+      <p:sp>
+        <p:nvSpPr>
+          <p:cNvPr id="25" name="Shape 23"/>
           <p:cNvSpPr/>
           <p:nvPr/>
         </p:nvSpPr>
@@ -24856,7 +25680,7 @@
       </p:sp>
       <p:sp>
         <p:nvSpPr>
-          <p:cNvPr id="23" name="Text 21"/>
+          <p:cNvPr id="26" name="Text 24"/>
           <p:cNvSpPr/>
           <p:nvPr/>
         </p:nvSpPr>
@@ -24895,7 +25719,7 @@
       </p:sp>
       <p:sp>
         <p:nvSpPr>
-          <p:cNvPr id="24" name="Shape 22"/>
+          <p:cNvPr id="27" name="Shape 25"/>
           <p:cNvSpPr/>
           <p:nvPr/>
         </p:nvSpPr>
@@ -24922,7 +25746,7 @@
       </p:sp>
       <p:sp>
         <p:nvSpPr>
-          <p:cNvPr id="25" name="Shape 23"/>
+          <p:cNvPr id="28" name="Shape 26"/>
           <p:cNvSpPr/>
           <p:nvPr/>
         </p:nvSpPr>
@@ -24949,7 +25773,7 @@
       </p:sp>
       <p:sp>
         <p:nvSpPr>
-          <p:cNvPr id="26" name="Text 24"/>
+          <p:cNvPr id="29" name="Text 27"/>
           <p:cNvSpPr/>
           <p:nvPr/>
         </p:nvSpPr>
@@ -24980,7 +25804,7 @@
                 <a:ea typeface="Trebuchet MS" pitchFamily="34" charset="-122"/>
                 <a:cs typeface="Trebuchet MS" pitchFamily="34" charset="-120"/>
               </a:rPr>
-              <a:t>clean</a:t>
+              <a:t>cleans</a:t>
             </a:r>
             <a:endParaRPr lang="en-US" sz="1400" dirty="0"/>
           </a:p>
@@ -24988,7 +25812,7 @@
       </p:sp>
       <p:sp>
         <p:nvSpPr>
-          <p:cNvPr id="27" name="Text 25"/>
+          <p:cNvPr id="30" name="Text 28"/>
           <p:cNvSpPr/>
           <p:nvPr/>
         </p:nvSpPr>
@@ -25027,7 +25851,7 @@
       </p:sp>
       <p:sp>
         <p:nvSpPr>
-          <p:cNvPr id="28" name="Shape 26"/>
+          <p:cNvPr id="31" name="Shape 29"/>
           <p:cNvSpPr/>
           <p:nvPr/>
         </p:nvSpPr>
@@ -25054,7 +25878,7 @@
       </p:sp>
       <p:sp>
         <p:nvSpPr>
-          <p:cNvPr id="29" name="Text 27"/>
+          <p:cNvPr id="32" name="Text 30"/>
           <p:cNvSpPr/>
           <p:nvPr/>
         </p:nvSpPr>
@@ -25085,7 +25909,7 @@
                 <a:ea typeface="Trebuchet MS" pitchFamily="34" charset="-122"/>
                 <a:cs typeface="Trebuchet MS" pitchFamily="34" charset="-120"/>
               </a:rPr>
-              <a:t>ly</a:t>
+              <a:t>ing</a:t>
             </a:r>
             <a:endParaRPr lang="en-US" sz="1400" dirty="0"/>
           </a:p>
@@ -25093,7 +25917,7 @@
       </p:sp>
       <p:sp>
         <p:nvSpPr>
-          <p:cNvPr id="30" name="Shape 28"/>
+          <p:cNvPr id="33" name="Shape 31"/>
           <p:cNvSpPr/>
           <p:nvPr/>
         </p:nvSpPr>
@@ -25120,7 +25944,7 @@
       </p:sp>
       <p:sp>
         <p:nvSpPr>
-          <p:cNvPr id="31" name="Text 29"/>
+          <p:cNvPr id="34" name="Text 32"/>
           <p:cNvSpPr/>
           <p:nvPr/>
         </p:nvSpPr>
@@ -25159,7 +25983,7 @@
       </p:sp>
       <p:sp>
         <p:nvSpPr>
-          <p:cNvPr id="32" name="Shape 30"/>
+          <p:cNvPr id="35" name="Shape 33"/>
           <p:cNvSpPr/>
           <p:nvPr/>
         </p:nvSpPr>
@@ -25186,7 +26010,7 @@
       </p:sp>
       <p:sp>
         <p:nvSpPr>
-          <p:cNvPr id="33" name="Text 31"/>
+          <p:cNvPr id="36" name="Text 34"/>
           <p:cNvSpPr/>
           <p:nvPr/>
         </p:nvSpPr>
@@ -25509,7 +26333,7 @@
                 <a:ea typeface="Calibri" pitchFamily="34" charset="-122"/>
                 <a:cs typeface="Calibri" pitchFamily="34" charset="-120"/>
               </a:rPr>
-              <a:t>Word Labs  •  wordlabs.app  •  Root: 'clean' = free from dirt or impurity</a:t>
+              <a:t>Word Labs  •  wordlabs.app  •  Root: 'clean' = free from dirt</a:t>
             </a:r>
             <a:endParaRPr lang="en-US" sz="800" dirty="0"/>
           </a:p>
@@ -25648,7 +26472,7 @@
                 <a:ea typeface="Trebuchet MS" pitchFamily="34" charset="-122"/>
                 <a:cs typeface="Trebuchet MS" pitchFamily="34" charset="-120"/>
               </a:rPr>
-              <a:t>cleanly</a:t>
+              <a:t>cleansing</a:t>
             </a:r>
             <a:endParaRPr lang="en-US" sz="2800" dirty="0"/>
           </a:p>
@@ -25728,7 +26552,7 @@
         </p:nvSpPr>
         <p:spPr>
           <a:xfrm>
-            <a:off x="2938272" y="2258568"/>
+            <a:off x="2221992" y="2258568"/>
             <a:ext cx="1828800" cy="292608"/>
           </a:xfrm>
           <a:prstGeom prst="rect">
@@ -25762,7 +26586,7 @@
         </p:nvSpPr>
         <p:spPr>
           <a:xfrm>
-            <a:off x="2938272" y="2258568"/>
+            <a:off x="2221992" y="2258568"/>
             <a:ext cx="1828800" cy="292608"/>
           </a:xfrm>
           <a:prstGeom prst="rect">
@@ -25801,7 +26625,7 @@
         </p:nvSpPr>
         <p:spPr>
           <a:xfrm>
-            <a:off x="2938272" y="2569464"/>
+            <a:off x="2221992" y="2569464"/>
             <a:ext cx="1828800" cy="201168"/>
           </a:xfrm>
           <a:prstGeom prst="rect">
@@ -25840,7 +26664,7 @@
         </p:nvSpPr>
         <p:spPr>
           <a:xfrm>
-            <a:off x="5803392" y="2258568"/>
+            <a:off x="4370832" y="2258568"/>
             <a:ext cx="1828800" cy="292608"/>
           </a:xfrm>
           <a:prstGeom prst="rect">
@@ -25874,7 +26698,7 @@
         </p:nvSpPr>
         <p:spPr>
           <a:xfrm>
-            <a:off x="5803392" y="2258568"/>
+            <a:off x="4370832" y="2258568"/>
             <a:ext cx="1828800" cy="292608"/>
           </a:xfrm>
           <a:prstGeom prst="rect">
@@ -25899,7 +26723,7 @@
                 <a:ea typeface="Trebuchet MS" pitchFamily="34" charset="-122"/>
                 <a:cs typeface="Trebuchet MS" pitchFamily="34" charset="-120"/>
               </a:rPr>
-              <a:t>ly</a:t>
+              <a:t>s</a:t>
             </a:r>
             <a:endParaRPr lang="en-US" sz="1300" dirty="0"/>
           </a:p>
@@ -25913,7 +26737,7 @@
         </p:nvSpPr>
         <p:spPr>
           <a:xfrm>
-            <a:off x="5803392" y="2569464"/>
+            <a:off x="4370832" y="2569464"/>
             <a:ext cx="1828800" cy="201168"/>
           </a:xfrm>
           <a:prstGeom prst="rect">
@@ -25938,7 +26762,7 @@
                 <a:ea typeface="Calibri" pitchFamily="34" charset="-122"/>
                 <a:cs typeface="Calibri" pitchFamily="34" charset="-120"/>
               </a:rPr>
-              <a:t>in the manner of</a:t>
+              <a:t>plural or present tense</a:t>
             </a:r>
             <a:endParaRPr lang="en-US" sz="850" dirty="0"/>
           </a:p>
@@ -25947,6 +26771,118 @@
       <p:sp>
         <p:nvSpPr>
           <p:cNvPr id="22" name="Shape 20"/>
+          <p:cNvSpPr/>
+          <p:nvPr/>
+        </p:nvSpPr>
+        <p:spPr>
+          <a:xfrm>
+            <a:off x="6519672" y="2258568"/>
+            <a:ext cx="1828800" cy="292608"/>
+          </a:xfrm>
+          <a:prstGeom prst="rect">
+            <a:avLst>
+              <a:gd name="adj" fmla="val 25000"/>
+            </a:avLst>
+          </a:prstGeom>
+          <a:solidFill>
+            <a:srgbClr val="FCE7F3"/>
+          </a:solidFill>
+          <a:ln w="19050">
+            <a:solidFill>
+              <a:srgbClr val="DB2777"/>
+            </a:solidFill>
+            <a:prstDash val="solid"/>
+          </a:ln>
+          <a:effectLst>
+            <a:outerShdw sx="100000" sy="100000" kx="0" ky="0" algn="bl" rotWithShape="0" blurRad="101600" dist="38100" dir="8100000">
+              <a:srgbClr val="000000">
+                <a:alpha val="12000"/>
+              </a:srgbClr>
+            </a:outerShdw>
+          </a:effectLst>
+        </p:spPr>
+      </p:sp>
+      <p:sp>
+        <p:nvSpPr>
+          <p:cNvPr id="23" name="Text 21"/>
+          <p:cNvSpPr/>
+          <p:nvPr/>
+        </p:nvSpPr>
+        <p:spPr>
+          <a:xfrm>
+            <a:off x="6519672" y="2258568"/>
+            <a:ext cx="1828800" cy="292608"/>
+          </a:xfrm>
+          <a:prstGeom prst="rect">
+            <a:avLst/>
+          </a:prstGeom>
+          <a:noFill/>
+          <a:ln/>
+        </p:spPr>
+        <p:txBody>
+          <a:bodyPr wrap="square" lIns="0" tIns="0" rIns="0" bIns="0" rtlCol="0" anchor="ctr"/>
+          <a:lstStyle/>
+          <a:p>
+            <a:pPr algn="ctr" indent="0" marL="0">
+              <a:buNone/>
+            </a:pPr>
+            <a:r>
+              <a:rPr lang="en-US" sz="1300" b="1" dirty="0">
+                <a:solidFill>
+                  <a:srgbClr val="9D174D"/>
+                </a:solidFill>
+                <a:latin typeface="Trebuchet MS" pitchFamily="34" charset="0"/>
+                <a:ea typeface="Trebuchet MS" pitchFamily="34" charset="-122"/>
+                <a:cs typeface="Trebuchet MS" pitchFamily="34" charset="-120"/>
+              </a:rPr>
+              <a:t>ing</a:t>
+            </a:r>
+            <a:endParaRPr lang="en-US" sz="1300" dirty="0"/>
+          </a:p>
+        </p:txBody>
+      </p:sp>
+      <p:sp>
+        <p:nvSpPr>
+          <p:cNvPr id="24" name="Text 22"/>
+          <p:cNvSpPr/>
+          <p:nvPr/>
+        </p:nvSpPr>
+        <p:spPr>
+          <a:xfrm>
+            <a:off x="6519672" y="2569464"/>
+            <a:ext cx="1828800" cy="201168"/>
+          </a:xfrm>
+          <a:prstGeom prst="rect">
+            <a:avLst/>
+          </a:prstGeom>
+          <a:noFill/>
+          <a:ln/>
+        </p:spPr>
+        <p:txBody>
+          <a:bodyPr wrap="square" lIns="0" tIns="0" rIns="0" bIns="0" rtlCol="0" anchor="t"/>
+          <a:lstStyle/>
+          <a:p>
+            <a:pPr algn="ctr" indent="0" marL="0">
+              <a:buNone/>
+            </a:pPr>
+            <a:r>
+              <a:rPr lang="en-US" sz="850" dirty="0">
+                <a:solidFill>
+                  <a:srgbClr val="475569"/>
+                </a:solidFill>
+                <a:latin typeface="Calibri" pitchFamily="34" charset="0"/>
+                <a:ea typeface="Calibri" pitchFamily="34" charset="-122"/>
+                <a:cs typeface="Calibri" pitchFamily="34" charset="-120"/>
+              </a:rPr>
+              <a:t>happening now</a:t>
+            </a:r>
+            <a:endParaRPr lang="en-US" sz="850" dirty="0"/>
+          </a:p>
+        </p:txBody>
+      </p:sp>
+      <p:sp>
+        <p:nvSpPr>
+          <p:cNvPr id="25" name="Shape 23"/>
           <p:cNvSpPr/>
           <p:nvPr/>
         </p:nvSpPr>
@@ -25973,7 +26909,7 @@
       </p:sp>
       <p:sp>
         <p:nvSpPr>
-          <p:cNvPr id="23" name="Text 21"/>
+          <p:cNvPr id="26" name="Text 24"/>
           <p:cNvSpPr/>
           <p:nvPr/>
         </p:nvSpPr>
@@ -26012,7 +26948,7 @@
       </p:sp>
       <p:sp>
         <p:nvSpPr>
-          <p:cNvPr id="24" name="Shape 22"/>
+          <p:cNvPr id="27" name="Shape 25"/>
           <p:cNvSpPr/>
           <p:nvPr/>
         </p:nvSpPr>
@@ -26039,7 +26975,7 @@
       </p:sp>
       <p:sp>
         <p:nvSpPr>
-          <p:cNvPr id="25" name="Shape 23"/>
+          <p:cNvPr id="28" name="Shape 26"/>
           <p:cNvSpPr/>
           <p:nvPr/>
         </p:nvSpPr>
@@ -26066,7 +27002,7 @@
       </p:sp>
       <p:sp>
         <p:nvSpPr>
-          <p:cNvPr id="26" name="Text 24"/>
+          <p:cNvPr id="29" name="Text 27"/>
           <p:cNvSpPr/>
           <p:nvPr/>
         </p:nvSpPr>
@@ -26097,7 +27033,7 @@
                 <a:ea typeface="Trebuchet MS" pitchFamily="34" charset="-122"/>
                 <a:cs typeface="Trebuchet MS" pitchFamily="34" charset="-120"/>
               </a:rPr>
-              <a:t>clean</a:t>
+              <a:t>cleans</a:t>
             </a:r>
             <a:endParaRPr lang="en-US" sz="1400" dirty="0"/>
           </a:p>
@@ -26105,7 +27041,7 @@
       </p:sp>
       <p:sp>
         <p:nvSpPr>
-          <p:cNvPr id="27" name="Text 25"/>
+          <p:cNvPr id="30" name="Text 28"/>
           <p:cNvSpPr/>
           <p:nvPr/>
         </p:nvSpPr>
@@ -26144,7 +27080,7 @@
       </p:sp>
       <p:sp>
         <p:nvSpPr>
-          <p:cNvPr id="28" name="Shape 26"/>
+          <p:cNvPr id="31" name="Shape 29"/>
           <p:cNvSpPr/>
           <p:nvPr/>
         </p:nvSpPr>
@@ -26171,7 +27107,7 @@
       </p:sp>
       <p:sp>
         <p:nvSpPr>
-          <p:cNvPr id="29" name="Text 27"/>
+          <p:cNvPr id="32" name="Text 30"/>
           <p:cNvSpPr/>
           <p:nvPr/>
         </p:nvSpPr>
@@ -26202,7 +27138,7 @@
                 <a:ea typeface="Trebuchet MS" pitchFamily="34" charset="-122"/>
                 <a:cs typeface="Trebuchet MS" pitchFamily="34" charset="-120"/>
               </a:rPr>
-              <a:t>ly</a:t>
+              <a:t>ing</a:t>
             </a:r>
             <a:endParaRPr lang="en-US" sz="1400" dirty="0"/>
           </a:p>
@@ -26210,7 +27146,7 @@
       </p:sp>
       <p:sp>
         <p:nvSpPr>
-          <p:cNvPr id="30" name="Shape 28"/>
+          <p:cNvPr id="33" name="Shape 31"/>
           <p:cNvSpPr/>
           <p:nvPr/>
         </p:nvSpPr>
@@ -26237,7 +27173,7 @@
       </p:sp>
       <p:sp>
         <p:nvSpPr>
-          <p:cNvPr id="31" name="Text 29"/>
+          <p:cNvPr id="34" name="Text 32"/>
           <p:cNvSpPr/>
           <p:nvPr/>
         </p:nvSpPr>
@@ -26276,7 +27212,7 @@
       </p:sp>
       <p:sp>
         <p:nvSpPr>
-          <p:cNvPr id="32" name="Shape 30"/>
+          <p:cNvPr id="35" name="Shape 33"/>
           <p:cNvSpPr/>
           <p:nvPr/>
         </p:nvSpPr>
@@ -26303,13 +27239,13 @@
       </p:sp>
       <p:sp>
         <p:nvSpPr>
-          <p:cNvPr id="33" name="Shape 31"/>
-          <p:cNvSpPr/>
-          <p:nvPr/>
-        </p:nvSpPr>
-        <p:spPr>
-          <a:xfrm>
-            <a:off x="2427732" y="4169664"/>
+          <p:cNvPr id="36" name="Shape 34"/>
+          <p:cNvSpPr/>
+          <p:nvPr/>
+        </p:nvSpPr>
+        <p:spPr>
+          <a:xfrm>
+            <a:off x="2124837" y="4169664"/>
             <a:ext cx="685800" cy="475488"/>
           </a:xfrm>
           <a:prstGeom prst="rect">
@@ -26330,13 +27266,13 @@
       </p:sp>
       <p:sp>
         <p:nvSpPr>
-          <p:cNvPr id="34" name="Text 32"/>
-          <p:cNvSpPr/>
-          <p:nvPr/>
-        </p:nvSpPr>
-        <p:spPr>
-          <a:xfrm>
-            <a:off x="2427732" y="4169664"/>
+          <p:cNvPr id="37" name="Text 35"/>
+          <p:cNvSpPr/>
+          <p:nvPr/>
+        </p:nvSpPr>
+        <p:spPr>
+          <a:xfrm>
+            <a:off x="2124837" y="4169664"/>
             <a:ext cx="685800" cy="475488"/>
           </a:xfrm>
           <a:prstGeom prst="rect">
@@ -26361,7 +27297,7 @@
                 <a:ea typeface="Trebuchet MS" pitchFamily="34" charset="-122"/>
                 <a:cs typeface="Trebuchet MS" pitchFamily="34" charset="-120"/>
               </a:rPr>
-              <a:t>cl</a:t>
+              <a:t>c</a:t>
             </a:r>
             <a:endParaRPr lang="en-US" sz="900" dirty="0"/>
           </a:p>
@@ -26369,13 +27305,13 @@
       </p:sp>
       <p:sp>
         <p:nvSpPr>
-          <p:cNvPr id="35" name="Shape 33"/>
-          <p:cNvSpPr/>
-          <p:nvPr/>
-        </p:nvSpPr>
-        <p:spPr>
-          <a:xfrm>
-            <a:off x="3639312" y="4169664"/>
+          <p:cNvPr id="38" name="Shape 36"/>
+          <p:cNvSpPr/>
+          <p:nvPr/>
+        </p:nvSpPr>
+        <p:spPr>
+          <a:xfrm>
+            <a:off x="3033522" y="4169664"/>
             <a:ext cx="685800" cy="475488"/>
           </a:xfrm>
           <a:prstGeom prst="rect">
@@ -26396,13 +27332,13 @@
       </p:sp>
       <p:sp>
         <p:nvSpPr>
-          <p:cNvPr id="36" name="Text 34"/>
-          <p:cNvSpPr/>
-          <p:nvPr/>
-        </p:nvSpPr>
-        <p:spPr>
-          <a:xfrm>
-            <a:off x="3639312" y="4169664"/>
+          <p:cNvPr id="39" name="Text 37"/>
+          <p:cNvSpPr/>
+          <p:nvPr/>
+        </p:nvSpPr>
+        <p:spPr>
+          <a:xfrm>
+            <a:off x="3033522" y="4169664"/>
             <a:ext cx="685800" cy="475488"/>
           </a:xfrm>
           <a:prstGeom prst="rect">
@@ -26427,7 +27363,7 @@
                 <a:ea typeface="Trebuchet MS" pitchFamily="34" charset="-122"/>
                 <a:cs typeface="Trebuchet MS" pitchFamily="34" charset="-120"/>
               </a:rPr>
-              <a:t>ea</a:t>
+              <a:t>l</a:t>
             </a:r>
             <a:endParaRPr lang="en-US" sz="900" dirty="0"/>
           </a:p>
@@ -26435,13 +27371,13 @@
       </p:sp>
       <p:sp>
         <p:nvSpPr>
-          <p:cNvPr id="37" name="Shape 35"/>
-          <p:cNvSpPr/>
-          <p:nvPr/>
-        </p:nvSpPr>
-        <p:spPr>
-          <a:xfrm>
-            <a:off x="4850892" y="4169664"/>
+          <p:cNvPr id="40" name="Shape 38"/>
+          <p:cNvSpPr/>
+          <p:nvPr/>
+        </p:nvSpPr>
+        <p:spPr>
+          <a:xfrm>
+            <a:off x="3942207" y="4169664"/>
             <a:ext cx="685800" cy="475488"/>
           </a:xfrm>
           <a:prstGeom prst="rect">
@@ -26462,13 +27398,13 @@
       </p:sp>
       <p:sp>
         <p:nvSpPr>
-          <p:cNvPr id="38" name="Text 36"/>
-          <p:cNvSpPr/>
-          <p:nvPr/>
-        </p:nvSpPr>
-        <p:spPr>
-          <a:xfrm>
-            <a:off x="4850892" y="4169664"/>
+          <p:cNvPr id="41" name="Text 39"/>
+          <p:cNvSpPr/>
+          <p:nvPr/>
+        </p:nvSpPr>
+        <p:spPr>
+          <a:xfrm>
+            <a:off x="3942207" y="4169664"/>
             <a:ext cx="685800" cy="475488"/>
           </a:xfrm>
           <a:prstGeom prst="rect">
@@ -26493,7 +27429,7 @@
                 <a:ea typeface="Trebuchet MS" pitchFamily="34" charset="-122"/>
                 <a:cs typeface="Trebuchet MS" pitchFamily="34" charset="-120"/>
               </a:rPr>
-              <a:t>n</a:t>
+              <a:t>ea</a:t>
             </a:r>
             <a:endParaRPr lang="en-US" sz="900" dirty="0"/>
           </a:p>
@@ -26501,13 +27437,13 @@
       </p:sp>
       <p:sp>
         <p:nvSpPr>
-          <p:cNvPr id="39" name="Shape 37"/>
-          <p:cNvSpPr/>
-          <p:nvPr/>
-        </p:nvSpPr>
-        <p:spPr>
-          <a:xfrm>
-            <a:off x="6062472" y="4169664"/>
+          <p:cNvPr id="42" name="Shape 40"/>
+          <p:cNvSpPr/>
+          <p:nvPr/>
+        </p:nvSpPr>
+        <p:spPr>
+          <a:xfrm>
+            <a:off x="4850892" y="4169664"/>
             <a:ext cx="685800" cy="475488"/>
           </a:xfrm>
           <a:prstGeom prst="rect">
@@ -26528,13 +27464,13 @@
       </p:sp>
       <p:sp>
         <p:nvSpPr>
-          <p:cNvPr id="40" name="Text 38"/>
-          <p:cNvSpPr/>
-          <p:nvPr/>
-        </p:nvSpPr>
-        <p:spPr>
-          <a:xfrm>
-            <a:off x="6062472" y="4169664"/>
+          <p:cNvPr id="43" name="Text 41"/>
+          <p:cNvSpPr/>
+          <p:nvPr/>
+        </p:nvSpPr>
+        <p:spPr>
+          <a:xfrm>
+            <a:off x="4850892" y="4169664"/>
             <a:ext cx="685800" cy="475488"/>
           </a:xfrm>
           <a:prstGeom prst="rect">
@@ -26559,7 +27495,7 @@
                 <a:ea typeface="Trebuchet MS" pitchFamily="34" charset="-122"/>
                 <a:cs typeface="Trebuchet MS" pitchFamily="34" charset="-120"/>
               </a:rPr>
-              <a:t>l</a:t>
+              <a:t>n</a:t>
             </a:r>
             <a:endParaRPr lang="en-US" sz="900" dirty="0"/>
           </a:p>
@@ -26567,13 +27503,13 @@
       </p:sp>
       <p:sp>
         <p:nvSpPr>
-          <p:cNvPr id="41" name="Shape 39"/>
-          <p:cNvSpPr/>
-          <p:nvPr/>
-        </p:nvSpPr>
-        <p:spPr>
-          <a:xfrm>
-            <a:off x="7274052" y="4169664"/>
+          <p:cNvPr id="44" name="Shape 42"/>
+          <p:cNvSpPr/>
+          <p:nvPr/>
+        </p:nvSpPr>
+        <p:spPr>
+          <a:xfrm>
+            <a:off x="5759577" y="4169664"/>
             <a:ext cx="685800" cy="475488"/>
           </a:xfrm>
           <a:prstGeom prst="rect">
@@ -26594,13 +27530,13 @@
       </p:sp>
       <p:sp>
         <p:nvSpPr>
-          <p:cNvPr id="42" name="Text 40"/>
-          <p:cNvSpPr/>
-          <p:nvPr/>
-        </p:nvSpPr>
-        <p:spPr>
-          <a:xfrm>
-            <a:off x="7274052" y="4169664"/>
+          <p:cNvPr id="45" name="Text 43"/>
+          <p:cNvSpPr/>
+          <p:nvPr/>
+        </p:nvSpPr>
+        <p:spPr>
+          <a:xfrm>
+            <a:off x="5759577" y="4169664"/>
             <a:ext cx="685800" cy="475488"/>
           </a:xfrm>
           <a:prstGeom prst="rect">
@@ -26625,7 +27561,139 @@
                 <a:ea typeface="Trebuchet MS" pitchFamily="34" charset="-122"/>
                 <a:cs typeface="Trebuchet MS" pitchFamily="34" charset="-120"/>
               </a:rPr>
-              <a:t>y</a:t>
+              <a:t>s</a:t>
+            </a:r>
+            <a:endParaRPr lang="en-US" sz="900" dirty="0"/>
+          </a:p>
+        </p:txBody>
+      </p:sp>
+      <p:sp>
+        <p:nvSpPr>
+          <p:cNvPr id="46" name="Shape 44"/>
+          <p:cNvSpPr/>
+          <p:nvPr/>
+        </p:nvSpPr>
+        <p:spPr>
+          <a:xfrm>
+            <a:off x="6668262" y="4169664"/>
+            <a:ext cx="685800" cy="475488"/>
+          </a:xfrm>
+          <a:prstGeom prst="rect">
+            <a:avLst>
+              <a:gd name="adj" fmla="val 7692"/>
+            </a:avLst>
+          </a:prstGeom>
+          <a:solidFill>
+            <a:srgbClr val="FFFFFF"/>
+          </a:solidFill>
+          <a:ln w="12700">
+            <a:solidFill>
+              <a:srgbClr val="DB2777"/>
+            </a:solidFill>
+            <a:prstDash val="solid"/>
+          </a:ln>
+        </p:spPr>
+      </p:sp>
+      <p:sp>
+        <p:nvSpPr>
+          <p:cNvPr id="47" name="Text 45"/>
+          <p:cNvSpPr/>
+          <p:nvPr/>
+        </p:nvSpPr>
+        <p:spPr>
+          <a:xfrm>
+            <a:off x="6668262" y="4169664"/>
+            <a:ext cx="685800" cy="475488"/>
+          </a:xfrm>
+          <a:prstGeom prst="rect">
+            <a:avLst/>
+          </a:prstGeom>
+          <a:noFill/>
+          <a:ln/>
+        </p:spPr>
+        <p:txBody>
+          <a:bodyPr wrap="square" lIns="0" tIns="0" rIns="0" bIns="0" rtlCol="0" anchor="ctr"/>
+          <a:lstStyle/>
+          <a:p>
+            <a:pPr algn="ctr" indent="0" marL="0">
+              <a:buNone/>
+            </a:pPr>
+            <a:r>
+              <a:rPr lang="en-US" sz="900" b="1" dirty="0">
+                <a:solidFill>
+                  <a:srgbClr val="9D174D"/>
+                </a:solidFill>
+                <a:latin typeface="Trebuchet MS" pitchFamily="34" charset="0"/>
+                <a:ea typeface="Trebuchet MS" pitchFamily="34" charset="-122"/>
+                <a:cs typeface="Trebuchet MS" pitchFamily="34" charset="-120"/>
+              </a:rPr>
+              <a:t>i</a:t>
+            </a:r>
+            <a:endParaRPr lang="en-US" sz="900" dirty="0"/>
+          </a:p>
+        </p:txBody>
+      </p:sp>
+      <p:sp>
+        <p:nvSpPr>
+          <p:cNvPr id="48" name="Shape 46"/>
+          <p:cNvSpPr/>
+          <p:nvPr/>
+        </p:nvSpPr>
+        <p:spPr>
+          <a:xfrm>
+            <a:off x="7576947" y="4169664"/>
+            <a:ext cx="685800" cy="475488"/>
+          </a:xfrm>
+          <a:prstGeom prst="rect">
+            <a:avLst>
+              <a:gd name="adj" fmla="val 7692"/>
+            </a:avLst>
+          </a:prstGeom>
+          <a:solidFill>
+            <a:srgbClr val="FFFFFF"/>
+          </a:solidFill>
+          <a:ln w="12700">
+            <a:solidFill>
+              <a:srgbClr val="DB2777"/>
+            </a:solidFill>
+            <a:prstDash val="solid"/>
+          </a:ln>
+        </p:spPr>
+      </p:sp>
+      <p:sp>
+        <p:nvSpPr>
+          <p:cNvPr id="49" name="Text 47"/>
+          <p:cNvSpPr/>
+          <p:nvPr/>
+        </p:nvSpPr>
+        <p:spPr>
+          <a:xfrm>
+            <a:off x="7576947" y="4169664"/>
+            <a:ext cx="685800" cy="475488"/>
+          </a:xfrm>
+          <a:prstGeom prst="rect">
+            <a:avLst/>
+          </a:prstGeom>
+          <a:noFill/>
+          <a:ln/>
+        </p:spPr>
+        <p:txBody>
+          <a:bodyPr wrap="square" lIns="0" tIns="0" rIns="0" bIns="0" rtlCol="0" anchor="ctr"/>
+          <a:lstStyle/>
+          <a:p>
+            <a:pPr algn="ctr" indent="0" marL="0">
+              <a:buNone/>
+            </a:pPr>
+            <a:r>
+              <a:rPr lang="en-US" sz="900" b="1" dirty="0">
+                <a:solidFill>
+                  <a:srgbClr val="9D174D"/>
+                </a:solidFill>
+                <a:latin typeface="Trebuchet MS" pitchFamily="34" charset="0"/>
+                <a:ea typeface="Trebuchet MS" pitchFamily="34" charset="-122"/>
+                <a:cs typeface="Trebuchet MS" pitchFamily="34" charset="-120"/>
+              </a:rPr>
+              <a:t>ng</a:t>
             </a:r>
             <a:endParaRPr lang="en-US" sz="900" dirty="0"/>
           </a:p>
@@ -26917,7 +27985,7 @@
                 <a:ea typeface="Calibri" pitchFamily="34" charset="-122"/>
                 <a:cs typeface="Calibri" pitchFamily="34" charset="-120"/>
               </a:rPr>
-              <a:t>Word Labs  •  wordlabs.app  •  Root: 'clean' = free from dirt or impurity</a:t>
+              <a:t>Word Labs  •  wordlabs.app  •  Root: 'clean' = free from dirt</a:t>
             </a:r>
             <a:endParaRPr lang="en-US" sz="800" dirty="0"/>
           </a:p>
@@ -27056,7 +28124,7 @@
                 <a:ea typeface="Trebuchet MS" pitchFamily="34" charset="-122"/>
                 <a:cs typeface="Trebuchet MS" pitchFamily="34" charset="-120"/>
               </a:rPr>
-              <a:t>cleaning</a:t>
+              <a:t>cleanliness</a:t>
             </a:r>
             <a:endParaRPr lang="en-US" sz="2800" dirty="0"/>
           </a:p>
@@ -27744,7 +28812,7 @@
                 <a:ea typeface="Calibri" pitchFamily="34" charset="-122"/>
                 <a:cs typeface="Calibri" pitchFamily="34" charset="-120"/>
               </a:rPr>
-              <a:t>Word Labs  •  wordlabs.app  •  Root: 'clean' = free from dirt or impurity</a:t>
+              <a:t>Word Labs  •  wordlabs.app  •  Root: 'clean' = free from dirt</a:t>
             </a:r>
             <a:endParaRPr lang="en-US" sz="800" dirty="0"/>
           </a:p>
@@ -27883,7 +28951,7 @@
                 <a:ea typeface="Trebuchet MS" pitchFamily="34" charset="-122"/>
                 <a:cs typeface="Trebuchet MS" pitchFamily="34" charset="-120"/>
               </a:rPr>
-              <a:t>cleaning</a:t>
+              <a:t>cleanliness</a:t>
             </a:r>
             <a:endParaRPr lang="en-US" sz="2800" dirty="0"/>
           </a:p>
@@ -27963,7 +29031,7 @@
         </p:nvSpPr>
         <p:spPr>
           <a:xfrm>
-            <a:off x="2938272" y="2258568"/>
+            <a:off x="2221992" y="2258568"/>
             <a:ext cx="1828800" cy="292608"/>
           </a:xfrm>
           <a:prstGeom prst="rect">
@@ -27997,7 +29065,7 @@
         </p:nvSpPr>
         <p:spPr>
           <a:xfrm>
-            <a:off x="2938272" y="2258568"/>
+            <a:off x="2221992" y="2258568"/>
             <a:ext cx="1828800" cy="292608"/>
           </a:xfrm>
           <a:prstGeom prst="rect">
@@ -28036,7 +29104,7 @@
         </p:nvSpPr>
         <p:spPr>
           <a:xfrm>
-            <a:off x="2938272" y="2569464"/>
+            <a:off x="2221992" y="2569464"/>
             <a:ext cx="1828800" cy="201168"/>
           </a:xfrm>
           <a:prstGeom prst="rect">
@@ -28075,7 +29143,7 @@
         </p:nvSpPr>
         <p:spPr>
           <a:xfrm>
-            <a:off x="5803392" y="2258568"/>
+            <a:off x="4370832" y="2258568"/>
             <a:ext cx="1828800" cy="292608"/>
           </a:xfrm>
           <a:prstGeom prst="rect">
@@ -28109,7 +29177,7 @@
         </p:nvSpPr>
         <p:spPr>
           <a:xfrm>
-            <a:off x="5803392" y="2258568"/>
+            <a:off x="4370832" y="2258568"/>
             <a:ext cx="1828800" cy="292608"/>
           </a:xfrm>
           <a:prstGeom prst="rect">
@@ -28134,7 +29202,7 @@
                 <a:ea typeface="Trebuchet MS" pitchFamily="34" charset="-122"/>
                 <a:cs typeface="Trebuchet MS" pitchFamily="34" charset="-120"/>
               </a:rPr>
-              <a:t>ing</a:t>
+              <a:t>ly</a:t>
             </a:r>
             <a:endParaRPr lang="en-US" sz="1300" dirty="0"/>
           </a:p>
@@ -28148,7 +29216,7 @@
         </p:nvSpPr>
         <p:spPr>
           <a:xfrm>
-            <a:off x="5803392" y="2569464"/>
+            <a:off x="4370832" y="2569464"/>
             <a:ext cx="1828800" cy="201168"/>
           </a:xfrm>
           <a:prstGeom prst="rect">
@@ -28173,7 +29241,7 @@
                 <a:ea typeface="Calibri" pitchFamily="34" charset="-122"/>
                 <a:cs typeface="Calibri" pitchFamily="34" charset="-120"/>
               </a:rPr>
-              <a:t>action happening now</a:t>
+              <a:t>in a way</a:t>
             </a:r>
             <a:endParaRPr lang="en-US" sz="850" dirty="0"/>
           </a:p>
@@ -28182,6 +29250,118 @@
       <p:sp>
         <p:nvSpPr>
           <p:cNvPr id="22" name="Shape 20"/>
+          <p:cNvSpPr/>
+          <p:nvPr/>
+        </p:nvSpPr>
+        <p:spPr>
+          <a:xfrm>
+            <a:off x="6519672" y="2258568"/>
+            <a:ext cx="1828800" cy="292608"/>
+          </a:xfrm>
+          <a:prstGeom prst="rect">
+            <a:avLst>
+              <a:gd name="adj" fmla="val 25000"/>
+            </a:avLst>
+          </a:prstGeom>
+          <a:solidFill>
+            <a:srgbClr val="FCE7F3"/>
+          </a:solidFill>
+          <a:ln w="19050">
+            <a:solidFill>
+              <a:srgbClr val="DB2777"/>
+            </a:solidFill>
+            <a:prstDash val="solid"/>
+          </a:ln>
+          <a:effectLst>
+            <a:outerShdw sx="100000" sy="100000" kx="0" ky="0" algn="bl" rotWithShape="0" blurRad="101600" dist="38100" dir="8100000">
+              <a:srgbClr val="000000">
+                <a:alpha val="12000"/>
+              </a:srgbClr>
+            </a:outerShdw>
+          </a:effectLst>
+        </p:spPr>
+      </p:sp>
+      <p:sp>
+        <p:nvSpPr>
+          <p:cNvPr id="23" name="Text 21"/>
+          <p:cNvSpPr/>
+          <p:nvPr/>
+        </p:nvSpPr>
+        <p:spPr>
+          <a:xfrm>
+            <a:off x="6519672" y="2258568"/>
+            <a:ext cx="1828800" cy="292608"/>
+          </a:xfrm>
+          <a:prstGeom prst="rect">
+            <a:avLst/>
+          </a:prstGeom>
+          <a:noFill/>
+          <a:ln/>
+        </p:spPr>
+        <p:txBody>
+          <a:bodyPr wrap="square" lIns="0" tIns="0" rIns="0" bIns="0" rtlCol="0" anchor="ctr"/>
+          <a:lstStyle/>
+          <a:p>
+            <a:pPr algn="ctr" indent="0" marL="0">
+              <a:buNone/>
+            </a:pPr>
+            <a:r>
+              <a:rPr lang="en-US" sz="1300" b="1" dirty="0">
+                <a:solidFill>
+                  <a:srgbClr val="9D174D"/>
+                </a:solidFill>
+                <a:latin typeface="Trebuchet MS" pitchFamily="34" charset="0"/>
+                <a:ea typeface="Trebuchet MS" pitchFamily="34" charset="-122"/>
+                <a:cs typeface="Trebuchet MS" pitchFamily="34" charset="-120"/>
+              </a:rPr>
+              <a:t>ness</a:t>
+            </a:r>
+            <a:endParaRPr lang="en-US" sz="1300" dirty="0"/>
+          </a:p>
+        </p:txBody>
+      </p:sp>
+      <p:sp>
+        <p:nvSpPr>
+          <p:cNvPr id="24" name="Text 22"/>
+          <p:cNvSpPr/>
+          <p:nvPr/>
+        </p:nvSpPr>
+        <p:spPr>
+          <a:xfrm>
+            <a:off x="6519672" y="2569464"/>
+            <a:ext cx="1828800" cy="201168"/>
+          </a:xfrm>
+          <a:prstGeom prst="rect">
+            <a:avLst/>
+          </a:prstGeom>
+          <a:noFill/>
+          <a:ln/>
+        </p:spPr>
+        <p:txBody>
+          <a:bodyPr wrap="square" lIns="0" tIns="0" rIns="0" bIns="0" rtlCol="0" anchor="t"/>
+          <a:lstStyle/>
+          <a:p>
+            <a:pPr algn="ctr" indent="0" marL="0">
+              <a:buNone/>
+            </a:pPr>
+            <a:r>
+              <a:rPr lang="en-US" sz="850" dirty="0">
+                <a:solidFill>
+                  <a:srgbClr val="475569"/>
+                </a:solidFill>
+                <a:latin typeface="Calibri" pitchFamily="34" charset="0"/>
+                <a:ea typeface="Calibri" pitchFamily="34" charset="-122"/>
+                <a:cs typeface="Calibri" pitchFamily="34" charset="-120"/>
+              </a:rPr>
+              <a:t>state of</a:t>
+            </a:r>
+            <a:endParaRPr lang="en-US" sz="850" dirty="0"/>
+          </a:p>
+        </p:txBody>
+      </p:sp>
+      <p:sp>
+        <p:nvSpPr>
+          <p:cNvPr id="25" name="Shape 23"/>
           <p:cNvSpPr/>
           <p:nvPr/>
         </p:nvSpPr>
@@ -28208,7 +29388,7 @@
       </p:sp>
       <p:sp>
         <p:nvSpPr>
-          <p:cNvPr id="23" name="Text 21"/>
+          <p:cNvPr id="26" name="Text 24"/>
           <p:cNvSpPr/>
           <p:nvPr/>
         </p:nvSpPr>
@@ -28247,7 +29427,7 @@
       </p:sp>
       <p:sp>
         <p:nvSpPr>
-          <p:cNvPr id="24" name="Shape 22"/>
+          <p:cNvPr id="27" name="Shape 25"/>
           <p:cNvSpPr/>
           <p:nvPr/>
         </p:nvSpPr>
@@ -28274,7 +29454,7 @@
       </p:sp>
       <p:sp>
         <p:nvSpPr>
-          <p:cNvPr id="25" name="Text 23"/>
+          <p:cNvPr id="28" name="Text 26"/>
           <p:cNvSpPr/>
           <p:nvPr/>
         </p:nvSpPr>
@@ -28313,7 +29493,7 @@
       </p:sp>
       <p:sp>
         <p:nvSpPr>
-          <p:cNvPr id="26" name="Shape 24"/>
+          <p:cNvPr id="29" name="Shape 27"/>
           <p:cNvSpPr/>
           <p:nvPr/>
         </p:nvSpPr>
@@ -28340,7 +29520,7 @@
       </p:sp>
       <p:sp>
         <p:nvSpPr>
-          <p:cNvPr id="27" name="Text 25"/>
+          <p:cNvPr id="30" name="Text 28"/>
           <p:cNvSpPr/>
           <p:nvPr/>
         </p:nvSpPr>
@@ -28379,7 +29559,7 @@
       </p:sp>
       <p:sp>
         <p:nvSpPr>
-          <p:cNvPr id="28" name="Shape 26"/>
+          <p:cNvPr id="31" name="Shape 29"/>
           <p:cNvSpPr/>
           <p:nvPr/>
         </p:nvSpPr>
@@ -28406,7 +29586,7 @@
       </p:sp>
       <p:sp>
         <p:nvSpPr>
-          <p:cNvPr id="29" name="Text 27"/>
+          <p:cNvPr id="32" name="Text 30"/>
           <p:cNvSpPr/>
           <p:nvPr/>
         </p:nvSpPr>
@@ -28729,7 +29909,7 @@
                 <a:ea typeface="Calibri" pitchFamily="34" charset="-122"/>
                 <a:cs typeface="Calibri" pitchFamily="34" charset="-120"/>
               </a:rPr>
-              <a:t>Word Labs  •  wordlabs.app  •  Root: 'clean' = free from dirt or impurity</a:t>
+              <a:t>Word Labs  •  wordlabs.app  •  Root: 'clean' = free from dirt</a:t>
             </a:r>
             <a:endParaRPr lang="en-US" sz="800" dirty="0"/>
           </a:p>
@@ -28868,7 +30048,7 @@
                 <a:ea typeface="Trebuchet MS" pitchFamily="34" charset="-122"/>
                 <a:cs typeface="Trebuchet MS" pitchFamily="34" charset="-120"/>
               </a:rPr>
-              <a:t>cleaning</a:t>
+              <a:t>cleanliness</a:t>
             </a:r>
             <a:endParaRPr lang="en-US" sz="2800" dirty="0"/>
           </a:p>
@@ -28948,7 +30128,7 @@
         </p:nvSpPr>
         <p:spPr>
           <a:xfrm>
-            <a:off x="2938272" y="2258568"/>
+            <a:off x="2221992" y="2258568"/>
             <a:ext cx="1828800" cy="292608"/>
           </a:xfrm>
           <a:prstGeom prst="rect">
@@ -28982,7 +30162,7 @@
         </p:nvSpPr>
         <p:spPr>
           <a:xfrm>
-            <a:off x="2938272" y="2258568"/>
+            <a:off x="2221992" y="2258568"/>
             <a:ext cx="1828800" cy="292608"/>
           </a:xfrm>
           <a:prstGeom prst="rect">
@@ -29021,7 +30201,7 @@
         </p:nvSpPr>
         <p:spPr>
           <a:xfrm>
-            <a:off x="2938272" y="2569464"/>
+            <a:off x="2221992" y="2569464"/>
             <a:ext cx="1828800" cy="201168"/>
           </a:xfrm>
           <a:prstGeom prst="rect">
@@ -29060,7 +30240,7 @@
         </p:nvSpPr>
         <p:spPr>
           <a:xfrm>
-            <a:off x="5803392" y="2258568"/>
+            <a:off x="4370832" y="2258568"/>
             <a:ext cx="1828800" cy="292608"/>
           </a:xfrm>
           <a:prstGeom prst="rect">
@@ -29094,7 +30274,7 @@
         </p:nvSpPr>
         <p:spPr>
           <a:xfrm>
-            <a:off x="5803392" y="2258568"/>
+            <a:off x="4370832" y="2258568"/>
             <a:ext cx="1828800" cy="292608"/>
           </a:xfrm>
           <a:prstGeom prst="rect">
@@ -29119,7 +30299,7 @@
                 <a:ea typeface="Trebuchet MS" pitchFamily="34" charset="-122"/>
                 <a:cs typeface="Trebuchet MS" pitchFamily="34" charset="-120"/>
               </a:rPr>
-              <a:t>ing</a:t>
+              <a:t>ly</a:t>
             </a:r>
             <a:endParaRPr lang="en-US" sz="1300" dirty="0"/>
           </a:p>
@@ -29133,7 +30313,7 @@
         </p:nvSpPr>
         <p:spPr>
           <a:xfrm>
-            <a:off x="5803392" y="2569464"/>
+            <a:off x="4370832" y="2569464"/>
             <a:ext cx="1828800" cy="201168"/>
           </a:xfrm>
           <a:prstGeom prst="rect">
@@ -29158,7 +30338,7 @@
                 <a:ea typeface="Calibri" pitchFamily="34" charset="-122"/>
                 <a:cs typeface="Calibri" pitchFamily="34" charset="-120"/>
               </a:rPr>
-              <a:t>action happening now</a:t>
+              <a:t>in a way</a:t>
             </a:r>
             <a:endParaRPr lang="en-US" sz="850" dirty="0"/>
           </a:p>
@@ -29167,6 +30347,118 @@
       <p:sp>
         <p:nvSpPr>
           <p:cNvPr id="22" name="Shape 20"/>
+          <p:cNvSpPr/>
+          <p:nvPr/>
+        </p:nvSpPr>
+        <p:spPr>
+          <a:xfrm>
+            <a:off x="6519672" y="2258568"/>
+            <a:ext cx="1828800" cy="292608"/>
+          </a:xfrm>
+          <a:prstGeom prst="rect">
+            <a:avLst>
+              <a:gd name="adj" fmla="val 25000"/>
+            </a:avLst>
+          </a:prstGeom>
+          <a:solidFill>
+            <a:srgbClr val="FCE7F3"/>
+          </a:solidFill>
+          <a:ln w="19050">
+            <a:solidFill>
+              <a:srgbClr val="DB2777"/>
+            </a:solidFill>
+            <a:prstDash val="solid"/>
+          </a:ln>
+          <a:effectLst>
+            <a:outerShdw sx="100000" sy="100000" kx="0" ky="0" algn="bl" rotWithShape="0" blurRad="101600" dist="38100" dir="8100000">
+              <a:srgbClr val="000000">
+                <a:alpha val="12000"/>
+              </a:srgbClr>
+            </a:outerShdw>
+          </a:effectLst>
+        </p:spPr>
+      </p:sp>
+      <p:sp>
+        <p:nvSpPr>
+          <p:cNvPr id="23" name="Text 21"/>
+          <p:cNvSpPr/>
+          <p:nvPr/>
+        </p:nvSpPr>
+        <p:spPr>
+          <a:xfrm>
+            <a:off x="6519672" y="2258568"/>
+            <a:ext cx="1828800" cy="292608"/>
+          </a:xfrm>
+          <a:prstGeom prst="rect">
+            <a:avLst/>
+          </a:prstGeom>
+          <a:noFill/>
+          <a:ln/>
+        </p:spPr>
+        <p:txBody>
+          <a:bodyPr wrap="square" lIns="0" tIns="0" rIns="0" bIns="0" rtlCol="0" anchor="ctr"/>
+          <a:lstStyle/>
+          <a:p>
+            <a:pPr algn="ctr" indent="0" marL="0">
+              <a:buNone/>
+            </a:pPr>
+            <a:r>
+              <a:rPr lang="en-US" sz="1300" b="1" dirty="0">
+                <a:solidFill>
+                  <a:srgbClr val="9D174D"/>
+                </a:solidFill>
+                <a:latin typeface="Trebuchet MS" pitchFamily="34" charset="0"/>
+                <a:ea typeface="Trebuchet MS" pitchFamily="34" charset="-122"/>
+                <a:cs typeface="Trebuchet MS" pitchFamily="34" charset="-120"/>
+              </a:rPr>
+              <a:t>ness</a:t>
+            </a:r>
+            <a:endParaRPr lang="en-US" sz="1300" dirty="0"/>
+          </a:p>
+        </p:txBody>
+      </p:sp>
+      <p:sp>
+        <p:nvSpPr>
+          <p:cNvPr id="24" name="Text 22"/>
+          <p:cNvSpPr/>
+          <p:nvPr/>
+        </p:nvSpPr>
+        <p:spPr>
+          <a:xfrm>
+            <a:off x="6519672" y="2569464"/>
+            <a:ext cx="1828800" cy="201168"/>
+          </a:xfrm>
+          <a:prstGeom prst="rect">
+            <a:avLst/>
+          </a:prstGeom>
+          <a:noFill/>
+          <a:ln/>
+        </p:spPr>
+        <p:txBody>
+          <a:bodyPr wrap="square" lIns="0" tIns="0" rIns="0" bIns="0" rtlCol="0" anchor="t"/>
+          <a:lstStyle/>
+          <a:p>
+            <a:pPr algn="ctr" indent="0" marL="0">
+              <a:buNone/>
+            </a:pPr>
+            <a:r>
+              <a:rPr lang="en-US" sz="850" dirty="0">
+                <a:solidFill>
+                  <a:srgbClr val="475569"/>
+                </a:solidFill>
+                <a:latin typeface="Calibri" pitchFamily="34" charset="0"/>
+                <a:ea typeface="Calibri" pitchFamily="34" charset="-122"/>
+                <a:cs typeface="Calibri" pitchFamily="34" charset="-120"/>
+              </a:rPr>
+              <a:t>state of</a:t>
+            </a:r>
+            <a:endParaRPr lang="en-US" sz="850" dirty="0"/>
+          </a:p>
+        </p:txBody>
+      </p:sp>
+      <p:sp>
+        <p:nvSpPr>
+          <p:cNvPr id="25" name="Shape 23"/>
           <p:cNvSpPr/>
           <p:nvPr/>
         </p:nvSpPr>
@@ -29193,7 +30485,7 @@
       </p:sp>
       <p:sp>
         <p:nvSpPr>
-          <p:cNvPr id="23" name="Text 21"/>
+          <p:cNvPr id="26" name="Text 24"/>
           <p:cNvSpPr/>
           <p:nvPr/>
         </p:nvSpPr>
@@ -29232,7 +30524,7 @@
       </p:sp>
       <p:sp>
         <p:nvSpPr>
-          <p:cNvPr id="24" name="Shape 22"/>
+          <p:cNvPr id="27" name="Shape 25"/>
           <p:cNvSpPr/>
           <p:nvPr/>
         </p:nvSpPr>
@@ -29259,13 +30551,13 @@
       </p:sp>
       <p:sp>
         <p:nvSpPr>
-          <p:cNvPr id="25" name="Shape 23"/>
-          <p:cNvSpPr/>
-          <p:nvPr/>
-        </p:nvSpPr>
-        <p:spPr>
-          <a:xfrm>
-            <a:off x="2999232" y="3364992"/>
+          <p:cNvPr id="28" name="Shape 26"/>
+          <p:cNvSpPr/>
+          <p:nvPr/>
+        </p:nvSpPr>
+        <p:spPr>
+          <a:xfrm>
+            <a:off x="2313432" y="3364992"/>
             <a:ext cx="1645920" cy="475488"/>
           </a:xfrm>
           <a:prstGeom prst="rect">
@@ -29286,13 +30578,13 @@
       </p:sp>
       <p:sp>
         <p:nvSpPr>
-          <p:cNvPr id="26" name="Text 24"/>
-          <p:cNvSpPr/>
-          <p:nvPr/>
-        </p:nvSpPr>
-        <p:spPr>
-          <a:xfrm>
-            <a:off x="2999232" y="3364992"/>
+          <p:cNvPr id="29" name="Text 27"/>
+          <p:cNvSpPr/>
+          <p:nvPr/>
+        </p:nvSpPr>
+        <p:spPr>
+          <a:xfrm>
+            <a:off x="2313432" y="3364992"/>
             <a:ext cx="1645920" cy="475488"/>
           </a:xfrm>
           <a:prstGeom prst="rect">
@@ -29325,14 +30617,14 @@
       </p:sp>
       <p:sp>
         <p:nvSpPr>
-          <p:cNvPr id="27" name="Text 25"/>
-          <p:cNvSpPr/>
-          <p:nvPr/>
-        </p:nvSpPr>
-        <p:spPr>
-          <a:xfrm>
-            <a:off x="4645152" y="3364992"/>
-            <a:ext cx="1097280" cy="475488"/>
+          <p:cNvPr id="30" name="Text 28"/>
+          <p:cNvSpPr/>
+          <p:nvPr/>
+        </p:nvSpPr>
+        <p:spPr>
+          <a:xfrm>
+            <a:off x="3959352" y="3364992"/>
+            <a:ext cx="411480" cy="475488"/>
           </a:xfrm>
           <a:prstGeom prst="rect">
             <a:avLst/>
@@ -29364,13 +30656,13 @@
       </p:sp>
       <p:sp>
         <p:nvSpPr>
-          <p:cNvPr id="28" name="Shape 26"/>
-          <p:cNvSpPr/>
-          <p:nvPr/>
-        </p:nvSpPr>
-        <p:spPr>
-          <a:xfrm>
-            <a:off x="5742432" y="3364992"/>
+          <p:cNvPr id="31" name="Shape 29"/>
+          <p:cNvSpPr/>
+          <p:nvPr/>
+        </p:nvSpPr>
+        <p:spPr>
+          <a:xfrm>
+            <a:off x="4370832" y="3364992"/>
             <a:ext cx="1645920" cy="475488"/>
           </a:xfrm>
           <a:prstGeom prst="rect">
@@ -29391,13 +30683,13 @@
       </p:sp>
       <p:sp>
         <p:nvSpPr>
-          <p:cNvPr id="29" name="Text 27"/>
-          <p:cNvSpPr/>
-          <p:nvPr/>
-        </p:nvSpPr>
-        <p:spPr>
-          <a:xfrm>
-            <a:off x="5742432" y="3364992"/>
+          <p:cNvPr id="32" name="Text 30"/>
+          <p:cNvSpPr/>
+          <p:nvPr/>
+        </p:nvSpPr>
+        <p:spPr>
+          <a:xfrm>
+            <a:off x="4370832" y="3364992"/>
             <a:ext cx="1645920" cy="475488"/>
           </a:xfrm>
           <a:prstGeom prst="rect">
@@ -29422,7 +30714,7 @@
                 <a:ea typeface="Trebuchet MS" pitchFamily="34" charset="-122"/>
                 <a:cs typeface="Trebuchet MS" pitchFamily="34" charset="-120"/>
               </a:rPr>
-              <a:t>ing</a:t>
+              <a:t>li</a:t>
             </a:r>
             <a:endParaRPr lang="en-US" sz="1400" dirty="0"/>
           </a:p>
@@ -29430,7 +30722,112 @@
       </p:sp>
       <p:sp>
         <p:nvSpPr>
-          <p:cNvPr id="30" name="Shape 28"/>
+          <p:cNvPr id="33" name="Text 31"/>
+          <p:cNvSpPr/>
+          <p:nvPr/>
+        </p:nvSpPr>
+        <p:spPr>
+          <a:xfrm>
+            <a:off x="6016752" y="3364992"/>
+            <a:ext cx="411480" cy="475488"/>
+          </a:xfrm>
+          <a:prstGeom prst="rect">
+            <a:avLst/>
+          </a:prstGeom>
+          <a:noFill/>
+          <a:ln/>
+        </p:spPr>
+        <p:txBody>
+          <a:bodyPr wrap="square" lIns="0" tIns="0" rIns="0" bIns="0" rtlCol="0" anchor="ctr"/>
+          <a:lstStyle/>
+          <a:p>
+            <a:pPr algn="ctr" indent="0" marL="0">
+              <a:buNone/>
+            </a:pPr>
+            <a:r>
+              <a:rPr lang="en-US" sz="1600" b="1" dirty="0">
+                <a:solidFill>
+                  <a:srgbClr val="0D9488"/>
+                </a:solidFill>
+                <a:latin typeface="Trebuchet MS" pitchFamily="34" charset="0"/>
+                <a:ea typeface="Trebuchet MS" pitchFamily="34" charset="-122"/>
+                <a:cs typeface="Trebuchet MS" pitchFamily="34" charset="-120"/>
+              </a:rPr>
+              <a:t>·</a:t>
+            </a:r>
+            <a:endParaRPr lang="en-US" sz="1600" dirty="0"/>
+          </a:p>
+        </p:txBody>
+      </p:sp>
+      <p:sp>
+        <p:nvSpPr>
+          <p:cNvPr id="34" name="Shape 32"/>
+          <p:cNvSpPr/>
+          <p:nvPr/>
+        </p:nvSpPr>
+        <p:spPr>
+          <a:xfrm>
+            <a:off x="6428232" y="3364992"/>
+            <a:ext cx="1645920" cy="475488"/>
+          </a:xfrm>
+          <a:prstGeom prst="rect">
+            <a:avLst>
+              <a:gd name="adj" fmla="val 9615"/>
+            </a:avLst>
+          </a:prstGeom>
+          <a:solidFill>
+            <a:srgbClr val="FFFFFF"/>
+          </a:solidFill>
+          <a:ln w="12700">
+            <a:solidFill>
+              <a:srgbClr val="0D9488"/>
+            </a:solidFill>
+            <a:prstDash val="solid"/>
+          </a:ln>
+        </p:spPr>
+      </p:sp>
+      <p:sp>
+        <p:nvSpPr>
+          <p:cNvPr id="35" name="Text 33"/>
+          <p:cNvSpPr/>
+          <p:nvPr/>
+        </p:nvSpPr>
+        <p:spPr>
+          <a:xfrm>
+            <a:off x="6428232" y="3364992"/>
+            <a:ext cx="1645920" cy="475488"/>
+          </a:xfrm>
+          <a:prstGeom prst="rect">
+            <a:avLst/>
+          </a:prstGeom>
+          <a:noFill/>
+          <a:ln/>
+        </p:spPr>
+        <p:txBody>
+          <a:bodyPr wrap="square" lIns="0" tIns="0" rIns="0" bIns="0" rtlCol="0" anchor="ctr"/>
+          <a:lstStyle/>
+          <a:p>
+            <a:pPr algn="ctr" indent="0" marL="0">
+              <a:buNone/>
+            </a:pPr>
+            <a:r>
+              <a:rPr lang="en-US" sz="1400" b="1" dirty="0">
+                <a:solidFill>
+                  <a:srgbClr val="0D9488"/>
+                </a:solidFill>
+                <a:latin typeface="Trebuchet MS" pitchFamily="34" charset="0"/>
+                <a:ea typeface="Trebuchet MS" pitchFamily="34" charset="-122"/>
+                <a:cs typeface="Trebuchet MS" pitchFamily="34" charset="-120"/>
+              </a:rPr>
+              <a:t>ness</a:t>
+            </a:r>
+            <a:endParaRPr lang="en-US" sz="1400" dirty="0"/>
+          </a:p>
+        </p:txBody>
+      </p:sp>
+      <p:sp>
+        <p:nvSpPr>
+          <p:cNvPr id="36" name="Shape 34"/>
           <p:cNvSpPr/>
           <p:nvPr/>
         </p:nvSpPr>
@@ -29457,7 +30854,7 @@
       </p:sp>
       <p:sp>
         <p:nvSpPr>
-          <p:cNvPr id="31" name="Text 29"/>
+          <p:cNvPr id="37" name="Text 35"/>
           <p:cNvSpPr/>
           <p:nvPr/>
         </p:nvSpPr>
@@ -29496,7 +30893,7 @@
       </p:sp>
       <p:sp>
         <p:nvSpPr>
-          <p:cNvPr id="32" name="Shape 30"/>
+          <p:cNvPr id="38" name="Shape 36"/>
           <p:cNvSpPr/>
           <p:nvPr/>
         </p:nvSpPr>
@@ -29523,7 +30920,7 @@
       </p:sp>
       <p:sp>
         <p:nvSpPr>
-          <p:cNvPr id="33" name="Text 31"/>
+          <p:cNvPr id="39" name="Text 37"/>
           <p:cNvSpPr/>
           <p:nvPr/>
         </p:nvSpPr>
@@ -29846,7 +31243,7 @@
                 <a:ea typeface="Calibri" pitchFamily="34" charset="-122"/>
                 <a:cs typeface="Calibri" pitchFamily="34" charset="-120"/>
               </a:rPr>
-              <a:t>Word Labs  •  wordlabs.app  •  Root: 'clean' = free from dirt or impurity</a:t>
+              <a:t>Word Labs  •  wordlabs.app  •  Root: 'clean' = free from dirt</a:t>
             </a:r>
             <a:endParaRPr lang="en-US" sz="800" dirty="0"/>
           </a:p>
@@ -29985,7 +31382,7 @@
                 <a:ea typeface="Trebuchet MS" pitchFamily="34" charset="-122"/>
                 <a:cs typeface="Trebuchet MS" pitchFamily="34" charset="-120"/>
               </a:rPr>
-              <a:t>cleaning</a:t>
+              <a:t>cleanliness</a:t>
             </a:r>
             <a:endParaRPr lang="en-US" sz="2800" dirty="0"/>
           </a:p>
@@ -30065,7 +31462,7 @@
         </p:nvSpPr>
         <p:spPr>
           <a:xfrm>
-            <a:off x="2938272" y="2258568"/>
+            <a:off x="2221992" y="2258568"/>
             <a:ext cx="1828800" cy="292608"/>
           </a:xfrm>
           <a:prstGeom prst="rect">
@@ -30099,7 +31496,7 @@
         </p:nvSpPr>
         <p:spPr>
           <a:xfrm>
-            <a:off x="2938272" y="2258568"/>
+            <a:off x="2221992" y="2258568"/>
             <a:ext cx="1828800" cy="292608"/>
           </a:xfrm>
           <a:prstGeom prst="rect">
@@ -30138,7 +31535,7 @@
         </p:nvSpPr>
         <p:spPr>
           <a:xfrm>
-            <a:off x="2938272" y="2569464"/>
+            <a:off x="2221992" y="2569464"/>
             <a:ext cx="1828800" cy="201168"/>
           </a:xfrm>
           <a:prstGeom prst="rect">
@@ -30177,7 +31574,7 @@
         </p:nvSpPr>
         <p:spPr>
           <a:xfrm>
-            <a:off x="5803392" y="2258568"/>
+            <a:off x="4370832" y="2258568"/>
             <a:ext cx="1828800" cy="292608"/>
           </a:xfrm>
           <a:prstGeom prst="rect">
@@ -30211,7 +31608,7 @@
         </p:nvSpPr>
         <p:spPr>
           <a:xfrm>
-            <a:off x="5803392" y="2258568"/>
+            <a:off x="4370832" y="2258568"/>
             <a:ext cx="1828800" cy="292608"/>
           </a:xfrm>
           <a:prstGeom prst="rect">
@@ -30236,7 +31633,7 @@
                 <a:ea typeface="Trebuchet MS" pitchFamily="34" charset="-122"/>
                 <a:cs typeface="Trebuchet MS" pitchFamily="34" charset="-120"/>
               </a:rPr>
-              <a:t>ing</a:t>
+              <a:t>ly</a:t>
             </a:r>
             <a:endParaRPr lang="en-US" sz="1300" dirty="0"/>
           </a:p>
@@ -30250,7 +31647,7 @@
         </p:nvSpPr>
         <p:spPr>
           <a:xfrm>
-            <a:off x="5803392" y="2569464"/>
+            <a:off x="4370832" y="2569464"/>
             <a:ext cx="1828800" cy="201168"/>
           </a:xfrm>
           <a:prstGeom prst="rect">
@@ -30275,7 +31672,7 @@
                 <a:ea typeface="Calibri" pitchFamily="34" charset="-122"/>
                 <a:cs typeface="Calibri" pitchFamily="34" charset="-120"/>
               </a:rPr>
-              <a:t>action happening now</a:t>
+              <a:t>in a way</a:t>
             </a:r>
             <a:endParaRPr lang="en-US" sz="850" dirty="0"/>
           </a:p>
@@ -30284,6 +31681,118 @@
       <p:sp>
         <p:nvSpPr>
           <p:cNvPr id="22" name="Shape 20"/>
+          <p:cNvSpPr/>
+          <p:nvPr/>
+        </p:nvSpPr>
+        <p:spPr>
+          <a:xfrm>
+            <a:off x="6519672" y="2258568"/>
+            <a:ext cx="1828800" cy="292608"/>
+          </a:xfrm>
+          <a:prstGeom prst="rect">
+            <a:avLst>
+              <a:gd name="adj" fmla="val 25000"/>
+            </a:avLst>
+          </a:prstGeom>
+          <a:solidFill>
+            <a:srgbClr val="FCE7F3"/>
+          </a:solidFill>
+          <a:ln w="19050">
+            <a:solidFill>
+              <a:srgbClr val="DB2777"/>
+            </a:solidFill>
+            <a:prstDash val="solid"/>
+          </a:ln>
+          <a:effectLst>
+            <a:outerShdw sx="100000" sy="100000" kx="0" ky="0" algn="bl" rotWithShape="0" blurRad="101600" dist="38100" dir="8100000">
+              <a:srgbClr val="000000">
+                <a:alpha val="12000"/>
+              </a:srgbClr>
+            </a:outerShdw>
+          </a:effectLst>
+        </p:spPr>
+      </p:sp>
+      <p:sp>
+        <p:nvSpPr>
+          <p:cNvPr id="23" name="Text 21"/>
+          <p:cNvSpPr/>
+          <p:nvPr/>
+        </p:nvSpPr>
+        <p:spPr>
+          <a:xfrm>
+            <a:off x="6519672" y="2258568"/>
+            <a:ext cx="1828800" cy="292608"/>
+          </a:xfrm>
+          <a:prstGeom prst="rect">
+            <a:avLst/>
+          </a:prstGeom>
+          <a:noFill/>
+          <a:ln/>
+        </p:spPr>
+        <p:txBody>
+          <a:bodyPr wrap="square" lIns="0" tIns="0" rIns="0" bIns="0" rtlCol="0" anchor="ctr"/>
+          <a:lstStyle/>
+          <a:p>
+            <a:pPr algn="ctr" indent="0" marL="0">
+              <a:buNone/>
+            </a:pPr>
+            <a:r>
+              <a:rPr lang="en-US" sz="1300" b="1" dirty="0">
+                <a:solidFill>
+                  <a:srgbClr val="9D174D"/>
+                </a:solidFill>
+                <a:latin typeface="Trebuchet MS" pitchFamily="34" charset="0"/>
+                <a:ea typeface="Trebuchet MS" pitchFamily="34" charset="-122"/>
+                <a:cs typeface="Trebuchet MS" pitchFamily="34" charset="-120"/>
+              </a:rPr>
+              <a:t>ness</a:t>
+            </a:r>
+            <a:endParaRPr lang="en-US" sz="1300" dirty="0"/>
+          </a:p>
+        </p:txBody>
+      </p:sp>
+      <p:sp>
+        <p:nvSpPr>
+          <p:cNvPr id="24" name="Text 22"/>
+          <p:cNvSpPr/>
+          <p:nvPr/>
+        </p:nvSpPr>
+        <p:spPr>
+          <a:xfrm>
+            <a:off x="6519672" y="2569464"/>
+            <a:ext cx="1828800" cy="201168"/>
+          </a:xfrm>
+          <a:prstGeom prst="rect">
+            <a:avLst/>
+          </a:prstGeom>
+          <a:noFill/>
+          <a:ln/>
+        </p:spPr>
+        <p:txBody>
+          <a:bodyPr wrap="square" lIns="0" tIns="0" rIns="0" bIns="0" rtlCol="0" anchor="t"/>
+          <a:lstStyle/>
+          <a:p>
+            <a:pPr algn="ctr" indent="0" marL="0">
+              <a:buNone/>
+            </a:pPr>
+            <a:r>
+              <a:rPr lang="en-US" sz="850" dirty="0">
+                <a:solidFill>
+                  <a:srgbClr val="475569"/>
+                </a:solidFill>
+                <a:latin typeface="Calibri" pitchFamily="34" charset="0"/>
+                <a:ea typeface="Calibri" pitchFamily="34" charset="-122"/>
+                <a:cs typeface="Calibri" pitchFamily="34" charset="-120"/>
+              </a:rPr>
+              <a:t>state of</a:t>
+            </a:r>
+            <a:endParaRPr lang="en-US" sz="850" dirty="0"/>
+          </a:p>
+        </p:txBody>
+      </p:sp>
+      <p:sp>
+        <p:nvSpPr>
+          <p:cNvPr id="25" name="Shape 23"/>
           <p:cNvSpPr/>
           <p:nvPr/>
         </p:nvSpPr>
@@ -30310,7 +31819,7 @@
       </p:sp>
       <p:sp>
         <p:nvSpPr>
-          <p:cNvPr id="23" name="Text 21"/>
+          <p:cNvPr id="26" name="Text 24"/>
           <p:cNvSpPr/>
           <p:nvPr/>
         </p:nvSpPr>
@@ -30349,7 +31858,7 @@
       </p:sp>
       <p:sp>
         <p:nvSpPr>
-          <p:cNvPr id="24" name="Shape 22"/>
+          <p:cNvPr id="27" name="Shape 25"/>
           <p:cNvSpPr/>
           <p:nvPr/>
         </p:nvSpPr>
@@ -30376,13 +31885,13 @@
       </p:sp>
       <p:sp>
         <p:nvSpPr>
-          <p:cNvPr id="25" name="Shape 23"/>
-          <p:cNvSpPr/>
-          <p:nvPr/>
-        </p:nvSpPr>
-        <p:spPr>
-          <a:xfrm>
-            <a:off x="2999232" y="3364992"/>
+          <p:cNvPr id="28" name="Shape 26"/>
+          <p:cNvSpPr/>
+          <p:nvPr/>
+        </p:nvSpPr>
+        <p:spPr>
+          <a:xfrm>
+            <a:off x="2313432" y="3364992"/>
             <a:ext cx="1645920" cy="475488"/>
           </a:xfrm>
           <a:prstGeom prst="rect">
@@ -30403,13 +31912,13 @@
       </p:sp>
       <p:sp>
         <p:nvSpPr>
-          <p:cNvPr id="26" name="Text 24"/>
-          <p:cNvSpPr/>
-          <p:nvPr/>
-        </p:nvSpPr>
-        <p:spPr>
-          <a:xfrm>
-            <a:off x="2999232" y="3364992"/>
+          <p:cNvPr id="29" name="Text 27"/>
+          <p:cNvSpPr/>
+          <p:nvPr/>
+        </p:nvSpPr>
+        <p:spPr>
+          <a:xfrm>
+            <a:off x="2313432" y="3364992"/>
             <a:ext cx="1645920" cy="475488"/>
           </a:xfrm>
           <a:prstGeom prst="rect">
@@ -30442,14 +31951,14 @@
       </p:sp>
       <p:sp>
         <p:nvSpPr>
-          <p:cNvPr id="27" name="Text 25"/>
-          <p:cNvSpPr/>
-          <p:nvPr/>
-        </p:nvSpPr>
-        <p:spPr>
-          <a:xfrm>
-            <a:off x="4645152" y="3364992"/>
-            <a:ext cx="1097280" cy="475488"/>
+          <p:cNvPr id="30" name="Text 28"/>
+          <p:cNvSpPr/>
+          <p:nvPr/>
+        </p:nvSpPr>
+        <p:spPr>
+          <a:xfrm>
+            <a:off x="3959352" y="3364992"/>
+            <a:ext cx="411480" cy="475488"/>
           </a:xfrm>
           <a:prstGeom prst="rect">
             <a:avLst/>
@@ -30481,13 +31990,13 @@
       </p:sp>
       <p:sp>
         <p:nvSpPr>
-          <p:cNvPr id="28" name="Shape 26"/>
-          <p:cNvSpPr/>
-          <p:nvPr/>
-        </p:nvSpPr>
-        <p:spPr>
-          <a:xfrm>
-            <a:off x="5742432" y="3364992"/>
+          <p:cNvPr id="31" name="Shape 29"/>
+          <p:cNvSpPr/>
+          <p:nvPr/>
+        </p:nvSpPr>
+        <p:spPr>
+          <a:xfrm>
+            <a:off x="4370832" y="3364992"/>
             <a:ext cx="1645920" cy="475488"/>
           </a:xfrm>
           <a:prstGeom prst="rect">
@@ -30508,13 +32017,13 @@
       </p:sp>
       <p:sp>
         <p:nvSpPr>
-          <p:cNvPr id="29" name="Text 27"/>
-          <p:cNvSpPr/>
-          <p:nvPr/>
-        </p:nvSpPr>
-        <p:spPr>
-          <a:xfrm>
-            <a:off x="5742432" y="3364992"/>
+          <p:cNvPr id="32" name="Text 30"/>
+          <p:cNvSpPr/>
+          <p:nvPr/>
+        </p:nvSpPr>
+        <p:spPr>
+          <a:xfrm>
+            <a:off x="4370832" y="3364992"/>
             <a:ext cx="1645920" cy="475488"/>
           </a:xfrm>
           <a:prstGeom prst="rect">
@@ -30539,7 +32048,7 @@
                 <a:ea typeface="Trebuchet MS" pitchFamily="34" charset="-122"/>
                 <a:cs typeface="Trebuchet MS" pitchFamily="34" charset="-120"/>
               </a:rPr>
-              <a:t>ing</a:t>
+              <a:t>li</a:t>
             </a:r>
             <a:endParaRPr lang="en-US" sz="1400" dirty="0"/>
           </a:p>
@@ -30547,7 +32056,112 @@
       </p:sp>
       <p:sp>
         <p:nvSpPr>
-          <p:cNvPr id="30" name="Shape 28"/>
+          <p:cNvPr id="33" name="Text 31"/>
+          <p:cNvSpPr/>
+          <p:nvPr/>
+        </p:nvSpPr>
+        <p:spPr>
+          <a:xfrm>
+            <a:off x="6016752" y="3364992"/>
+            <a:ext cx="411480" cy="475488"/>
+          </a:xfrm>
+          <a:prstGeom prst="rect">
+            <a:avLst/>
+          </a:prstGeom>
+          <a:noFill/>
+          <a:ln/>
+        </p:spPr>
+        <p:txBody>
+          <a:bodyPr wrap="square" lIns="0" tIns="0" rIns="0" bIns="0" rtlCol="0" anchor="ctr"/>
+          <a:lstStyle/>
+          <a:p>
+            <a:pPr algn="ctr" indent="0" marL="0">
+              <a:buNone/>
+            </a:pPr>
+            <a:r>
+              <a:rPr lang="en-US" sz="1600" b="1" dirty="0">
+                <a:solidFill>
+                  <a:srgbClr val="0D9488"/>
+                </a:solidFill>
+                <a:latin typeface="Trebuchet MS" pitchFamily="34" charset="0"/>
+                <a:ea typeface="Trebuchet MS" pitchFamily="34" charset="-122"/>
+                <a:cs typeface="Trebuchet MS" pitchFamily="34" charset="-120"/>
+              </a:rPr>
+              <a:t>·</a:t>
+            </a:r>
+            <a:endParaRPr lang="en-US" sz="1600" dirty="0"/>
+          </a:p>
+        </p:txBody>
+      </p:sp>
+      <p:sp>
+        <p:nvSpPr>
+          <p:cNvPr id="34" name="Shape 32"/>
+          <p:cNvSpPr/>
+          <p:nvPr/>
+        </p:nvSpPr>
+        <p:spPr>
+          <a:xfrm>
+            <a:off x="6428232" y="3364992"/>
+            <a:ext cx="1645920" cy="475488"/>
+          </a:xfrm>
+          <a:prstGeom prst="rect">
+            <a:avLst>
+              <a:gd name="adj" fmla="val 9615"/>
+            </a:avLst>
+          </a:prstGeom>
+          <a:solidFill>
+            <a:srgbClr val="FFFFFF"/>
+          </a:solidFill>
+          <a:ln w="12700">
+            <a:solidFill>
+              <a:srgbClr val="0D9488"/>
+            </a:solidFill>
+            <a:prstDash val="solid"/>
+          </a:ln>
+        </p:spPr>
+      </p:sp>
+      <p:sp>
+        <p:nvSpPr>
+          <p:cNvPr id="35" name="Text 33"/>
+          <p:cNvSpPr/>
+          <p:nvPr/>
+        </p:nvSpPr>
+        <p:spPr>
+          <a:xfrm>
+            <a:off x="6428232" y="3364992"/>
+            <a:ext cx="1645920" cy="475488"/>
+          </a:xfrm>
+          <a:prstGeom prst="rect">
+            <a:avLst/>
+          </a:prstGeom>
+          <a:noFill/>
+          <a:ln/>
+        </p:spPr>
+        <p:txBody>
+          <a:bodyPr wrap="square" lIns="0" tIns="0" rIns="0" bIns="0" rtlCol="0" anchor="ctr"/>
+          <a:lstStyle/>
+          <a:p>
+            <a:pPr algn="ctr" indent="0" marL="0">
+              <a:buNone/>
+            </a:pPr>
+            <a:r>
+              <a:rPr lang="en-US" sz="1400" b="1" dirty="0">
+                <a:solidFill>
+                  <a:srgbClr val="0D9488"/>
+                </a:solidFill>
+                <a:latin typeface="Trebuchet MS" pitchFamily="34" charset="0"/>
+                <a:ea typeface="Trebuchet MS" pitchFamily="34" charset="-122"/>
+                <a:cs typeface="Trebuchet MS" pitchFamily="34" charset="-120"/>
+              </a:rPr>
+              <a:t>ness</a:t>
+            </a:r>
+            <a:endParaRPr lang="en-US" sz="1400" dirty="0"/>
+          </a:p>
+        </p:txBody>
+      </p:sp>
+      <p:sp>
+        <p:nvSpPr>
+          <p:cNvPr id="36" name="Shape 34"/>
           <p:cNvSpPr/>
           <p:nvPr/>
         </p:nvSpPr>
@@ -30574,7 +32188,7 @@
       </p:sp>
       <p:sp>
         <p:nvSpPr>
-          <p:cNvPr id="31" name="Text 29"/>
+          <p:cNvPr id="37" name="Text 35"/>
           <p:cNvSpPr/>
           <p:nvPr/>
         </p:nvSpPr>
@@ -30613,7 +32227,7 @@
       </p:sp>
       <p:sp>
         <p:nvSpPr>
-          <p:cNvPr id="32" name="Shape 30"/>
+          <p:cNvPr id="38" name="Shape 36"/>
           <p:cNvSpPr/>
           <p:nvPr/>
         </p:nvSpPr>
@@ -30640,14 +32254,14 @@
       </p:sp>
       <p:sp>
         <p:nvSpPr>
-          <p:cNvPr id="33" name="Shape 31"/>
-          <p:cNvSpPr/>
-          <p:nvPr/>
-        </p:nvSpPr>
-        <p:spPr>
-          <a:xfrm>
-            <a:off x="2427732" y="4169664"/>
-            <a:ext cx="685800" cy="475488"/>
+          <p:cNvPr id="39" name="Shape 37"/>
+          <p:cNvSpPr/>
+          <p:nvPr/>
+        </p:nvSpPr>
+        <p:spPr>
+          <a:xfrm>
+            <a:off x="1951828" y="4169664"/>
+            <a:ext cx="603504" cy="475488"/>
           </a:xfrm>
           <a:prstGeom prst="rect">
             <a:avLst>
@@ -30667,14 +32281,14 @@
       </p:sp>
       <p:sp>
         <p:nvSpPr>
-          <p:cNvPr id="34" name="Text 32"/>
-          <p:cNvSpPr/>
-          <p:nvPr/>
-        </p:nvSpPr>
-        <p:spPr>
-          <a:xfrm>
-            <a:off x="2427732" y="4169664"/>
-            <a:ext cx="685800" cy="475488"/>
+          <p:cNvPr id="40" name="Text 38"/>
+          <p:cNvSpPr/>
+          <p:nvPr/>
+        </p:nvSpPr>
+        <p:spPr>
+          <a:xfrm>
+            <a:off x="1951828" y="4169664"/>
+            <a:ext cx="603504" cy="475488"/>
           </a:xfrm>
           <a:prstGeom prst="rect">
             <a:avLst/>
@@ -30698,7 +32312,7 @@
                 <a:ea typeface="Trebuchet MS" pitchFamily="34" charset="-122"/>
                 <a:cs typeface="Trebuchet MS" pitchFamily="34" charset="-120"/>
               </a:rPr>
-              <a:t>cl</a:t>
+              <a:t>c</a:t>
             </a:r>
             <a:endParaRPr lang="en-US" sz="900" dirty="0"/>
           </a:p>
@@ -30706,14 +32320,14 @@
       </p:sp>
       <p:sp>
         <p:nvSpPr>
-          <p:cNvPr id="35" name="Shape 33"/>
-          <p:cNvSpPr/>
-          <p:nvPr/>
-        </p:nvSpPr>
-        <p:spPr>
-          <a:xfrm>
-            <a:off x="3639312" y="4169664"/>
-            <a:ext cx="685800" cy="475488"/>
+          <p:cNvPr id="41" name="Shape 39"/>
+          <p:cNvSpPr/>
+          <p:nvPr/>
+        </p:nvSpPr>
+        <p:spPr>
+          <a:xfrm>
+            <a:off x="2605209" y="4169664"/>
+            <a:ext cx="603504" cy="475488"/>
           </a:xfrm>
           <a:prstGeom prst="rect">
             <a:avLst>
@@ -30733,14 +32347,14 @@
       </p:sp>
       <p:sp>
         <p:nvSpPr>
-          <p:cNvPr id="36" name="Text 34"/>
-          <p:cNvSpPr/>
-          <p:nvPr/>
-        </p:nvSpPr>
-        <p:spPr>
-          <a:xfrm>
-            <a:off x="3639312" y="4169664"/>
-            <a:ext cx="685800" cy="475488"/>
+          <p:cNvPr id="42" name="Text 40"/>
+          <p:cNvSpPr/>
+          <p:nvPr/>
+        </p:nvSpPr>
+        <p:spPr>
+          <a:xfrm>
+            <a:off x="2605209" y="4169664"/>
+            <a:ext cx="603504" cy="475488"/>
           </a:xfrm>
           <a:prstGeom prst="rect">
             <a:avLst/>
@@ -30764,7 +32378,7 @@
                 <a:ea typeface="Trebuchet MS" pitchFamily="34" charset="-122"/>
                 <a:cs typeface="Trebuchet MS" pitchFamily="34" charset="-120"/>
               </a:rPr>
-              <a:t>ea</a:t>
+              <a:t>l</a:t>
             </a:r>
             <a:endParaRPr lang="en-US" sz="900" dirty="0"/>
           </a:p>
@@ -30772,14 +32386,14 @@
       </p:sp>
       <p:sp>
         <p:nvSpPr>
-          <p:cNvPr id="37" name="Shape 35"/>
-          <p:cNvSpPr/>
-          <p:nvPr/>
-        </p:nvSpPr>
-        <p:spPr>
-          <a:xfrm>
-            <a:off x="4850892" y="4169664"/>
-            <a:ext cx="685800" cy="475488"/>
+          <p:cNvPr id="43" name="Shape 41"/>
+          <p:cNvSpPr/>
+          <p:nvPr/>
+        </p:nvSpPr>
+        <p:spPr>
+          <a:xfrm>
+            <a:off x="3258589" y="4169664"/>
+            <a:ext cx="603504" cy="475488"/>
           </a:xfrm>
           <a:prstGeom prst="rect">
             <a:avLst>
@@ -30799,14 +32413,14 @@
       </p:sp>
       <p:sp>
         <p:nvSpPr>
-          <p:cNvPr id="38" name="Text 36"/>
-          <p:cNvSpPr/>
-          <p:nvPr/>
-        </p:nvSpPr>
-        <p:spPr>
-          <a:xfrm>
-            <a:off x="4850892" y="4169664"/>
-            <a:ext cx="685800" cy="475488"/>
+          <p:cNvPr id="44" name="Text 42"/>
+          <p:cNvSpPr/>
+          <p:nvPr/>
+        </p:nvSpPr>
+        <p:spPr>
+          <a:xfrm>
+            <a:off x="3258589" y="4169664"/>
+            <a:ext cx="603504" cy="475488"/>
           </a:xfrm>
           <a:prstGeom prst="rect">
             <a:avLst/>
@@ -30830,7 +32444,7 @@
                 <a:ea typeface="Trebuchet MS" pitchFamily="34" charset="-122"/>
                 <a:cs typeface="Trebuchet MS" pitchFamily="34" charset="-120"/>
               </a:rPr>
-              <a:t>n</a:t>
+              <a:t>ea</a:t>
             </a:r>
             <a:endParaRPr lang="en-US" sz="900" dirty="0"/>
           </a:p>
@@ -30838,14 +32452,14 @@
       </p:sp>
       <p:sp>
         <p:nvSpPr>
-          <p:cNvPr id="39" name="Shape 37"/>
-          <p:cNvSpPr/>
-          <p:nvPr/>
-        </p:nvSpPr>
-        <p:spPr>
-          <a:xfrm>
-            <a:off x="6062472" y="4169664"/>
-            <a:ext cx="685800" cy="475488"/>
+          <p:cNvPr id="45" name="Shape 43"/>
+          <p:cNvSpPr/>
+          <p:nvPr/>
+        </p:nvSpPr>
+        <p:spPr>
+          <a:xfrm>
+            <a:off x="3911969" y="4169664"/>
+            <a:ext cx="603504" cy="475488"/>
           </a:xfrm>
           <a:prstGeom prst="rect">
             <a:avLst>
@@ -30865,14 +32479,14 @@
       </p:sp>
       <p:sp>
         <p:nvSpPr>
-          <p:cNvPr id="40" name="Text 38"/>
-          <p:cNvSpPr/>
-          <p:nvPr/>
-        </p:nvSpPr>
-        <p:spPr>
-          <a:xfrm>
-            <a:off x="6062472" y="4169664"/>
-            <a:ext cx="685800" cy="475488"/>
+          <p:cNvPr id="46" name="Text 44"/>
+          <p:cNvSpPr/>
+          <p:nvPr/>
+        </p:nvSpPr>
+        <p:spPr>
+          <a:xfrm>
+            <a:off x="3911969" y="4169664"/>
+            <a:ext cx="603504" cy="475488"/>
           </a:xfrm>
           <a:prstGeom prst="rect">
             <a:avLst/>
@@ -30896,7 +32510,7 @@
                 <a:ea typeface="Trebuchet MS" pitchFamily="34" charset="-122"/>
                 <a:cs typeface="Trebuchet MS" pitchFamily="34" charset="-120"/>
               </a:rPr>
-              <a:t>i</a:t>
+              <a:t>n</a:t>
             </a:r>
             <a:endParaRPr lang="en-US" sz="900" dirty="0"/>
           </a:p>
@@ -30904,14 +32518,14 @@
       </p:sp>
       <p:sp>
         <p:nvSpPr>
-          <p:cNvPr id="41" name="Shape 39"/>
-          <p:cNvSpPr/>
-          <p:nvPr/>
-        </p:nvSpPr>
-        <p:spPr>
-          <a:xfrm>
-            <a:off x="7274052" y="4169664"/>
-            <a:ext cx="685800" cy="475488"/>
+          <p:cNvPr id="47" name="Shape 45"/>
+          <p:cNvSpPr/>
+          <p:nvPr/>
+        </p:nvSpPr>
+        <p:spPr>
+          <a:xfrm>
+            <a:off x="4565350" y="4169664"/>
+            <a:ext cx="603504" cy="475488"/>
           </a:xfrm>
           <a:prstGeom prst="rect">
             <a:avLst>
@@ -30931,14 +32545,14 @@
       </p:sp>
       <p:sp>
         <p:nvSpPr>
-          <p:cNvPr id="42" name="Text 40"/>
-          <p:cNvSpPr/>
-          <p:nvPr/>
-        </p:nvSpPr>
-        <p:spPr>
-          <a:xfrm>
-            <a:off x="7274052" y="4169664"/>
-            <a:ext cx="685800" cy="475488"/>
+          <p:cNvPr id="48" name="Text 46"/>
+          <p:cNvSpPr/>
+          <p:nvPr/>
+        </p:nvSpPr>
+        <p:spPr>
+          <a:xfrm>
+            <a:off x="4565350" y="4169664"/>
+            <a:ext cx="603504" cy="475488"/>
           </a:xfrm>
           <a:prstGeom prst="rect">
             <a:avLst/>
@@ -30962,7 +32576,337 @@
                 <a:ea typeface="Trebuchet MS" pitchFamily="34" charset="-122"/>
                 <a:cs typeface="Trebuchet MS" pitchFamily="34" charset="-120"/>
               </a:rPr>
-              <a:t>ng</a:t>
+              <a:t>l</a:t>
+            </a:r>
+            <a:endParaRPr lang="en-US" sz="900" dirty="0"/>
+          </a:p>
+        </p:txBody>
+      </p:sp>
+      <p:sp>
+        <p:nvSpPr>
+          <p:cNvPr id="49" name="Shape 47"/>
+          <p:cNvSpPr/>
+          <p:nvPr/>
+        </p:nvSpPr>
+        <p:spPr>
+          <a:xfrm>
+            <a:off x="5218730" y="4169664"/>
+            <a:ext cx="603504" cy="475488"/>
+          </a:xfrm>
+          <a:prstGeom prst="rect">
+            <a:avLst>
+              <a:gd name="adj" fmla="val 7692"/>
+            </a:avLst>
+          </a:prstGeom>
+          <a:solidFill>
+            <a:srgbClr val="FFFFFF"/>
+          </a:solidFill>
+          <a:ln w="12700">
+            <a:solidFill>
+              <a:srgbClr val="DB2777"/>
+            </a:solidFill>
+            <a:prstDash val="solid"/>
+          </a:ln>
+        </p:spPr>
+      </p:sp>
+      <p:sp>
+        <p:nvSpPr>
+          <p:cNvPr id="50" name="Text 48"/>
+          <p:cNvSpPr/>
+          <p:nvPr/>
+        </p:nvSpPr>
+        <p:spPr>
+          <a:xfrm>
+            <a:off x="5218730" y="4169664"/>
+            <a:ext cx="603504" cy="475488"/>
+          </a:xfrm>
+          <a:prstGeom prst="rect">
+            <a:avLst/>
+          </a:prstGeom>
+          <a:noFill/>
+          <a:ln/>
+        </p:spPr>
+        <p:txBody>
+          <a:bodyPr wrap="square" lIns="0" tIns="0" rIns="0" bIns="0" rtlCol="0" anchor="ctr"/>
+          <a:lstStyle/>
+          <a:p>
+            <a:pPr algn="ctr" indent="0" marL="0">
+              <a:buNone/>
+            </a:pPr>
+            <a:r>
+              <a:rPr lang="en-US" sz="900" b="1" dirty="0">
+                <a:solidFill>
+                  <a:srgbClr val="9D174D"/>
+                </a:solidFill>
+                <a:latin typeface="Trebuchet MS" pitchFamily="34" charset="0"/>
+                <a:ea typeface="Trebuchet MS" pitchFamily="34" charset="-122"/>
+                <a:cs typeface="Trebuchet MS" pitchFamily="34" charset="-120"/>
+              </a:rPr>
+              <a:t>i</a:t>
+            </a:r>
+            <a:endParaRPr lang="en-US" sz="900" dirty="0"/>
+          </a:p>
+        </p:txBody>
+      </p:sp>
+      <p:sp>
+        <p:nvSpPr>
+          <p:cNvPr id="51" name="Shape 49"/>
+          <p:cNvSpPr/>
+          <p:nvPr/>
+        </p:nvSpPr>
+        <p:spPr>
+          <a:xfrm>
+            <a:off x="5872111" y="4169664"/>
+            <a:ext cx="603504" cy="475488"/>
+          </a:xfrm>
+          <a:prstGeom prst="rect">
+            <a:avLst>
+              <a:gd name="adj" fmla="val 7692"/>
+            </a:avLst>
+          </a:prstGeom>
+          <a:solidFill>
+            <a:srgbClr val="FFFFFF"/>
+          </a:solidFill>
+          <a:ln w="12700">
+            <a:solidFill>
+              <a:srgbClr val="DB2777"/>
+            </a:solidFill>
+            <a:prstDash val="solid"/>
+          </a:ln>
+        </p:spPr>
+      </p:sp>
+      <p:sp>
+        <p:nvSpPr>
+          <p:cNvPr id="52" name="Text 50"/>
+          <p:cNvSpPr/>
+          <p:nvPr/>
+        </p:nvSpPr>
+        <p:spPr>
+          <a:xfrm>
+            <a:off x="5872111" y="4169664"/>
+            <a:ext cx="603504" cy="475488"/>
+          </a:xfrm>
+          <a:prstGeom prst="rect">
+            <a:avLst/>
+          </a:prstGeom>
+          <a:noFill/>
+          <a:ln/>
+        </p:spPr>
+        <p:txBody>
+          <a:bodyPr wrap="square" lIns="0" tIns="0" rIns="0" bIns="0" rtlCol="0" anchor="ctr"/>
+          <a:lstStyle/>
+          <a:p>
+            <a:pPr algn="ctr" indent="0" marL="0">
+              <a:buNone/>
+            </a:pPr>
+            <a:r>
+              <a:rPr lang="en-US" sz="900" b="1" dirty="0">
+                <a:solidFill>
+                  <a:srgbClr val="9D174D"/>
+                </a:solidFill>
+                <a:latin typeface="Trebuchet MS" pitchFamily="34" charset="0"/>
+                <a:ea typeface="Trebuchet MS" pitchFamily="34" charset="-122"/>
+                <a:cs typeface="Trebuchet MS" pitchFamily="34" charset="-120"/>
+              </a:rPr>
+              <a:t>n</a:t>
+            </a:r>
+            <a:endParaRPr lang="en-US" sz="900" dirty="0"/>
+          </a:p>
+        </p:txBody>
+      </p:sp>
+      <p:sp>
+        <p:nvSpPr>
+          <p:cNvPr id="53" name="Shape 51"/>
+          <p:cNvSpPr/>
+          <p:nvPr/>
+        </p:nvSpPr>
+        <p:spPr>
+          <a:xfrm>
+            <a:off x="6525491" y="4169664"/>
+            <a:ext cx="603504" cy="475488"/>
+          </a:xfrm>
+          <a:prstGeom prst="rect">
+            <a:avLst>
+              <a:gd name="adj" fmla="val 7692"/>
+            </a:avLst>
+          </a:prstGeom>
+          <a:solidFill>
+            <a:srgbClr val="FFFFFF"/>
+          </a:solidFill>
+          <a:ln w="12700">
+            <a:solidFill>
+              <a:srgbClr val="DB2777"/>
+            </a:solidFill>
+            <a:prstDash val="solid"/>
+          </a:ln>
+        </p:spPr>
+      </p:sp>
+      <p:sp>
+        <p:nvSpPr>
+          <p:cNvPr id="54" name="Text 52"/>
+          <p:cNvSpPr/>
+          <p:nvPr/>
+        </p:nvSpPr>
+        <p:spPr>
+          <a:xfrm>
+            <a:off x="6525491" y="4169664"/>
+            <a:ext cx="603504" cy="475488"/>
+          </a:xfrm>
+          <a:prstGeom prst="rect">
+            <a:avLst/>
+          </a:prstGeom>
+          <a:noFill/>
+          <a:ln/>
+        </p:spPr>
+        <p:txBody>
+          <a:bodyPr wrap="square" lIns="0" tIns="0" rIns="0" bIns="0" rtlCol="0" anchor="ctr"/>
+          <a:lstStyle/>
+          <a:p>
+            <a:pPr algn="ctr" indent="0" marL="0">
+              <a:buNone/>
+            </a:pPr>
+            <a:r>
+              <a:rPr lang="en-US" sz="900" b="1" dirty="0">
+                <a:solidFill>
+                  <a:srgbClr val="9D174D"/>
+                </a:solidFill>
+                <a:latin typeface="Trebuchet MS" pitchFamily="34" charset="0"/>
+                <a:ea typeface="Trebuchet MS" pitchFamily="34" charset="-122"/>
+                <a:cs typeface="Trebuchet MS" pitchFamily="34" charset="-120"/>
+              </a:rPr>
+              <a:t>e</a:t>
+            </a:r>
+            <a:endParaRPr lang="en-US" sz="900" dirty="0"/>
+          </a:p>
+        </p:txBody>
+      </p:sp>
+      <p:sp>
+        <p:nvSpPr>
+          <p:cNvPr id="55" name="Shape 53"/>
+          <p:cNvSpPr/>
+          <p:nvPr/>
+        </p:nvSpPr>
+        <p:spPr>
+          <a:xfrm>
+            <a:off x="7178871" y="4169664"/>
+            <a:ext cx="603504" cy="475488"/>
+          </a:xfrm>
+          <a:prstGeom prst="rect">
+            <a:avLst>
+              <a:gd name="adj" fmla="val 7692"/>
+            </a:avLst>
+          </a:prstGeom>
+          <a:solidFill>
+            <a:srgbClr val="FFFFFF"/>
+          </a:solidFill>
+          <a:ln w="12700">
+            <a:solidFill>
+              <a:srgbClr val="DB2777"/>
+            </a:solidFill>
+            <a:prstDash val="solid"/>
+          </a:ln>
+        </p:spPr>
+      </p:sp>
+      <p:sp>
+        <p:nvSpPr>
+          <p:cNvPr id="56" name="Text 54"/>
+          <p:cNvSpPr/>
+          <p:nvPr/>
+        </p:nvSpPr>
+        <p:spPr>
+          <a:xfrm>
+            <a:off x="7178871" y="4169664"/>
+            <a:ext cx="603504" cy="475488"/>
+          </a:xfrm>
+          <a:prstGeom prst="rect">
+            <a:avLst/>
+          </a:prstGeom>
+          <a:noFill/>
+          <a:ln/>
+        </p:spPr>
+        <p:txBody>
+          <a:bodyPr wrap="square" lIns="0" tIns="0" rIns="0" bIns="0" rtlCol="0" anchor="ctr"/>
+          <a:lstStyle/>
+          <a:p>
+            <a:pPr algn="ctr" indent="0" marL="0">
+              <a:buNone/>
+            </a:pPr>
+            <a:r>
+              <a:rPr lang="en-US" sz="900" b="1" dirty="0">
+                <a:solidFill>
+                  <a:srgbClr val="9D174D"/>
+                </a:solidFill>
+                <a:latin typeface="Trebuchet MS" pitchFamily="34" charset="0"/>
+                <a:ea typeface="Trebuchet MS" pitchFamily="34" charset="-122"/>
+                <a:cs typeface="Trebuchet MS" pitchFamily="34" charset="-120"/>
+              </a:rPr>
+              <a:t>s</a:t>
+            </a:r>
+            <a:endParaRPr lang="en-US" sz="900" dirty="0"/>
+          </a:p>
+        </p:txBody>
+      </p:sp>
+      <p:sp>
+        <p:nvSpPr>
+          <p:cNvPr id="57" name="Shape 55"/>
+          <p:cNvSpPr/>
+          <p:nvPr/>
+        </p:nvSpPr>
+        <p:spPr>
+          <a:xfrm>
+            <a:off x="7832252" y="4169664"/>
+            <a:ext cx="603504" cy="475488"/>
+          </a:xfrm>
+          <a:prstGeom prst="rect">
+            <a:avLst>
+              <a:gd name="adj" fmla="val 7692"/>
+            </a:avLst>
+          </a:prstGeom>
+          <a:solidFill>
+            <a:srgbClr val="FFFFFF"/>
+          </a:solidFill>
+          <a:ln w="12700">
+            <a:solidFill>
+              <a:srgbClr val="DB2777"/>
+            </a:solidFill>
+            <a:prstDash val="solid"/>
+          </a:ln>
+        </p:spPr>
+      </p:sp>
+      <p:sp>
+        <p:nvSpPr>
+          <p:cNvPr id="58" name="Text 56"/>
+          <p:cNvSpPr/>
+          <p:nvPr/>
+        </p:nvSpPr>
+        <p:spPr>
+          <a:xfrm>
+            <a:off x="7832252" y="4169664"/>
+            <a:ext cx="603504" cy="475488"/>
+          </a:xfrm>
+          <a:prstGeom prst="rect">
+            <a:avLst/>
+          </a:prstGeom>
+          <a:noFill/>
+          <a:ln/>
+        </p:spPr>
+        <p:txBody>
+          <a:bodyPr wrap="square" lIns="0" tIns="0" rIns="0" bIns="0" rtlCol="0" anchor="ctr"/>
+          <a:lstStyle/>
+          <a:p>
+            <a:pPr algn="ctr" indent="0" marL="0">
+              <a:buNone/>
+            </a:pPr>
+            <a:r>
+              <a:rPr lang="en-US" sz="900" b="1" dirty="0">
+                <a:solidFill>
+                  <a:srgbClr val="9D174D"/>
+                </a:solidFill>
+                <a:latin typeface="Trebuchet MS" pitchFamily="34" charset="0"/>
+                <a:ea typeface="Trebuchet MS" pitchFamily="34" charset="-122"/>
+                <a:cs typeface="Trebuchet MS" pitchFamily="34" charset="-120"/>
+              </a:rPr>
+              <a:t>s</a:t>
             </a:r>
             <a:endParaRPr lang="en-US" sz="900" dirty="0"/>
           </a:p>
@@ -31254,7 +33198,7 @@
                 <a:ea typeface="Calibri" pitchFamily="34" charset="-122"/>
                 <a:cs typeface="Calibri" pitchFamily="34" charset="-120"/>
               </a:rPr>
-              <a:t>Word Labs  •  wordlabs.app  •  Root: 'clean' = free from dirt or impurity</a:t>
+              <a:t>Word Labs  •  wordlabs.app  •  Root: 'clean' = free from dirt</a:t>
             </a:r>
             <a:endParaRPr lang="en-US" sz="800" dirty="0"/>
           </a:p>
@@ -32423,7 +34367,7 @@
                 <a:ea typeface="Calibri" pitchFamily="34" charset="-122"/>
                 <a:cs typeface="Calibri" pitchFamily="34" charset="-120"/>
               </a:rPr>
-              <a:t>Word Labs  •  wordlabs.app  •  Root: 'clean' = free from dirt or impurity</a:t>
+              <a:t>Word Labs  •  wordlabs.app  •  Root: 'clean' = free from dirt</a:t>
             </a:r>
             <a:endParaRPr lang="en-US" sz="800" dirty="0"/>
           </a:p>
@@ -32852,7 +34796,7 @@
                 <a:ea typeface="Trebuchet MS" pitchFamily="34" charset="-122"/>
                 <a:cs typeface="Trebuchet MS" pitchFamily="34" charset="-120"/>
               </a:rPr>
-              <a:t>-er</a:t>
+              <a:t>-ed</a:t>
             </a:r>
             <a:endParaRPr lang="en-US" sz="1300" dirty="0"/>
           </a:p>
@@ -32873,7 +34817,7 @@
             <a:avLst/>
           </a:prstGeom>
           <a:solidFill>
-            <a:srgbClr val="DDD6FE"/>
+            <a:srgbClr val="F1F5F9"/>
           </a:solidFill>
           <a:ln w="12700">
             <a:solidFill>
@@ -32885,14 +34829,64 @@
       </p:sp>
       <p:sp>
         <p:nvSpPr>
-          <p:cNvPr id="24" name="Text 22"/>
-          <p:cNvSpPr/>
-          <p:nvPr/>
-        </p:nvSpPr>
-        <p:spPr>
-          <a:xfrm>
-            <a:off x="365760" y="1984248"/>
-            <a:ext cx="2468880" cy="402336"/>
+          <p:cNvPr id="24" name="Shape 22"/>
+          <p:cNvSpPr/>
+          <p:nvPr/>
+        </p:nvSpPr>
+        <p:spPr>
+          <a:xfrm>
+            <a:off x="2971800" y="1984248"/>
+            <a:ext cx="2834640" cy="402336"/>
+          </a:xfrm>
+          <a:prstGeom prst="rect">
+            <a:avLst/>
+          </a:prstGeom>
+          <a:solidFill>
+            <a:srgbClr val="F1F5F9"/>
+          </a:solidFill>
+          <a:ln w="12700">
+            <a:solidFill>
+              <a:srgbClr val="E2E8F0"/>
+            </a:solidFill>
+            <a:prstDash val="solid"/>
+          </a:ln>
+        </p:spPr>
+      </p:sp>
+      <p:sp>
+        <p:nvSpPr>
+          <p:cNvPr id="25" name="Shape 23"/>
+          <p:cNvSpPr/>
+          <p:nvPr/>
+        </p:nvSpPr>
+        <p:spPr>
+          <a:xfrm>
+            <a:off x="5943600" y="1984248"/>
+            <a:ext cx="2834640" cy="402336"/>
+          </a:xfrm>
+          <a:prstGeom prst="rect">
+            <a:avLst/>
+          </a:prstGeom>
+          <a:solidFill>
+            <a:srgbClr val="FCE7F3"/>
+          </a:solidFill>
+          <a:ln w="12700">
+            <a:solidFill>
+              <a:srgbClr val="E2E8F0"/>
+            </a:solidFill>
+            <a:prstDash val="solid"/>
+          </a:ln>
+        </p:spPr>
+      </p:sp>
+      <p:sp>
+        <p:nvSpPr>
+          <p:cNvPr id="26" name="Text 24"/>
+          <p:cNvSpPr/>
+          <p:nvPr/>
+        </p:nvSpPr>
+        <p:spPr>
+          <a:xfrm>
+            <a:off x="5943600" y="1984248"/>
+            <a:ext cx="2834640" cy="402336"/>
           </a:xfrm>
           <a:prstGeom prst="rect">
             <a:avLst/>
@@ -32910,13 +34904,13 @@
             <a:r>
               <a:rPr lang="en-US" sz="1300" b="1" dirty="0">
                 <a:solidFill>
-                  <a:srgbClr val="4C1D95"/>
+                  <a:srgbClr val="9D174D"/>
                 </a:solidFill>
                 <a:latin typeface="Trebuchet MS" pitchFamily="34" charset="0"/>
                 <a:ea typeface="Trebuchet MS" pitchFamily="34" charset="-122"/>
                 <a:cs typeface="Trebuchet MS" pitchFamily="34" charset="-120"/>
               </a:rPr>
-              <a:t>re-</a:t>
+              <a:t>-er</a:t>
             </a:r>
             <a:endParaRPr lang="en-US" sz="1300" dirty="0"/>
           </a:p>
@@ -32924,20 +34918,45 @@
       </p:sp>
       <p:sp>
         <p:nvSpPr>
-          <p:cNvPr id="25" name="Shape 23"/>
-          <p:cNvSpPr/>
-          <p:nvPr/>
-        </p:nvSpPr>
-        <p:spPr>
-          <a:xfrm>
-            <a:off x="2971800" y="1984248"/>
+          <p:cNvPr id="27" name="Shape 25"/>
+          <p:cNvSpPr/>
+          <p:nvPr/>
+        </p:nvSpPr>
+        <p:spPr>
+          <a:xfrm>
+            <a:off x="365760" y="2404872"/>
+            <a:ext cx="2468880" cy="402336"/>
+          </a:xfrm>
+          <a:prstGeom prst="rect">
+            <a:avLst/>
+          </a:prstGeom>
+          <a:solidFill>
+            <a:srgbClr val="F8FAFC"/>
+          </a:solidFill>
+          <a:ln w="12700">
+            <a:solidFill>
+              <a:srgbClr val="E2E8F0"/>
+            </a:solidFill>
+            <a:prstDash val="solid"/>
+          </a:ln>
+        </p:spPr>
+      </p:sp>
+      <p:sp>
+        <p:nvSpPr>
+          <p:cNvPr id="28" name="Shape 26"/>
+          <p:cNvSpPr/>
+          <p:nvPr/>
+        </p:nvSpPr>
+        <p:spPr>
+          <a:xfrm>
+            <a:off x="2971800" y="2404872"/>
             <a:ext cx="2834640" cy="402336"/>
           </a:xfrm>
           <a:prstGeom prst="rect">
             <a:avLst/>
           </a:prstGeom>
           <a:solidFill>
-            <a:srgbClr val="F1F5F9"/>
+            <a:srgbClr val="F8FAFC"/>
           </a:solidFill>
           <a:ln w="12700">
             <a:solidFill>
@@ -32949,13 +34968,13 @@
       </p:sp>
       <p:sp>
         <p:nvSpPr>
-          <p:cNvPr id="26" name="Shape 24"/>
-          <p:cNvSpPr/>
-          <p:nvPr/>
-        </p:nvSpPr>
-        <p:spPr>
-          <a:xfrm>
-            <a:off x="5943600" y="1984248"/>
+          <p:cNvPr id="29" name="Shape 27"/>
+          <p:cNvSpPr/>
+          <p:nvPr/>
+        </p:nvSpPr>
+        <p:spPr>
+          <a:xfrm>
+            <a:off x="5943600" y="2404872"/>
             <a:ext cx="2834640" cy="402336"/>
           </a:xfrm>
           <a:prstGeom prst="rect">
@@ -32974,13 +34993,13 @@
       </p:sp>
       <p:sp>
         <p:nvSpPr>
-          <p:cNvPr id="27" name="Text 25"/>
-          <p:cNvSpPr/>
-          <p:nvPr/>
-        </p:nvSpPr>
-        <p:spPr>
-          <a:xfrm>
-            <a:off x="5943600" y="1984248"/>
+          <p:cNvPr id="30" name="Text 28"/>
+          <p:cNvSpPr/>
+          <p:nvPr/>
+        </p:nvSpPr>
+        <p:spPr>
+          <a:xfrm>
+            <a:off x="5943600" y="2404872"/>
             <a:ext cx="2834640" cy="402336"/>
           </a:xfrm>
           <a:prstGeom prst="rect">
@@ -33013,20 +35032,20 @@
       </p:sp>
       <p:sp>
         <p:nvSpPr>
-          <p:cNvPr id="28" name="Shape 26"/>
-          <p:cNvSpPr/>
-          <p:nvPr/>
-        </p:nvSpPr>
-        <p:spPr>
-          <a:xfrm>
-            <a:off x="365760" y="2404872"/>
+          <p:cNvPr id="31" name="Shape 29"/>
+          <p:cNvSpPr/>
+          <p:nvPr/>
+        </p:nvSpPr>
+        <p:spPr>
+          <a:xfrm>
+            <a:off x="365760" y="2825496"/>
             <a:ext cx="2468880" cy="402336"/>
           </a:xfrm>
           <a:prstGeom prst="rect">
             <a:avLst/>
           </a:prstGeom>
           <a:solidFill>
-            <a:srgbClr val="DDD6FE"/>
+            <a:srgbClr val="F1F5F9"/>
           </a:solidFill>
           <a:ln w="12700">
             <a:solidFill>
@@ -33038,14 +35057,64 @@
       </p:sp>
       <p:sp>
         <p:nvSpPr>
-          <p:cNvPr id="29" name="Text 27"/>
-          <p:cNvSpPr/>
-          <p:nvPr/>
-        </p:nvSpPr>
-        <p:spPr>
-          <a:xfrm>
-            <a:off x="365760" y="2404872"/>
-            <a:ext cx="2468880" cy="402336"/>
+          <p:cNvPr id="32" name="Shape 30"/>
+          <p:cNvSpPr/>
+          <p:nvPr/>
+        </p:nvSpPr>
+        <p:spPr>
+          <a:xfrm>
+            <a:off x="2971800" y="2825496"/>
+            <a:ext cx="2834640" cy="402336"/>
+          </a:xfrm>
+          <a:prstGeom prst="rect">
+            <a:avLst/>
+          </a:prstGeom>
+          <a:solidFill>
+            <a:srgbClr val="F1F5F9"/>
+          </a:solidFill>
+          <a:ln w="12700">
+            <a:solidFill>
+              <a:srgbClr val="E2E8F0"/>
+            </a:solidFill>
+            <a:prstDash val="solid"/>
+          </a:ln>
+        </p:spPr>
+      </p:sp>
+      <p:sp>
+        <p:nvSpPr>
+          <p:cNvPr id="33" name="Shape 31"/>
+          <p:cNvSpPr/>
+          <p:nvPr/>
+        </p:nvSpPr>
+        <p:spPr>
+          <a:xfrm>
+            <a:off x="5943600" y="2825496"/>
+            <a:ext cx="2834640" cy="402336"/>
+          </a:xfrm>
+          <a:prstGeom prst="rect">
+            <a:avLst/>
+          </a:prstGeom>
+          <a:solidFill>
+            <a:srgbClr val="FCE7F3"/>
+          </a:solidFill>
+          <a:ln w="12700">
+            <a:solidFill>
+              <a:srgbClr val="E2E8F0"/>
+            </a:solidFill>
+            <a:prstDash val="solid"/>
+          </a:ln>
+        </p:spPr>
+      </p:sp>
+      <p:sp>
+        <p:nvSpPr>
+          <p:cNvPr id="34" name="Text 32"/>
+          <p:cNvSpPr/>
+          <p:nvPr/>
+        </p:nvSpPr>
+        <p:spPr>
+          <a:xfrm>
+            <a:off x="5943600" y="2825496"/>
+            <a:ext cx="2834640" cy="402336"/>
           </a:xfrm>
           <a:prstGeom prst="rect">
             <a:avLst/>
@@ -33063,13 +35132,13 @@
             <a:r>
               <a:rPr lang="en-US" sz="1300" b="1" dirty="0">
                 <a:solidFill>
-                  <a:srgbClr val="4C1D95"/>
+                  <a:srgbClr val="9D174D"/>
                 </a:solidFill>
                 <a:latin typeface="Trebuchet MS" pitchFamily="34" charset="0"/>
                 <a:ea typeface="Trebuchet MS" pitchFamily="34" charset="-122"/>
                 <a:cs typeface="Trebuchet MS" pitchFamily="34" charset="-120"/>
               </a:rPr>
-              <a:t>squeaky-</a:t>
+              <a:t>-ing</a:t>
             </a:r>
             <a:endParaRPr lang="en-US" sz="1300" dirty="0"/>
           </a:p>
@@ -33077,13 +35146,38 @@
       </p:sp>
       <p:sp>
         <p:nvSpPr>
-          <p:cNvPr id="30" name="Shape 28"/>
-          <p:cNvSpPr/>
-          <p:nvPr/>
-        </p:nvSpPr>
-        <p:spPr>
-          <a:xfrm>
-            <a:off x="2971800" y="2404872"/>
+          <p:cNvPr id="35" name="Shape 33"/>
+          <p:cNvSpPr/>
+          <p:nvPr/>
+        </p:nvSpPr>
+        <p:spPr>
+          <a:xfrm>
+            <a:off x="365760" y="3246120"/>
+            <a:ext cx="2468880" cy="402336"/>
+          </a:xfrm>
+          <a:prstGeom prst="rect">
+            <a:avLst/>
+          </a:prstGeom>
+          <a:solidFill>
+            <a:srgbClr val="F8FAFC"/>
+          </a:solidFill>
+          <a:ln w="12700">
+            <a:solidFill>
+              <a:srgbClr val="E2E8F0"/>
+            </a:solidFill>
+            <a:prstDash val="solid"/>
+          </a:ln>
+        </p:spPr>
+      </p:sp>
+      <p:sp>
+        <p:nvSpPr>
+          <p:cNvPr id="36" name="Shape 34"/>
+          <p:cNvSpPr/>
+          <p:nvPr/>
+        </p:nvSpPr>
+        <p:spPr>
+          <a:xfrm>
+            <a:off x="2971800" y="3246120"/>
             <a:ext cx="2834640" cy="402336"/>
           </a:xfrm>
           <a:prstGeom prst="rect">
@@ -33102,13 +35196,13 @@
       </p:sp>
       <p:sp>
         <p:nvSpPr>
-          <p:cNvPr id="31" name="Shape 29"/>
-          <p:cNvSpPr/>
-          <p:nvPr/>
-        </p:nvSpPr>
-        <p:spPr>
-          <a:xfrm>
-            <a:off x="5943600" y="2404872"/>
+          <p:cNvPr id="37" name="Shape 35"/>
+          <p:cNvSpPr/>
+          <p:nvPr/>
+        </p:nvSpPr>
+        <p:spPr>
+          <a:xfrm>
+            <a:off x="5943600" y="3246120"/>
             <a:ext cx="2834640" cy="402336"/>
           </a:xfrm>
           <a:prstGeom prst="rect">
@@ -33127,13 +35221,13 @@
       </p:sp>
       <p:sp>
         <p:nvSpPr>
-          <p:cNvPr id="32" name="Text 30"/>
-          <p:cNvSpPr/>
-          <p:nvPr/>
-        </p:nvSpPr>
-        <p:spPr>
-          <a:xfrm>
-            <a:off x="5943600" y="2404872"/>
+          <p:cNvPr id="38" name="Text 36"/>
+          <p:cNvSpPr/>
+          <p:nvPr/>
+        </p:nvSpPr>
+        <p:spPr>
+          <a:xfrm>
+            <a:off x="5943600" y="3246120"/>
             <a:ext cx="2834640" cy="402336"/>
           </a:xfrm>
           <a:prstGeom prst="rect">
@@ -33166,20 +35260,20 @@
       </p:sp>
       <p:sp>
         <p:nvSpPr>
-          <p:cNvPr id="33" name="Shape 31"/>
-          <p:cNvSpPr/>
-          <p:nvPr/>
-        </p:nvSpPr>
-        <p:spPr>
-          <a:xfrm>
-            <a:off x="365760" y="2825496"/>
+          <p:cNvPr id="39" name="Shape 37"/>
+          <p:cNvSpPr/>
+          <p:nvPr/>
+        </p:nvSpPr>
+        <p:spPr>
+          <a:xfrm>
+            <a:off x="365760" y="3666744"/>
             <a:ext cx="2468880" cy="402336"/>
           </a:xfrm>
           <a:prstGeom prst="rect">
             <a:avLst/>
           </a:prstGeom>
           <a:solidFill>
-            <a:srgbClr val="DDD6FE"/>
+            <a:srgbClr val="F1F5F9"/>
           </a:solidFill>
           <a:ln w="12700">
             <a:solidFill>
@@ -33191,14 +35285,64 @@
       </p:sp>
       <p:sp>
         <p:nvSpPr>
-          <p:cNvPr id="34" name="Text 32"/>
-          <p:cNvSpPr/>
-          <p:nvPr/>
-        </p:nvSpPr>
-        <p:spPr>
-          <a:xfrm>
-            <a:off x="365760" y="2825496"/>
-            <a:ext cx="2468880" cy="402336"/>
+          <p:cNvPr id="40" name="Shape 38"/>
+          <p:cNvSpPr/>
+          <p:nvPr/>
+        </p:nvSpPr>
+        <p:spPr>
+          <a:xfrm>
+            <a:off x="2971800" y="3666744"/>
+            <a:ext cx="2834640" cy="402336"/>
+          </a:xfrm>
+          <a:prstGeom prst="rect">
+            <a:avLst/>
+          </a:prstGeom>
+          <a:solidFill>
+            <a:srgbClr val="F1F5F9"/>
+          </a:solidFill>
+          <a:ln w="12700">
+            <a:solidFill>
+              <a:srgbClr val="E2E8F0"/>
+            </a:solidFill>
+            <a:prstDash val="solid"/>
+          </a:ln>
+        </p:spPr>
+      </p:sp>
+      <p:sp>
+        <p:nvSpPr>
+          <p:cNvPr id="41" name="Shape 39"/>
+          <p:cNvSpPr/>
+          <p:nvPr/>
+        </p:nvSpPr>
+        <p:spPr>
+          <a:xfrm>
+            <a:off x="5943600" y="3666744"/>
+            <a:ext cx="2834640" cy="402336"/>
+          </a:xfrm>
+          <a:prstGeom prst="rect">
+            <a:avLst/>
+          </a:prstGeom>
+          <a:solidFill>
+            <a:srgbClr val="FCE7F3"/>
+          </a:solidFill>
+          <a:ln w="12700">
+            <a:solidFill>
+              <a:srgbClr val="E2E8F0"/>
+            </a:solidFill>
+            <a:prstDash val="solid"/>
+          </a:ln>
+        </p:spPr>
+      </p:sp>
+      <p:sp>
+        <p:nvSpPr>
+          <p:cNvPr id="42" name="Text 40"/>
+          <p:cNvSpPr/>
+          <p:nvPr/>
+        </p:nvSpPr>
+        <p:spPr>
+          <a:xfrm>
+            <a:off x="5943600" y="3666744"/>
+            <a:ext cx="2834640" cy="402336"/>
           </a:xfrm>
           <a:prstGeom prst="rect">
             <a:avLst/>
@@ -33216,13 +35360,13 @@
             <a:r>
               <a:rPr lang="en-US" sz="1300" b="1" dirty="0">
                 <a:solidFill>
-                  <a:srgbClr val="4C1D95"/>
+                  <a:srgbClr val="9D174D"/>
                 </a:solidFill>
                 <a:latin typeface="Trebuchet MS" pitchFamily="34" charset="0"/>
                 <a:ea typeface="Trebuchet MS" pitchFamily="34" charset="-122"/>
                 <a:cs typeface="Trebuchet MS" pitchFamily="34" charset="-120"/>
               </a:rPr>
-              <a:t>dry-</a:t>
+              <a:t>-s</a:t>
             </a:r>
             <a:endParaRPr lang="en-US" sz="1300" dirty="0"/>
           </a:p>
@@ -33230,64 +35374,14 @@
       </p:sp>
       <p:sp>
         <p:nvSpPr>
-          <p:cNvPr id="35" name="Shape 33"/>
-          <p:cNvSpPr/>
-          <p:nvPr/>
-        </p:nvSpPr>
-        <p:spPr>
-          <a:xfrm>
-            <a:off x="2971800" y="2825496"/>
-            <a:ext cx="2834640" cy="402336"/>
-          </a:xfrm>
-          <a:prstGeom prst="rect">
-            <a:avLst/>
-          </a:prstGeom>
-          <a:solidFill>
-            <a:srgbClr val="F1F5F9"/>
-          </a:solidFill>
-          <a:ln w="12700">
-            <a:solidFill>
-              <a:srgbClr val="E2E8F0"/>
-            </a:solidFill>
-            <a:prstDash val="solid"/>
-          </a:ln>
-        </p:spPr>
-      </p:sp>
-      <p:sp>
-        <p:nvSpPr>
-          <p:cNvPr id="36" name="Shape 34"/>
-          <p:cNvSpPr/>
-          <p:nvPr/>
-        </p:nvSpPr>
-        <p:spPr>
-          <a:xfrm>
-            <a:off x="5943600" y="2825496"/>
-            <a:ext cx="2834640" cy="402336"/>
-          </a:xfrm>
-          <a:prstGeom prst="rect">
-            <a:avLst/>
-          </a:prstGeom>
-          <a:solidFill>
-            <a:srgbClr val="FCE7F3"/>
-          </a:solidFill>
-          <a:ln w="12700">
-            <a:solidFill>
-              <a:srgbClr val="E2E8F0"/>
-            </a:solidFill>
-            <a:prstDash val="solid"/>
-          </a:ln>
-        </p:spPr>
-      </p:sp>
-      <p:sp>
-        <p:nvSpPr>
-          <p:cNvPr id="37" name="Text 35"/>
-          <p:cNvSpPr/>
-          <p:nvPr/>
-        </p:nvSpPr>
-        <p:spPr>
-          <a:xfrm>
-            <a:off x="5943600" y="2825496"/>
-            <a:ext cx="2834640" cy="402336"/>
+          <p:cNvPr id="43" name="Text 41"/>
+          <p:cNvSpPr/>
+          <p:nvPr/>
+        </p:nvSpPr>
+        <p:spPr>
+          <a:xfrm>
+            <a:off x="365760" y="3611880"/>
+            <a:ext cx="1828800" cy="347472"/>
           </a:xfrm>
           <a:prstGeom prst="rect">
             <a:avLst/>
@@ -33299,59 +35393,61 @@
           <a:bodyPr wrap="square" lIns="0" tIns="0" rIns="0" bIns="0" rtlCol="0" anchor="ctr"/>
           <a:lstStyle/>
           <a:p>
-            <a:pPr algn="ctr" indent="0" marL="0">
-              <a:buNone/>
-            </a:pPr>
-            <a:r>
-              <a:rPr lang="en-US" sz="1300" b="1" dirty="0">
-                <a:solidFill>
-                  <a:srgbClr val="9D174D"/>
+            <a:pPr algn="l" indent="0" marL="0">
+              <a:buNone/>
+            </a:pPr>
+            <a:r>
+              <a:rPr lang="en-US" sz="1200" b="1" dirty="0">
+                <a:solidFill>
+                  <a:srgbClr val="0F172A"/>
                 </a:solidFill>
                 <a:latin typeface="Trebuchet MS" pitchFamily="34" charset="0"/>
                 <a:ea typeface="Trebuchet MS" pitchFamily="34" charset="-122"/>
                 <a:cs typeface="Trebuchet MS" pitchFamily="34" charset="-120"/>
               </a:rPr>
-              <a:t>-ness</a:t>
-            </a:r>
-            <a:endParaRPr lang="en-US" sz="1300" dirty="0"/>
-          </a:p>
-        </p:txBody>
-      </p:sp>
-      <p:sp>
-        <p:nvSpPr>
-          <p:cNvPr id="38" name="Shape 36"/>
-          <p:cNvSpPr/>
-          <p:nvPr/>
-        </p:nvSpPr>
-        <p:spPr>
-          <a:xfrm>
-            <a:off x="365760" y="3246120"/>
-            <a:ext cx="2468880" cy="402336"/>
-          </a:xfrm>
-          <a:prstGeom prst="rect">
-            <a:avLst/>
-          </a:prstGeom>
-          <a:solidFill>
-            <a:srgbClr val="DDD6FE"/>
-          </a:solidFill>
-          <a:ln w="12700">
-            <a:solidFill>
-              <a:srgbClr val="E2E8F0"/>
-            </a:solidFill>
-            <a:prstDash val="solid"/>
-          </a:ln>
-        </p:spPr>
-      </p:sp>
-      <p:sp>
-        <p:nvSpPr>
-          <p:cNvPr id="39" name="Text 37"/>
-          <p:cNvSpPr/>
-          <p:nvPr/>
-        </p:nvSpPr>
-        <p:spPr>
-          <a:xfrm>
-            <a:off x="365760" y="3246120"/>
-            <a:ext cx="2468880" cy="402336"/>
+              <a:t>Sample words:</a:t>
+            </a:r>
+            <a:endParaRPr lang="en-US" sz="1200" dirty="0"/>
+          </a:p>
+        </p:txBody>
+      </p:sp>
+      <p:sp>
+        <p:nvSpPr>
+          <p:cNvPr id="44" name="Shape 42"/>
+          <p:cNvSpPr/>
+          <p:nvPr/>
+        </p:nvSpPr>
+        <p:spPr>
+          <a:xfrm>
+            <a:off x="365760" y="4023360"/>
+            <a:ext cx="2011680" cy="402336"/>
+          </a:xfrm>
+          <a:prstGeom prst="rect">
+            <a:avLst>
+              <a:gd name="adj" fmla="val 13636"/>
+            </a:avLst>
+          </a:prstGeom>
+          <a:solidFill>
+            <a:srgbClr val="EEF2FF"/>
+          </a:solidFill>
+          <a:ln w="12700">
+            <a:solidFill>
+              <a:srgbClr val="6366F1"/>
+            </a:solidFill>
+            <a:prstDash val="solid"/>
+          </a:ln>
+        </p:spPr>
+      </p:sp>
+      <p:sp>
+        <p:nvSpPr>
+          <p:cNvPr id="45" name="Text 43"/>
+          <p:cNvSpPr/>
+          <p:nvPr/>
+        </p:nvSpPr>
+        <p:spPr>
+          <a:xfrm>
+            <a:off x="365760" y="4023360"/>
+            <a:ext cx="2011680" cy="402336"/>
           </a:xfrm>
           <a:prstGeom prst="rect">
             <a:avLst/>
@@ -33367,80 +35463,57 @@
               <a:buNone/>
             </a:pPr>
             <a:r>
-              <a:rPr lang="en-US" sz="1300" b="1" dirty="0">
-                <a:solidFill>
-                  <a:srgbClr val="4C1D95"/>
+              <a:rPr lang="en-US" sz="1200" b="1" dirty="0">
+                <a:solidFill>
+                  <a:srgbClr val="4338CA"/>
                 </a:solidFill>
                 <a:latin typeface="Trebuchet MS" pitchFamily="34" charset="0"/>
                 <a:ea typeface="Trebuchet MS" pitchFamily="34" charset="-122"/>
                 <a:cs typeface="Trebuchet MS" pitchFamily="34" charset="-120"/>
               </a:rPr>
-              <a:t>spring-</a:t>
-            </a:r>
-            <a:endParaRPr lang="en-US" sz="1300" dirty="0"/>
-          </a:p>
-        </p:txBody>
-      </p:sp>
-      <p:sp>
-        <p:nvSpPr>
-          <p:cNvPr id="40" name="Shape 38"/>
-          <p:cNvSpPr/>
-          <p:nvPr/>
-        </p:nvSpPr>
-        <p:spPr>
-          <a:xfrm>
-            <a:off x="2971800" y="3246120"/>
-            <a:ext cx="2834640" cy="402336"/>
-          </a:xfrm>
-          <a:prstGeom prst="rect">
-            <a:avLst/>
-          </a:prstGeom>
-          <a:solidFill>
-            <a:srgbClr val="F8FAFC"/>
-          </a:solidFill>
-          <a:ln w="12700">
-            <a:solidFill>
-              <a:srgbClr val="E2E8F0"/>
-            </a:solidFill>
-            <a:prstDash val="solid"/>
-          </a:ln>
-        </p:spPr>
-      </p:sp>
-      <p:sp>
-        <p:nvSpPr>
-          <p:cNvPr id="41" name="Shape 39"/>
-          <p:cNvSpPr/>
-          <p:nvPr/>
-        </p:nvSpPr>
-        <p:spPr>
-          <a:xfrm>
-            <a:off x="5943600" y="3246120"/>
-            <a:ext cx="2834640" cy="402336"/>
-          </a:xfrm>
-          <a:prstGeom prst="rect">
-            <a:avLst/>
-          </a:prstGeom>
-          <a:solidFill>
-            <a:srgbClr val="FCE7F3"/>
-          </a:solidFill>
-          <a:ln w="12700">
-            <a:solidFill>
-              <a:srgbClr val="E2E8F0"/>
-            </a:solidFill>
-            <a:prstDash val="solid"/>
-          </a:ln>
-        </p:spPr>
-      </p:sp>
-      <p:sp>
-        <p:nvSpPr>
-          <p:cNvPr id="42" name="Text 40"/>
-          <p:cNvSpPr/>
-          <p:nvPr/>
-        </p:nvSpPr>
-        <p:spPr>
-          <a:xfrm>
-            <a:off x="5943600" y="3246120"/>
-            <a:ext cx="2834640" cy="402336"/>
+              <a:t>clean</a:t>
+            </a:r>
+            <a:endParaRPr lang="en-US" sz="1200" dirty="0"/>
+          </a:p>
+        </p:txBody>
+      </p:sp>
+      <p:sp>
+        <p:nvSpPr>
+          <p:cNvPr id="46" name="Shape 44"/>
+          <p:cNvSpPr/>
+          <p:nvPr/>
+        </p:nvSpPr>
+        <p:spPr>
+          <a:xfrm>
+            <a:off x="2542032" y="4023360"/>
+            <a:ext cx="2011680" cy="402336"/>
+          </a:xfrm>
+          <a:prstGeom prst="rect">
+            <a:avLst>
+              <a:gd name="adj" fmla="val 13636"/>
+            </a:avLst>
+          </a:prstGeom>
+          <a:solidFill>
+            <a:srgbClr val="EEF2FF"/>
+          </a:solidFill>
+          <a:ln w="12700">
+            <a:solidFill>
+              <a:srgbClr val="6366F1"/>
+            </a:solidFill>
+            <a:prstDash val="solid"/>
+          </a:ln>
+        </p:spPr>
+      </p:sp>
+      <p:sp>
+        <p:nvSpPr>
+          <p:cNvPr id="47" name="Text 45"/>
+          <p:cNvSpPr/>
+          <p:nvPr/>
+        </p:nvSpPr>
+        <p:spPr>
+          <a:xfrm>
+            <a:off x="2542032" y="4023360"/>
+            <a:ext cx="2011680" cy="402336"/>
           </a:xfrm>
           <a:prstGeom prst="rect">
             <a:avLst/>
@@ -33456,30 +35529,57 @@
               <a:buNone/>
             </a:pPr>
             <a:r>
-              <a:rPr lang="en-US" sz="1300" b="1" dirty="0">
-                <a:solidFill>
-                  <a:srgbClr val="9D174D"/>
+              <a:rPr lang="en-US" sz="1200" b="1" dirty="0">
+                <a:solidFill>
+                  <a:srgbClr val="4338CA"/>
                 </a:solidFill>
                 <a:latin typeface="Trebuchet MS" pitchFamily="34" charset="0"/>
                 <a:ea typeface="Trebuchet MS" pitchFamily="34" charset="-122"/>
                 <a:cs typeface="Trebuchet MS" pitchFamily="34" charset="-120"/>
               </a:rPr>
-              <a:t>-ing</a:t>
-            </a:r>
-            <a:endParaRPr lang="en-US" sz="1300" dirty="0"/>
-          </a:p>
-        </p:txBody>
-      </p:sp>
-      <p:sp>
-        <p:nvSpPr>
-          <p:cNvPr id="43" name="Text 41"/>
-          <p:cNvSpPr/>
-          <p:nvPr/>
-        </p:nvSpPr>
-        <p:spPr>
-          <a:xfrm>
-            <a:off x="365760" y="3611880"/>
-            <a:ext cx="1828800" cy="347472"/>
+              <a:t>cleans</a:t>
+            </a:r>
+            <a:endParaRPr lang="en-US" sz="1200" dirty="0"/>
+          </a:p>
+        </p:txBody>
+      </p:sp>
+      <p:sp>
+        <p:nvSpPr>
+          <p:cNvPr id="48" name="Shape 46"/>
+          <p:cNvSpPr/>
+          <p:nvPr/>
+        </p:nvSpPr>
+        <p:spPr>
+          <a:xfrm>
+            <a:off x="4718304" y="4023360"/>
+            <a:ext cx="2011680" cy="402336"/>
+          </a:xfrm>
+          <a:prstGeom prst="rect">
+            <a:avLst>
+              <a:gd name="adj" fmla="val 13636"/>
+            </a:avLst>
+          </a:prstGeom>
+          <a:solidFill>
+            <a:srgbClr val="EEF2FF"/>
+          </a:solidFill>
+          <a:ln w="12700">
+            <a:solidFill>
+              <a:srgbClr val="6366F1"/>
+            </a:solidFill>
+            <a:prstDash val="solid"/>
+          </a:ln>
+        </p:spPr>
+      </p:sp>
+      <p:sp>
+        <p:nvSpPr>
+          <p:cNvPr id="49" name="Text 47"/>
+          <p:cNvSpPr/>
+          <p:nvPr/>
+        </p:nvSpPr>
+        <p:spPr>
+          <a:xfrm>
+            <a:off x="4718304" y="4023360"/>
+            <a:ext cx="2011680" cy="402336"/>
           </a:xfrm>
           <a:prstGeom prst="rect">
             <a:avLst/>
@@ -33491,19 +35591,19 @@
           <a:bodyPr wrap="square" lIns="0" tIns="0" rIns="0" bIns="0" rtlCol="0" anchor="ctr"/>
           <a:lstStyle/>
           <a:p>
-            <a:pPr algn="l" indent="0" marL="0">
+            <a:pPr algn="ctr" indent="0" marL="0">
               <a:buNone/>
             </a:pPr>
             <a:r>
               <a:rPr lang="en-US" sz="1200" b="1" dirty="0">
                 <a:solidFill>
-                  <a:srgbClr val="0F172A"/>
+                  <a:srgbClr val="4338CA"/>
                 </a:solidFill>
                 <a:latin typeface="Trebuchet MS" pitchFamily="34" charset="0"/>
                 <a:ea typeface="Trebuchet MS" pitchFamily="34" charset="-122"/>
                 <a:cs typeface="Trebuchet MS" pitchFamily="34" charset="-120"/>
               </a:rPr>
-              <a:t>Sample words:</a:t>
+              <a:t>cleaned</a:t>
             </a:r>
             <a:endParaRPr lang="en-US" sz="1200" dirty="0"/>
           </a:p>
@@ -33511,13 +35611,13 @@
       </p:sp>
       <p:sp>
         <p:nvSpPr>
-          <p:cNvPr id="44" name="Shape 42"/>
-          <p:cNvSpPr/>
-          <p:nvPr/>
-        </p:nvSpPr>
-        <p:spPr>
-          <a:xfrm>
-            <a:off x="365760" y="4023360"/>
+          <p:cNvPr id="50" name="Shape 48"/>
+          <p:cNvSpPr/>
+          <p:nvPr/>
+        </p:nvSpPr>
+        <p:spPr>
+          <a:xfrm>
+            <a:off x="6894576" y="4023360"/>
             <a:ext cx="2011680" cy="402336"/>
           </a:xfrm>
           <a:prstGeom prst="rect">
@@ -33538,13 +35638,13 @@
       </p:sp>
       <p:sp>
         <p:nvSpPr>
-          <p:cNvPr id="45" name="Text 43"/>
-          <p:cNvSpPr/>
-          <p:nvPr/>
-        </p:nvSpPr>
-        <p:spPr>
-          <a:xfrm>
-            <a:off x="365760" y="4023360"/>
+          <p:cNvPr id="51" name="Text 49"/>
+          <p:cNvSpPr/>
+          <p:nvPr/>
+        </p:nvSpPr>
+        <p:spPr>
+          <a:xfrm>
+            <a:off x="6894576" y="4023360"/>
             <a:ext cx="2011680" cy="402336"/>
           </a:xfrm>
           <a:prstGeom prst="rect">
@@ -33577,13 +35677,13 @@
       </p:sp>
       <p:sp>
         <p:nvSpPr>
-          <p:cNvPr id="46" name="Shape 44"/>
-          <p:cNvSpPr/>
-          <p:nvPr/>
-        </p:nvSpPr>
-        <p:spPr>
-          <a:xfrm>
-            <a:off x="2542032" y="4023360"/>
+          <p:cNvPr id="52" name="Shape 50"/>
+          <p:cNvSpPr/>
+          <p:nvPr/>
+        </p:nvSpPr>
+        <p:spPr>
+          <a:xfrm>
+            <a:off x="365760" y="4498848"/>
             <a:ext cx="2011680" cy="402336"/>
           </a:xfrm>
           <a:prstGeom prst="rect">
@@ -33604,13 +35704,13 @@
       </p:sp>
       <p:sp>
         <p:nvSpPr>
-          <p:cNvPr id="47" name="Text 45"/>
-          <p:cNvSpPr/>
-          <p:nvPr/>
-        </p:nvSpPr>
-        <p:spPr>
-          <a:xfrm>
-            <a:off x="2542032" y="4023360"/>
+          <p:cNvPr id="53" name="Text 51"/>
+          <p:cNvSpPr/>
+          <p:nvPr/>
+        </p:nvSpPr>
+        <p:spPr>
+          <a:xfrm>
+            <a:off x="365760" y="4498848"/>
             <a:ext cx="2011680" cy="402336"/>
           </a:xfrm>
           <a:prstGeom prst="rect">
@@ -33635,7 +35735,7 @@
                 <a:ea typeface="Trebuchet MS" pitchFamily="34" charset="-122"/>
                 <a:cs typeface="Trebuchet MS" pitchFamily="34" charset="-120"/>
               </a:rPr>
-              <a:t>cleanest</a:t>
+              <a:t>cleanly</a:t>
             </a:r>
             <a:endParaRPr lang="en-US" sz="1200" dirty="0"/>
           </a:p>
@@ -33643,13 +35743,13 @@
       </p:sp>
       <p:sp>
         <p:nvSpPr>
-          <p:cNvPr id="48" name="Shape 46"/>
-          <p:cNvSpPr/>
-          <p:nvPr/>
-        </p:nvSpPr>
-        <p:spPr>
-          <a:xfrm>
-            <a:off x="4718304" y="4023360"/>
+          <p:cNvPr id="54" name="Shape 52"/>
+          <p:cNvSpPr/>
+          <p:nvPr/>
+        </p:nvSpPr>
+        <p:spPr>
+          <a:xfrm>
+            <a:off x="2542032" y="4498848"/>
             <a:ext cx="2011680" cy="402336"/>
           </a:xfrm>
           <a:prstGeom prst="rect">
@@ -33670,13 +35770,13 @@
       </p:sp>
       <p:sp>
         <p:nvSpPr>
-          <p:cNvPr id="49" name="Text 47"/>
-          <p:cNvSpPr/>
-          <p:nvPr/>
-        </p:nvSpPr>
-        <p:spPr>
-          <a:xfrm>
-            <a:off x="4718304" y="4023360"/>
+          <p:cNvPr id="55" name="Text 53"/>
+          <p:cNvSpPr/>
+          <p:nvPr/>
+        </p:nvSpPr>
+        <p:spPr>
+          <a:xfrm>
+            <a:off x="2542032" y="4498848"/>
             <a:ext cx="2011680" cy="402336"/>
           </a:xfrm>
           <a:prstGeom prst="rect">
@@ -33701,337 +35801,7 @@
                 <a:ea typeface="Trebuchet MS" pitchFamily="34" charset="-122"/>
                 <a:cs typeface="Trebuchet MS" pitchFamily="34" charset="-120"/>
               </a:rPr>
-              <a:t>cleanly</a:t>
-            </a:r>
-            <a:endParaRPr lang="en-US" sz="1200" dirty="0"/>
-          </a:p>
-        </p:txBody>
-      </p:sp>
-      <p:sp>
-        <p:nvSpPr>
-          <p:cNvPr id="50" name="Shape 48"/>
-          <p:cNvSpPr/>
-          <p:nvPr/>
-        </p:nvSpPr>
-        <p:spPr>
-          <a:xfrm>
-            <a:off x="6894576" y="4023360"/>
-            <a:ext cx="2011680" cy="402336"/>
-          </a:xfrm>
-          <a:prstGeom prst="rect">
-            <a:avLst>
-              <a:gd name="adj" fmla="val 13636"/>
-            </a:avLst>
-          </a:prstGeom>
-          <a:solidFill>
-            <a:srgbClr val="EEF2FF"/>
-          </a:solidFill>
-          <a:ln w="12700">
-            <a:solidFill>
-              <a:srgbClr val="6366F1"/>
-            </a:solidFill>
-            <a:prstDash val="solid"/>
-          </a:ln>
-        </p:spPr>
-      </p:sp>
-      <p:sp>
-        <p:nvSpPr>
-          <p:cNvPr id="51" name="Text 49"/>
-          <p:cNvSpPr/>
-          <p:nvPr/>
-        </p:nvSpPr>
-        <p:spPr>
-          <a:xfrm>
-            <a:off x="6894576" y="4023360"/>
-            <a:ext cx="2011680" cy="402336"/>
-          </a:xfrm>
-          <a:prstGeom prst="rect">
-            <a:avLst/>
-          </a:prstGeom>
-          <a:noFill/>
-          <a:ln/>
-        </p:spPr>
-        <p:txBody>
-          <a:bodyPr wrap="square" lIns="0" tIns="0" rIns="0" bIns="0" rtlCol="0" anchor="ctr"/>
-          <a:lstStyle/>
-          <a:p>
-            <a:pPr algn="ctr" indent="0" marL="0">
-              <a:buNone/>
-            </a:pPr>
-            <a:r>
-              <a:rPr lang="en-US" sz="1200" b="1" dirty="0">
-                <a:solidFill>
-                  <a:srgbClr val="4338CA"/>
-                </a:solidFill>
-                <a:latin typeface="Trebuchet MS" pitchFamily="34" charset="0"/>
-                <a:ea typeface="Trebuchet MS" pitchFamily="34" charset="-122"/>
-                <a:cs typeface="Trebuchet MS" pitchFamily="34" charset="-120"/>
-              </a:rPr>
-              <a:t>cleanliness</a:t>
-            </a:r>
-            <a:endParaRPr lang="en-US" sz="1200" dirty="0"/>
-          </a:p>
-        </p:txBody>
-      </p:sp>
-      <p:sp>
-        <p:nvSpPr>
-          <p:cNvPr id="52" name="Shape 50"/>
-          <p:cNvSpPr/>
-          <p:nvPr/>
-        </p:nvSpPr>
-        <p:spPr>
-          <a:xfrm>
-            <a:off x="365760" y="4498848"/>
-            <a:ext cx="2011680" cy="402336"/>
-          </a:xfrm>
-          <a:prstGeom prst="rect">
-            <a:avLst>
-              <a:gd name="adj" fmla="val 13636"/>
-            </a:avLst>
-          </a:prstGeom>
-          <a:solidFill>
-            <a:srgbClr val="EEF2FF"/>
-          </a:solidFill>
-          <a:ln w="12700">
-            <a:solidFill>
-              <a:srgbClr val="6366F1"/>
-            </a:solidFill>
-            <a:prstDash val="solid"/>
-          </a:ln>
-        </p:spPr>
-      </p:sp>
-      <p:sp>
-        <p:nvSpPr>
-          <p:cNvPr id="53" name="Text 51"/>
-          <p:cNvSpPr/>
-          <p:nvPr/>
-        </p:nvSpPr>
-        <p:spPr>
-          <a:xfrm>
-            <a:off x="365760" y="4498848"/>
-            <a:ext cx="2011680" cy="402336"/>
-          </a:xfrm>
-          <a:prstGeom prst="rect">
-            <a:avLst/>
-          </a:prstGeom>
-          <a:noFill/>
-          <a:ln/>
-        </p:spPr>
-        <p:txBody>
-          <a:bodyPr wrap="square" lIns="0" tIns="0" rIns="0" bIns="0" rtlCol="0" anchor="ctr"/>
-          <a:lstStyle/>
-          <a:p>
-            <a:pPr algn="ctr" indent="0" marL="0">
-              <a:buNone/>
-            </a:pPr>
-            <a:r>
-              <a:rPr lang="en-US" sz="1200" b="1" dirty="0">
-                <a:solidFill>
-                  <a:srgbClr val="4338CA"/>
-                </a:solidFill>
-                <a:latin typeface="Trebuchet MS" pitchFamily="34" charset="0"/>
-                <a:ea typeface="Trebuchet MS" pitchFamily="34" charset="-122"/>
-                <a:cs typeface="Trebuchet MS" pitchFamily="34" charset="-120"/>
-              </a:rPr>
-              <a:t>cleaning</a:t>
-            </a:r>
-            <a:endParaRPr lang="en-US" sz="1200" dirty="0"/>
-          </a:p>
-        </p:txBody>
-      </p:sp>
-      <p:sp>
-        <p:nvSpPr>
-          <p:cNvPr id="54" name="Shape 52"/>
-          <p:cNvSpPr/>
-          <p:nvPr/>
-        </p:nvSpPr>
-        <p:spPr>
-          <a:xfrm>
-            <a:off x="2542032" y="4498848"/>
-            <a:ext cx="2011680" cy="402336"/>
-          </a:xfrm>
-          <a:prstGeom prst="rect">
-            <a:avLst>
-              <a:gd name="adj" fmla="val 13636"/>
-            </a:avLst>
-          </a:prstGeom>
-          <a:solidFill>
-            <a:srgbClr val="EEF2FF"/>
-          </a:solidFill>
-          <a:ln w="12700">
-            <a:solidFill>
-              <a:srgbClr val="6366F1"/>
-            </a:solidFill>
-            <a:prstDash val="solid"/>
-          </a:ln>
-        </p:spPr>
-      </p:sp>
-      <p:sp>
-        <p:nvSpPr>
-          <p:cNvPr id="55" name="Text 53"/>
-          <p:cNvSpPr/>
-          <p:nvPr/>
-        </p:nvSpPr>
-        <p:spPr>
-          <a:xfrm>
-            <a:off x="2542032" y="4498848"/>
-            <a:ext cx="2011680" cy="402336"/>
-          </a:xfrm>
-          <a:prstGeom prst="rect">
-            <a:avLst/>
-          </a:prstGeom>
-          <a:noFill/>
-          <a:ln/>
-        </p:spPr>
-        <p:txBody>
-          <a:bodyPr wrap="square" lIns="0" tIns="0" rIns="0" bIns="0" rtlCol="0" anchor="ctr"/>
-          <a:lstStyle/>
-          <a:p>
-            <a:pPr algn="ctr" indent="0" marL="0">
-              <a:buNone/>
-            </a:pPr>
-            <a:r>
-              <a:rPr lang="en-US" sz="1200" b="1" dirty="0">
-                <a:solidFill>
-                  <a:srgbClr val="4338CA"/>
-                </a:solidFill>
-                <a:latin typeface="Trebuchet MS" pitchFamily="34" charset="0"/>
-                <a:ea typeface="Trebuchet MS" pitchFamily="34" charset="-122"/>
-                <a:cs typeface="Trebuchet MS" pitchFamily="34" charset="-120"/>
-              </a:rPr>
               <a:t>unclean</a:t>
-            </a:r>
-            <a:endParaRPr lang="en-US" sz="1200" dirty="0"/>
-          </a:p>
-        </p:txBody>
-      </p:sp>
-      <p:sp>
-        <p:nvSpPr>
-          <p:cNvPr id="56" name="Shape 54"/>
-          <p:cNvSpPr/>
-          <p:nvPr/>
-        </p:nvSpPr>
-        <p:spPr>
-          <a:xfrm>
-            <a:off x="4718304" y="4498848"/>
-            <a:ext cx="2011680" cy="402336"/>
-          </a:xfrm>
-          <a:prstGeom prst="rect">
-            <a:avLst>
-              <a:gd name="adj" fmla="val 13636"/>
-            </a:avLst>
-          </a:prstGeom>
-          <a:solidFill>
-            <a:srgbClr val="EEF2FF"/>
-          </a:solidFill>
-          <a:ln w="12700">
-            <a:solidFill>
-              <a:srgbClr val="6366F1"/>
-            </a:solidFill>
-            <a:prstDash val="solid"/>
-          </a:ln>
-        </p:spPr>
-      </p:sp>
-      <p:sp>
-        <p:nvSpPr>
-          <p:cNvPr id="57" name="Text 55"/>
-          <p:cNvSpPr/>
-          <p:nvPr/>
-        </p:nvSpPr>
-        <p:spPr>
-          <a:xfrm>
-            <a:off x="4718304" y="4498848"/>
-            <a:ext cx="2011680" cy="402336"/>
-          </a:xfrm>
-          <a:prstGeom prst="rect">
-            <a:avLst/>
-          </a:prstGeom>
-          <a:noFill/>
-          <a:ln/>
-        </p:spPr>
-        <p:txBody>
-          <a:bodyPr wrap="square" lIns="0" tIns="0" rIns="0" bIns="0" rtlCol="0" anchor="ctr"/>
-          <a:lstStyle/>
-          <a:p>
-            <a:pPr algn="ctr" indent="0" marL="0">
-              <a:buNone/>
-            </a:pPr>
-            <a:r>
-              <a:rPr lang="en-US" sz="1200" b="1" dirty="0">
-                <a:solidFill>
-                  <a:srgbClr val="4338CA"/>
-                </a:solidFill>
-                <a:latin typeface="Trebuchet MS" pitchFamily="34" charset="0"/>
-                <a:ea typeface="Trebuchet MS" pitchFamily="34" charset="-122"/>
-                <a:cs typeface="Trebuchet MS" pitchFamily="34" charset="-120"/>
-              </a:rPr>
-              <a:t>reclean</a:t>
-            </a:r>
-            <a:endParaRPr lang="en-US" sz="1200" dirty="0"/>
-          </a:p>
-        </p:txBody>
-      </p:sp>
-      <p:sp>
-        <p:nvSpPr>
-          <p:cNvPr id="58" name="Shape 56"/>
-          <p:cNvSpPr/>
-          <p:nvPr/>
-        </p:nvSpPr>
-        <p:spPr>
-          <a:xfrm>
-            <a:off x="6894576" y="4498848"/>
-            <a:ext cx="2011680" cy="402336"/>
-          </a:xfrm>
-          <a:prstGeom prst="rect">
-            <a:avLst>
-              <a:gd name="adj" fmla="val 13636"/>
-            </a:avLst>
-          </a:prstGeom>
-          <a:solidFill>
-            <a:srgbClr val="EEF2FF"/>
-          </a:solidFill>
-          <a:ln w="12700">
-            <a:solidFill>
-              <a:srgbClr val="6366F1"/>
-            </a:solidFill>
-            <a:prstDash val="solid"/>
-          </a:ln>
-        </p:spPr>
-      </p:sp>
-      <p:sp>
-        <p:nvSpPr>
-          <p:cNvPr id="59" name="Text 57"/>
-          <p:cNvSpPr/>
-          <p:nvPr/>
-        </p:nvSpPr>
-        <p:spPr>
-          <a:xfrm>
-            <a:off x="6894576" y="4498848"/>
-            <a:ext cx="2011680" cy="402336"/>
-          </a:xfrm>
-          <a:prstGeom prst="rect">
-            <a:avLst/>
-          </a:prstGeom>
-          <a:noFill/>
-          <a:ln/>
-        </p:spPr>
-        <p:txBody>
-          <a:bodyPr wrap="square" lIns="0" tIns="0" rIns="0" bIns="0" rtlCol="0" anchor="ctr"/>
-          <a:lstStyle/>
-          <a:p>
-            <a:pPr algn="ctr" indent="0" marL="0">
-              <a:buNone/>
-            </a:pPr>
-            <a:r>
-              <a:rPr lang="en-US" sz="1200" b="1" dirty="0">
-                <a:solidFill>
-                  <a:srgbClr val="4338CA"/>
-                </a:solidFill>
-                <a:latin typeface="Trebuchet MS" pitchFamily="34" charset="0"/>
-                <a:ea typeface="Trebuchet MS" pitchFamily="34" charset="-122"/>
-                <a:cs typeface="Trebuchet MS" pitchFamily="34" charset="-120"/>
-              </a:rPr>
-              <a:t>cleanse</a:t>
             </a:r>
             <a:endParaRPr lang="en-US" sz="1200" dirty="0"/>
           </a:p>
@@ -34323,7 +36093,7 @@
                 <a:ea typeface="Calibri" pitchFamily="34" charset="-122"/>
                 <a:cs typeface="Calibri" pitchFamily="34" charset="-120"/>
               </a:rPr>
-              <a:t>Word Labs  •  wordlabs.app  •  Root: 'clean' = free from dirt or impurity</a:t>
+              <a:t>Word Labs  •  wordlabs.app  •  Root: 'clean' = free from dirt</a:t>
             </a:r>
             <a:endParaRPr lang="en-US" sz="800" dirty="0"/>
           </a:p>
@@ -34487,7 +36257,7 @@
                 <a:ea typeface="Calibri" pitchFamily="34" charset="-122"/>
                 <a:cs typeface="Calibri" pitchFamily="34" charset="-120"/>
               </a:rPr>
-              <a:t>The core part of a word carrying its basic meaning. For example, 'clean' means 'free from dirt or impurity'.</a:t>
+              <a:t>The core part of a word carrying its basic meaning. For example, 'clean' means 'free from dirt'.</a:t>
             </a:r>
             <a:endParaRPr lang="en-US" sz="1350" dirty="0"/>
           </a:p>
@@ -35107,7 +36877,7 @@
                 <a:ea typeface="Calibri" pitchFamily="34" charset="-122"/>
                 <a:cs typeface="Calibri" pitchFamily="34" charset="-120"/>
               </a:rPr>
-              <a:t>Word Labs  •  wordlabs.app  •  Root: 'clean' = free from dirt or impurity</a:t>
+              <a:t>Word Labs  •  wordlabs.app  •  Root: 'clean' = free from dirt</a:t>
             </a:r>
             <a:endParaRPr lang="en-US" sz="800" dirty="0"/>
           </a:p>
@@ -35219,7 +36989,7 @@
                 <a:ea typeface="Calibri" pitchFamily="34" charset="-122"/>
                 <a:cs typeface="Calibri" pitchFamily="34" charset="-120"/>
               </a:rPr>
-              <a:t>1.  The word 'unclean' uses the prefix 'un' to mean 'not clean'.</a:t>
+              <a:t>1.  'clean' means 'very quiet and calm'.</a:t>
             </a:r>
             <a:endParaRPr lang="en-US" sz="1300" dirty="0"/>
           </a:p>
@@ -35242,11 +37012,11 @@
             </a:avLst>
           </a:prstGeom>
           <a:solidFill>
-            <a:srgbClr val="DCFCE7"/>
-          </a:solidFill>
-          <a:ln w="12700">
-            <a:solidFill>
-              <a:srgbClr val="16A34A"/>
+            <a:srgbClr val="FEE2E2"/>
+          </a:solidFill>
+          <a:ln w="12700">
+            <a:solidFill>
+              <a:srgbClr val="DC2626"/>
             </a:solidFill>
             <a:prstDash val="solid"/>
           </a:ln>
@@ -35279,13 +37049,13 @@
             <a:r>
               <a:rPr lang="en-US" sz="1100" b="1" dirty="0">
                 <a:solidFill>
-                  <a:srgbClr val="16A34A"/>
+                  <a:srgbClr val="DC2626"/>
                 </a:solidFill>
                 <a:latin typeface="Trebuchet MS" pitchFamily="34" charset="0"/>
                 <a:ea typeface="Trebuchet MS" pitchFamily="34" charset="-122"/>
                 <a:cs typeface="Trebuchet MS" pitchFamily="34" charset="-120"/>
               </a:rPr>
-              <a:t>TRUE</a:t>
+              <a:t>FALSE</a:t>
             </a:r>
             <a:endParaRPr lang="en-US" sz="1100" dirty="0"/>
           </a:p>
@@ -35358,7 +37128,7 @@
                 <a:ea typeface="Calibri" pitchFamily="34" charset="-122"/>
                 <a:cs typeface="Calibri" pitchFamily="34" charset="-120"/>
               </a:rPr>
-              <a:t>2.  The word 'cleaner' can describe a person whose job is to remove dirt.</a:t>
+              <a:t>2.  'clean' means 'free from dirt'.</a:t>
             </a:r>
             <a:endParaRPr lang="en-US" sz="1300" dirty="0"/>
           </a:p>
@@ -35497,7 +37267,7 @@
                 <a:ea typeface="Calibri" pitchFamily="34" charset="-122"/>
                 <a:cs typeface="Calibri" pitchFamily="34" charset="-120"/>
               </a:rPr>
-              <a:t>3.  The root 'clean' comes from a Greek word meaning 'to wash'.</a:t>
+              <a:t>3.  'cleans' means 'makes something dirty'.</a:t>
             </a:r>
             <a:endParaRPr lang="en-US" sz="1300" dirty="0"/>
           </a:p>
@@ -35636,7 +37406,7 @@
                 <a:ea typeface="Calibri" pitchFamily="34" charset="-122"/>
                 <a:cs typeface="Calibri" pitchFamily="34" charset="-120"/>
               </a:rPr>
-              <a:t>4.  The suffix '-ly' in 'cleanly' changes the word to mean 'the most clean'.</a:t>
+              <a:t>4.  'cleans' means 'makes something free of dirt'.</a:t>
             </a:r>
             <a:endParaRPr lang="en-US" sz="1300" dirty="0"/>
           </a:p>
@@ -35659,11 +37429,11 @@
             </a:avLst>
           </a:prstGeom>
           <a:solidFill>
-            <a:srgbClr val="FEE2E2"/>
-          </a:solidFill>
-          <a:ln w="12700">
-            <a:solidFill>
-              <a:srgbClr val="DC2626"/>
+            <a:srgbClr val="DCFCE7"/>
+          </a:solidFill>
+          <a:ln w="12700">
+            <a:solidFill>
+              <a:srgbClr val="16A34A"/>
             </a:solidFill>
             <a:prstDash val="solid"/>
           </a:ln>
@@ -35696,13 +37466,13 @@
             <a:r>
               <a:rPr lang="en-US" sz="1100" b="1" dirty="0">
                 <a:solidFill>
-                  <a:srgbClr val="DC2626"/>
+                  <a:srgbClr val="16A34A"/>
                 </a:solidFill>
                 <a:latin typeface="Trebuchet MS" pitchFamily="34" charset="0"/>
                 <a:ea typeface="Trebuchet MS" pitchFamily="34" charset="-122"/>
                 <a:cs typeface="Trebuchet MS" pitchFamily="34" charset="-120"/>
               </a:rPr>
-              <a:t>FALSE</a:t>
+              <a:t>TRUE</a:t>
             </a:r>
             <a:endParaRPr lang="en-US" sz="1100" dirty="0"/>
           </a:p>
@@ -35775,7 +37545,7 @@
                 <a:ea typeface="Calibri" pitchFamily="34" charset="-122"/>
                 <a:cs typeface="Calibri" pitchFamily="34" charset="-120"/>
               </a:rPr>
-              <a:t>5.  Adding the suffix '-ness' to 'clean' makes the noun 'cleanliness'.</a:t>
+              <a:t>5.  'clean' means 'free from dirt or mess'.</a:t>
             </a:r>
             <a:endParaRPr lang="en-US" sz="1300" dirty="0"/>
           </a:p>
@@ -36133,7 +37903,7 @@
                 <a:ea typeface="Calibri" pitchFamily="34" charset="-122"/>
                 <a:cs typeface="Calibri" pitchFamily="34" charset="-120"/>
               </a:rPr>
-              <a:t>Word Labs  •  wordlabs.app  •  Root: 'clean' = free from dirt or impurity</a:t>
+              <a:t>Word Labs  •  wordlabs.app  •  Root: 'clean' = free from dirt</a:t>
             </a:r>
             <a:endParaRPr lang="en-US" sz="800" dirty="0"/>
           </a:p>
@@ -36270,7 +38040,7 @@
                 <a:ea typeface="Trebuchet MS" pitchFamily="34" charset="-122"/>
                 <a:cs typeface="Trebuchet MS" pitchFamily="34" charset="-120"/>
               </a:rPr>
-              <a:t>free from dirt or impurity</a:t>
+              <a:t>free from dirt</a:t>
             </a:r>
             <a:endParaRPr lang="en-US" sz="2000" dirty="0"/>
           </a:p>
@@ -36309,7 +38079,7 @@
                 <a:ea typeface="Calibri" pitchFamily="34" charset="-122"/>
                 <a:cs typeface="Calibri" pitchFamily="34" charset="-120"/>
               </a:rPr>
-              <a:t>Origin: Latin: clarus</a:t>
+              <a:t>Origin: Anglo-Saxon (Old English) root</a:t>
             </a:r>
             <a:endParaRPr lang="en-US" sz="1100" dirty="0"/>
           </a:p>
@@ -36414,7 +38184,7 @@
                 <a:ea typeface="Trebuchet MS" pitchFamily="34" charset="-122"/>
                 <a:cs typeface="Trebuchet MS" pitchFamily="34" charset="-120"/>
               </a:rPr>
-              <a:t>cleaner</a:t>
+              <a:t>clean</a:t>
             </a:r>
             <a:endParaRPr lang="en-US" sz="1300" dirty="0"/>
           </a:p>
@@ -36480,7 +38250,7 @@
                 <a:ea typeface="Trebuchet MS" pitchFamily="34" charset="-122"/>
                 <a:cs typeface="Trebuchet MS" pitchFamily="34" charset="-120"/>
               </a:rPr>
-              <a:t>cleanest</a:t>
+              <a:t>cleans</a:t>
             </a:r>
             <a:endParaRPr lang="en-US" sz="1300" dirty="0"/>
           </a:p>
@@ -36546,7 +38316,7 @@
                 <a:ea typeface="Trebuchet MS" pitchFamily="34" charset="-122"/>
                 <a:cs typeface="Trebuchet MS" pitchFamily="34" charset="-120"/>
               </a:rPr>
-              <a:t>cleanly</a:t>
+              <a:t>cleaned</a:t>
             </a:r>
             <a:endParaRPr lang="en-US" sz="1300" dirty="0"/>
           </a:p>
@@ -36612,7 +38382,7 @@
                 <a:ea typeface="Trebuchet MS" pitchFamily="34" charset="-122"/>
                 <a:cs typeface="Trebuchet MS" pitchFamily="34" charset="-120"/>
               </a:rPr>
-              <a:t>cleanliness</a:t>
+              <a:t>cleaner</a:t>
             </a:r>
             <a:endParaRPr lang="en-US" sz="1300" dirty="0"/>
           </a:p>
@@ -36678,7 +38448,7 @@
                 <a:ea typeface="Trebuchet MS" pitchFamily="34" charset="-122"/>
                 <a:cs typeface="Trebuchet MS" pitchFamily="34" charset="-120"/>
               </a:rPr>
-              <a:t>cleaning</a:t>
+              <a:t>cleanly</a:t>
             </a:r>
             <a:endParaRPr lang="en-US" sz="1300" dirty="0"/>
           </a:p>
@@ -36745,72 +38515,6 @@
                 <a:cs typeface="Trebuchet MS" pitchFamily="34" charset="-120"/>
               </a:rPr>
               <a:t>unclean</a:t>
-            </a:r>
-            <a:endParaRPr lang="en-US" sz="1300" dirty="0"/>
-          </a:p>
-        </p:txBody>
-      </p:sp>
-      <p:sp>
-        <p:nvSpPr>
-          <p:cNvPr id="28" name="Shape 26"/>
-          <p:cNvSpPr/>
-          <p:nvPr/>
-        </p:nvSpPr>
-        <p:spPr>
-          <a:xfrm>
-            <a:off x="4663440" y="3401568"/>
-            <a:ext cx="2011680" cy="502920"/>
-          </a:xfrm>
-          <a:prstGeom prst="rect">
-            <a:avLst>
-              <a:gd name="adj" fmla="val 14545"/>
-            </a:avLst>
-          </a:prstGeom>
-          <a:solidFill>
-            <a:srgbClr val="EEF2FF"/>
-          </a:solidFill>
-          <a:ln w="12700">
-            <a:solidFill>
-              <a:srgbClr val="6366F1"/>
-            </a:solidFill>
-            <a:prstDash val="solid"/>
-          </a:ln>
-        </p:spPr>
-      </p:sp>
-      <p:sp>
-        <p:nvSpPr>
-          <p:cNvPr id="29" name="Text 27"/>
-          <p:cNvSpPr/>
-          <p:nvPr/>
-        </p:nvSpPr>
-        <p:spPr>
-          <a:xfrm>
-            <a:off x="4663440" y="3401568"/>
-            <a:ext cx="2011680" cy="502920"/>
-          </a:xfrm>
-          <a:prstGeom prst="rect">
-            <a:avLst/>
-          </a:prstGeom>
-          <a:noFill/>
-          <a:ln/>
-        </p:spPr>
-        <p:txBody>
-          <a:bodyPr wrap="square" lIns="0" tIns="0" rIns="0" bIns="0" rtlCol="0" anchor="ctr"/>
-          <a:lstStyle/>
-          <a:p>
-            <a:pPr algn="ctr" indent="0" marL="0">
-              <a:buNone/>
-            </a:pPr>
-            <a:r>
-              <a:rPr lang="en-US" sz="1300" b="1" dirty="0">
-                <a:solidFill>
-                  <a:srgbClr val="4338CA"/>
-                </a:solidFill>
-                <a:latin typeface="Trebuchet MS" pitchFamily="34" charset="0"/>
-                <a:ea typeface="Trebuchet MS" pitchFamily="34" charset="-122"/>
-                <a:cs typeface="Trebuchet MS" pitchFamily="34" charset="-120"/>
-              </a:rPr>
-              <a:t>reclean</a:t>
             </a:r>
             <a:endParaRPr lang="en-US" sz="1300" dirty="0"/>
           </a:p>
@@ -37102,7 +38806,7 @@
                 <a:ea typeface="Calibri" pitchFamily="34" charset="-122"/>
                 <a:cs typeface="Calibri" pitchFamily="34" charset="-120"/>
               </a:rPr>
-              <a:t>Word Labs  •  wordlabs.app  •  Root: 'clean' = free from dirt or impurity</a:t>
+              <a:t>Word Labs  •  wordlabs.app  •  Root: 'clean' = free from dirt</a:t>
             </a:r>
             <a:endParaRPr lang="en-US" sz="800" dirty="0"/>
           </a:p>
@@ -37531,7 +39235,7 @@
                 <a:ea typeface="Trebuchet MS" pitchFamily="34" charset="-122"/>
                 <a:cs typeface="Trebuchet MS" pitchFamily="34" charset="-120"/>
               </a:rPr>
-              <a:t>-er</a:t>
+              <a:t>-ed</a:t>
             </a:r>
             <a:endParaRPr lang="en-US" sz="1300" dirty="0"/>
           </a:p>
@@ -37552,7 +39256,7 @@
             <a:avLst/>
           </a:prstGeom>
           <a:solidFill>
-            <a:srgbClr val="DDD6FE"/>
+            <a:srgbClr val="F1F5F9"/>
           </a:solidFill>
           <a:ln w="12700">
             <a:solidFill>
@@ -37564,18 +39268,68 @@
       </p:sp>
       <p:sp>
         <p:nvSpPr>
-          <p:cNvPr id="24" name="Text 22"/>
-          <p:cNvSpPr/>
-          <p:nvPr/>
-        </p:nvSpPr>
-        <p:spPr>
-          <a:xfrm>
-            <a:off x="640080" y="2212848"/>
+          <p:cNvPr id="24" name="Shape 22"/>
+          <p:cNvSpPr/>
+          <p:nvPr/>
+        </p:nvSpPr>
+        <p:spPr>
+          <a:xfrm>
+            <a:off x="3291840" y="2212848"/>
+            <a:ext cx="1645920" cy="420624"/>
+          </a:xfrm>
+          <a:prstGeom prst="rect">
+            <a:avLst/>
+          </a:prstGeom>
+          <a:solidFill>
+            <a:srgbClr val="F1F5F9"/>
+          </a:solidFill>
+          <a:ln w="12700">
+            <a:solidFill>
+              <a:srgbClr val="E5E7EB"/>
+            </a:solidFill>
+            <a:prstDash val="solid"/>
+          </a:ln>
+        </p:spPr>
+      </p:sp>
+      <p:sp>
+        <p:nvSpPr>
+          <p:cNvPr id="25" name="Shape 23"/>
+          <p:cNvSpPr/>
+          <p:nvPr/>
+        </p:nvSpPr>
+        <p:spPr>
+          <a:xfrm>
+            <a:off x="5943600" y="2212848"/>
             <a:ext cx="1463040" cy="420624"/>
           </a:xfrm>
           <a:prstGeom prst="rect">
             <a:avLst/>
           </a:prstGeom>
+          <a:solidFill>
+            <a:srgbClr val="FCE7F3"/>
+          </a:solidFill>
+          <a:ln w="12700">
+            <a:solidFill>
+              <a:srgbClr val="E5E7EB"/>
+            </a:solidFill>
+            <a:prstDash val="solid"/>
+          </a:ln>
+        </p:spPr>
+      </p:sp>
+      <p:sp>
+        <p:nvSpPr>
+          <p:cNvPr id="26" name="Text 24"/>
+          <p:cNvSpPr/>
+          <p:nvPr/>
+        </p:nvSpPr>
+        <p:spPr>
+          <a:xfrm>
+            <a:off x="5943600" y="2212848"/>
+            <a:ext cx="1463040" cy="420624"/>
+          </a:xfrm>
+          <a:prstGeom prst="rect">
+            <a:avLst/>
+          </a:prstGeom>
           <a:noFill/>
           <a:ln/>
         </p:spPr>
@@ -37589,13 +39343,13 @@
             <a:r>
               <a:rPr lang="en-US" sz="1300" b="1" dirty="0">
                 <a:solidFill>
-                  <a:srgbClr val="4C1D95"/>
+                  <a:srgbClr val="9D174D"/>
                 </a:solidFill>
                 <a:latin typeface="Trebuchet MS" pitchFamily="34" charset="0"/>
                 <a:ea typeface="Trebuchet MS" pitchFamily="34" charset="-122"/>
                 <a:cs typeface="Trebuchet MS" pitchFamily="34" charset="-120"/>
               </a:rPr>
-              <a:t>re-</a:t>
+              <a:t>-er</a:t>
             </a:r>
             <a:endParaRPr lang="en-US" sz="1300" dirty="0"/>
           </a:p>
@@ -37603,20 +39357,45 @@
       </p:sp>
       <p:sp>
         <p:nvSpPr>
-          <p:cNvPr id="25" name="Shape 23"/>
-          <p:cNvSpPr/>
-          <p:nvPr/>
-        </p:nvSpPr>
-        <p:spPr>
-          <a:xfrm>
-            <a:off x="3291840" y="2212848"/>
+          <p:cNvPr id="27" name="Shape 25"/>
+          <p:cNvSpPr/>
+          <p:nvPr/>
+        </p:nvSpPr>
+        <p:spPr>
+          <a:xfrm>
+            <a:off x="640080" y="2670048"/>
+            <a:ext cx="1463040" cy="420624"/>
+          </a:xfrm>
+          <a:prstGeom prst="rect">
+            <a:avLst/>
+          </a:prstGeom>
+          <a:solidFill>
+            <a:srgbClr val="F8FAFC"/>
+          </a:solidFill>
+          <a:ln w="12700">
+            <a:solidFill>
+              <a:srgbClr val="E5E7EB"/>
+            </a:solidFill>
+            <a:prstDash val="solid"/>
+          </a:ln>
+        </p:spPr>
+      </p:sp>
+      <p:sp>
+        <p:nvSpPr>
+          <p:cNvPr id="28" name="Shape 26"/>
+          <p:cNvSpPr/>
+          <p:nvPr/>
+        </p:nvSpPr>
+        <p:spPr>
+          <a:xfrm>
+            <a:off x="3291840" y="2670048"/>
             <a:ext cx="1645920" cy="420624"/>
           </a:xfrm>
           <a:prstGeom prst="rect">
             <a:avLst/>
           </a:prstGeom>
           <a:solidFill>
-            <a:srgbClr val="F1F5F9"/>
+            <a:srgbClr val="F8FAFC"/>
           </a:solidFill>
           <a:ln w="12700">
             <a:solidFill>
@@ -37628,13 +39407,13 @@
       </p:sp>
       <p:sp>
         <p:nvSpPr>
-          <p:cNvPr id="26" name="Shape 24"/>
-          <p:cNvSpPr/>
-          <p:nvPr/>
-        </p:nvSpPr>
-        <p:spPr>
-          <a:xfrm>
-            <a:off x="5943600" y="2212848"/>
+          <p:cNvPr id="29" name="Shape 27"/>
+          <p:cNvSpPr/>
+          <p:nvPr/>
+        </p:nvSpPr>
+        <p:spPr>
+          <a:xfrm>
+            <a:off x="5943600" y="2670048"/>
             <a:ext cx="1463040" cy="420624"/>
           </a:xfrm>
           <a:prstGeom prst="rect">
@@ -37653,13 +39432,13 @@
       </p:sp>
       <p:sp>
         <p:nvSpPr>
-          <p:cNvPr id="27" name="Text 25"/>
-          <p:cNvSpPr/>
-          <p:nvPr/>
-        </p:nvSpPr>
-        <p:spPr>
-          <a:xfrm>
-            <a:off x="5943600" y="2212848"/>
+          <p:cNvPr id="30" name="Text 28"/>
+          <p:cNvSpPr/>
+          <p:nvPr/>
+        </p:nvSpPr>
+        <p:spPr>
+          <a:xfrm>
+            <a:off x="5943600" y="2670048"/>
             <a:ext cx="1463040" cy="420624"/>
           </a:xfrm>
           <a:prstGeom prst="rect">
@@ -37692,20 +39471,20 @@
       </p:sp>
       <p:sp>
         <p:nvSpPr>
-          <p:cNvPr id="28" name="Shape 26"/>
-          <p:cNvSpPr/>
-          <p:nvPr/>
-        </p:nvSpPr>
-        <p:spPr>
-          <a:xfrm>
-            <a:off x="640080" y="2670048"/>
+          <p:cNvPr id="31" name="Shape 29"/>
+          <p:cNvSpPr/>
+          <p:nvPr/>
+        </p:nvSpPr>
+        <p:spPr>
+          <a:xfrm>
+            <a:off x="640080" y="3127248"/>
             <a:ext cx="1463040" cy="420624"/>
           </a:xfrm>
           <a:prstGeom prst="rect">
             <a:avLst/>
           </a:prstGeom>
           <a:solidFill>
-            <a:srgbClr val="DDD6FE"/>
+            <a:srgbClr val="F1F5F9"/>
           </a:solidFill>
           <a:ln w="12700">
             <a:solidFill>
@@ -37717,18 +39496,68 @@
       </p:sp>
       <p:sp>
         <p:nvSpPr>
-          <p:cNvPr id="29" name="Text 27"/>
-          <p:cNvSpPr/>
-          <p:nvPr/>
-        </p:nvSpPr>
-        <p:spPr>
-          <a:xfrm>
-            <a:off x="640080" y="2670048"/>
+          <p:cNvPr id="32" name="Shape 30"/>
+          <p:cNvSpPr/>
+          <p:nvPr/>
+        </p:nvSpPr>
+        <p:spPr>
+          <a:xfrm>
+            <a:off x="3291840" y="3127248"/>
+            <a:ext cx="1645920" cy="420624"/>
+          </a:xfrm>
+          <a:prstGeom prst="rect">
+            <a:avLst/>
+          </a:prstGeom>
+          <a:solidFill>
+            <a:srgbClr val="F1F5F9"/>
+          </a:solidFill>
+          <a:ln w="12700">
+            <a:solidFill>
+              <a:srgbClr val="E5E7EB"/>
+            </a:solidFill>
+            <a:prstDash val="solid"/>
+          </a:ln>
+        </p:spPr>
+      </p:sp>
+      <p:sp>
+        <p:nvSpPr>
+          <p:cNvPr id="33" name="Shape 31"/>
+          <p:cNvSpPr/>
+          <p:nvPr/>
+        </p:nvSpPr>
+        <p:spPr>
+          <a:xfrm>
+            <a:off x="5943600" y="3127248"/>
             <a:ext cx="1463040" cy="420624"/>
           </a:xfrm>
           <a:prstGeom prst="rect">
             <a:avLst/>
           </a:prstGeom>
+          <a:solidFill>
+            <a:srgbClr val="FCE7F3"/>
+          </a:solidFill>
+          <a:ln w="12700">
+            <a:solidFill>
+              <a:srgbClr val="E5E7EB"/>
+            </a:solidFill>
+            <a:prstDash val="solid"/>
+          </a:ln>
+        </p:spPr>
+      </p:sp>
+      <p:sp>
+        <p:nvSpPr>
+          <p:cNvPr id="34" name="Text 32"/>
+          <p:cNvSpPr/>
+          <p:nvPr/>
+        </p:nvSpPr>
+        <p:spPr>
+          <a:xfrm>
+            <a:off x="5943600" y="3127248"/>
+            <a:ext cx="1463040" cy="420624"/>
+          </a:xfrm>
+          <a:prstGeom prst="rect">
+            <a:avLst/>
+          </a:prstGeom>
           <a:noFill/>
           <a:ln/>
         </p:spPr>
@@ -37742,13 +39571,13 @@
             <a:r>
               <a:rPr lang="en-US" sz="1300" b="1" dirty="0">
                 <a:solidFill>
-                  <a:srgbClr val="4C1D95"/>
+                  <a:srgbClr val="9D174D"/>
                 </a:solidFill>
                 <a:latin typeface="Trebuchet MS" pitchFamily="34" charset="0"/>
                 <a:ea typeface="Trebuchet MS" pitchFamily="34" charset="-122"/>
                 <a:cs typeface="Trebuchet MS" pitchFamily="34" charset="-120"/>
               </a:rPr>
-              <a:t>squeaky-</a:t>
+              <a:t>-ing</a:t>
             </a:r>
             <a:endParaRPr lang="en-US" sz="1300" dirty="0"/>
           </a:p>
@@ -37756,13 +39585,38 @@
       </p:sp>
       <p:sp>
         <p:nvSpPr>
-          <p:cNvPr id="30" name="Shape 28"/>
-          <p:cNvSpPr/>
-          <p:nvPr/>
-        </p:nvSpPr>
-        <p:spPr>
-          <a:xfrm>
-            <a:off x="3291840" y="2670048"/>
+          <p:cNvPr id="35" name="Shape 33"/>
+          <p:cNvSpPr/>
+          <p:nvPr/>
+        </p:nvSpPr>
+        <p:spPr>
+          <a:xfrm>
+            <a:off x="640080" y="3584448"/>
+            <a:ext cx="1463040" cy="420624"/>
+          </a:xfrm>
+          <a:prstGeom prst="rect">
+            <a:avLst/>
+          </a:prstGeom>
+          <a:solidFill>
+            <a:srgbClr val="F8FAFC"/>
+          </a:solidFill>
+          <a:ln w="12700">
+            <a:solidFill>
+              <a:srgbClr val="E5E7EB"/>
+            </a:solidFill>
+            <a:prstDash val="solid"/>
+          </a:ln>
+        </p:spPr>
+      </p:sp>
+      <p:sp>
+        <p:nvSpPr>
+          <p:cNvPr id="36" name="Shape 34"/>
+          <p:cNvSpPr/>
+          <p:nvPr/>
+        </p:nvSpPr>
+        <p:spPr>
+          <a:xfrm>
+            <a:off x="3291840" y="3584448"/>
             <a:ext cx="1645920" cy="420624"/>
           </a:xfrm>
           <a:prstGeom prst="rect">
@@ -37781,13 +39635,13 @@
       </p:sp>
       <p:sp>
         <p:nvSpPr>
-          <p:cNvPr id="31" name="Shape 29"/>
-          <p:cNvSpPr/>
-          <p:nvPr/>
-        </p:nvSpPr>
-        <p:spPr>
-          <a:xfrm>
-            <a:off x="5943600" y="2670048"/>
+          <p:cNvPr id="37" name="Shape 35"/>
+          <p:cNvSpPr/>
+          <p:nvPr/>
+        </p:nvSpPr>
+        <p:spPr>
+          <a:xfrm>
+            <a:off x="5943600" y="3584448"/>
             <a:ext cx="1463040" cy="420624"/>
           </a:xfrm>
           <a:prstGeom prst="rect">
@@ -37806,13 +39660,13 @@
       </p:sp>
       <p:sp>
         <p:nvSpPr>
-          <p:cNvPr id="32" name="Text 30"/>
-          <p:cNvSpPr/>
-          <p:nvPr/>
-        </p:nvSpPr>
-        <p:spPr>
-          <a:xfrm>
-            <a:off x="5943600" y="2670048"/>
+          <p:cNvPr id="38" name="Text 36"/>
+          <p:cNvSpPr/>
+          <p:nvPr/>
+        </p:nvSpPr>
+        <p:spPr>
+          <a:xfrm>
+            <a:off x="5943600" y="3584448"/>
             <a:ext cx="1463040" cy="420624"/>
           </a:xfrm>
           <a:prstGeom prst="rect">
@@ -37845,20 +39699,20 @@
       </p:sp>
       <p:sp>
         <p:nvSpPr>
-          <p:cNvPr id="33" name="Shape 31"/>
-          <p:cNvSpPr/>
-          <p:nvPr/>
-        </p:nvSpPr>
-        <p:spPr>
-          <a:xfrm>
-            <a:off x="640080" y="3127248"/>
+          <p:cNvPr id="39" name="Shape 37"/>
+          <p:cNvSpPr/>
+          <p:nvPr/>
+        </p:nvSpPr>
+        <p:spPr>
+          <a:xfrm>
+            <a:off x="640080" y="4041648"/>
             <a:ext cx="1463040" cy="420624"/>
           </a:xfrm>
           <a:prstGeom prst="rect">
             <a:avLst/>
           </a:prstGeom>
           <a:solidFill>
-            <a:srgbClr val="DDD6FE"/>
+            <a:srgbClr val="F1F5F9"/>
           </a:solidFill>
           <a:ln w="12700">
             <a:solidFill>
@@ -37870,18 +39724,68 @@
       </p:sp>
       <p:sp>
         <p:nvSpPr>
-          <p:cNvPr id="34" name="Text 32"/>
-          <p:cNvSpPr/>
-          <p:nvPr/>
-        </p:nvSpPr>
-        <p:spPr>
-          <a:xfrm>
-            <a:off x="640080" y="3127248"/>
+          <p:cNvPr id="40" name="Shape 38"/>
+          <p:cNvSpPr/>
+          <p:nvPr/>
+        </p:nvSpPr>
+        <p:spPr>
+          <a:xfrm>
+            <a:off x="3291840" y="4041648"/>
+            <a:ext cx="1645920" cy="420624"/>
+          </a:xfrm>
+          <a:prstGeom prst="rect">
+            <a:avLst/>
+          </a:prstGeom>
+          <a:solidFill>
+            <a:srgbClr val="F1F5F9"/>
+          </a:solidFill>
+          <a:ln w="12700">
+            <a:solidFill>
+              <a:srgbClr val="E5E7EB"/>
+            </a:solidFill>
+            <a:prstDash val="solid"/>
+          </a:ln>
+        </p:spPr>
+      </p:sp>
+      <p:sp>
+        <p:nvSpPr>
+          <p:cNvPr id="41" name="Shape 39"/>
+          <p:cNvSpPr/>
+          <p:nvPr/>
+        </p:nvSpPr>
+        <p:spPr>
+          <a:xfrm>
+            <a:off x="5943600" y="4041648"/>
             <a:ext cx="1463040" cy="420624"/>
           </a:xfrm>
           <a:prstGeom prst="rect">
             <a:avLst/>
           </a:prstGeom>
+          <a:solidFill>
+            <a:srgbClr val="FCE7F3"/>
+          </a:solidFill>
+          <a:ln w="12700">
+            <a:solidFill>
+              <a:srgbClr val="E5E7EB"/>
+            </a:solidFill>
+            <a:prstDash val="solid"/>
+          </a:ln>
+        </p:spPr>
+      </p:sp>
+      <p:sp>
+        <p:nvSpPr>
+          <p:cNvPr id="42" name="Text 40"/>
+          <p:cNvSpPr/>
+          <p:nvPr/>
+        </p:nvSpPr>
+        <p:spPr>
+          <a:xfrm>
+            <a:off x="5943600" y="4041648"/>
+            <a:ext cx="1463040" cy="420624"/>
+          </a:xfrm>
+          <a:prstGeom prst="rect">
+            <a:avLst/>
+          </a:prstGeom>
           <a:noFill/>
           <a:ln/>
         </p:spPr>
@@ -37895,13 +39799,13 @@
             <a:r>
               <a:rPr lang="en-US" sz="1300" b="1" dirty="0">
                 <a:solidFill>
-                  <a:srgbClr val="4C1D95"/>
+                  <a:srgbClr val="9D174D"/>
                 </a:solidFill>
                 <a:latin typeface="Trebuchet MS" pitchFamily="34" charset="0"/>
                 <a:ea typeface="Trebuchet MS" pitchFamily="34" charset="-122"/>
                 <a:cs typeface="Trebuchet MS" pitchFamily="34" charset="-120"/>
               </a:rPr>
-              <a:t>dry-</a:t>
+              <a:t>-s</a:t>
             </a:r>
             <a:endParaRPr lang="en-US" sz="1300" dirty="0"/>
           </a:p>
@@ -37909,255 +39813,13 @@
       </p:sp>
       <p:sp>
         <p:nvSpPr>
-          <p:cNvPr id="35" name="Shape 33"/>
-          <p:cNvSpPr/>
-          <p:nvPr/>
-        </p:nvSpPr>
-        <p:spPr>
-          <a:xfrm>
-            <a:off x="3291840" y="3127248"/>
-            <a:ext cx="1645920" cy="420624"/>
-          </a:xfrm>
-          <a:prstGeom prst="rect">
-            <a:avLst/>
-          </a:prstGeom>
-          <a:solidFill>
-            <a:srgbClr val="F1F5F9"/>
-          </a:solidFill>
-          <a:ln w="12700">
-            <a:solidFill>
-              <a:srgbClr val="E5E7EB"/>
-            </a:solidFill>
-            <a:prstDash val="solid"/>
-          </a:ln>
-        </p:spPr>
-      </p:sp>
-      <p:sp>
-        <p:nvSpPr>
-          <p:cNvPr id="36" name="Shape 34"/>
-          <p:cNvSpPr/>
-          <p:nvPr/>
-        </p:nvSpPr>
-        <p:spPr>
-          <a:xfrm>
-            <a:off x="5943600" y="3127248"/>
-            <a:ext cx="1463040" cy="420624"/>
-          </a:xfrm>
-          <a:prstGeom prst="rect">
-            <a:avLst/>
-          </a:prstGeom>
-          <a:solidFill>
-            <a:srgbClr val="FCE7F3"/>
-          </a:solidFill>
-          <a:ln w="12700">
-            <a:solidFill>
-              <a:srgbClr val="E5E7EB"/>
-            </a:solidFill>
-            <a:prstDash val="solid"/>
-          </a:ln>
-        </p:spPr>
-      </p:sp>
-      <p:sp>
-        <p:nvSpPr>
-          <p:cNvPr id="37" name="Text 35"/>
-          <p:cNvSpPr/>
-          <p:nvPr/>
-        </p:nvSpPr>
-        <p:spPr>
-          <a:xfrm>
-            <a:off x="5943600" y="3127248"/>
-            <a:ext cx="1463040" cy="420624"/>
-          </a:xfrm>
-          <a:prstGeom prst="rect">
-            <a:avLst/>
-          </a:prstGeom>
-          <a:noFill/>
-          <a:ln/>
-        </p:spPr>
-        <p:txBody>
-          <a:bodyPr wrap="square" lIns="0" tIns="0" rIns="0" bIns="0" rtlCol="0" anchor="ctr"/>
-          <a:lstStyle/>
-          <a:p>
-            <a:pPr algn="ctr" indent="0" marL="0">
-              <a:buNone/>
-            </a:pPr>
-            <a:r>
-              <a:rPr lang="en-US" sz="1300" b="1" dirty="0">
-                <a:solidFill>
-                  <a:srgbClr val="9D174D"/>
-                </a:solidFill>
-                <a:latin typeface="Trebuchet MS" pitchFamily="34" charset="0"/>
-                <a:ea typeface="Trebuchet MS" pitchFamily="34" charset="-122"/>
-                <a:cs typeface="Trebuchet MS" pitchFamily="34" charset="-120"/>
-              </a:rPr>
-              <a:t>-ness</a:t>
-            </a:r>
-            <a:endParaRPr lang="en-US" sz="1300" dirty="0"/>
-          </a:p>
-        </p:txBody>
-      </p:sp>
-      <p:sp>
-        <p:nvSpPr>
-          <p:cNvPr id="38" name="Shape 36"/>
-          <p:cNvSpPr/>
-          <p:nvPr/>
-        </p:nvSpPr>
-        <p:spPr>
-          <a:xfrm>
-            <a:off x="640080" y="3584448"/>
-            <a:ext cx="1463040" cy="420624"/>
-          </a:xfrm>
-          <a:prstGeom prst="rect">
-            <a:avLst/>
-          </a:prstGeom>
-          <a:solidFill>
-            <a:srgbClr val="DDD6FE"/>
-          </a:solidFill>
-          <a:ln w="12700">
-            <a:solidFill>
-              <a:srgbClr val="E5E7EB"/>
-            </a:solidFill>
-            <a:prstDash val="solid"/>
-          </a:ln>
-        </p:spPr>
-      </p:sp>
-      <p:sp>
-        <p:nvSpPr>
-          <p:cNvPr id="39" name="Text 37"/>
-          <p:cNvSpPr/>
-          <p:nvPr/>
-        </p:nvSpPr>
-        <p:spPr>
-          <a:xfrm>
-            <a:off x="640080" y="3584448"/>
-            <a:ext cx="1463040" cy="420624"/>
-          </a:xfrm>
-          <a:prstGeom prst="rect">
-            <a:avLst/>
-          </a:prstGeom>
-          <a:noFill/>
-          <a:ln/>
-        </p:spPr>
-        <p:txBody>
-          <a:bodyPr wrap="square" lIns="0" tIns="0" rIns="0" bIns="0" rtlCol="0" anchor="ctr"/>
-          <a:lstStyle/>
-          <a:p>
-            <a:pPr algn="ctr" indent="0" marL="0">
-              <a:buNone/>
-            </a:pPr>
-            <a:r>
-              <a:rPr lang="en-US" sz="1300" b="1" dirty="0">
-                <a:solidFill>
-                  <a:srgbClr val="4C1D95"/>
-                </a:solidFill>
-                <a:latin typeface="Trebuchet MS" pitchFamily="34" charset="0"/>
-                <a:ea typeface="Trebuchet MS" pitchFamily="34" charset="-122"/>
-                <a:cs typeface="Trebuchet MS" pitchFamily="34" charset="-120"/>
-              </a:rPr>
-              <a:t>spring-</a:t>
-            </a:r>
-            <a:endParaRPr lang="en-US" sz="1300" dirty="0"/>
-          </a:p>
-        </p:txBody>
-      </p:sp>
-      <p:sp>
-        <p:nvSpPr>
-          <p:cNvPr id="40" name="Shape 38"/>
-          <p:cNvSpPr/>
-          <p:nvPr/>
-        </p:nvSpPr>
-        <p:spPr>
-          <a:xfrm>
-            <a:off x="3291840" y="3584448"/>
-            <a:ext cx="1645920" cy="420624"/>
-          </a:xfrm>
-          <a:prstGeom prst="rect">
-            <a:avLst/>
-          </a:prstGeom>
-          <a:solidFill>
-            <a:srgbClr val="F8FAFC"/>
-          </a:solidFill>
-          <a:ln w="12700">
-            <a:solidFill>
-              <a:srgbClr val="E5E7EB"/>
-            </a:solidFill>
-            <a:prstDash val="solid"/>
-          </a:ln>
-        </p:spPr>
-      </p:sp>
-      <p:sp>
-        <p:nvSpPr>
-          <p:cNvPr id="41" name="Shape 39"/>
-          <p:cNvSpPr/>
-          <p:nvPr/>
-        </p:nvSpPr>
-        <p:spPr>
-          <a:xfrm>
-            <a:off x="5943600" y="3584448"/>
-            <a:ext cx="1463040" cy="420624"/>
-          </a:xfrm>
-          <a:prstGeom prst="rect">
-            <a:avLst/>
-          </a:prstGeom>
-          <a:solidFill>
-            <a:srgbClr val="FCE7F3"/>
-          </a:solidFill>
-          <a:ln w="12700">
-            <a:solidFill>
-              <a:srgbClr val="E5E7EB"/>
-            </a:solidFill>
-            <a:prstDash val="solid"/>
-          </a:ln>
-        </p:spPr>
-      </p:sp>
-      <p:sp>
-        <p:nvSpPr>
-          <p:cNvPr id="42" name="Text 40"/>
-          <p:cNvSpPr/>
-          <p:nvPr/>
-        </p:nvSpPr>
-        <p:spPr>
-          <a:xfrm>
-            <a:off x="5943600" y="3584448"/>
-            <a:ext cx="1463040" cy="420624"/>
-          </a:xfrm>
-          <a:prstGeom prst="rect">
-            <a:avLst/>
-          </a:prstGeom>
-          <a:noFill/>
-          <a:ln/>
-        </p:spPr>
-        <p:txBody>
-          <a:bodyPr wrap="square" lIns="0" tIns="0" rIns="0" bIns="0" rtlCol="0" anchor="ctr"/>
-          <a:lstStyle/>
-          <a:p>
-            <a:pPr algn="ctr" indent="0" marL="0">
-              <a:buNone/>
-            </a:pPr>
-            <a:r>
-              <a:rPr lang="en-US" sz="1300" b="1" dirty="0">
-                <a:solidFill>
-                  <a:srgbClr val="9D174D"/>
-                </a:solidFill>
-                <a:latin typeface="Trebuchet MS" pitchFamily="34" charset="0"/>
-                <a:ea typeface="Trebuchet MS" pitchFamily="34" charset="-122"/>
-                <a:cs typeface="Trebuchet MS" pitchFamily="34" charset="-120"/>
-              </a:rPr>
-              <a:t>-ing</a:t>
-            </a:r>
-            <a:endParaRPr lang="en-US" sz="1300" dirty="0"/>
-          </a:p>
-        </p:txBody>
-      </p:sp>
-      <p:sp>
-        <p:nvSpPr>
           <p:cNvPr id="43" name="Text 41"/>
           <p:cNvSpPr/>
           <p:nvPr/>
         </p:nvSpPr>
         <p:spPr>
           <a:xfrm>
-            <a:off x="365760" y="4178808"/>
+            <a:off x="365760" y="4636008"/>
             <a:ext cx="1097280" cy="420624"/>
           </a:xfrm>
           <a:prstGeom prst="rect">
@@ -38196,7 +39858,7 @@
         </p:nvSpPr>
         <p:spPr>
           <a:xfrm>
-            <a:off x="1508760" y="4178808"/>
+            <a:off x="1508760" y="4636008"/>
             <a:ext cx="822960" cy="420624"/>
           </a:xfrm>
           <a:prstGeom prst="rect">
@@ -38230,7 +39892,7 @@
         </p:nvSpPr>
         <p:spPr>
           <a:xfrm>
-            <a:off x="1508760" y="4178808"/>
+            <a:off x="1508760" y="4636008"/>
             <a:ext cx="822960" cy="420624"/>
           </a:xfrm>
           <a:prstGeom prst="rect">
@@ -38269,7 +39931,7 @@
         </p:nvSpPr>
         <p:spPr>
           <a:xfrm>
-            <a:off x="2359152" y="4178808"/>
+            <a:off x="2359152" y="4636008"/>
             <a:ext cx="320040" cy="420624"/>
           </a:xfrm>
           <a:prstGeom prst="rect">
@@ -38308,7 +39970,7 @@
         </p:nvSpPr>
         <p:spPr>
           <a:xfrm>
-            <a:off x="2706624" y="4178808"/>
+            <a:off x="2706624" y="4636008"/>
             <a:ext cx="1389888" cy="420624"/>
           </a:xfrm>
           <a:prstGeom prst="rect">
@@ -38342,7 +40004,7 @@
         </p:nvSpPr>
         <p:spPr>
           <a:xfrm>
-            <a:off x="2706624" y="4178808"/>
+            <a:off x="2706624" y="4636008"/>
             <a:ext cx="1389888" cy="420624"/>
           </a:xfrm>
           <a:prstGeom prst="rect">
@@ -38381,7 +40043,7 @@
         </p:nvSpPr>
         <p:spPr>
           <a:xfrm>
-            <a:off x="4123944" y="4178808"/>
+            <a:off x="4123944" y="4636008"/>
             <a:ext cx="320040" cy="420624"/>
           </a:xfrm>
           <a:prstGeom prst="rect">
@@ -38420,7 +40082,7 @@
         </p:nvSpPr>
         <p:spPr>
           <a:xfrm>
-            <a:off x="4471416" y="4178808"/>
+            <a:off x="4471416" y="4636008"/>
             <a:ext cx="822960" cy="420624"/>
           </a:xfrm>
           <a:prstGeom prst="rect">
@@ -38454,7 +40116,7 @@
         </p:nvSpPr>
         <p:spPr>
           <a:xfrm>
-            <a:off x="4471416" y="4178808"/>
+            <a:off x="4471416" y="4636008"/>
             <a:ext cx="822960" cy="420624"/>
           </a:xfrm>
           <a:prstGeom prst="rect">
@@ -38479,7 +40141,7 @@
                 <a:ea typeface="Trebuchet MS" pitchFamily="34" charset="-122"/>
                 <a:cs typeface="Trebuchet MS" pitchFamily="34" charset="-120"/>
               </a:rPr>
-              <a:t>-er</a:t>
+              <a:t>-ed</a:t>
             </a:r>
             <a:endParaRPr lang="en-US" sz="1300" dirty="0"/>
           </a:p>
@@ -38493,7 +40155,7 @@
         </p:nvSpPr>
         <p:spPr>
           <a:xfrm>
-            <a:off x="5367528" y="4178808"/>
+            <a:off x="5367528" y="4636008"/>
             <a:ext cx="365760" cy="420624"/>
           </a:xfrm>
           <a:prstGeom prst="rect">
@@ -38532,7 +40194,7 @@
         </p:nvSpPr>
         <p:spPr>
           <a:xfrm>
-            <a:off x="5779008" y="4178808"/>
+            <a:off x="5779008" y="4636008"/>
             <a:ext cx="2194560" cy="420624"/>
           </a:xfrm>
           <a:prstGeom prst="rect">
@@ -38559,7 +40221,7 @@
         </p:nvSpPr>
         <p:spPr>
           <a:xfrm>
-            <a:off x="5779008" y="4178808"/>
+            <a:off x="5779008" y="4636008"/>
             <a:ext cx="2194560" cy="420624"/>
           </a:xfrm>
           <a:prstGeom prst="rect">
@@ -38584,7 +40246,7 @@
                 <a:ea typeface="Trebuchet MS" pitchFamily="34" charset="-122"/>
                 <a:cs typeface="Trebuchet MS" pitchFamily="34" charset="-120"/>
               </a:rPr>
-              <a:t>cleaner</a:t>
+              <a:t>clean</a:t>
             </a:r>
             <a:endParaRPr lang="en-US" sz="1400" dirty="0"/>
           </a:p>
@@ -38876,7 +40538,7 @@
                 <a:ea typeface="Calibri" pitchFamily="34" charset="-122"/>
                 <a:cs typeface="Calibri" pitchFamily="34" charset="-120"/>
               </a:rPr>
-              <a:t>Word Labs  •  wordlabs.app  •  Root: 'clean' = free from dirt or impurity</a:t>
+              <a:t>Word Labs  •  wordlabs.app  •  Root: 'clean' = free from dirt</a:t>
             </a:r>
             <a:endParaRPr lang="en-US" sz="800" dirty="0"/>
           </a:p>
@@ -38988,7 +40650,7 @@
                 <a:ea typeface="Trebuchet MS" pitchFamily="34" charset="-122"/>
                 <a:cs typeface="Trebuchet MS" pitchFamily="34" charset="-120"/>
               </a:rPr>
-              <a:t>cleaner</a:t>
+              <a:t>clean</a:t>
             </a:r>
             <a:endParaRPr lang="en-US" sz="1200" dirty="0"/>
           </a:p>
@@ -39054,7 +40716,7 @@
                 <a:ea typeface="Calibri" pitchFamily="34" charset="-122"/>
                 <a:cs typeface="Calibri" pitchFamily="34" charset="-120"/>
               </a:rPr>
-              <a:t>To clean something again because it wasn't clean enough the first time.</a:t>
+              <a:t>makes something free of dirt</a:t>
             </a:r>
             <a:endParaRPr lang="en-US" sz="1200" dirty="0"/>
           </a:p>
@@ -39127,7 +40789,7 @@
                 <a:ea typeface="Trebuchet MS" pitchFamily="34" charset="-122"/>
                 <a:cs typeface="Trebuchet MS" pitchFamily="34" charset="-120"/>
               </a:rPr>
-              <a:t>cleanest</a:t>
+              <a:t>cleans</a:t>
             </a:r>
             <a:endParaRPr lang="en-US" sz="1200" dirty="0"/>
           </a:p>
@@ -39193,7 +40855,7 @@
                 <a:ea typeface="Calibri" pitchFamily="34" charset="-122"/>
                 <a:cs typeface="Calibri" pitchFamily="34" charset="-120"/>
               </a:rPr>
-              <a:t>The habit or quality of keeping things clean and free from dirt.</a:t>
+              <a:t>a person or product that removes dirt, or more free from dirt than something else</a:t>
             </a:r>
             <a:endParaRPr lang="en-US" sz="1200" dirty="0"/>
           </a:p>
@@ -39266,7 +40928,7 @@
                 <a:ea typeface="Trebuchet MS" pitchFamily="34" charset="-122"/>
                 <a:cs typeface="Trebuchet MS" pitchFamily="34" charset="-120"/>
               </a:rPr>
-              <a:t>cleanly</a:t>
+              <a:t>cleaned</a:t>
             </a:r>
             <a:endParaRPr lang="en-US" sz="1200" dirty="0"/>
           </a:p>
@@ -39332,7 +40994,7 @@
                 <a:ea typeface="Calibri" pitchFamily="34" charset="-122"/>
                 <a:cs typeface="Calibri" pitchFamily="34" charset="-120"/>
               </a:rPr>
-              <a:t>Not clean; dirty or impure.</a:t>
+              <a:t>dirty or not clean</a:t>
             </a:r>
             <a:endParaRPr lang="en-US" sz="1200" dirty="0"/>
           </a:p>
@@ -39405,7 +41067,7 @@
                 <a:ea typeface="Trebuchet MS" pitchFamily="34" charset="-122"/>
                 <a:cs typeface="Trebuchet MS" pitchFamily="34" charset="-120"/>
               </a:rPr>
-              <a:t>cleanliness</a:t>
+              <a:t>cleaner</a:t>
             </a:r>
             <a:endParaRPr lang="en-US" sz="1200" dirty="0"/>
           </a:p>
@@ -39471,7 +41133,7 @@
                 <a:ea typeface="Calibri" pitchFamily="34" charset="-122"/>
                 <a:cs typeface="Calibri" pitchFamily="34" charset="-120"/>
               </a:rPr>
-              <a:t>The act of removing dirt or mess from something.</a:t>
+              <a:t>in a clean, neat, or precise way</a:t>
             </a:r>
             <a:endParaRPr lang="en-US" sz="1200" dirty="0"/>
           </a:p>
@@ -39544,7 +41206,7 @@
                 <a:ea typeface="Trebuchet MS" pitchFamily="34" charset="-122"/>
                 <a:cs typeface="Trebuchet MS" pitchFamily="34" charset="-120"/>
               </a:rPr>
-              <a:t>cleaning</a:t>
+              <a:t>cleanly</a:t>
             </a:r>
             <a:endParaRPr lang="en-US" sz="1200" dirty="0"/>
           </a:p>
@@ -39610,7 +41272,7 @@
                 <a:ea typeface="Calibri" pitchFamily="34" charset="-122"/>
                 <a:cs typeface="Calibri" pitchFamily="34" charset="-120"/>
               </a:rPr>
-              <a:t>A person or thing that removes dirt and makes something clean.</a:t>
+              <a:t>free from dirt or mess</a:t>
             </a:r>
             <a:endParaRPr lang="en-US" sz="1200" dirty="0"/>
           </a:p>
@@ -39749,146 +41411,7 @@
                 <a:ea typeface="Calibri" pitchFamily="34" charset="-122"/>
                 <a:cs typeface="Calibri" pitchFamily="34" charset="-120"/>
               </a:rPr>
-              <a:t>In a clean and tidy way, without making a mess.</a:t>
-            </a:r>
-            <a:endParaRPr lang="en-US" sz="1200" dirty="0"/>
-          </a:p>
-        </p:txBody>
-      </p:sp>
-      <p:sp>
-        <p:nvSpPr>
-          <p:cNvPr id="35" name="Shape 33"/>
-          <p:cNvSpPr/>
-          <p:nvPr/>
-        </p:nvSpPr>
-        <p:spPr>
-          <a:xfrm>
-            <a:off x="365760" y="4370832"/>
-            <a:ext cx="2011680" cy="457200"/>
-          </a:xfrm>
-          <a:prstGeom prst="rect">
-            <a:avLst>
-              <a:gd name="adj" fmla="val 12000"/>
-            </a:avLst>
-          </a:prstGeom>
-          <a:solidFill>
-            <a:srgbClr val="EEF2FF"/>
-          </a:solidFill>
-          <a:ln w="12700">
-            <a:solidFill>
-              <a:srgbClr val="6366F1"/>
-            </a:solidFill>
-            <a:prstDash val="solid"/>
-          </a:ln>
-          <a:effectLst>
-            <a:outerShdw sx="100000" sy="100000" kx="0" ky="0" algn="bl" rotWithShape="0" blurRad="101600" dist="38100" dir="8100000">
-              <a:srgbClr val="000000">
-                <a:alpha val="12000"/>
-              </a:srgbClr>
-            </a:outerShdw>
-          </a:effectLst>
-        </p:spPr>
-      </p:sp>
-      <p:sp>
-        <p:nvSpPr>
-          <p:cNvPr id="36" name="Text 34"/>
-          <p:cNvSpPr/>
-          <p:nvPr/>
-        </p:nvSpPr>
-        <p:spPr>
-          <a:xfrm>
-            <a:off x="365760" y="4370832"/>
-            <a:ext cx="2011680" cy="457200"/>
-          </a:xfrm>
-          <a:prstGeom prst="rect">
-            <a:avLst/>
-          </a:prstGeom>
-          <a:noFill/>
-          <a:ln/>
-        </p:spPr>
-        <p:txBody>
-          <a:bodyPr wrap="square" lIns="0" tIns="0" rIns="0" bIns="0" rtlCol="0" anchor="ctr"/>
-          <a:lstStyle/>
-          <a:p>
-            <a:pPr algn="ctr" indent="0" marL="0">
-              <a:buNone/>
-            </a:pPr>
-            <a:r>
-              <a:rPr lang="en-US" sz="1200" b="1" dirty="0">
-                <a:solidFill>
-                  <a:srgbClr val="4338CA"/>
-                </a:solidFill>
-                <a:latin typeface="Trebuchet MS" pitchFamily="34" charset="0"/>
-                <a:ea typeface="Trebuchet MS" pitchFamily="34" charset="-122"/>
-                <a:cs typeface="Trebuchet MS" pitchFamily="34" charset="-120"/>
-              </a:rPr>
-              <a:t>reclean</a:t>
-            </a:r>
-            <a:endParaRPr lang="en-US" sz="1200" dirty="0"/>
-          </a:p>
-        </p:txBody>
-      </p:sp>
-      <p:sp>
-        <p:nvSpPr>
-          <p:cNvPr id="37" name="Shape 35"/>
-          <p:cNvSpPr/>
-          <p:nvPr/>
-        </p:nvSpPr>
-        <p:spPr>
-          <a:xfrm>
-            <a:off x="2514600" y="4370832"/>
-            <a:ext cx="6263640" cy="457200"/>
-          </a:xfrm>
-          <a:prstGeom prst="rect">
-            <a:avLst>
-              <a:gd name="adj" fmla="val 12000"/>
-            </a:avLst>
-          </a:prstGeom>
-          <a:solidFill>
-            <a:srgbClr val="F8FAFC"/>
-          </a:solidFill>
-          <a:ln w="12700">
-            <a:solidFill>
-              <a:srgbClr val="E2E8F0"/>
-            </a:solidFill>
-            <a:prstDash val="solid"/>
-          </a:ln>
-        </p:spPr>
-      </p:sp>
-      <p:sp>
-        <p:nvSpPr>
-          <p:cNvPr id="38" name="Text 36"/>
-          <p:cNvSpPr/>
-          <p:nvPr/>
-        </p:nvSpPr>
-        <p:spPr>
-          <a:xfrm>
-            <a:off x="2651760" y="4370832"/>
-            <a:ext cx="6035040" cy="457200"/>
-          </a:xfrm>
-          <a:prstGeom prst="rect">
-            <a:avLst/>
-          </a:prstGeom>
-          <a:noFill/>
-          <a:ln/>
-        </p:spPr>
-        <p:txBody>
-          <a:bodyPr wrap="square" rtlCol="0" anchor="ctr"/>
-          <a:lstStyle/>
-          <a:p>
-            <a:pPr algn="l" indent="0" marL="0">
-              <a:buNone/>
-            </a:pPr>
-            <a:r>
-              <a:rPr lang="en-US" sz="1200" dirty="0">
-                <a:solidFill>
-                  <a:srgbClr val="0F172A"/>
-                </a:solidFill>
-                <a:latin typeface="Calibri" pitchFamily="34" charset="0"/>
-                <a:ea typeface="Calibri" pitchFamily="34" charset="-122"/>
-                <a:cs typeface="Calibri" pitchFamily="34" charset="-120"/>
-              </a:rPr>
-              <a:t>The most clean of all — not dirty at all.</a:t>
+              <a:t>made something free from dirt (in the past)</a:t>
             </a:r>
             <a:endParaRPr lang="en-US" sz="1200" dirty="0"/>
           </a:p>
@@ -40180,7 +41703,7 @@
                 <a:ea typeface="Calibri" pitchFamily="34" charset="-122"/>
                 <a:cs typeface="Calibri" pitchFamily="34" charset="-120"/>
               </a:rPr>
-              <a:t>Word Labs  •  wordlabs.app  •  Root: 'clean' = free from dirt or impurity</a:t>
+              <a:t>Word Labs  •  wordlabs.app  •  Root: 'clean' = free from dirt</a:t>
             </a:r>
             <a:endParaRPr lang="en-US" sz="800" dirty="0"/>
           </a:p>
@@ -40383,7 +41906,7 @@
                 <a:ea typeface="Calibri" pitchFamily="34" charset="-122"/>
                 <a:cs typeface="Calibri" pitchFamily="34" charset="-120"/>
               </a:rPr>
-              <a:t>After the art lesson, the teacher asked everyone to clean their brushes carefully before putting them away.</a:t>
+              <a:t>Please keep your bedroom clean.</a:t>
             </a:r>
             <a:endParaRPr lang="en-US" sz="1500" dirty="0"/>
           </a:p>
@@ -40547,7 +42070,7 @@
                 <a:ea typeface="Calibri" pitchFamily="34" charset="-122"/>
                 <a:cs typeface="Calibri" pitchFamily="34" charset="-120"/>
               </a:rPr>
-              <a:t>The cleaner at our school works very hard every afternoon to make sure the classrooms are tidy and spotless.</a:t>
+              <a:t>She cleans her room every Saturday morning.</a:t>
             </a:r>
             <a:endParaRPr lang="en-US" sz="1500" dirty="0"/>
           </a:p>
@@ -40711,7 +42234,7 @@
                 <a:ea typeface="Calibri" pitchFamily="34" charset="-122"/>
                 <a:cs typeface="Calibri" pitchFamily="34" charset="-120"/>
               </a:rPr>
-              <a:t>Mum reminded us that cleanliness in the kitchen is important so that we don't spread germs when we cook.</a:t>
+              <a:t>She cleaned her room before her friends arrived.</a:t>
             </a:r>
             <a:endParaRPr lang="en-US" sz="1500" dirty="0"/>
           </a:p>
